--- a/docs/SIH26162_ThermalSentinel_Idea_extended.pptx
+++ b/docs/SIH26162_ThermalSentinel_Idea_extended.pptx
@@ -13,9 +13,10 @@
     <p:sldId id="261" r:id="rId7"/>
     <p:sldId id="262" r:id="rId8"/>
     <p:sldId id="263" r:id="rId9"/>
+    <p:sldId id="264" r:id="rId10"/>
   </p:sldIdLst>
   <p:notesMasterIdLst>
-    <p:notesMasterId r:id="rId10"/>
+    <p:notesMasterId r:id="rId11"/>
   </p:notesMasterIdLst>
   <p:sldSz cx="9144000" cy="5143500"/>
   <p:notesSz cx="5143500" cy="9144000"/>
@@ -1719,6 +1720,94 @@
             <a:fld id="{F7021451-1387-4CA6-816F-3879F97B5CBC}" type="slidenum">
               <a:rPr lang="en-US"/>
               <a:t>8</a:t>
+            </a:fld>
+            <a:endParaRPr lang="en-US"/>
+          </a:p>
+        </p:txBody>
+      </p:sp>
+    </p:spTree>
+    <p:extLst>
+      <p:ext uri="{BB962C8B-B14F-4D97-AF65-F5344CB8AC3E}">
+        <p14:creationId xmlns:p14="http://schemas.microsoft.com/office/powerpoint/2010/main" val="1024086991"/>
+      </p:ext>
+    </p:extLst>
+  </p:cSld>
+  <p:clrMapOvr>
+    <a:masterClrMapping/>
+  </p:clrMapOvr>
+</p:notes>
+</file>
+
+<file path=ppt/notesSlides/notesSlide9.xml><?xml version="1.0" encoding="utf-8"?>
+<p:notes xmlns:a="http://schemas.openxmlformats.org/drawingml/2006/main" xmlns:r="http://schemas.openxmlformats.org/officeDocument/2006/relationships" xmlns:p="http://schemas.openxmlformats.org/presentationml/2006/main">
+  <p:cSld>
+    <p:spTree>
+      <p:nvGrpSpPr>
+        <p:cNvPr id="1" name=""/>
+        <p:cNvGrpSpPr/>
+        <p:nvPr/>
+      </p:nvGrpSpPr>
+      <p:grpSpPr>
+        <a:xfrm>
+          <a:off x="0" y="0"/>
+          <a:ext cx="0" cy="0"/>
+          <a:chOff x="0" y="0"/>
+          <a:chExt cx="0" cy="0"/>
+        </a:xfrm>
+      </p:grpSpPr>
+      <p:sp>
+        <p:nvSpPr>
+          <p:cNvPr id="2" name="Slide Image Placeholder 1"/>
+          <p:cNvSpPr>
+            <a:spLocks noGrp="1" noRot="1" noChangeAspect="1"/>
+          </p:cNvSpPr>
+          <p:nvPr>
+            <p:ph type="sldImg"/>
+          </p:nvPr>
+        </p:nvSpPr>
+        <p:spPr/>
+      </p:sp>
+      <p:sp>
+        <p:nvSpPr>
+          <p:cNvPr id="3" name="Notes Placeholder 2"/>
+          <p:cNvSpPr>
+            <a:spLocks noGrp="1"/>
+          </p:cNvSpPr>
+          <p:nvPr>
+            <p:ph type="body" idx="1"/>
+          </p:nvPr>
+        </p:nvSpPr>
+        <p:spPr/>
+        <p:txBody>
+          <a:bodyPr/>
+          <a:lstStyle/>
+          <a:p>
+            <a:r>
+              <a:rPr lang="en-US" dirty="0"/>
+              <a:t/>
+            </a:r>
+            <a:endParaRPr lang="en-US" dirty="0"/>
+          </a:p>
+        </p:txBody>
+      </p:sp>
+      <p:sp>
+        <p:nvSpPr>
+          <p:cNvPr id="4" name="Slide Number Placeholder 3"/>
+          <p:cNvSpPr>
+            <a:spLocks noGrp="1"/>
+          </p:cNvSpPr>
+          <p:nvPr>
+            <p:ph type="sldNum" sz="quarter" idx="10"/>
+          </p:nvPr>
+        </p:nvSpPr>
+        <p:spPr/>
+        <p:txBody>
+          <a:bodyPr/>
+          <a:lstStyle/>
+          <a:p>
+            <a:fld id="{F7021451-1387-4CA6-816F-3879F97B5CBC}" type="slidenum">
+              <a:rPr lang="en-US"/>
+              <a:t>9</a:t>
             </a:fld>
             <a:endParaRPr lang="en-US"/>
           </a:p>
@@ -2390,7 +2479,7 @@
                 <a:ea typeface="Calibri" pitchFamily="34" charset="-122"/>
                 <a:cs typeface="Calibri" pitchFamily="34" charset="-120"/>
               </a:rPr>
-              <a:t>&lt;TEAM NAME&gt;</a:t>
+              <a:t>FireOrbit</a:t>
             </a:r>
             <a:endParaRPr lang="en-US" sz="1150" dirty="0"/>
           </a:p>
@@ -2642,7 +2731,7 @@
                 <a:ea typeface="Calibri" pitchFamily="34" charset="-122"/>
                 <a:cs typeface="Calibri" pitchFamily="34" charset="-120"/>
               </a:rPr>
-              <a:t>&lt;TEAM NAME&gt;</a:t>
+              <a:t>FireOrbit</a:t>
             </a:r>
             <a:endParaRPr lang="en-US" sz="900" dirty="0"/>
           </a:p>
@@ -5543,7 +5632,7 @@
                 <a:ea typeface="Calibri" pitchFamily="34" charset="-122"/>
                 <a:cs typeface="Calibri" pitchFamily="34" charset="-120"/>
               </a:rPr>
-              <a:t>&lt;TEAM NAME&gt;</a:t>
+              <a:t>FireOrbit</a:t>
             </a:r>
             <a:endParaRPr lang="en-US" sz="900" dirty="0"/>
           </a:p>
@@ -5582,7 +5671,7 @@
                 <a:ea typeface="Calibri" pitchFamily="34" charset="-122"/>
                 <a:cs typeface="Calibri" pitchFamily="34" charset="-120"/>
               </a:rPr>
-              <a:t>TECHNICAL APPROACH</a:t>
+              <a:t>COMPARISON WITH EXISTING SOLUTIONS</a:t>
             </a:r>
             <a:endParaRPr lang="en-US" sz="2200" dirty="0"/>
           </a:p>
@@ -5661,6 +5750,5783 @@
                 <a:cs typeface="Calibri" pitchFamily="34" charset="-120"/>
               </a:rPr>
               <a:t>3</a:t>
+            </a:r>
+            <a:endParaRPr lang="en-US" sz="900" dirty="0"/>
+          </a:p>
+        </p:txBody>
+      </p:sp>
+      <p:graphicFrame>
+        <p:nvGraphicFramePr>
+          <p:cNvPr id="4" name="Table 0"/>
+          <p:cNvGraphicFramePr>
+            <a:graphicFrameLocks noGrp="1"/>
+          </p:cNvGraphicFramePr>
+          <p:nvPr>
+            <p:extLst>
+              <p:ext uri="{D42A27DB-BD31-4B8C-83A1-F6EECF244321}">
+                <p14:modId xmlns:p14="http://schemas.microsoft.com/office/powerpoint/2010/main" val="1579011935"/>
+              </p:ext>
+            </p:extLst>
+          </p:nvPr>
+        </p:nvGraphicFramePr>
+        <p:xfrm>
+          <a:off x="274320" y="685800"/>
+          <a:ext cx="8595360" cy="914400"/>
+        </p:xfrm>
+        <a:graphic>
+          <a:graphicData uri="http://schemas.openxmlformats.org/drawingml/2006/table">
+            <a:tbl>
+              <a:tblPr/>
+              <a:tblGrid>
+                <a:gridCol w="2743200"/>
+                <a:gridCol w="1051560"/>
+                <a:gridCol w="1188720"/>
+                <a:gridCol w="1234440"/>
+                <a:gridCol w="1234440"/>
+                <a:gridCol w="1143000"/>
+              </a:tblGrid>
+              <a:tr h="246888">
+                <a:tc>
+                  <a:txBody>
+                    <a:bodyPr/>
+                    <a:lstStyle/>
+                    <a:p>
+                      <a:pPr indent="0" marL="0">
+                        <a:buNone/>
+                      </a:pPr>
+                      <a:r>
+                        <a:rPr lang="en-US" sz="850" b="1" dirty="0">
+                          <a:solidFill>
+                            <a:srgbClr val="FFFFFF"/>
+                          </a:solidFill>
+                          <a:latin typeface="Calibri" pitchFamily="34" charset="0"/>
+                          <a:ea typeface="Calibri" pitchFamily="34" charset="-122"/>
+                          <a:cs typeface="Calibri" pitchFamily="34" charset="-120"/>
+                        </a:rPr>
+                        <a:t>Capability</a:t>
+                      </a:r>
+                      <a:endParaRPr lang="en-US" sz="850" dirty="0">
+                        <a:latin typeface="Calibri" charset="0"/>
+                        <a:ea typeface="Calibri" charset="0"/>
+                        <a:cs typeface="Calibri" charset="0"/>
+                      </a:endParaRPr>
+                    </a:p>
+                  </a:txBody>
+                  <a:tcPr marL="27432" marR="27432" marT="27432" marB="27432" anchor="ctr">
+                    <a:lnL w="6350" cap="flat" cmpd="sng" algn="ctr">
+                      <a:solidFill>
+                        <a:srgbClr val="D1D5DB"/>
+                      </a:solidFill>
+                      <a:prstDash val="solid"/>
+                      <a:round/>
+                      <a:headEnd type="none" w="med" len="med"/>
+                      <a:tailEnd type="none" w="med" len="med"/>
+                    </a:lnL>
+                    <a:lnR w="6350" cap="flat" cmpd="sng" algn="ctr">
+                      <a:solidFill>
+                        <a:srgbClr val="D1D5DB"/>
+                      </a:solidFill>
+                      <a:prstDash val="solid"/>
+                      <a:round/>
+                      <a:headEnd type="none" w="med" len="med"/>
+                      <a:tailEnd type="none" w="med" len="med"/>
+                    </a:lnR>
+                    <a:lnT w="6350" cap="flat" cmpd="sng" algn="ctr">
+                      <a:solidFill>
+                        <a:srgbClr val="D1D5DB"/>
+                      </a:solidFill>
+                      <a:prstDash val="solid"/>
+                      <a:round/>
+                      <a:headEnd type="none" w="med" len="med"/>
+                      <a:tailEnd type="none" w="med" len="med"/>
+                    </a:lnT>
+                    <a:lnB w="6350" cap="flat" cmpd="sng" algn="ctr">
+                      <a:solidFill>
+                        <a:srgbClr val="D1D5DB"/>
+                      </a:solidFill>
+                      <a:prstDash val="solid"/>
+                      <a:round/>
+                      <a:headEnd type="none" w="med" len="med"/>
+                      <a:tailEnd type="none" w="med" len="med"/>
+                    </a:lnB>
+                    <a:solidFill>
+                      <a:srgbClr val="0F172A"/>
+                    </a:solidFill>
+                  </a:tcPr>
+                </a:tc>
+                <a:tc>
+                  <a:txBody>
+                    <a:bodyPr/>
+                    <a:lstStyle/>
+                    <a:p>
+                      <a:pPr algn="ctr" indent="0" marL="0">
+                        <a:buNone/>
+                      </a:pPr>
+                      <a:r>
+                        <a:rPr lang="en-US" sz="850" b="1" dirty="0">
+                          <a:solidFill>
+                            <a:srgbClr val="FFFFFF"/>
+                          </a:solidFill>
+                          <a:latin typeface="Calibri" pitchFamily="34" charset="0"/>
+                          <a:ea typeface="Calibri" pitchFamily="34" charset="-122"/>
+                          <a:cs typeface="Calibri" pitchFamily="34" charset="-120"/>
+                        </a:rPr>
+                        <a:t>NASA FIRMS map</a:t>
+                      </a:r>
+                      <a:endParaRPr lang="en-US" sz="850" dirty="0">
+                        <a:latin typeface="Calibri" charset="0"/>
+                        <a:ea typeface="Calibri" charset="0"/>
+                        <a:cs typeface="Calibri" charset="0"/>
+                      </a:endParaRPr>
+                    </a:p>
+                  </a:txBody>
+                  <a:tcPr marL="27432" marR="27432" marT="27432" marB="27432" anchor="ctr">
+                    <a:lnL w="6350" cap="flat" cmpd="sng" algn="ctr">
+                      <a:solidFill>
+                        <a:srgbClr val="D1D5DB"/>
+                      </a:solidFill>
+                      <a:prstDash val="solid"/>
+                      <a:round/>
+                      <a:headEnd type="none" w="med" len="med"/>
+                      <a:tailEnd type="none" w="med" len="med"/>
+                    </a:lnL>
+                    <a:lnR w="6350" cap="flat" cmpd="sng" algn="ctr">
+                      <a:solidFill>
+                        <a:srgbClr val="D1D5DB"/>
+                      </a:solidFill>
+                      <a:prstDash val="solid"/>
+                      <a:round/>
+                      <a:headEnd type="none" w="med" len="med"/>
+                      <a:tailEnd type="none" w="med" len="med"/>
+                    </a:lnR>
+                    <a:lnT w="6350" cap="flat" cmpd="sng" algn="ctr">
+                      <a:solidFill>
+                        <a:srgbClr val="D1D5DB"/>
+                      </a:solidFill>
+                      <a:prstDash val="solid"/>
+                      <a:round/>
+                      <a:headEnd type="none" w="med" len="med"/>
+                      <a:tailEnd type="none" w="med" len="med"/>
+                    </a:lnT>
+                    <a:lnB w="6350" cap="flat" cmpd="sng" algn="ctr">
+                      <a:solidFill>
+                        <a:srgbClr val="D1D5DB"/>
+                      </a:solidFill>
+                      <a:prstDash val="solid"/>
+                      <a:round/>
+                      <a:headEnd type="none" w="med" len="med"/>
+                      <a:tailEnd type="none" w="med" len="med"/>
+                    </a:lnB>
+                    <a:solidFill>
+                      <a:srgbClr val="0F172A"/>
+                    </a:solidFill>
+                  </a:tcPr>
+                </a:tc>
+                <a:tc>
+                  <a:txBody>
+                    <a:bodyPr/>
+                    <a:lstStyle/>
+                    <a:p>
+                      <a:pPr algn="ctr" indent="0" marL="0">
+                        <a:buNone/>
+                      </a:pPr>
+                      <a:r>
+                        <a:rPr lang="en-US" sz="850" b="1" dirty="0">
+                          <a:solidFill>
+                            <a:srgbClr val="FFFFFF"/>
+                          </a:solidFill>
+                          <a:latin typeface="Calibri" pitchFamily="34" charset="0"/>
+                          <a:ea typeface="Calibri" pitchFamily="34" charset="-122"/>
+                          <a:cs typeface="Calibri" pitchFamily="34" charset="-120"/>
+                        </a:rPr>
+                        <a:t>Global Forest Watch Fires</a:t>
+                      </a:r>
+                      <a:endParaRPr lang="en-US" sz="850" dirty="0">
+                        <a:latin typeface="Calibri" charset="0"/>
+                        <a:ea typeface="Calibri" charset="0"/>
+                        <a:cs typeface="Calibri" charset="0"/>
+                      </a:endParaRPr>
+                    </a:p>
+                  </a:txBody>
+                  <a:tcPr marL="27432" marR="27432" marT="27432" marB="27432" anchor="ctr">
+                    <a:lnL w="6350" cap="flat" cmpd="sng" algn="ctr">
+                      <a:solidFill>
+                        <a:srgbClr val="D1D5DB"/>
+                      </a:solidFill>
+                      <a:prstDash val="solid"/>
+                      <a:round/>
+                      <a:headEnd type="none" w="med" len="med"/>
+                      <a:tailEnd type="none" w="med" len="med"/>
+                    </a:lnL>
+                    <a:lnR w="6350" cap="flat" cmpd="sng" algn="ctr">
+                      <a:solidFill>
+                        <a:srgbClr val="D1D5DB"/>
+                      </a:solidFill>
+                      <a:prstDash val="solid"/>
+                      <a:round/>
+                      <a:headEnd type="none" w="med" len="med"/>
+                      <a:tailEnd type="none" w="med" len="med"/>
+                    </a:lnR>
+                    <a:lnT w="6350" cap="flat" cmpd="sng" algn="ctr">
+                      <a:solidFill>
+                        <a:srgbClr val="D1D5DB"/>
+                      </a:solidFill>
+                      <a:prstDash val="solid"/>
+                      <a:round/>
+                      <a:headEnd type="none" w="med" len="med"/>
+                      <a:tailEnd type="none" w="med" len="med"/>
+                    </a:lnT>
+                    <a:lnB w="6350" cap="flat" cmpd="sng" algn="ctr">
+                      <a:solidFill>
+                        <a:srgbClr val="D1D5DB"/>
+                      </a:solidFill>
+                      <a:prstDash val="solid"/>
+                      <a:round/>
+                      <a:headEnd type="none" w="med" len="med"/>
+                      <a:tailEnd type="none" w="med" len="med"/>
+                    </a:lnB>
+                    <a:solidFill>
+                      <a:srgbClr val="0F172A"/>
+                    </a:solidFill>
+                  </a:tcPr>
+                </a:tc>
+                <a:tc>
+                  <a:txBody>
+                    <a:bodyPr/>
+                    <a:lstStyle/>
+                    <a:p>
+                      <a:pPr algn="ctr" indent="0" marL="0">
+                        <a:buNone/>
+                      </a:pPr>
+                      <a:r>
+                        <a:rPr lang="en-US" sz="850" b="1" dirty="0">
+                          <a:solidFill>
+                            <a:srgbClr val="FFFFFF"/>
+                          </a:solidFill>
+                          <a:latin typeface="Calibri" pitchFamily="34" charset="0"/>
+                          <a:ea typeface="Calibri" pitchFamily="34" charset="-122"/>
+                          <a:cs typeface="Calibri" pitchFamily="34" charset="-120"/>
+                        </a:rPr>
+                        <a:t>Copernicus EFFIS / GWIS</a:t>
+                      </a:r>
+                      <a:endParaRPr lang="en-US" sz="850" dirty="0">
+                        <a:latin typeface="Calibri" charset="0"/>
+                        <a:ea typeface="Calibri" charset="0"/>
+                        <a:cs typeface="Calibri" charset="0"/>
+                      </a:endParaRPr>
+                    </a:p>
+                  </a:txBody>
+                  <a:tcPr marL="27432" marR="27432" marT="27432" marB="27432" anchor="ctr">
+                    <a:lnL w="6350" cap="flat" cmpd="sng" algn="ctr">
+                      <a:solidFill>
+                        <a:srgbClr val="D1D5DB"/>
+                      </a:solidFill>
+                      <a:prstDash val="solid"/>
+                      <a:round/>
+                      <a:headEnd type="none" w="med" len="med"/>
+                      <a:tailEnd type="none" w="med" len="med"/>
+                    </a:lnL>
+                    <a:lnR w="6350" cap="flat" cmpd="sng" algn="ctr">
+                      <a:solidFill>
+                        <a:srgbClr val="D1D5DB"/>
+                      </a:solidFill>
+                      <a:prstDash val="solid"/>
+                      <a:round/>
+                      <a:headEnd type="none" w="med" len="med"/>
+                      <a:tailEnd type="none" w="med" len="med"/>
+                    </a:lnR>
+                    <a:lnT w="6350" cap="flat" cmpd="sng" algn="ctr">
+                      <a:solidFill>
+                        <a:srgbClr val="D1D5DB"/>
+                      </a:solidFill>
+                      <a:prstDash val="solid"/>
+                      <a:round/>
+                      <a:headEnd type="none" w="med" len="med"/>
+                      <a:tailEnd type="none" w="med" len="med"/>
+                    </a:lnT>
+                    <a:lnB w="6350" cap="flat" cmpd="sng" algn="ctr">
+                      <a:solidFill>
+                        <a:srgbClr val="D1D5DB"/>
+                      </a:solidFill>
+                      <a:prstDash val="solid"/>
+                      <a:round/>
+                      <a:headEnd type="none" w="med" len="med"/>
+                      <a:tailEnd type="none" w="med" len="med"/>
+                    </a:lnB>
+                    <a:solidFill>
+                      <a:srgbClr val="0F172A"/>
+                    </a:solidFill>
+                  </a:tcPr>
+                </a:tc>
+                <a:tc>
+                  <a:txBody>
+                    <a:bodyPr/>
+                    <a:lstStyle/>
+                    <a:p>
+                      <a:pPr algn="ctr" indent="0" marL="0">
+                        <a:buNone/>
+                      </a:pPr>
+                      <a:r>
+                        <a:rPr lang="en-US" sz="850" b="1" dirty="0">
+                          <a:solidFill>
+                            <a:srgbClr val="FFFFFF"/>
+                          </a:solidFill>
+                          <a:latin typeface="Calibri" pitchFamily="34" charset="0"/>
+                          <a:ea typeface="Calibri" pitchFamily="34" charset="-122"/>
+                          <a:cs typeface="Calibri" pitchFamily="34" charset="-120"/>
+                        </a:rPr>
+                        <a:t>VIIRS Nightfire (VNF) / research</a:t>
+                      </a:r>
+                      <a:endParaRPr lang="en-US" sz="850" dirty="0">
+                        <a:latin typeface="Calibri" charset="0"/>
+                        <a:ea typeface="Calibri" charset="0"/>
+                        <a:cs typeface="Calibri" charset="0"/>
+                      </a:endParaRPr>
+                    </a:p>
+                  </a:txBody>
+                  <a:tcPr marL="27432" marR="27432" marT="27432" marB="27432" anchor="ctr">
+                    <a:lnL w="6350" cap="flat" cmpd="sng" algn="ctr">
+                      <a:solidFill>
+                        <a:srgbClr val="D1D5DB"/>
+                      </a:solidFill>
+                      <a:prstDash val="solid"/>
+                      <a:round/>
+                      <a:headEnd type="none" w="med" len="med"/>
+                      <a:tailEnd type="none" w="med" len="med"/>
+                    </a:lnL>
+                    <a:lnR w="6350" cap="flat" cmpd="sng" algn="ctr">
+                      <a:solidFill>
+                        <a:srgbClr val="D1D5DB"/>
+                      </a:solidFill>
+                      <a:prstDash val="solid"/>
+                      <a:round/>
+                      <a:headEnd type="none" w="med" len="med"/>
+                      <a:tailEnd type="none" w="med" len="med"/>
+                    </a:lnR>
+                    <a:lnT w="6350" cap="flat" cmpd="sng" algn="ctr">
+                      <a:solidFill>
+                        <a:srgbClr val="D1D5DB"/>
+                      </a:solidFill>
+                      <a:prstDash val="solid"/>
+                      <a:round/>
+                      <a:headEnd type="none" w="med" len="med"/>
+                      <a:tailEnd type="none" w="med" len="med"/>
+                    </a:lnT>
+                    <a:lnB w="6350" cap="flat" cmpd="sng" algn="ctr">
+                      <a:solidFill>
+                        <a:srgbClr val="D1D5DB"/>
+                      </a:solidFill>
+                      <a:prstDash val="solid"/>
+                      <a:round/>
+                      <a:headEnd type="none" w="med" len="med"/>
+                      <a:tailEnd type="none" w="med" len="med"/>
+                    </a:lnB>
+                    <a:solidFill>
+                      <a:srgbClr val="0F172A"/>
+                    </a:solidFill>
+                  </a:tcPr>
+                </a:tc>
+                <a:tc>
+                  <a:txBody>
+                    <a:bodyPr/>
+                    <a:lstStyle/>
+                    <a:p>
+                      <a:pPr algn="ctr" indent="0" marL="0">
+                        <a:buNone/>
+                      </a:pPr>
+                      <a:r>
+                        <a:rPr lang="en-US" sz="850" b="1" dirty="0">
+                          <a:solidFill>
+                            <a:srgbClr val="FFFFFF"/>
+                          </a:solidFill>
+                          <a:latin typeface="Calibri" pitchFamily="34" charset="0"/>
+                          <a:ea typeface="Calibri" pitchFamily="34" charset="-122"/>
+                          <a:cs typeface="Calibri" pitchFamily="34" charset="-120"/>
+                        </a:rPr>
+                        <a:t>ThermalSentinel (FireOrbit)</a:t>
+                      </a:r>
+                      <a:endParaRPr lang="en-US" sz="850" dirty="0">
+                        <a:latin typeface="Calibri" charset="0"/>
+                        <a:ea typeface="Calibri" charset="0"/>
+                        <a:cs typeface="Calibri" charset="0"/>
+                      </a:endParaRPr>
+                    </a:p>
+                  </a:txBody>
+                  <a:tcPr marL="27432" marR="27432" marT="27432" marB="27432" anchor="ctr">
+                    <a:lnL w="6350" cap="flat" cmpd="sng" algn="ctr">
+                      <a:solidFill>
+                        <a:srgbClr val="D1D5DB"/>
+                      </a:solidFill>
+                      <a:prstDash val="solid"/>
+                      <a:round/>
+                      <a:headEnd type="none" w="med" len="med"/>
+                      <a:tailEnd type="none" w="med" len="med"/>
+                    </a:lnL>
+                    <a:lnR w="6350" cap="flat" cmpd="sng" algn="ctr">
+                      <a:solidFill>
+                        <a:srgbClr val="D1D5DB"/>
+                      </a:solidFill>
+                      <a:prstDash val="solid"/>
+                      <a:round/>
+                      <a:headEnd type="none" w="med" len="med"/>
+                      <a:tailEnd type="none" w="med" len="med"/>
+                    </a:lnR>
+                    <a:lnT w="6350" cap="flat" cmpd="sng" algn="ctr">
+                      <a:solidFill>
+                        <a:srgbClr val="D1D5DB"/>
+                      </a:solidFill>
+                      <a:prstDash val="solid"/>
+                      <a:round/>
+                      <a:headEnd type="none" w="med" len="med"/>
+                      <a:tailEnd type="none" w="med" len="med"/>
+                    </a:lnT>
+                    <a:lnB w="6350" cap="flat" cmpd="sng" algn="ctr">
+                      <a:solidFill>
+                        <a:srgbClr val="D1D5DB"/>
+                      </a:solidFill>
+                      <a:prstDash val="solid"/>
+                      <a:round/>
+                      <a:headEnd type="none" w="med" len="med"/>
+                      <a:tailEnd type="none" w="med" len="med"/>
+                    </a:lnB>
+                    <a:solidFill>
+                      <a:srgbClr val="0F172A"/>
+                    </a:solidFill>
+                  </a:tcPr>
+                </a:tc>
+              </a:tr>
+              <a:tr h="246888">
+                <a:tc>
+                  <a:txBody>
+                    <a:bodyPr/>
+                    <a:lstStyle/>
+                    <a:p>
+                      <a:pPr indent="0" marL="0">
+                        <a:buNone/>
+                      </a:pPr>
+                      <a:r>
+                        <a:rPr lang="en-US" sz="850" dirty="0">
+                          <a:solidFill>
+                            <a:srgbClr val="1F2937"/>
+                          </a:solidFill>
+                          <a:latin typeface="Calibri" pitchFamily="34" charset="0"/>
+                          <a:ea typeface="Calibri" pitchFamily="34" charset="-122"/>
+                          <a:cs typeface="Calibri" pitchFamily="34" charset="-120"/>
+                        </a:rPr>
+                        <a:t>Primary purpose</a:t>
+                      </a:r>
+                      <a:endParaRPr lang="en-US" sz="850" dirty="0">
+                        <a:latin typeface="Calibri" charset="0"/>
+                        <a:ea typeface="Calibri" charset="0"/>
+                        <a:cs typeface="Calibri" charset="0"/>
+                      </a:endParaRPr>
+                    </a:p>
+                  </a:txBody>
+                  <a:tcPr marL="27432" marR="27432" marT="27432" marB="27432">
+                    <a:lnL w="6350" cap="flat" cmpd="sng" algn="ctr">
+                      <a:solidFill>
+                        <a:srgbClr val="D1D5DB"/>
+                      </a:solidFill>
+                      <a:prstDash val="solid"/>
+                      <a:round/>
+                      <a:headEnd type="none" w="med" len="med"/>
+                      <a:tailEnd type="none" w="med" len="med"/>
+                    </a:lnL>
+                    <a:lnR w="6350" cap="flat" cmpd="sng" algn="ctr">
+                      <a:solidFill>
+                        <a:srgbClr val="D1D5DB"/>
+                      </a:solidFill>
+                      <a:prstDash val="solid"/>
+                      <a:round/>
+                      <a:headEnd type="none" w="med" len="med"/>
+                      <a:tailEnd type="none" w="med" len="med"/>
+                    </a:lnR>
+                    <a:lnT w="6350" cap="flat" cmpd="sng" algn="ctr">
+                      <a:solidFill>
+                        <a:srgbClr val="D1D5DB"/>
+                      </a:solidFill>
+                      <a:prstDash val="solid"/>
+                      <a:round/>
+                      <a:headEnd type="none" w="med" len="med"/>
+                      <a:tailEnd type="none" w="med" len="med"/>
+                    </a:lnT>
+                    <a:lnB w="6350" cap="flat" cmpd="sng" algn="ctr">
+                      <a:solidFill>
+                        <a:srgbClr val="D1D5DB"/>
+                      </a:solidFill>
+                      <a:prstDash val="solid"/>
+                      <a:round/>
+                      <a:headEnd type="none" w="med" len="med"/>
+                      <a:tailEnd type="none" w="med" len="med"/>
+                    </a:lnB>
+                    <a:solidFill>
+                      <a:srgbClr val="FFFFFF"/>
+                    </a:solidFill>
+                  </a:tcPr>
+                </a:tc>
+                <a:tc>
+                  <a:txBody>
+                    <a:bodyPr/>
+                    <a:lstStyle/>
+                    <a:p>
+                      <a:pPr algn="ctr" indent="0" marL="0">
+                        <a:buNone/>
+                      </a:pPr>
+                      <a:r>
+                        <a:rPr lang="en-US" sz="750" dirty="0">
+                          <a:solidFill>
+                            <a:srgbClr val="B45309"/>
+                          </a:solidFill>
+                          <a:latin typeface="Calibri" pitchFamily="34" charset="0"/>
+                          <a:ea typeface="Calibri" pitchFamily="34" charset="-122"/>
+                          <a:cs typeface="Calibri" pitchFamily="34" charset="-120"/>
+                        </a:rPr>
+                        <a:t>hotspot map</a:t>
+                      </a:r>
+                      <a:endParaRPr lang="en-US" sz="750" dirty="0">
+                        <a:latin typeface="Calibri" charset="0"/>
+                        <a:ea typeface="Calibri" charset="0"/>
+                        <a:cs typeface="Calibri" charset="0"/>
+                      </a:endParaRPr>
+                    </a:p>
+                  </a:txBody>
+                  <a:tcPr marL="27432" marR="27432" marT="27432" marB="27432">
+                    <a:lnL w="6350" cap="flat" cmpd="sng" algn="ctr">
+                      <a:solidFill>
+                        <a:srgbClr val="D1D5DB"/>
+                      </a:solidFill>
+                      <a:prstDash val="solid"/>
+                      <a:round/>
+                      <a:headEnd type="none" w="med" len="med"/>
+                      <a:tailEnd type="none" w="med" len="med"/>
+                    </a:lnL>
+                    <a:lnR w="6350" cap="flat" cmpd="sng" algn="ctr">
+                      <a:solidFill>
+                        <a:srgbClr val="D1D5DB"/>
+                      </a:solidFill>
+                      <a:prstDash val="solid"/>
+                      <a:round/>
+                      <a:headEnd type="none" w="med" len="med"/>
+                      <a:tailEnd type="none" w="med" len="med"/>
+                    </a:lnR>
+                    <a:lnT w="6350" cap="flat" cmpd="sng" algn="ctr">
+                      <a:solidFill>
+                        <a:srgbClr val="D1D5DB"/>
+                      </a:solidFill>
+                      <a:prstDash val="solid"/>
+                      <a:round/>
+                      <a:headEnd type="none" w="med" len="med"/>
+                      <a:tailEnd type="none" w="med" len="med"/>
+                    </a:lnT>
+                    <a:lnB w="6350" cap="flat" cmpd="sng" algn="ctr">
+                      <a:solidFill>
+                        <a:srgbClr val="D1D5DB"/>
+                      </a:solidFill>
+                      <a:prstDash val="solid"/>
+                      <a:round/>
+                      <a:headEnd type="none" w="med" len="med"/>
+                      <a:tailEnd type="none" w="med" len="med"/>
+                    </a:lnB>
+                    <a:solidFill>
+                      <a:srgbClr val="FFFFFF"/>
+                    </a:solidFill>
+                  </a:tcPr>
+                </a:tc>
+                <a:tc>
+                  <a:txBody>
+                    <a:bodyPr/>
+                    <a:lstStyle/>
+                    <a:p>
+                      <a:pPr algn="ctr" indent="0" marL="0">
+                        <a:buNone/>
+                      </a:pPr>
+                      <a:r>
+                        <a:rPr lang="en-US" sz="750" dirty="0">
+                          <a:solidFill>
+                            <a:srgbClr val="B45309"/>
+                          </a:solidFill>
+                          <a:latin typeface="Calibri" pitchFamily="34" charset="0"/>
+                          <a:ea typeface="Calibri" pitchFamily="34" charset="-122"/>
+                          <a:cs typeface="Calibri" pitchFamily="34" charset="-120"/>
+                        </a:rPr>
+                        <a:t>forest / land fires</a:t>
+                      </a:r>
+                      <a:endParaRPr lang="en-US" sz="750" dirty="0">
+                        <a:latin typeface="Calibri" charset="0"/>
+                        <a:ea typeface="Calibri" charset="0"/>
+                        <a:cs typeface="Calibri" charset="0"/>
+                      </a:endParaRPr>
+                    </a:p>
+                  </a:txBody>
+                  <a:tcPr marL="27432" marR="27432" marT="27432" marB="27432">
+                    <a:lnL w="6350" cap="flat" cmpd="sng" algn="ctr">
+                      <a:solidFill>
+                        <a:srgbClr val="D1D5DB"/>
+                      </a:solidFill>
+                      <a:prstDash val="solid"/>
+                      <a:round/>
+                      <a:headEnd type="none" w="med" len="med"/>
+                      <a:tailEnd type="none" w="med" len="med"/>
+                    </a:lnL>
+                    <a:lnR w="6350" cap="flat" cmpd="sng" algn="ctr">
+                      <a:solidFill>
+                        <a:srgbClr val="D1D5DB"/>
+                      </a:solidFill>
+                      <a:prstDash val="solid"/>
+                      <a:round/>
+                      <a:headEnd type="none" w="med" len="med"/>
+                      <a:tailEnd type="none" w="med" len="med"/>
+                    </a:lnR>
+                    <a:lnT w="6350" cap="flat" cmpd="sng" algn="ctr">
+                      <a:solidFill>
+                        <a:srgbClr val="D1D5DB"/>
+                      </a:solidFill>
+                      <a:prstDash val="solid"/>
+                      <a:round/>
+                      <a:headEnd type="none" w="med" len="med"/>
+                      <a:tailEnd type="none" w="med" len="med"/>
+                    </a:lnT>
+                    <a:lnB w="6350" cap="flat" cmpd="sng" algn="ctr">
+                      <a:solidFill>
+                        <a:srgbClr val="D1D5DB"/>
+                      </a:solidFill>
+                      <a:prstDash val="solid"/>
+                      <a:round/>
+                      <a:headEnd type="none" w="med" len="med"/>
+                      <a:tailEnd type="none" w="med" len="med"/>
+                    </a:lnB>
+                    <a:solidFill>
+                      <a:srgbClr val="FFFFFF"/>
+                    </a:solidFill>
+                  </a:tcPr>
+                </a:tc>
+                <a:tc>
+                  <a:txBody>
+                    <a:bodyPr/>
+                    <a:lstStyle/>
+                    <a:p>
+                      <a:pPr algn="ctr" indent="0" marL="0">
+                        <a:buNone/>
+                      </a:pPr>
+                      <a:r>
+                        <a:rPr lang="en-US" sz="750" dirty="0">
+                          <a:solidFill>
+                            <a:srgbClr val="B45309"/>
+                          </a:solidFill>
+                          <a:latin typeface="Calibri" pitchFamily="34" charset="0"/>
+                          <a:ea typeface="Calibri" pitchFamily="34" charset="-122"/>
+                          <a:cs typeface="Calibri" pitchFamily="34" charset="-120"/>
+                        </a:rPr>
+                        <a:t>wildfire danger &amp; burnt area</a:t>
+                      </a:r>
+                      <a:endParaRPr lang="en-US" sz="750" dirty="0">
+                        <a:latin typeface="Calibri" charset="0"/>
+                        <a:ea typeface="Calibri" charset="0"/>
+                        <a:cs typeface="Calibri" charset="0"/>
+                      </a:endParaRPr>
+                    </a:p>
+                  </a:txBody>
+                  <a:tcPr marL="27432" marR="27432" marT="27432" marB="27432">
+                    <a:lnL w="6350" cap="flat" cmpd="sng" algn="ctr">
+                      <a:solidFill>
+                        <a:srgbClr val="D1D5DB"/>
+                      </a:solidFill>
+                      <a:prstDash val="solid"/>
+                      <a:round/>
+                      <a:headEnd type="none" w="med" len="med"/>
+                      <a:tailEnd type="none" w="med" len="med"/>
+                    </a:lnL>
+                    <a:lnR w="6350" cap="flat" cmpd="sng" algn="ctr">
+                      <a:solidFill>
+                        <a:srgbClr val="D1D5DB"/>
+                      </a:solidFill>
+                      <a:prstDash val="solid"/>
+                      <a:round/>
+                      <a:headEnd type="none" w="med" len="med"/>
+                      <a:tailEnd type="none" w="med" len="med"/>
+                    </a:lnR>
+                    <a:lnT w="6350" cap="flat" cmpd="sng" algn="ctr">
+                      <a:solidFill>
+                        <a:srgbClr val="D1D5DB"/>
+                      </a:solidFill>
+                      <a:prstDash val="solid"/>
+                      <a:round/>
+                      <a:headEnd type="none" w="med" len="med"/>
+                      <a:tailEnd type="none" w="med" len="med"/>
+                    </a:lnT>
+                    <a:lnB w="6350" cap="flat" cmpd="sng" algn="ctr">
+                      <a:solidFill>
+                        <a:srgbClr val="D1D5DB"/>
+                      </a:solidFill>
+                      <a:prstDash val="solid"/>
+                      <a:round/>
+                      <a:headEnd type="none" w="med" len="med"/>
+                      <a:tailEnd type="none" w="med" len="med"/>
+                    </a:lnB>
+                    <a:solidFill>
+                      <a:srgbClr val="FFFFFF"/>
+                    </a:solidFill>
+                  </a:tcPr>
+                </a:tc>
+                <a:tc>
+                  <a:txBody>
+                    <a:bodyPr/>
+                    <a:lstStyle/>
+                    <a:p>
+                      <a:pPr algn="ctr" indent="0" marL="0">
+                        <a:buNone/>
+                      </a:pPr>
+                      <a:r>
+                        <a:rPr lang="en-US" sz="750" dirty="0">
+                          <a:solidFill>
+                            <a:srgbClr val="B45309"/>
+                          </a:solidFill>
+                          <a:latin typeface="Calibri" pitchFamily="34" charset="0"/>
+                          <a:ea typeface="Calibri" pitchFamily="34" charset="-122"/>
+                          <a:cs typeface="Calibri" pitchFamily="34" charset="-120"/>
+                        </a:rPr>
+                        <a:t>flare &amp; industrial catalogue</a:t>
+                      </a:r>
+                      <a:endParaRPr lang="en-US" sz="750" dirty="0">
+                        <a:latin typeface="Calibri" charset="0"/>
+                        <a:ea typeface="Calibri" charset="0"/>
+                        <a:cs typeface="Calibri" charset="0"/>
+                      </a:endParaRPr>
+                    </a:p>
+                  </a:txBody>
+                  <a:tcPr marL="27432" marR="27432" marT="27432" marB="27432">
+                    <a:lnL w="6350" cap="flat" cmpd="sng" algn="ctr">
+                      <a:solidFill>
+                        <a:srgbClr val="D1D5DB"/>
+                      </a:solidFill>
+                      <a:prstDash val="solid"/>
+                      <a:round/>
+                      <a:headEnd type="none" w="med" len="med"/>
+                      <a:tailEnd type="none" w="med" len="med"/>
+                    </a:lnL>
+                    <a:lnR w="6350" cap="flat" cmpd="sng" algn="ctr">
+                      <a:solidFill>
+                        <a:srgbClr val="D1D5DB"/>
+                      </a:solidFill>
+                      <a:prstDash val="solid"/>
+                      <a:round/>
+                      <a:headEnd type="none" w="med" len="med"/>
+                      <a:tailEnd type="none" w="med" len="med"/>
+                    </a:lnR>
+                    <a:lnT w="6350" cap="flat" cmpd="sng" algn="ctr">
+                      <a:solidFill>
+                        <a:srgbClr val="D1D5DB"/>
+                      </a:solidFill>
+                      <a:prstDash val="solid"/>
+                      <a:round/>
+                      <a:headEnd type="none" w="med" len="med"/>
+                      <a:tailEnd type="none" w="med" len="med"/>
+                    </a:lnT>
+                    <a:lnB w="6350" cap="flat" cmpd="sng" algn="ctr">
+                      <a:solidFill>
+                        <a:srgbClr val="D1D5DB"/>
+                      </a:solidFill>
+                      <a:prstDash val="solid"/>
+                      <a:round/>
+                      <a:headEnd type="none" w="med" len="med"/>
+                      <a:tailEnd type="none" w="med" len="med"/>
+                    </a:lnB>
+                    <a:solidFill>
+                      <a:srgbClr val="FFFFFF"/>
+                    </a:solidFill>
+                  </a:tcPr>
+                </a:tc>
+                <a:tc>
+                  <a:txBody>
+                    <a:bodyPr/>
+                    <a:lstStyle/>
+                    <a:p>
+                      <a:pPr algn="ctr" indent="0" marL="0">
+                        <a:buNone/>
+                      </a:pPr>
+                      <a:r>
+                        <a:rPr lang="en-US" sz="750" dirty="0">
+                          <a:solidFill>
+                            <a:srgbClr val="B45309"/>
+                          </a:solidFill>
+                          <a:latin typeface="Calibri" pitchFamily="34" charset="0"/>
+                          <a:ea typeface="Calibri" pitchFamily="34" charset="-122"/>
+                          <a:cs typeface="Calibri" pitchFamily="34" charset="-120"/>
+                        </a:rPr>
+                        <a:t>industrial fire intelligence</a:t>
+                      </a:r>
+                      <a:endParaRPr lang="en-US" sz="750" dirty="0">
+                        <a:latin typeface="Calibri" charset="0"/>
+                        <a:ea typeface="Calibri" charset="0"/>
+                        <a:cs typeface="Calibri" charset="0"/>
+                      </a:endParaRPr>
+                    </a:p>
+                  </a:txBody>
+                  <a:tcPr marL="27432" marR="27432" marT="27432" marB="27432">
+                    <a:lnL w="6350" cap="flat" cmpd="sng" algn="ctr">
+                      <a:solidFill>
+                        <a:srgbClr val="D1D5DB"/>
+                      </a:solidFill>
+                      <a:prstDash val="solid"/>
+                      <a:round/>
+                      <a:headEnd type="none" w="med" len="med"/>
+                      <a:tailEnd type="none" w="med" len="med"/>
+                    </a:lnL>
+                    <a:lnR w="6350" cap="flat" cmpd="sng" algn="ctr">
+                      <a:solidFill>
+                        <a:srgbClr val="D1D5DB"/>
+                      </a:solidFill>
+                      <a:prstDash val="solid"/>
+                      <a:round/>
+                      <a:headEnd type="none" w="med" len="med"/>
+                      <a:tailEnd type="none" w="med" len="med"/>
+                    </a:lnR>
+                    <a:lnT w="6350" cap="flat" cmpd="sng" algn="ctr">
+                      <a:solidFill>
+                        <a:srgbClr val="D1D5DB"/>
+                      </a:solidFill>
+                      <a:prstDash val="solid"/>
+                      <a:round/>
+                      <a:headEnd type="none" w="med" len="med"/>
+                      <a:tailEnd type="none" w="med" len="med"/>
+                    </a:lnT>
+                    <a:lnB w="6350" cap="flat" cmpd="sng" algn="ctr">
+                      <a:solidFill>
+                        <a:srgbClr val="D1D5DB"/>
+                      </a:solidFill>
+                      <a:prstDash val="solid"/>
+                      <a:round/>
+                      <a:headEnd type="none" w="med" len="med"/>
+                      <a:tailEnd type="none" w="med" len="med"/>
+                    </a:lnB>
+                    <a:solidFill>
+                      <a:srgbClr val="ECFDF5"/>
+                    </a:solidFill>
+                  </a:tcPr>
+                </a:tc>
+              </a:tr>
+              <a:tr h="246888">
+                <a:tc>
+                  <a:txBody>
+                    <a:bodyPr/>
+                    <a:lstStyle/>
+                    <a:p>
+                      <a:pPr indent="0" marL="0">
+                        <a:buNone/>
+                      </a:pPr>
+                      <a:r>
+                        <a:rPr lang="en-US" sz="850" dirty="0">
+                          <a:solidFill>
+                            <a:srgbClr val="1F2937"/>
+                          </a:solidFill>
+                          <a:latin typeface="Calibri" pitchFamily="34" charset="0"/>
+                          <a:ea typeface="Calibri" pitchFamily="34" charset="-122"/>
+                          <a:cs typeface="Calibri" pitchFamily="34" charset="-120"/>
+                        </a:rPr>
+                        <a:t>Detects thermal anomalies</a:t>
+                      </a:r>
+                      <a:endParaRPr lang="en-US" sz="850" dirty="0">
+                        <a:latin typeface="Calibri" charset="0"/>
+                        <a:ea typeface="Calibri" charset="0"/>
+                        <a:cs typeface="Calibri" charset="0"/>
+                      </a:endParaRPr>
+                    </a:p>
+                  </a:txBody>
+                  <a:tcPr marL="27432" marR="27432" marT="27432" marB="27432">
+                    <a:lnL w="6350" cap="flat" cmpd="sng" algn="ctr">
+                      <a:solidFill>
+                        <a:srgbClr val="D1D5DB"/>
+                      </a:solidFill>
+                      <a:prstDash val="solid"/>
+                      <a:round/>
+                      <a:headEnd type="none" w="med" len="med"/>
+                      <a:tailEnd type="none" w="med" len="med"/>
+                    </a:lnL>
+                    <a:lnR w="6350" cap="flat" cmpd="sng" algn="ctr">
+                      <a:solidFill>
+                        <a:srgbClr val="D1D5DB"/>
+                      </a:solidFill>
+                      <a:prstDash val="solid"/>
+                      <a:round/>
+                      <a:headEnd type="none" w="med" len="med"/>
+                      <a:tailEnd type="none" w="med" len="med"/>
+                    </a:lnR>
+                    <a:lnT w="6350" cap="flat" cmpd="sng" algn="ctr">
+                      <a:solidFill>
+                        <a:srgbClr val="D1D5DB"/>
+                      </a:solidFill>
+                      <a:prstDash val="solid"/>
+                      <a:round/>
+                      <a:headEnd type="none" w="med" len="med"/>
+                      <a:tailEnd type="none" w="med" len="med"/>
+                    </a:lnT>
+                    <a:lnB w="6350" cap="flat" cmpd="sng" algn="ctr">
+                      <a:solidFill>
+                        <a:srgbClr val="D1D5DB"/>
+                      </a:solidFill>
+                      <a:prstDash val="solid"/>
+                      <a:round/>
+                      <a:headEnd type="none" w="med" len="med"/>
+                      <a:tailEnd type="none" w="med" len="med"/>
+                    </a:lnB>
+                    <a:solidFill>
+                      <a:srgbClr val="F3F4F6"/>
+                    </a:solidFill>
+                  </a:tcPr>
+                </a:tc>
+                <a:tc>
+                  <a:txBody>
+                    <a:bodyPr/>
+                    <a:lstStyle/>
+                    <a:p>
+                      <a:pPr algn="ctr" indent="0" marL="0">
+                        <a:buNone/>
+                      </a:pPr>
+                      <a:r>
+                        <a:rPr lang="en-US" sz="850" b="1" dirty="0">
+                          <a:solidFill>
+                            <a:srgbClr val="15803D"/>
+                          </a:solidFill>
+                          <a:latin typeface="Calibri" pitchFamily="34" charset="0"/>
+                          <a:ea typeface="Calibri" pitchFamily="34" charset="-122"/>
+                          <a:cs typeface="Calibri" pitchFamily="34" charset="-120"/>
+                        </a:rPr>
+                        <a:t>✔</a:t>
+                      </a:r>
+                      <a:endParaRPr lang="en-US" sz="850" dirty="0">
+                        <a:latin typeface="Calibri" charset="0"/>
+                        <a:ea typeface="Calibri" charset="0"/>
+                        <a:cs typeface="Calibri" charset="0"/>
+                      </a:endParaRPr>
+                    </a:p>
+                  </a:txBody>
+                  <a:tcPr marL="27432" marR="27432" marT="27432" marB="27432">
+                    <a:lnL w="6350" cap="flat" cmpd="sng" algn="ctr">
+                      <a:solidFill>
+                        <a:srgbClr val="D1D5DB"/>
+                      </a:solidFill>
+                      <a:prstDash val="solid"/>
+                      <a:round/>
+                      <a:headEnd type="none" w="med" len="med"/>
+                      <a:tailEnd type="none" w="med" len="med"/>
+                    </a:lnL>
+                    <a:lnR w="6350" cap="flat" cmpd="sng" algn="ctr">
+                      <a:solidFill>
+                        <a:srgbClr val="D1D5DB"/>
+                      </a:solidFill>
+                      <a:prstDash val="solid"/>
+                      <a:round/>
+                      <a:headEnd type="none" w="med" len="med"/>
+                      <a:tailEnd type="none" w="med" len="med"/>
+                    </a:lnR>
+                    <a:lnT w="6350" cap="flat" cmpd="sng" algn="ctr">
+                      <a:solidFill>
+                        <a:srgbClr val="D1D5DB"/>
+                      </a:solidFill>
+                      <a:prstDash val="solid"/>
+                      <a:round/>
+                      <a:headEnd type="none" w="med" len="med"/>
+                      <a:tailEnd type="none" w="med" len="med"/>
+                    </a:lnT>
+                    <a:lnB w="6350" cap="flat" cmpd="sng" algn="ctr">
+                      <a:solidFill>
+                        <a:srgbClr val="D1D5DB"/>
+                      </a:solidFill>
+                      <a:prstDash val="solid"/>
+                      <a:round/>
+                      <a:headEnd type="none" w="med" len="med"/>
+                      <a:tailEnd type="none" w="med" len="med"/>
+                    </a:lnB>
+                    <a:solidFill>
+                      <a:srgbClr val="F3F4F6"/>
+                    </a:solidFill>
+                  </a:tcPr>
+                </a:tc>
+                <a:tc>
+                  <a:txBody>
+                    <a:bodyPr/>
+                    <a:lstStyle/>
+                    <a:p>
+                      <a:pPr algn="ctr" indent="0" marL="0">
+                        <a:buNone/>
+                      </a:pPr>
+                      <a:r>
+                        <a:rPr lang="en-US" sz="850" b="1" dirty="0">
+                          <a:solidFill>
+                            <a:srgbClr val="15803D"/>
+                          </a:solidFill>
+                          <a:latin typeface="Calibri" pitchFamily="34" charset="0"/>
+                          <a:ea typeface="Calibri" pitchFamily="34" charset="-122"/>
+                          <a:cs typeface="Calibri" pitchFamily="34" charset="-120"/>
+                        </a:rPr>
+                        <a:t>✔</a:t>
+                      </a:r>
+                      <a:endParaRPr lang="en-US" sz="850" dirty="0">
+                        <a:latin typeface="Calibri" charset="0"/>
+                        <a:ea typeface="Calibri" charset="0"/>
+                        <a:cs typeface="Calibri" charset="0"/>
+                      </a:endParaRPr>
+                    </a:p>
+                  </a:txBody>
+                  <a:tcPr marL="27432" marR="27432" marT="27432" marB="27432">
+                    <a:lnL w="6350" cap="flat" cmpd="sng" algn="ctr">
+                      <a:solidFill>
+                        <a:srgbClr val="D1D5DB"/>
+                      </a:solidFill>
+                      <a:prstDash val="solid"/>
+                      <a:round/>
+                      <a:headEnd type="none" w="med" len="med"/>
+                      <a:tailEnd type="none" w="med" len="med"/>
+                    </a:lnL>
+                    <a:lnR w="6350" cap="flat" cmpd="sng" algn="ctr">
+                      <a:solidFill>
+                        <a:srgbClr val="D1D5DB"/>
+                      </a:solidFill>
+                      <a:prstDash val="solid"/>
+                      <a:round/>
+                      <a:headEnd type="none" w="med" len="med"/>
+                      <a:tailEnd type="none" w="med" len="med"/>
+                    </a:lnR>
+                    <a:lnT w="6350" cap="flat" cmpd="sng" algn="ctr">
+                      <a:solidFill>
+                        <a:srgbClr val="D1D5DB"/>
+                      </a:solidFill>
+                      <a:prstDash val="solid"/>
+                      <a:round/>
+                      <a:headEnd type="none" w="med" len="med"/>
+                      <a:tailEnd type="none" w="med" len="med"/>
+                    </a:lnT>
+                    <a:lnB w="6350" cap="flat" cmpd="sng" algn="ctr">
+                      <a:solidFill>
+                        <a:srgbClr val="D1D5DB"/>
+                      </a:solidFill>
+                      <a:prstDash val="solid"/>
+                      <a:round/>
+                      <a:headEnd type="none" w="med" len="med"/>
+                      <a:tailEnd type="none" w="med" len="med"/>
+                    </a:lnB>
+                    <a:solidFill>
+                      <a:srgbClr val="F3F4F6"/>
+                    </a:solidFill>
+                  </a:tcPr>
+                </a:tc>
+                <a:tc>
+                  <a:txBody>
+                    <a:bodyPr/>
+                    <a:lstStyle/>
+                    <a:p>
+                      <a:pPr algn="ctr" indent="0" marL="0">
+                        <a:buNone/>
+                      </a:pPr>
+                      <a:r>
+                        <a:rPr lang="en-US" sz="850" b="1" dirty="0">
+                          <a:solidFill>
+                            <a:srgbClr val="15803D"/>
+                          </a:solidFill>
+                          <a:latin typeface="Calibri" pitchFamily="34" charset="0"/>
+                          <a:ea typeface="Calibri" pitchFamily="34" charset="-122"/>
+                          <a:cs typeface="Calibri" pitchFamily="34" charset="-120"/>
+                        </a:rPr>
+                        <a:t>✔</a:t>
+                      </a:r>
+                      <a:endParaRPr lang="en-US" sz="850" dirty="0">
+                        <a:latin typeface="Calibri" charset="0"/>
+                        <a:ea typeface="Calibri" charset="0"/>
+                        <a:cs typeface="Calibri" charset="0"/>
+                      </a:endParaRPr>
+                    </a:p>
+                  </a:txBody>
+                  <a:tcPr marL="27432" marR="27432" marT="27432" marB="27432">
+                    <a:lnL w="6350" cap="flat" cmpd="sng" algn="ctr">
+                      <a:solidFill>
+                        <a:srgbClr val="D1D5DB"/>
+                      </a:solidFill>
+                      <a:prstDash val="solid"/>
+                      <a:round/>
+                      <a:headEnd type="none" w="med" len="med"/>
+                      <a:tailEnd type="none" w="med" len="med"/>
+                    </a:lnL>
+                    <a:lnR w="6350" cap="flat" cmpd="sng" algn="ctr">
+                      <a:solidFill>
+                        <a:srgbClr val="D1D5DB"/>
+                      </a:solidFill>
+                      <a:prstDash val="solid"/>
+                      <a:round/>
+                      <a:headEnd type="none" w="med" len="med"/>
+                      <a:tailEnd type="none" w="med" len="med"/>
+                    </a:lnR>
+                    <a:lnT w="6350" cap="flat" cmpd="sng" algn="ctr">
+                      <a:solidFill>
+                        <a:srgbClr val="D1D5DB"/>
+                      </a:solidFill>
+                      <a:prstDash val="solid"/>
+                      <a:round/>
+                      <a:headEnd type="none" w="med" len="med"/>
+                      <a:tailEnd type="none" w="med" len="med"/>
+                    </a:lnT>
+                    <a:lnB w="6350" cap="flat" cmpd="sng" algn="ctr">
+                      <a:solidFill>
+                        <a:srgbClr val="D1D5DB"/>
+                      </a:solidFill>
+                      <a:prstDash val="solid"/>
+                      <a:round/>
+                      <a:headEnd type="none" w="med" len="med"/>
+                      <a:tailEnd type="none" w="med" len="med"/>
+                    </a:lnB>
+                    <a:solidFill>
+                      <a:srgbClr val="F3F4F6"/>
+                    </a:solidFill>
+                  </a:tcPr>
+                </a:tc>
+                <a:tc>
+                  <a:txBody>
+                    <a:bodyPr/>
+                    <a:lstStyle/>
+                    <a:p>
+                      <a:pPr algn="ctr" indent="0" marL="0">
+                        <a:buNone/>
+                      </a:pPr>
+                      <a:r>
+                        <a:rPr lang="en-US" sz="850" b="1" dirty="0">
+                          <a:solidFill>
+                            <a:srgbClr val="15803D"/>
+                          </a:solidFill>
+                          <a:latin typeface="Calibri" pitchFamily="34" charset="0"/>
+                          <a:ea typeface="Calibri" pitchFamily="34" charset="-122"/>
+                          <a:cs typeface="Calibri" pitchFamily="34" charset="-120"/>
+                        </a:rPr>
+                        <a:t>✔</a:t>
+                      </a:r>
+                      <a:endParaRPr lang="en-US" sz="850" dirty="0">
+                        <a:latin typeface="Calibri" charset="0"/>
+                        <a:ea typeface="Calibri" charset="0"/>
+                        <a:cs typeface="Calibri" charset="0"/>
+                      </a:endParaRPr>
+                    </a:p>
+                  </a:txBody>
+                  <a:tcPr marL="27432" marR="27432" marT="27432" marB="27432">
+                    <a:lnL w="6350" cap="flat" cmpd="sng" algn="ctr">
+                      <a:solidFill>
+                        <a:srgbClr val="D1D5DB"/>
+                      </a:solidFill>
+                      <a:prstDash val="solid"/>
+                      <a:round/>
+                      <a:headEnd type="none" w="med" len="med"/>
+                      <a:tailEnd type="none" w="med" len="med"/>
+                    </a:lnL>
+                    <a:lnR w="6350" cap="flat" cmpd="sng" algn="ctr">
+                      <a:solidFill>
+                        <a:srgbClr val="D1D5DB"/>
+                      </a:solidFill>
+                      <a:prstDash val="solid"/>
+                      <a:round/>
+                      <a:headEnd type="none" w="med" len="med"/>
+                      <a:tailEnd type="none" w="med" len="med"/>
+                    </a:lnR>
+                    <a:lnT w="6350" cap="flat" cmpd="sng" algn="ctr">
+                      <a:solidFill>
+                        <a:srgbClr val="D1D5DB"/>
+                      </a:solidFill>
+                      <a:prstDash val="solid"/>
+                      <a:round/>
+                      <a:headEnd type="none" w="med" len="med"/>
+                      <a:tailEnd type="none" w="med" len="med"/>
+                    </a:lnT>
+                    <a:lnB w="6350" cap="flat" cmpd="sng" algn="ctr">
+                      <a:solidFill>
+                        <a:srgbClr val="D1D5DB"/>
+                      </a:solidFill>
+                      <a:prstDash val="solid"/>
+                      <a:round/>
+                      <a:headEnd type="none" w="med" len="med"/>
+                      <a:tailEnd type="none" w="med" len="med"/>
+                    </a:lnB>
+                    <a:solidFill>
+                      <a:srgbClr val="F3F4F6"/>
+                    </a:solidFill>
+                  </a:tcPr>
+                </a:tc>
+                <a:tc>
+                  <a:txBody>
+                    <a:bodyPr/>
+                    <a:lstStyle/>
+                    <a:p>
+                      <a:pPr algn="ctr" indent="0" marL="0">
+                        <a:buNone/>
+                      </a:pPr>
+                      <a:r>
+                        <a:rPr lang="en-US" sz="850" b="1" dirty="0">
+                          <a:solidFill>
+                            <a:srgbClr val="15803D"/>
+                          </a:solidFill>
+                          <a:latin typeface="Calibri" pitchFamily="34" charset="0"/>
+                          <a:ea typeface="Calibri" pitchFamily="34" charset="-122"/>
+                          <a:cs typeface="Calibri" pitchFamily="34" charset="-120"/>
+                        </a:rPr>
+                        <a:t>✔</a:t>
+                      </a:r>
+                      <a:endParaRPr lang="en-US" sz="850" dirty="0">
+                        <a:latin typeface="Calibri" charset="0"/>
+                        <a:ea typeface="Calibri" charset="0"/>
+                        <a:cs typeface="Calibri" charset="0"/>
+                      </a:endParaRPr>
+                    </a:p>
+                  </a:txBody>
+                  <a:tcPr marL="27432" marR="27432" marT="27432" marB="27432">
+                    <a:lnL w="6350" cap="flat" cmpd="sng" algn="ctr">
+                      <a:solidFill>
+                        <a:srgbClr val="D1D5DB"/>
+                      </a:solidFill>
+                      <a:prstDash val="solid"/>
+                      <a:round/>
+                      <a:headEnd type="none" w="med" len="med"/>
+                      <a:tailEnd type="none" w="med" len="med"/>
+                    </a:lnL>
+                    <a:lnR w="6350" cap="flat" cmpd="sng" algn="ctr">
+                      <a:solidFill>
+                        <a:srgbClr val="D1D5DB"/>
+                      </a:solidFill>
+                      <a:prstDash val="solid"/>
+                      <a:round/>
+                      <a:headEnd type="none" w="med" len="med"/>
+                      <a:tailEnd type="none" w="med" len="med"/>
+                    </a:lnR>
+                    <a:lnT w="6350" cap="flat" cmpd="sng" algn="ctr">
+                      <a:solidFill>
+                        <a:srgbClr val="D1D5DB"/>
+                      </a:solidFill>
+                      <a:prstDash val="solid"/>
+                      <a:round/>
+                      <a:headEnd type="none" w="med" len="med"/>
+                      <a:tailEnd type="none" w="med" len="med"/>
+                    </a:lnT>
+                    <a:lnB w="6350" cap="flat" cmpd="sng" algn="ctr">
+                      <a:solidFill>
+                        <a:srgbClr val="D1D5DB"/>
+                      </a:solidFill>
+                      <a:prstDash val="solid"/>
+                      <a:round/>
+                      <a:headEnd type="none" w="med" len="med"/>
+                      <a:tailEnd type="none" w="med" len="med"/>
+                    </a:lnB>
+                    <a:solidFill>
+                      <a:srgbClr val="ECFDF5"/>
+                    </a:solidFill>
+                  </a:tcPr>
+                </a:tc>
+              </a:tr>
+              <a:tr h="246888">
+                <a:tc>
+                  <a:txBody>
+                    <a:bodyPr/>
+                    <a:lstStyle/>
+                    <a:p>
+                      <a:pPr indent="0" marL="0">
+                        <a:buNone/>
+                      </a:pPr>
+                      <a:r>
+                        <a:rPr lang="en-US" sz="850" dirty="0">
+                          <a:solidFill>
+                            <a:srgbClr val="1F2937"/>
+                          </a:solidFill>
+                          <a:latin typeface="Calibri" pitchFamily="34" charset="0"/>
+                          <a:ea typeface="Calibri" pitchFamily="34" charset="-122"/>
+                          <a:cs typeface="Calibri" pitchFamily="34" charset="-120"/>
+                        </a:rPr>
+                        <a:t>Classifies WHAT is burning (6 classes)</a:t>
+                      </a:r>
+                      <a:endParaRPr lang="en-US" sz="850" dirty="0">
+                        <a:latin typeface="Calibri" charset="0"/>
+                        <a:ea typeface="Calibri" charset="0"/>
+                        <a:cs typeface="Calibri" charset="0"/>
+                      </a:endParaRPr>
+                    </a:p>
+                  </a:txBody>
+                  <a:tcPr marL="27432" marR="27432" marT="27432" marB="27432">
+                    <a:lnL w="6350" cap="flat" cmpd="sng" algn="ctr">
+                      <a:solidFill>
+                        <a:srgbClr val="D1D5DB"/>
+                      </a:solidFill>
+                      <a:prstDash val="solid"/>
+                      <a:round/>
+                      <a:headEnd type="none" w="med" len="med"/>
+                      <a:tailEnd type="none" w="med" len="med"/>
+                    </a:lnL>
+                    <a:lnR w="6350" cap="flat" cmpd="sng" algn="ctr">
+                      <a:solidFill>
+                        <a:srgbClr val="D1D5DB"/>
+                      </a:solidFill>
+                      <a:prstDash val="solid"/>
+                      <a:round/>
+                      <a:headEnd type="none" w="med" len="med"/>
+                      <a:tailEnd type="none" w="med" len="med"/>
+                    </a:lnR>
+                    <a:lnT w="6350" cap="flat" cmpd="sng" algn="ctr">
+                      <a:solidFill>
+                        <a:srgbClr val="D1D5DB"/>
+                      </a:solidFill>
+                      <a:prstDash val="solid"/>
+                      <a:round/>
+                      <a:headEnd type="none" w="med" len="med"/>
+                      <a:tailEnd type="none" w="med" len="med"/>
+                    </a:lnT>
+                    <a:lnB w="6350" cap="flat" cmpd="sng" algn="ctr">
+                      <a:solidFill>
+                        <a:srgbClr val="D1D5DB"/>
+                      </a:solidFill>
+                      <a:prstDash val="solid"/>
+                      <a:round/>
+                      <a:headEnd type="none" w="med" len="med"/>
+                      <a:tailEnd type="none" w="med" len="med"/>
+                    </a:lnB>
+                    <a:solidFill>
+                      <a:srgbClr val="FFFFFF"/>
+                    </a:solidFill>
+                  </a:tcPr>
+                </a:tc>
+                <a:tc>
+                  <a:txBody>
+                    <a:bodyPr/>
+                    <a:lstStyle/>
+                    <a:p>
+                      <a:pPr algn="ctr" indent="0" marL="0">
+                        <a:buNone/>
+                      </a:pPr>
+                      <a:r>
+                        <a:rPr lang="en-US" sz="850" b="1" dirty="0">
+                          <a:solidFill>
+                            <a:srgbClr val="B91C1C"/>
+                          </a:solidFill>
+                          <a:latin typeface="Calibri" pitchFamily="34" charset="0"/>
+                          <a:ea typeface="Calibri" pitchFamily="34" charset="-122"/>
+                          <a:cs typeface="Calibri" pitchFamily="34" charset="-120"/>
+                        </a:rPr>
+                        <a:t>✖</a:t>
+                      </a:r>
+                      <a:endParaRPr lang="en-US" sz="850" dirty="0">
+                        <a:latin typeface="Calibri" charset="0"/>
+                        <a:ea typeface="Calibri" charset="0"/>
+                        <a:cs typeface="Calibri" charset="0"/>
+                      </a:endParaRPr>
+                    </a:p>
+                  </a:txBody>
+                  <a:tcPr marL="27432" marR="27432" marT="27432" marB="27432">
+                    <a:lnL w="6350" cap="flat" cmpd="sng" algn="ctr">
+                      <a:solidFill>
+                        <a:srgbClr val="D1D5DB"/>
+                      </a:solidFill>
+                      <a:prstDash val="solid"/>
+                      <a:round/>
+                      <a:headEnd type="none" w="med" len="med"/>
+                      <a:tailEnd type="none" w="med" len="med"/>
+                    </a:lnL>
+                    <a:lnR w="6350" cap="flat" cmpd="sng" algn="ctr">
+                      <a:solidFill>
+                        <a:srgbClr val="D1D5DB"/>
+                      </a:solidFill>
+                      <a:prstDash val="solid"/>
+                      <a:round/>
+                      <a:headEnd type="none" w="med" len="med"/>
+                      <a:tailEnd type="none" w="med" len="med"/>
+                    </a:lnR>
+                    <a:lnT w="6350" cap="flat" cmpd="sng" algn="ctr">
+                      <a:solidFill>
+                        <a:srgbClr val="D1D5DB"/>
+                      </a:solidFill>
+                      <a:prstDash val="solid"/>
+                      <a:round/>
+                      <a:headEnd type="none" w="med" len="med"/>
+                      <a:tailEnd type="none" w="med" len="med"/>
+                    </a:lnT>
+                    <a:lnB w="6350" cap="flat" cmpd="sng" algn="ctr">
+                      <a:solidFill>
+                        <a:srgbClr val="D1D5DB"/>
+                      </a:solidFill>
+                      <a:prstDash val="solid"/>
+                      <a:round/>
+                      <a:headEnd type="none" w="med" len="med"/>
+                      <a:tailEnd type="none" w="med" len="med"/>
+                    </a:lnB>
+                    <a:solidFill>
+                      <a:srgbClr val="FFFFFF"/>
+                    </a:solidFill>
+                  </a:tcPr>
+                </a:tc>
+                <a:tc>
+                  <a:txBody>
+                    <a:bodyPr/>
+                    <a:lstStyle/>
+                    <a:p>
+                      <a:pPr algn="ctr" indent="0" marL="0">
+                        <a:buNone/>
+                      </a:pPr>
+                      <a:r>
+                        <a:rPr lang="en-US" sz="850" b="1" dirty="0">
+                          <a:solidFill>
+                            <a:srgbClr val="B91C1C"/>
+                          </a:solidFill>
+                          <a:latin typeface="Calibri" pitchFamily="34" charset="0"/>
+                          <a:ea typeface="Calibri" pitchFamily="34" charset="-122"/>
+                          <a:cs typeface="Calibri" pitchFamily="34" charset="-120"/>
+                        </a:rPr>
+                        <a:t>✖</a:t>
+                      </a:r>
+                      <a:endParaRPr lang="en-US" sz="850" dirty="0">
+                        <a:latin typeface="Calibri" charset="0"/>
+                        <a:ea typeface="Calibri" charset="0"/>
+                        <a:cs typeface="Calibri" charset="0"/>
+                      </a:endParaRPr>
+                    </a:p>
+                  </a:txBody>
+                  <a:tcPr marL="27432" marR="27432" marT="27432" marB="27432">
+                    <a:lnL w="6350" cap="flat" cmpd="sng" algn="ctr">
+                      <a:solidFill>
+                        <a:srgbClr val="D1D5DB"/>
+                      </a:solidFill>
+                      <a:prstDash val="solid"/>
+                      <a:round/>
+                      <a:headEnd type="none" w="med" len="med"/>
+                      <a:tailEnd type="none" w="med" len="med"/>
+                    </a:lnL>
+                    <a:lnR w="6350" cap="flat" cmpd="sng" algn="ctr">
+                      <a:solidFill>
+                        <a:srgbClr val="D1D5DB"/>
+                      </a:solidFill>
+                      <a:prstDash val="solid"/>
+                      <a:round/>
+                      <a:headEnd type="none" w="med" len="med"/>
+                      <a:tailEnd type="none" w="med" len="med"/>
+                    </a:lnR>
+                    <a:lnT w="6350" cap="flat" cmpd="sng" algn="ctr">
+                      <a:solidFill>
+                        <a:srgbClr val="D1D5DB"/>
+                      </a:solidFill>
+                      <a:prstDash val="solid"/>
+                      <a:round/>
+                      <a:headEnd type="none" w="med" len="med"/>
+                      <a:tailEnd type="none" w="med" len="med"/>
+                    </a:lnT>
+                    <a:lnB w="6350" cap="flat" cmpd="sng" algn="ctr">
+                      <a:solidFill>
+                        <a:srgbClr val="D1D5DB"/>
+                      </a:solidFill>
+                      <a:prstDash val="solid"/>
+                      <a:round/>
+                      <a:headEnd type="none" w="med" len="med"/>
+                      <a:tailEnd type="none" w="med" len="med"/>
+                    </a:lnB>
+                    <a:solidFill>
+                      <a:srgbClr val="FFFFFF"/>
+                    </a:solidFill>
+                  </a:tcPr>
+                </a:tc>
+                <a:tc>
+                  <a:txBody>
+                    <a:bodyPr/>
+                    <a:lstStyle/>
+                    <a:p>
+                      <a:pPr algn="ctr" indent="0" marL="0">
+                        <a:buNone/>
+                      </a:pPr>
+                      <a:r>
+                        <a:rPr lang="en-US" sz="850" b="1" dirty="0">
+                          <a:solidFill>
+                            <a:srgbClr val="B91C1C"/>
+                          </a:solidFill>
+                          <a:latin typeface="Calibri" pitchFamily="34" charset="0"/>
+                          <a:ea typeface="Calibri" pitchFamily="34" charset="-122"/>
+                          <a:cs typeface="Calibri" pitchFamily="34" charset="-120"/>
+                        </a:rPr>
+                        <a:t>✖</a:t>
+                      </a:r>
+                      <a:endParaRPr lang="en-US" sz="850" dirty="0">
+                        <a:latin typeface="Calibri" charset="0"/>
+                        <a:ea typeface="Calibri" charset="0"/>
+                        <a:cs typeface="Calibri" charset="0"/>
+                      </a:endParaRPr>
+                    </a:p>
+                  </a:txBody>
+                  <a:tcPr marL="27432" marR="27432" marT="27432" marB="27432">
+                    <a:lnL w="6350" cap="flat" cmpd="sng" algn="ctr">
+                      <a:solidFill>
+                        <a:srgbClr val="D1D5DB"/>
+                      </a:solidFill>
+                      <a:prstDash val="solid"/>
+                      <a:round/>
+                      <a:headEnd type="none" w="med" len="med"/>
+                      <a:tailEnd type="none" w="med" len="med"/>
+                    </a:lnL>
+                    <a:lnR w="6350" cap="flat" cmpd="sng" algn="ctr">
+                      <a:solidFill>
+                        <a:srgbClr val="D1D5DB"/>
+                      </a:solidFill>
+                      <a:prstDash val="solid"/>
+                      <a:round/>
+                      <a:headEnd type="none" w="med" len="med"/>
+                      <a:tailEnd type="none" w="med" len="med"/>
+                    </a:lnR>
+                    <a:lnT w="6350" cap="flat" cmpd="sng" algn="ctr">
+                      <a:solidFill>
+                        <a:srgbClr val="D1D5DB"/>
+                      </a:solidFill>
+                      <a:prstDash val="solid"/>
+                      <a:round/>
+                      <a:headEnd type="none" w="med" len="med"/>
+                      <a:tailEnd type="none" w="med" len="med"/>
+                    </a:lnT>
+                    <a:lnB w="6350" cap="flat" cmpd="sng" algn="ctr">
+                      <a:solidFill>
+                        <a:srgbClr val="D1D5DB"/>
+                      </a:solidFill>
+                      <a:prstDash val="solid"/>
+                      <a:round/>
+                      <a:headEnd type="none" w="med" len="med"/>
+                      <a:tailEnd type="none" w="med" len="med"/>
+                    </a:lnB>
+                    <a:solidFill>
+                      <a:srgbClr val="FFFFFF"/>
+                    </a:solidFill>
+                  </a:tcPr>
+                </a:tc>
+                <a:tc>
+                  <a:txBody>
+                    <a:bodyPr/>
+                    <a:lstStyle/>
+                    <a:p>
+                      <a:pPr algn="ctr" indent="0" marL="0">
+                        <a:buNone/>
+                      </a:pPr>
+                      <a:r>
+                        <a:rPr lang="en-US" sz="750" dirty="0">
+                          <a:solidFill>
+                            <a:srgbClr val="B45309"/>
+                          </a:solidFill>
+                          <a:latin typeface="Calibri" pitchFamily="34" charset="0"/>
+                          <a:ea typeface="Calibri" pitchFamily="34" charset="-122"/>
+                          <a:cs typeface="Calibri" pitchFamily="34" charset="-120"/>
+                        </a:rPr>
+                        <a:t>flares only</a:t>
+                      </a:r>
+                      <a:endParaRPr lang="en-US" sz="750" dirty="0">
+                        <a:latin typeface="Calibri" charset="0"/>
+                        <a:ea typeface="Calibri" charset="0"/>
+                        <a:cs typeface="Calibri" charset="0"/>
+                      </a:endParaRPr>
+                    </a:p>
+                  </a:txBody>
+                  <a:tcPr marL="27432" marR="27432" marT="27432" marB="27432">
+                    <a:lnL w="6350" cap="flat" cmpd="sng" algn="ctr">
+                      <a:solidFill>
+                        <a:srgbClr val="D1D5DB"/>
+                      </a:solidFill>
+                      <a:prstDash val="solid"/>
+                      <a:round/>
+                      <a:headEnd type="none" w="med" len="med"/>
+                      <a:tailEnd type="none" w="med" len="med"/>
+                    </a:lnL>
+                    <a:lnR w="6350" cap="flat" cmpd="sng" algn="ctr">
+                      <a:solidFill>
+                        <a:srgbClr val="D1D5DB"/>
+                      </a:solidFill>
+                      <a:prstDash val="solid"/>
+                      <a:round/>
+                      <a:headEnd type="none" w="med" len="med"/>
+                      <a:tailEnd type="none" w="med" len="med"/>
+                    </a:lnR>
+                    <a:lnT w="6350" cap="flat" cmpd="sng" algn="ctr">
+                      <a:solidFill>
+                        <a:srgbClr val="D1D5DB"/>
+                      </a:solidFill>
+                      <a:prstDash val="solid"/>
+                      <a:round/>
+                      <a:headEnd type="none" w="med" len="med"/>
+                      <a:tailEnd type="none" w="med" len="med"/>
+                    </a:lnT>
+                    <a:lnB w="6350" cap="flat" cmpd="sng" algn="ctr">
+                      <a:solidFill>
+                        <a:srgbClr val="D1D5DB"/>
+                      </a:solidFill>
+                      <a:prstDash val="solid"/>
+                      <a:round/>
+                      <a:headEnd type="none" w="med" len="med"/>
+                      <a:tailEnd type="none" w="med" len="med"/>
+                    </a:lnB>
+                    <a:solidFill>
+                      <a:srgbClr val="FFFFFF"/>
+                    </a:solidFill>
+                  </a:tcPr>
+                </a:tc>
+                <a:tc>
+                  <a:txBody>
+                    <a:bodyPr/>
+                    <a:lstStyle/>
+                    <a:p>
+                      <a:pPr algn="ctr" indent="0" marL="0">
+                        <a:buNone/>
+                      </a:pPr>
+                      <a:r>
+                        <a:rPr lang="en-US" sz="850" b="1" dirty="0">
+                          <a:solidFill>
+                            <a:srgbClr val="15803D"/>
+                          </a:solidFill>
+                          <a:latin typeface="Calibri" pitchFamily="34" charset="0"/>
+                          <a:ea typeface="Calibri" pitchFamily="34" charset="-122"/>
+                          <a:cs typeface="Calibri" pitchFamily="34" charset="-120"/>
+                        </a:rPr>
+                        <a:t>✔</a:t>
+                      </a:r>
+                      <a:endParaRPr lang="en-US" sz="850" dirty="0">
+                        <a:latin typeface="Calibri" charset="0"/>
+                        <a:ea typeface="Calibri" charset="0"/>
+                        <a:cs typeface="Calibri" charset="0"/>
+                      </a:endParaRPr>
+                    </a:p>
+                  </a:txBody>
+                  <a:tcPr marL="27432" marR="27432" marT="27432" marB="27432">
+                    <a:lnL w="6350" cap="flat" cmpd="sng" algn="ctr">
+                      <a:solidFill>
+                        <a:srgbClr val="D1D5DB"/>
+                      </a:solidFill>
+                      <a:prstDash val="solid"/>
+                      <a:round/>
+                      <a:headEnd type="none" w="med" len="med"/>
+                      <a:tailEnd type="none" w="med" len="med"/>
+                    </a:lnL>
+                    <a:lnR w="6350" cap="flat" cmpd="sng" algn="ctr">
+                      <a:solidFill>
+                        <a:srgbClr val="D1D5DB"/>
+                      </a:solidFill>
+                      <a:prstDash val="solid"/>
+                      <a:round/>
+                      <a:headEnd type="none" w="med" len="med"/>
+                      <a:tailEnd type="none" w="med" len="med"/>
+                    </a:lnR>
+                    <a:lnT w="6350" cap="flat" cmpd="sng" algn="ctr">
+                      <a:solidFill>
+                        <a:srgbClr val="D1D5DB"/>
+                      </a:solidFill>
+                      <a:prstDash val="solid"/>
+                      <a:round/>
+                      <a:headEnd type="none" w="med" len="med"/>
+                      <a:tailEnd type="none" w="med" len="med"/>
+                    </a:lnT>
+                    <a:lnB w="6350" cap="flat" cmpd="sng" algn="ctr">
+                      <a:solidFill>
+                        <a:srgbClr val="D1D5DB"/>
+                      </a:solidFill>
+                      <a:prstDash val="solid"/>
+                      <a:round/>
+                      <a:headEnd type="none" w="med" len="med"/>
+                      <a:tailEnd type="none" w="med" len="med"/>
+                    </a:lnB>
+                    <a:solidFill>
+                      <a:srgbClr val="ECFDF5"/>
+                    </a:solidFill>
+                  </a:tcPr>
+                </a:tc>
+              </a:tr>
+              <a:tr h="246888">
+                <a:tc>
+                  <a:txBody>
+                    <a:bodyPr/>
+                    <a:lstStyle/>
+                    <a:p>
+                      <a:pPr indent="0" marL="0">
+                        <a:buNone/>
+                      </a:pPr>
+                      <a:r>
+                        <a:rPr lang="en-US" sz="850" dirty="0">
+                          <a:solidFill>
+                            <a:srgbClr val="1F2937"/>
+                          </a:solidFill>
+                          <a:latin typeface="Calibri" pitchFamily="34" charset="0"/>
+                          <a:ea typeface="Calibri" pitchFamily="34" charset="-122"/>
+                          <a:cs typeface="Calibri" pitchFamily="34" charset="-120"/>
+                        </a:rPr>
+                        <a:t>Separates industrial fire from wildfire / crop burn</a:t>
+                      </a:r>
+                      <a:endParaRPr lang="en-US" sz="850" dirty="0">
+                        <a:latin typeface="Calibri" charset="0"/>
+                        <a:ea typeface="Calibri" charset="0"/>
+                        <a:cs typeface="Calibri" charset="0"/>
+                      </a:endParaRPr>
+                    </a:p>
+                  </a:txBody>
+                  <a:tcPr marL="27432" marR="27432" marT="27432" marB="27432">
+                    <a:lnL w="6350" cap="flat" cmpd="sng" algn="ctr">
+                      <a:solidFill>
+                        <a:srgbClr val="D1D5DB"/>
+                      </a:solidFill>
+                      <a:prstDash val="solid"/>
+                      <a:round/>
+                      <a:headEnd type="none" w="med" len="med"/>
+                      <a:tailEnd type="none" w="med" len="med"/>
+                    </a:lnL>
+                    <a:lnR w="6350" cap="flat" cmpd="sng" algn="ctr">
+                      <a:solidFill>
+                        <a:srgbClr val="D1D5DB"/>
+                      </a:solidFill>
+                      <a:prstDash val="solid"/>
+                      <a:round/>
+                      <a:headEnd type="none" w="med" len="med"/>
+                      <a:tailEnd type="none" w="med" len="med"/>
+                    </a:lnR>
+                    <a:lnT w="6350" cap="flat" cmpd="sng" algn="ctr">
+                      <a:solidFill>
+                        <a:srgbClr val="D1D5DB"/>
+                      </a:solidFill>
+                      <a:prstDash val="solid"/>
+                      <a:round/>
+                      <a:headEnd type="none" w="med" len="med"/>
+                      <a:tailEnd type="none" w="med" len="med"/>
+                    </a:lnT>
+                    <a:lnB w="6350" cap="flat" cmpd="sng" algn="ctr">
+                      <a:solidFill>
+                        <a:srgbClr val="D1D5DB"/>
+                      </a:solidFill>
+                      <a:prstDash val="solid"/>
+                      <a:round/>
+                      <a:headEnd type="none" w="med" len="med"/>
+                      <a:tailEnd type="none" w="med" len="med"/>
+                    </a:lnB>
+                    <a:solidFill>
+                      <a:srgbClr val="F3F4F6"/>
+                    </a:solidFill>
+                  </a:tcPr>
+                </a:tc>
+                <a:tc>
+                  <a:txBody>
+                    <a:bodyPr/>
+                    <a:lstStyle/>
+                    <a:p>
+                      <a:pPr algn="ctr" indent="0" marL="0">
+                        <a:buNone/>
+                      </a:pPr>
+                      <a:r>
+                        <a:rPr lang="en-US" sz="850" b="1" dirty="0">
+                          <a:solidFill>
+                            <a:srgbClr val="B91C1C"/>
+                          </a:solidFill>
+                          <a:latin typeface="Calibri" pitchFamily="34" charset="0"/>
+                          <a:ea typeface="Calibri" pitchFamily="34" charset="-122"/>
+                          <a:cs typeface="Calibri" pitchFamily="34" charset="-120"/>
+                        </a:rPr>
+                        <a:t>✖</a:t>
+                      </a:r>
+                      <a:endParaRPr lang="en-US" sz="850" dirty="0">
+                        <a:latin typeface="Calibri" charset="0"/>
+                        <a:ea typeface="Calibri" charset="0"/>
+                        <a:cs typeface="Calibri" charset="0"/>
+                      </a:endParaRPr>
+                    </a:p>
+                  </a:txBody>
+                  <a:tcPr marL="27432" marR="27432" marT="27432" marB="27432">
+                    <a:lnL w="6350" cap="flat" cmpd="sng" algn="ctr">
+                      <a:solidFill>
+                        <a:srgbClr val="D1D5DB"/>
+                      </a:solidFill>
+                      <a:prstDash val="solid"/>
+                      <a:round/>
+                      <a:headEnd type="none" w="med" len="med"/>
+                      <a:tailEnd type="none" w="med" len="med"/>
+                    </a:lnL>
+                    <a:lnR w="6350" cap="flat" cmpd="sng" algn="ctr">
+                      <a:solidFill>
+                        <a:srgbClr val="D1D5DB"/>
+                      </a:solidFill>
+                      <a:prstDash val="solid"/>
+                      <a:round/>
+                      <a:headEnd type="none" w="med" len="med"/>
+                      <a:tailEnd type="none" w="med" len="med"/>
+                    </a:lnR>
+                    <a:lnT w="6350" cap="flat" cmpd="sng" algn="ctr">
+                      <a:solidFill>
+                        <a:srgbClr val="D1D5DB"/>
+                      </a:solidFill>
+                      <a:prstDash val="solid"/>
+                      <a:round/>
+                      <a:headEnd type="none" w="med" len="med"/>
+                      <a:tailEnd type="none" w="med" len="med"/>
+                    </a:lnT>
+                    <a:lnB w="6350" cap="flat" cmpd="sng" algn="ctr">
+                      <a:solidFill>
+                        <a:srgbClr val="D1D5DB"/>
+                      </a:solidFill>
+                      <a:prstDash val="solid"/>
+                      <a:round/>
+                      <a:headEnd type="none" w="med" len="med"/>
+                      <a:tailEnd type="none" w="med" len="med"/>
+                    </a:lnB>
+                    <a:solidFill>
+                      <a:srgbClr val="F3F4F6"/>
+                    </a:solidFill>
+                  </a:tcPr>
+                </a:tc>
+                <a:tc>
+                  <a:txBody>
+                    <a:bodyPr/>
+                    <a:lstStyle/>
+                    <a:p>
+                      <a:pPr algn="ctr" indent="0" marL="0">
+                        <a:buNone/>
+                      </a:pPr>
+                      <a:r>
+                        <a:rPr lang="en-US" sz="850" b="1" dirty="0">
+                          <a:solidFill>
+                            <a:srgbClr val="B91C1C"/>
+                          </a:solidFill>
+                          <a:latin typeface="Calibri" pitchFamily="34" charset="0"/>
+                          <a:ea typeface="Calibri" pitchFamily="34" charset="-122"/>
+                          <a:cs typeface="Calibri" pitchFamily="34" charset="-120"/>
+                        </a:rPr>
+                        <a:t>✖</a:t>
+                      </a:r>
+                      <a:endParaRPr lang="en-US" sz="850" dirty="0">
+                        <a:latin typeface="Calibri" charset="0"/>
+                        <a:ea typeface="Calibri" charset="0"/>
+                        <a:cs typeface="Calibri" charset="0"/>
+                      </a:endParaRPr>
+                    </a:p>
+                  </a:txBody>
+                  <a:tcPr marL="27432" marR="27432" marT="27432" marB="27432">
+                    <a:lnL w="6350" cap="flat" cmpd="sng" algn="ctr">
+                      <a:solidFill>
+                        <a:srgbClr val="D1D5DB"/>
+                      </a:solidFill>
+                      <a:prstDash val="solid"/>
+                      <a:round/>
+                      <a:headEnd type="none" w="med" len="med"/>
+                      <a:tailEnd type="none" w="med" len="med"/>
+                    </a:lnL>
+                    <a:lnR w="6350" cap="flat" cmpd="sng" algn="ctr">
+                      <a:solidFill>
+                        <a:srgbClr val="D1D5DB"/>
+                      </a:solidFill>
+                      <a:prstDash val="solid"/>
+                      <a:round/>
+                      <a:headEnd type="none" w="med" len="med"/>
+                      <a:tailEnd type="none" w="med" len="med"/>
+                    </a:lnR>
+                    <a:lnT w="6350" cap="flat" cmpd="sng" algn="ctr">
+                      <a:solidFill>
+                        <a:srgbClr val="D1D5DB"/>
+                      </a:solidFill>
+                      <a:prstDash val="solid"/>
+                      <a:round/>
+                      <a:headEnd type="none" w="med" len="med"/>
+                      <a:tailEnd type="none" w="med" len="med"/>
+                    </a:lnT>
+                    <a:lnB w="6350" cap="flat" cmpd="sng" algn="ctr">
+                      <a:solidFill>
+                        <a:srgbClr val="D1D5DB"/>
+                      </a:solidFill>
+                      <a:prstDash val="solid"/>
+                      <a:round/>
+                      <a:headEnd type="none" w="med" len="med"/>
+                      <a:tailEnd type="none" w="med" len="med"/>
+                    </a:lnB>
+                    <a:solidFill>
+                      <a:srgbClr val="F3F4F6"/>
+                    </a:solidFill>
+                  </a:tcPr>
+                </a:tc>
+                <a:tc>
+                  <a:txBody>
+                    <a:bodyPr/>
+                    <a:lstStyle/>
+                    <a:p>
+                      <a:pPr algn="ctr" indent="0" marL="0">
+                        <a:buNone/>
+                      </a:pPr>
+                      <a:r>
+                        <a:rPr lang="en-US" sz="850" b="1" dirty="0">
+                          <a:solidFill>
+                            <a:srgbClr val="B91C1C"/>
+                          </a:solidFill>
+                          <a:latin typeface="Calibri" pitchFamily="34" charset="0"/>
+                          <a:ea typeface="Calibri" pitchFamily="34" charset="-122"/>
+                          <a:cs typeface="Calibri" pitchFamily="34" charset="-120"/>
+                        </a:rPr>
+                        <a:t>✖</a:t>
+                      </a:r>
+                      <a:endParaRPr lang="en-US" sz="850" dirty="0">
+                        <a:latin typeface="Calibri" charset="0"/>
+                        <a:ea typeface="Calibri" charset="0"/>
+                        <a:cs typeface="Calibri" charset="0"/>
+                      </a:endParaRPr>
+                    </a:p>
+                  </a:txBody>
+                  <a:tcPr marL="27432" marR="27432" marT="27432" marB="27432">
+                    <a:lnL w="6350" cap="flat" cmpd="sng" algn="ctr">
+                      <a:solidFill>
+                        <a:srgbClr val="D1D5DB"/>
+                      </a:solidFill>
+                      <a:prstDash val="solid"/>
+                      <a:round/>
+                      <a:headEnd type="none" w="med" len="med"/>
+                      <a:tailEnd type="none" w="med" len="med"/>
+                    </a:lnL>
+                    <a:lnR w="6350" cap="flat" cmpd="sng" algn="ctr">
+                      <a:solidFill>
+                        <a:srgbClr val="D1D5DB"/>
+                      </a:solidFill>
+                      <a:prstDash val="solid"/>
+                      <a:round/>
+                      <a:headEnd type="none" w="med" len="med"/>
+                      <a:tailEnd type="none" w="med" len="med"/>
+                    </a:lnR>
+                    <a:lnT w="6350" cap="flat" cmpd="sng" algn="ctr">
+                      <a:solidFill>
+                        <a:srgbClr val="D1D5DB"/>
+                      </a:solidFill>
+                      <a:prstDash val="solid"/>
+                      <a:round/>
+                      <a:headEnd type="none" w="med" len="med"/>
+                      <a:tailEnd type="none" w="med" len="med"/>
+                    </a:lnT>
+                    <a:lnB w="6350" cap="flat" cmpd="sng" algn="ctr">
+                      <a:solidFill>
+                        <a:srgbClr val="D1D5DB"/>
+                      </a:solidFill>
+                      <a:prstDash val="solid"/>
+                      <a:round/>
+                      <a:headEnd type="none" w="med" len="med"/>
+                      <a:tailEnd type="none" w="med" len="med"/>
+                    </a:lnB>
+                    <a:solidFill>
+                      <a:srgbClr val="F3F4F6"/>
+                    </a:solidFill>
+                  </a:tcPr>
+                </a:tc>
+                <a:tc>
+                  <a:txBody>
+                    <a:bodyPr/>
+                    <a:lstStyle/>
+                    <a:p>
+                      <a:pPr algn="ctr" indent="0" marL="0">
+                        <a:buNone/>
+                      </a:pPr>
+                      <a:r>
+                        <a:rPr lang="en-US" sz="850" b="1" dirty="0">
+                          <a:solidFill>
+                            <a:srgbClr val="B45309"/>
+                          </a:solidFill>
+                          <a:latin typeface="Calibri" pitchFamily="34" charset="0"/>
+                          <a:ea typeface="Calibri" pitchFamily="34" charset="-122"/>
+                          <a:cs typeface="Calibri" pitchFamily="34" charset="-120"/>
+                        </a:rPr>
+                        <a:t>◐</a:t>
+                      </a:r>
+                      <a:endParaRPr lang="en-US" sz="850" dirty="0">
+                        <a:latin typeface="Calibri" charset="0"/>
+                        <a:ea typeface="Calibri" charset="0"/>
+                        <a:cs typeface="Calibri" charset="0"/>
+                      </a:endParaRPr>
+                    </a:p>
+                  </a:txBody>
+                  <a:tcPr marL="27432" marR="27432" marT="27432" marB="27432">
+                    <a:lnL w="6350" cap="flat" cmpd="sng" algn="ctr">
+                      <a:solidFill>
+                        <a:srgbClr val="D1D5DB"/>
+                      </a:solidFill>
+                      <a:prstDash val="solid"/>
+                      <a:round/>
+                      <a:headEnd type="none" w="med" len="med"/>
+                      <a:tailEnd type="none" w="med" len="med"/>
+                    </a:lnL>
+                    <a:lnR w="6350" cap="flat" cmpd="sng" algn="ctr">
+                      <a:solidFill>
+                        <a:srgbClr val="D1D5DB"/>
+                      </a:solidFill>
+                      <a:prstDash val="solid"/>
+                      <a:round/>
+                      <a:headEnd type="none" w="med" len="med"/>
+                      <a:tailEnd type="none" w="med" len="med"/>
+                    </a:lnR>
+                    <a:lnT w="6350" cap="flat" cmpd="sng" algn="ctr">
+                      <a:solidFill>
+                        <a:srgbClr val="D1D5DB"/>
+                      </a:solidFill>
+                      <a:prstDash val="solid"/>
+                      <a:round/>
+                      <a:headEnd type="none" w="med" len="med"/>
+                      <a:tailEnd type="none" w="med" len="med"/>
+                    </a:lnT>
+                    <a:lnB w="6350" cap="flat" cmpd="sng" algn="ctr">
+                      <a:solidFill>
+                        <a:srgbClr val="D1D5DB"/>
+                      </a:solidFill>
+                      <a:prstDash val="solid"/>
+                      <a:round/>
+                      <a:headEnd type="none" w="med" len="med"/>
+                      <a:tailEnd type="none" w="med" len="med"/>
+                    </a:lnB>
+                    <a:solidFill>
+                      <a:srgbClr val="F3F4F6"/>
+                    </a:solidFill>
+                  </a:tcPr>
+                </a:tc>
+                <a:tc>
+                  <a:txBody>
+                    <a:bodyPr/>
+                    <a:lstStyle/>
+                    <a:p>
+                      <a:pPr algn="ctr" indent="0" marL="0">
+                        <a:buNone/>
+                      </a:pPr>
+                      <a:r>
+                        <a:rPr lang="en-US" sz="850" b="1" dirty="0">
+                          <a:solidFill>
+                            <a:srgbClr val="15803D"/>
+                          </a:solidFill>
+                          <a:latin typeface="Calibri" pitchFamily="34" charset="0"/>
+                          <a:ea typeface="Calibri" pitchFamily="34" charset="-122"/>
+                          <a:cs typeface="Calibri" pitchFamily="34" charset="-120"/>
+                        </a:rPr>
+                        <a:t>✔</a:t>
+                      </a:r>
+                      <a:endParaRPr lang="en-US" sz="850" dirty="0">
+                        <a:latin typeface="Calibri" charset="0"/>
+                        <a:ea typeface="Calibri" charset="0"/>
+                        <a:cs typeface="Calibri" charset="0"/>
+                      </a:endParaRPr>
+                    </a:p>
+                  </a:txBody>
+                  <a:tcPr marL="27432" marR="27432" marT="27432" marB="27432">
+                    <a:lnL w="6350" cap="flat" cmpd="sng" algn="ctr">
+                      <a:solidFill>
+                        <a:srgbClr val="D1D5DB"/>
+                      </a:solidFill>
+                      <a:prstDash val="solid"/>
+                      <a:round/>
+                      <a:headEnd type="none" w="med" len="med"/>
+                      <a:tailEnd type="none" w="med" len="med"/>
+                    </a:lnL>
+                    <a:lnR w="6350" cap="flat" cmpd="sng" algn="ctr">
+                      <a:solidFill>
+                        <a:srgbClr val="D1D5DB"/>
+                      </a:solidFill>
+                      <a:prstDash val="solid"/>
+                      <a:round/>
+                      <a:headEnd type="none" w="med" len="med"/>
+                      <a:tailEnd type="none" w="med" len="med"/>
+                    </a:lnR>
+                    <a:lnT w="6350" cap="flat" cmpd="sng" algn="ctr">
+                      <a:solidFill>
+                        <a:srgbClr val="D1D5DB"/>
+                      </a:solidFill>
+                      <a:prstDash val="solid"/>
+                      <a:round/>
+                      <a:headEnd type="none" w="med" len="med"/>
+                      <a:tailEnd type="none" w="med" len="med"/>
+                    </a:lnT>
+                    <a:lnB w="6350" cap="flat" cmpd="sng" algn="ctr">
+                      <a:solidFill>
+                        <a:srgbClr val="D1D5DB"/>
+                      </a:solidFill>
+                      <a:prstDash val="solid"/>
+                      <a:round/>
+                      <a:headEnd type="none" w="med" len="med"/>
+                      <a:tailEnd type="none" w="med" len="med"/>
+                    </a:lnB>
+                    <a:solidFill>
+                      <a:srgbClr val="ECFDF5"/>
+                    </a:solidFill>
+                  </a:tcPr>
+                </a:tc>
+              </a:tr>
+              <a:tr h="246888">
+                <a:tc>
+                  <a:txBody>
+                    <a:bodyPr/>
+                    <a:lstStyle/>
+                    <a:p>
+                      <a:pPr indent="0" marL="0">
+                        <a:buNone/>
+                      </a:pPr>
+                      <a:r>
+                        <a:rPr lang="en-US" sz="850" dirty="0">
+                          <a:solidFill>
+                            <a:srgbClr val="1F2937"/>
+                          </a:solidFill>
+                          <a:latin typeface="Calibri" pitchFamily="34" charset="0"/>
+                          <a:ea typeface="Calibri" pitchFamily="34" charset="-122"/>
+                          <a:cs typeface="Calibri" pitchFamily="34" charset="-120"/>
+                        </a:rPr>
+                        <a:t>Registry of persistent sources with history</a:t>
+                      </a:r>
+                      <a:endParaRPr lang="en-US" sz="850" dirty="0">
+                        <a:latin typeface="Calibri" charset="0"/>
+                        <a:ea typeface="Calibri" charset="0"/>
+                        <a:cs typeface="Calibri" charset="0"/>
+                      </a:endParaRPr>
+                    </a:p>
+                  </a:txBody>
+                  <a:tcPr marL="27432" marR="27432" marT="27432" marB="27432">
+                    <a:lnL w="6350" cap="flat" cmpd="sng" algn="ctr">
+                      <a:solidFill>
+                        <a:srgbClr val="D1D5DB"/>
+                      </a:solidFill>
+                      <a:prstDash val="solid"/>
+                      <a:round/>
+                      <a:headEnd type="none" w="med" len="med"/>
+                      <a:tailEnd type="none" w="med" len="med"/>
+                    </a:lnL>
+                    <a:lnR w="6350" cap="flat" cmpd="sng" algn="ctr">
+                      <a:solidFill>
+                        <a:srgbClr val="D1D5DB"/>
+                      </a:solidFill>
+                      <a:prstDash val="solid"/>
+                      <a:round/>
+                      <a:headEnd type="none" w="med" len="med"/>
+                      <a:tailEnd type="none" w="med" len="med"/>
+                    </a:lnR>
+                    <a:lnT w="6350" cap="flat" cmpd="sng" algn="ctr">
+                      <a:solidFill>
+                        <a:srgbClr val="D1D5DB"/>
+                      </a:solidFill>
+                      <a:prstDash val="solid"/>
+                      <a:round/>
+                      <a:headEnd type="none" w="med" len="med"/>
+                      <a:tailEnd type="none" w="med" len="med"/>
+                    </a:lnT>
+                    <a:lnB w="6350" cap="flat" cmpd="sng" algn="ctr">
+                      <a:solidFill>
+                        <a:srgbClr val="D1D5DB"/>
+                      </a:solidFill>
+                      <a:prstDash val="solid"/>
+                      <a:round/>
+                      <a:headEnd type="none" w="med" len="med"/>
+                      <a:tailEnd type="none" w="med" len="med"/>
+                    </a:lnB>
+                    <a:solidFill>
+                      <a:srgbClr val="FFFFFF"/>
+                    </a:solidFill>
+                  </a:tcPr>
+                </a:tc>
+                <a:tc>
+                  <a:txBody>
+                    <a:bodyPr/>
+                    <a:lstStyle/>
+                    <a:p>
+                      <a:pPr algn="ctr" indent="0" marL="0">
+                        <a:buNone/>
+                      </a:pPr>
+                      <a:r>
+                        <a:rPr lang="en-US" sz="850" b="1" dirty="0">
+                          <a:solidFill>
+                            <a:srgbClr val="B91C1C"/>
+                          </a:solidFill>
+                          <a:latin typeface="Calibri" pitchFamily="34" charset="0"/>
+                          <a:ea typeface="Calibri" pitchFamily="34" charset="-122"/>
+                          <a:cs typeface="Calibri" pitchFamily="34" charset="-120"/>
+                        </a:rPr>
+                        <a:t>✖</a:t>
+                      </a:r>
+                      <a:endParaRPr lang="en-US" sz="850" dirty="0">
+                        <a:latin typeface="Calibri" charset="0"/>
+                        <a:ea typeface="Calibri" charset="0"/>
+                        <a:cs typeface="Calibri" charset="0"/>
+                      </a:endParaRPr>
+                    </a:p>
+                  </a:txBody>
+                  <a:tcPr marL="27432" marR="27432" marT="27432" marB="27432">
+                    <a:lnL w="6350" cap="flat" cmpd="sng" algn="ctr">
+                      <a:solidFill>
+                        <a:srgbClr val="D1D5DB"/>
+                      </a:solidFill>
+                      <a:prstDash val="solid"/>
+                      <a:round/>
+                      <a:headEnd type="none" w="med" len="med"/>
+                      <a:tailEnd type="none" w="med" len="med"/>
+                    </a:lnL>
+                    <a:lnR w="6350" cap="flat" cmpd="sng" algn="ctr">
+                      <a:solidFill>
+                        <a:srgbClr val="D1D5DB"/>
+                      </a:solidFill>
+                      <a:prstDash val="solid"/>
+                      <a:round/>
+                      <a:headEnd type="none" w="med" len="med"/>
+                      <a:tailEnd type="none" w="med" len="med"/>
+                    </a:lnR>
+                    <a:lnT w="6350" cap="flat" cmpd="sng" algn="ctr">
+                      <a:solidFill>
+                        <a:srgbClr val="D1D5DB"/>
+                      </a:solidFill>
+                      <a:prstDash val="solid"/>
+                      <a:round/>
+                      <a:headEnd type="none" w="med" len="med"/>
+                      <a:tailEnd type="none" w="med" len="med"/>
+                    </a:lnT>
+                    <a:lnB w="6350" cap="flat" cmpd="sng" algn="ctr">
+                      <a:solidFill>
+                        <a:srgbClr val="D1D5DB"/>
+                      </a:solidFill>
+                      <a:prstDash val="solid"/>
+                      <a:round/>
+                      <a:headEnd type="none" w="med" len="med"/>
+                      <a:tailEnd type="none" w="med" len="med"/>
+                    </a:lnB>
+                    <a:solidFill>
+                      <a:srgbClr val="FFFFFF"/>
+                    </a:solidFill>
+                  </a:tcPr>
+                </a:tc>
+                <a:tc>
+                  <a:txBody>
+                    <a:bodyPr/>
+                    <a:lstStyle/>
+                    <a:p>
+                      <a:pPr algn="ctr" indent="0" marL="0">
+                        <a:buNone/>
+                      </a:pPr>
+                      <a:r>
+                        <a:rPr lang="en-US" sz="850" b="1" dirty="0">
+                          <a:solidFill>
+                            <a:srgbClr val="B91C1C"/>
+                          </a:solidFill>
+                          <a:latin typeface="Calibri" pitchFamily="34" charset="0"/>
+                          <a:ea typeface="Calibri" pitchFamily="34" charset="-122"/>
+                          <a:cs typeface="Calibri" pitchFamily="34" charset="-120"/>
+                        </a:rPr>
+                        <a:t>✖</a:t>
+                      </a:r>
+                      <a:endParaRPr lang="en-US" sz="850" dirty="0">
+                        <a:latin typeface="Calibri" charset="0"/>
+                        <a:ea typeface="Calibri" charset="0"/>
+                        <a:cs typeface="Calibri" charset="0"/>
+                      </a:endParaRPr>
+                    </a:p>
+                  </a:txBody>
+                  <a:tcPr marL="27432" marR="27432" marT="27432" marB="27432">
+                    <a:lnL w="6350" cap="flat" cmpd="sng" algn="ctr">
+                      <a:solidFill>
+                        <a:srgbClr val="D1D5DB"/>
+                      </a:solidFill>
+                      <a:prstDash val="solid"/>
+                      <a:round/>
+                      <a:headEnd type="none" w="med" len="med"/>
+                      <a:tailEnd type="none" w="med" len="med"/>
+                    </a:lnL>
+                    <a:lnR w="6350" cap="flat" cmpd="sng" algn="ctr">
+                      <a:solidFill>
+                        <a:srgbClr val="D1D5DB"/>
+                      </a:solidFill>
+                      <a:prstDash val="solid"/>
+                      <a:round/>
+                      <a:headEnd type="none" w="med" len="med"/>
+                      <a:tailEnd type="none" w="med" len="med"/>
+                    </a:lnR>
+                    <a:lnT w="6350" cap="flat" cmpd="sng" algn="ctr">
+                      <a:solidFill>
+                        <a:srgbClr val="D1D5DB"/>
+                      </a:solidFill>
+                      <a:prstDash val="solid"/>
+                      <a:round/>
+                      <a:headEnd type="none" w="med" len="med"/>
+                      <a:tailEnd type="none" w="med" len="med"/>
+                    </a:lnT>
+                    <a:lnB w="6350" cap="flat" cmpd="sng" algn="ctr">
+                      <a:solidFill>
+                        <a:srgbClr val="D1D5DB"/>
+                      </a:solidFill>
+                      <a:prstDash val="solid"/>
+                      <a:round/>
+                      <a:headEnd type="none" w="med" len="med"/>
+                      <a:tailEnd type="none" w="med" len="med"/>
+                    </a:lnB>
+                    <a:solidFill>
+                      <a:srgbClr val="FFFFFF"/>
+                    </a:solidFill>
+                  </a:tcPr>
+                </a:tc>
+                <a:tc>
+                  <a:txBody>
+                    <a:bodyPr/>
+                    <a:lstStyle/>
+                    <a:p>
+                      <a:pPr algn="ctr" indent="0" marL="0">
+                        <a:buNone/>
+                      </a:pPr>
+                      <a:r>
+                        <a:rPr lang="en-US" sz="850" b="1" dirty="0">
+                          <a:solidFill>
+                            <a:srgbClr val="B91C1C"/>
+                          </a:solidFill>
+                          <a:latin typeface="Calibri" pitchFamily="34" charset="0"/>
+                          <a:ea typeface="Calibri" pitchFamily="34" charset="-122"/>
+                          <a:cs typeface="Calibri" pitchFamily="34" charset="-120"/>
+                        </a:rPr>
+                        <a:t>✖</a:t>
+                      </a:r>
+                      <a:endParaRPr lang="en-US" sz="850" dirty="0">
+                        <a:latin typeface="Calibri" charset="0"/>
+                        <a:ea typeface="Calibri" charset="0"/>
+                        <a:cs typeface="Calibri" charset="0"/>
+                      </a:endParaRPr>
+                    </a:p>
+                  </a:txBody>
+                  <a:tcPr marL="27432" marR="27432" marT="27432" marB="27432">
+                    <a:lnL w="6350" cap="flat" cmpd="sng" algn="ctr">
+                      <a:solidFill>
+                        <a:srgbClr val="D1D5DB"/>
+                      </a:solidFill>
+                      <a:prstDash val="solid"/>
+                      <a:round/>
+                      <a:headEnd type="none" w="med" len="med"/>
+                      <a:tailEnd type="none" w="med" len="med"/>
+                    </a:lnL>
+                    <a:lnR w="6350" cap="flat" cmpd="sng" algn="ctr">
+                      <a:solidFill>
+                        <a:srgbClr val="D1D5DB"/>
+                      </a:solidFill>
+                      <a:prstDash val="solid"/>
+                      <a:round/>
+                      <a:headEnd type="none" w="med" len="med"/>
+                      <a:tailEnd type="none" w="med" len="med"/>
+                    </a:lnR>
+                    <a:lnT w="6350" cap="flat" cmpd="sng" algn="ctr">
+                      <a:solidFill>
+                        <a:srgbClr val="D1D5DB"/>
+                      </a:solidFill>
+                      <a:prstDash val="solid"/>
+                      <a:round/>
+                      <a:headEnd type="none" w="med" len="med"/>
+                      <a:tailEnd type="none" w="med" len="med"/>
+                    </a:lnT>
+                    <a:lnB w="6350" cap="flat" cmpd="sng" algn="ctr">
+                      <a:solidFill>
+                        <a:srgbClr val="D1D5DB"/>
+                      </a:solidFill>
+                      <a:prstDash val="solid"/>
+                      <a:round/>
+                      <a:headEnd type="none" w="med" len="med"/>
+                      <a:tailEnd type="none" w="med" len="med"/>
+                    </a:lnB>
+                    <a:solidFill>
+                      <a:srgbClr val="FFFFFF"/>
+                    </a:solidFill>
+                  </a:tcPr>
+                </a:tc>
+                <a:tc>
+                  <a:txBody>
+                    <a:bodyPr/>
+                    <a:lstStyle/>
+                    <a:p>
+                      <a:pPr algn="ctr" indent="0" marL="0">
+                        <a:buNone/>
+                      </a:pPr>
+                      <a:r>
+                        <a:rPr lang="en-US" sz="750" dirty="0">
+                          <a:solidFill>
+                            <a:srgbClr val="B45309"/>
+                          </a:solidFill>
+                          <a:latin typeface="Calibri" pitchFamily="34" charset="0"/>
+                          <a:ea typeface="Calibri" pitchFamily="34" charset="-122"/>
+                          <a:cs typeface="Calibri" pitchFamily="34" charset="-120"/>
+                        </a:rPr>
+                        <a:t>annual, global</a:t>
+                      </a:r>
+                      <a:endParaRPr lang="en-US" sz="750" dirty="0">
+                        <a:latin typeface="Calibri" charset="0"/>
+                        <a:ea typeface="Calibri" charset="0"/>
+                        <a:cs typeface="Calibri" charset="0"/>
+                      </a:endParaRPr>
+                    </a:p>
+                  </a:txBody>
+                  <a:tcPr marL="27432" marR="27432" marT="27432" marB="27432">
+                    <a:lnL w="6350" cap="flat" cmpd="sng" algn="ctr">
+                      <a:solidFill>
+                        <a:srgbClr val="D1D5DB"/>
+                      </a:solidFill>
+                      <a:prstDash val="solid"/>
+                      <a:round/>
+                      <a:headEnd type="none" w="med" len="med"/>
+                      <a:tailEnd type="none" w="med" len="med"/>
+                    </a:lnL>
+                    <a:lnR w="6350" cap="flat" cmpd="sng" algn="ctr">
+                      <a:solidFill>
+                        <a:srgbClr val="D1D5DB"/>
+                      </a:solidFill>
+                      <a:prstDash val="solid"/>
+                      <a:round/>
+                      <a:headEnd type="none" w="med" len="med"/>
+                      <a:tailEnd type="none" w="med" len="med"/>
+                    </a:lnR>
+                    <a:lnT w="6350" cap="flat" cmpd="sng" algn="ctr">
+                      <a:solidFill>
+                        <a:srgbClr val="D1D5DB"/>
+                      </a:solidFill>
+                      <a:prstDash val="solid"/>
+                      <a:round/>
+                      <a:headEnd type="none" w="med" len="med"/>
+                      <a:tailEnd type="none" w="med" len="med"/>
+                    </a:lnT>
+                    <a:lnB w="6350" cap="flat" cmpd="sng" algn="ctr">
+                      <a:solidFill>
+                        <a:srgbClr val="D1D5DB"/>
+                      </a:solidFill>
+                      <a:prstDash val="solid"/>
+                      <a:round/>
+                      <a:headEnd type="none" w="med" len="med"/>
+                      <a:tailEnd type="none" w="med" len="med"/>
+                    </a:lnB>
+                    <a:solidFill>
+                      <a:srgbClr val="FFFFFF"/>
+                    </a:solidFill>
+                  </a:tcPr>
+                </a:tc>
+                <a:tc>
+                  <a:txBody>
+                    <a:bodyPr/>
+                    <a:lstStyle/>
+                    <a:p>
+                      <a:pPr algn="ctr" indent="0" marL="0">
+                        <a:buNone/>
+                      </a:pPr>
+                      <a:r>
+                        <a:rPr lang="en-US" sz="850" b="1" dirty="0">
+                          <a:solidFill>
+                            <a:srgbClr val="15803D"/>
+                          </a:solidFill>
+                          <a:latin typeface="Calibri" pitchFamily="34" charset="0"/>
+                          <a:ea typeface="Calibri" pitchFamily="34" charset="-122"/>
+                          <a:cs typeface="Calibri" pitchFamily="34" charset="-120"/>
+                        </a:rPr>
+                        <a:t>✔</a:t>
+                      </a:r>
+                      <a:endParaRPr lang="en-US" sz="850" dirty="0">
+                        <a:latin typeface="Calibri" charset="0"/>
+                        <a:ea typeface="Calibri" charset="0"/>
+                        <a:cs typeface="Calibri" charset="0"/>
+                      </a:endParaRPr>
+                    </a:p>
+                  </a:txBody>
+                  <a:tcPr marL="27432" marR="27432" marT="27432" marB="27432">
+                    <a:lnL w="6350" cap="flat" cmpd="sng" algn="ctr">
+                      <a:solidFill>
+                        <a:srgbClr val="D1D5DB"/>
+                      </a:solidFill>
+                      <a:prstDash val="solid"/>
+                      <a:round/>
+                      <a:headEnd type="none" w="med" len="med"/>
+                      <a:tailEnd type="none" w="med" len="med"/>
+                    </a:lnL>
+                    <a:lnR w="6350" cap="flat" cmpd="sng" algn="ctr">
+                      <a:solidFill>
+                        <a:srgbClr val="D1D5DB"/>
+                      </a:solidFill>
+                      <a:prstDash val="solid"/>
+                      <a:round/>
+                      <a:headEnd type="none" w="med" len="med"/>
+                      <a:tailEnd type="none" w="med" len="med"/>
+                    </a:lnR>
+                    <a:lnT w="6350" cap="flat" cmpd="sng" algn="ctr">
+                      <a:solidFill>
+                        <a:srgbClr val="D1D5DB"/>
+                      </a:solidFill>
+                      <a:prstDash val="solid"/>
+                      <a:round/>
+                      <a:headEnd type="none" w="med" len="med"/>
+                      <a:tailEnd type="none" w="med" len="med"/>
+                    </a:lnT>
+                    <a:lnB w="6350" cap="flat" cmpd="sng" algn="ctr">
+                      <a:solidFill>
+                        <a:srgbClr val="D1D5DB"/>
+                      </a:solidFill>
+                      <a:prstDash val="solid"/>
+                      <a:round/>
+                      <a:headEnd type="none" w="med" len="med"/>
+                      <a:tailEnd type="none" w="med" len="med"/>
+                    </a:lnB>
+                    <a:solidFill>
+                      <a:srgbClr val="ECFDF5"/>
+                    </a:solidFill>
+                  </a:tcPr>
+                </a:tc>
+              </a:tr>
+              <a:tr h="246888">
+                <a:tc>
+                  <a:txBody>
+                    <a:bodyPr/>
+                    <a:lstStyle/>
+                    <a:p>
+                      <a:pPr indent="0" marL="0">
+                        <a:buNone/>
+                      </a:pPr>
+                      <a:r>
+                        <a:rPr lang="en-US" sz="850" dirty="0">
+                          <a:solidFill>
+                            <a:srgbClr val="1F2937"/>
+                          </a:solidFill>
+                          <a:latin typeface="Calibri" pitchFamily="34" charset="0"/>
+                          <a:ea typeface="Calibri" pitchFamily="34" charset="-122"/>
+                          <a:cs typeface="Calibri" pitchFamily="34" charset="-120"/>
+                        </a:rPr>
+                        <a:t>Incident alert vs source's own baseline</a:t>
+                      </a:r>
+                      <a:endParaRPr lang="en-US" sz="850" dirty="0">
+                        <a:latin typeface="Calibri" charset="0"/>
+                        <a:ea typeface="Calibri" charset="0"/>
+                        <a:cs typeface="Calibri" charset="0"/>
+                      </a:endParaRPr>
+                    </a:p>
+                  </a:txBody>
+                  <a:tcPr marL="27432" marR="27432" marT="27432" marB="27432">
+                    <a:lnL w="6350" cap="flat" cmpd="sng" algn="ctr">
+                      <a:solidFill>
+                        <a:srgbClr val="D1D5DB"/>
+                      </a:solidFill>
+                      <a:prstDash val="solid"/>
+                      <a:round/>
+                      <a:headEnd type="none" w="med" len="med"/>
+                      <a:tailEnd type="none" w="med" len="med"/>
+                    </a:lnL>
+                    <a:lnR w="6350" cap="flat" cmpd="sng" algn="ctr">
+                      <a:solidFill>
+                        <a:srgbClr val="D1D5DB"/>
+                      </a:solidFill>
+                      <a:prstDash val="solid"/>
+                      <a:round/>
+                      <a:headEnd type="none" w="med" len="med"/>
+                      <a:tailEnd type="none" w="med" len="med"/>
+                    </a:lnR>
+                    <a:lnT w="6350" cap="flat" cmpd="sng" algn="ctr">
+                      <a:solidFill>
+                        <a:srgbClr val="D1D5DB"/>
+                      </a:solidFill>
+                      <a:prstDash val="solid"/>
+                      <a:round/>
+                      <a:headEnd type="none" w="med" len="med"/>
+                      <a:tailEnd type="none" w="med" len="med"/>
+                    </a:lnT>
+                    <a:lnB w="6350" cap="flat" cmpd="sng" algn="ctr">
+                      <a:solidFill>
+                        <a:srgbClr val="D1D5DB"/>
+                      </a:solidFill>
+                      <a:prstDash val="solid"/>
+                      <a:round/>
+                      <a:headEnd type="none" w="med" len="med"/>
+                      <a:tailEnd type="none" w="med" len="med"/>
+                    </a:lnB>
+                    <a:solidFill>
+                      <a:srgbClr val="F3F4F6"/>
+                    </a:solidFill>
+                  </a:tcPr>
+                </a:tc>
+                <a:tc>
+                  <a:txBody>
+                    <a:bodyPr/>
+                    <a:lstStyle/>
+                    <a:p>
+                      <a:pPr algn="ctr" indent="0" marL="0">
+                        <a:buNone/>
+                      </a:pPr>
+                      <a:r>
+                        <a:rPr lang="en-US" sz="850" b="1" dirty="0">
+                          <a:solidFill>
+                            <a:srgbClr val="B91C1C"/>
+                          </a:solidFill>
+                          <a:latin typeface="Calibri" pitchFamily="34" charset="0"/>
+                          <a:ea typeface="Calibri" pitchFamily="34" charset="-122"/>
+                          <a:cs typeface="Calibri" pitchFamily="34" charset="-120"/>
+                        </a:rPr>
+                        <a:t>✖</a:t>
+                      </a:r>
+                      <a:endParaRPr lang="en-US" sz="850" dirty="0">
+                        <a:latin typeface="Calibri" charset="0"/>
+                        <a:ea typeface="Calibri" charset="0"/>
+                        <a:cs typeface="Calibri" charset="0"/>
+                      </a:endParaRPr>
+                    </a:p>
+                  </a:txBody>
+                  <a:tcPr marL="27432" marR="27432" marT="27432" marB="27432">
+                    <a:lnL w="6350" cap="flat" cmpd="sng" algn="ctr">
+                      <a:solidFill>
+                        <a:srgbClr val="D1D5DB"/>
+                      </a:solidFill>
+                      <a:prstDash val="solid"/>
+                      <a:round/>
+                      <a:headEnd type="none" w="med" len="med"/>
+                      <a:tailEnd type="none" w="med" len="med"/>
+                    </a:lnL>
+                    <a:lnR w="6350" cap="flat" cmpd="sng" algn="ctr">
+                      <a:solidFill>
+                        <a:srgbClr val="D1D5DB"/>
+                      </a:solidFill>
+                      <a:prstDash val="solid"/>
+                      <a:round/>
+                      <a:headEnd type="none" w="med" len="med"/>
+                      <a:tailEnd type="none" w="med" len="med"/>
+                    </a:lnR>
+                    <a:lnT w="6350" cap="flat" cmpd="sng" algn="ctr">
+                      <a:solidFill>
+                        <a:srgbClr val="D1D5DB"/>
+                      </a:solidFill>
+                      <a:prstDash val="solid"/>
+                      <a:round/>
+                      <a:headEnd type="none" w="med" len="med"/>
+                      <a:tailEnd type="none" w="med" len="med"/>
+                    </a:lnT>
+                    <a:lnB w="6350" cap="flat" cmpd="sng" algn="ctr">
+                      <a:solidFill>
+                        <a:srgbClr val="D1D5DB"/>
+                      </a:solidFill>
+                      <a:prstDash val="solid"/>
+                      <a:round/>
+                      <a:headEnd type="none" w="med" len="med"/>
+                      <a:tailEnd type="none" w="med" len="med"/>
+                    </a:lnB>
+                    <a:solidFill>
+                      <a:srgbClr val="F3F4F6"/>
+                    </a:solidFill>
+                  </a:tcPr>
+                </a:tc>
+                <a:tc>
+                  <a:txBody>
+                    <a:bodyPr/>
+                    <a:lstStyle/>
+                    <a:p>
+                      <a:pPr algn="ctr" indent="0" marL="0">
+                        <a:buNone/>
+                      </a:pPr>
+                      <a:r>
+                        <a:rPr lang="en-US" sz="850" b="1" dirty="0">
+                          <a:solidFill>
+                            <a:srgbClr val="B91C1C"/>
+                          </a:solidFill>
+                          <a:latin typeface="Calibri" pitchFamily="34" charset="0"/>
+                          <a:ea typeface="Calibri" pitchFamily="34" charset="-122"/>
+                          <a:cs typeface="Calibri" pitchFamily="34" charset="-120"/>
+                        </a:rPr>
+                        <a:t>✖</a:t>
+                      </a:r>
+                      <a:endParaRPr lang="en-US" sz="850" dirty="0">
+                        <a:latin typeface="Calibri" charset="0"/>
+                        <a:ea typeface="Calibri" charset="0"/>
+                        <a:cs typeface="Calibri" charset="0"/>
+                      </a:endParaRPr>
+                    </a:p>
+                  </a:txBody>
+                  <a:tcPr marL="27432" marR="27432" marT="27432" marB="27432">
+                    <a:lnL w="6350" cap="flat" cmpd="sng" algn="ctr">
+                      <a:solidFill>
+                        <a:srgbClr val="D1D5DB"/>
+                      </a:solidFill>
+                      <a:prstDash val="solid"/>
+                      <a:round/>
+                      <a:headEnd type="none" w="med" len="med"/>
+                      <a:tailEnd type="none" w="med" len="med"/>
+                    </a:lnL>
+                    <a:lnR w="6350" cap="flat" cmpd="sng" algn="ctr">
+                      <a:solidFill>
+                        <a:srgbClr val="D1D5DB"/>
+                      </a:solidFill>
+                      <a:prstDash val="solid"/>
+                      <a:round/>
+                      <a:headEnd type="none" w="med" len="med"/>
+                      <a:tailEnd type="none" w="med" len="med"/>
+                    </a:lnR>
+                    <a:lnT w="6350" cap="flat" cmpd="sng" algn="ctr">
+                      <a:solidFill>
+                        <a:srgbClr val="D1D5DB"/>
+                      </a:solidFill>
+                      <a:prstDash val="solid"/>
+                      <a:round/>
+                      <a:headEnd type="none" w="med" len="med"/>
+                      <a:tailEnd type="none" w="med" len="med"/>
+                    </a:lnT>
+                    <a:lnB w="6350" cap="flat" cmpd="sng" algn="ctr">
+                      <a:solidFill>
+                        <a:srgbClr val="D1D5DB"/>
+                      </a:solidFill>
+                      <a:prstDash val="solid"/>
+                      <a:round/>
+                      <a:headEnd type="none" w="med" len="med"/>
+                      <a:tailEnd type="none" w="med" len="med"/>
+                    </a:lnB>
+                    <a:solidFill>
+                      <a:srgbClr val="F3F4F6"/>
+                    </a:solidFill>
+                  </a:tcPr>
+                </a:tc>
+                <a:tc>
+                  <a:txBody>
+                    <a:bodyPr/>
+                    <a:lstStyle/>
+                    <a:p>
+                      <a:pPr algn="ctr" indent="0" marL="0">
+                        <a:buNone/>
+                      </a:pPr>
+                      <a:r>
+                        <a:rPr lang="en-US" sz="850" b="1" dirty="0">
+                          <a:solidFill>
+                            <a:srgbClr val="B91C1C"/>
+                          </a:solidFill>
+                          <a:latin typeface="Calibri" pitchFamily="34" charset="0"/>
+                          <a:ea typeface="Calibri" pitchFamily="34" charset="-122"/>
+                          <a:cs typeface="Calibri" pitchFamily="34" charset="-120"/>
+                        </a:rPr>
+                        <a:t>✖</a:t>
+                      </a:r>
+                      <a:endParaRPr lang="en-US" sz="850" dirty="0">
+                        <a:latin typeface="Calibri" charset="0"/>
+                        <a:ea typeface="Calibri" charset="0"/>
+                        <a:cs typeface="Calibri" charset="0"/>
+                      </a:endParaRPr>
+                    </a:p>
+                  </a:txBody>
+                  <a:tcPr marL="27432" marR="27432" marT="27432" marB="27432">
+                    <a:lnL w="6350" cap="flat" cmpd="sng" algn="ctr">
+                      <a:solidFill>
+                        <a:srgbClr val="D1D5DB"/>
+                      </a:solidFill>
+                      <a:prstDash val="solid"/>
+                      <a:round/>
+                      <a:headEnd type="none" w="med" len="med"/>
+                      <a:tailEnd type="none" w="med" len="med"/>
+                    </a:lnL>
+                    <a:lnR w="6350" cap="flat" cmpd="sng" algn="ctr">
+                      <a:solidFill>
+                        <a:srgbClr val="D1D5DB"/>
+                      </a:solidFill>
+                      <a:prstDash val="solid"/>
+                      <a:round/>
+                      <a:headEnd type="none" w="med" len="med"/>
+                      <a:tailEnd type="none" w="med" len="med"/>
+                    </a:lnR>
+                    <a:lnT w="6350" cap="flat" cmpd="sng" algn="ctr">
+                      <a:solidFill>
+                        <a:srgbClr val="D1D5DB"/>
+                      </a:solidFill>
+                      <a:prstDash val="solid"/>
+                      <a:round/>
+                      <a:headEnd type="none" w="med" len="med"/>
+                      <a:tailEnd type="none" w="med" len="med"/>
+                    </a:lnT>
+                    <a:lnB w="6350" cap="flat" cmpd="sng" algn="ctr">
+                      <a:solidFill>
+                        <a:srgbClr val="D1D5DB"/>
+                      </a:solidFill>
+                      <a:prstDash val="solid"/>
+                      <a:round/>
+                      <a:headEnd type="none" w="med" len="med"/>
+                      <a:tailEnd type="none" w="med" len="med"/>
+                    </a:lnB>
+                    <a:solidFill>
+                      <a:srgbClr val="F3F4F6"/>
+                    </a:solidFill>
+                  </a:tcPr>
+                </a:tc>
+                <a:tc>
+                  <a:txBody>
+                    <a:bodyPr/>
+                    <a:lstStyle/>
+                    <a:p>
+                      <a:pPr algn="ctr" indent="0" marL="0">
+                        <a:buNone/>
+                      </a:pPr>
+                      <a:r>
+                        <a:rPr lang="en-US" sz="850" b="1" dirty="0">
+                          <a:solidFill>
+                            <a:srgbClr val="B91C1C"/>
+                          </a:solidFill>
+                          <a:latin typeface="Calibri" pitchFamily="34" charset="0"/>
+                          <a:ea typeface="Calibri" pitchFamily="34" charset="-122"/>
+                          <a:cs typeface="Calibri" pitchFamily="34" charset="-120"/>
+                        </a:rPr>
+                        <a:t>✖</a:t>
+                      </a:r>
+                      <a:endParaRPr lang="en-US" sz="850" dirty="0">
+                        <a:latin typeface="Calibri" charset="0"/>
+                        <a:ea typeface="Calibri" charset="0"/>
+                        <a:cs typeface="Calibri" charset="0"/>
+                      </a:endParaRPr>
+                    </a:p>
+                  </a:txBody>
+                  <a:tcPr marL="27432" marR="27432" marT="27432" marB="27432">
+                    <a:lnL w="6350" cap="flat" cmpd="sng" algn="ctr">
+                      <a:solidFill>
+                        <a:srgbClr val="D1D5DB"/>
+                      </a:solidFill>
+                      <a:prstDash val="solid"/>
+                      <a:round/>
+                      <a:headEnd type="none" w="med" len="med"/>
+                      <a:tailEnd type="none" w="med" len="med"/>
+                    </a:lnL>
+                    <a:lnR w="6350" cap="flat" cmpd="sng" algn="ctr">
+                      <a:solidFill>
+                        <a:srgbClr val="D1D5DB"/>
+                      </a:solidFill>
+                      <a:prstDash val="solid"/>
+                      <a:round/>
+                      <a:headEnd type="none" w="med" len="med"/>
+                      <a:tailEnd type="none" w="med" len="med"/>
+                    </a:lnR>
+                    <a:lnT w="6350" cap="flat" cmpd="sng" algn="ctr">
+                      <a:solidFill>
+                        <a:srgbClr val="D1D5DB"/>
+                      </a:solidFill>
+                      <a:prstDash val="solid"/>
+                      <a:round/>
+                      <a:headEnd type="none" w="med" len="med"/>
+                      <a:tailEnd type="none" w="med" len="med"/>
+                    </a:lnT>
+                    <a:lnB w="6350" cap="flat" cmpd="sng" algn="ctr">
+                      <a:solidFill>
+                        <a:srgbClr val="D1D5DB"/>
+                      </a:solidFill>
+                      <a:prstDash val="solid"/>
+                      <a:round/>
+                      <a:headEnd type="none" w="med" len="med"/>
+                      <a:tailEnd type="none" w="med" len="med"/>
+                    </a:lnB>
+                    <a:solidFill>
+                      <a:srgbClr val="F3F4F6"/>
+                    </a:solidFill>
+                  </a:tcPr>
+                </a:tc>
+                <a:tc>
+                  <a:txBody>
+                    <a:bodyPr/>
+                    <a:lstStyle/>
+                    <a:p>
+                      <a:pPr algn="ctr" indent="0" marL="0">
+                        <a:buNone/>
+                      </a:pPr>
+                      <a:r>
+                        <a:rPr lang="en-US" sz="850" b="1" dirty="0">
+                          <a:solidFill>
+                            <a:srgbClr val="15803D"/>
+                          </a:solidFill>
+                          <a:latin typeface="Calibri" pitchFamily="34" charset="0"/>
+                          <a:ea typeface="Calibri" pitchFamily="34" charset="-122"/>
+                          <a:cs typeface="Calibri" pitchFamily="34" charset="-120"/>
+                        </a:rPr>
+                        <a:t>✔</a:t>
+                      </a:r>
+                      <a:endParaRPr lang="en-US" sz="850" dirty="0">
+                        <a:latin typeface="Calibri" charset="0"/>
+                        <a:ea typeface="Calibri" charset="0"/>
+                        <a:cs typeface="Calibri" charset="0"/>
+                      </a:endParaRPr>
+                    </a:p>
+                  </a:txBody>
+                  <a:tcPr marL="27432" marR="27432" marT="27432" marB="27432">
+                    <a:lnL w="6350" cap="flat" cmpd="sng" algn="ctr">
+                      <a:solidFill>
+                        <a:srgbClr val="D1D5DB"/>
+                      </a:solidFill>
+                      <a:prstDash val="solid"/>
+                      <a:round/>
+                      <a:headEnd type="none" w="med" len="med"/>
+                      <a:tailEnd type="none" w="med" len="med"/>
+                    </a:lnL>
+                    <a:lnR w="6350" cap="flat" cmpd="sng" algn="ctr">
+                      <a:solidFill>
+                        <a:srgbClr val="D1D5DB"/>
+                      </a:solidFill>
+                      <a:prstDash val="solid"/>
+                      <a:round/>
+                      <a:headEnd type="none" w="med" len="med"/>
+                      <a:tailEnd type="none" w="med" len="med"/>
+                    </a:lnR>
+                    <a:lnT w="6350" cap="flat" cmpd="sng" algn="ctr">
+                      <a:solidFill>
+                        <a:srgbClr val="D1D5DB"/>
+                      </a:solidFill>
+                      <a:prstDash val="solid"/>
+                      <a:round/>
+                      <a:headEnd type="none" w="med" len="med"/>
+                      <a:tailEnd type="none" w="med" len="med"/>
+                    </a:lnT>
+                    <a:lnB w="6350" cap="flat" cmpd="sng" algn="ctr">
+                      <a:solidFill>
+                        <a:srgbClr val="D1D5DB"/>
+                      </a:solidFill>
+                      <a:prstDash val="solid"/>
+                      <a:round/>
+                      <a:headEnd type="none" w="med" len="med"/>
+                      <a:tailEnd type="none" w="med" len="med"/>
+                    </a:lnB>
+                    <a:solidFill>
+                      <a:srgbClr val="ECFDF5"/>
+                    </a:solidFill>
+                  </a:tcPr>
+                </a:tc>
+              </a:tr>
+              <a:tr h="246888">
+                <a:tc>
+                  <a:txBody>
+                    <a:bodyPr/>
+                    <a:lstStyle/>
+                    <a:p>
+                      <a:pPr indent="0" marL="0">
+                        <a:buNone/>
+                      </a:pPr>
+                      <a:r>
+                        <a:rPr lang="en-US" sz="850" dirty="0">
+                          <a:solidFill>
+                            <a:srgbClr val="1F2937"/>
+                          </a:solidFill>
+                          <a:latin typeface="Calibri" pitchFamily="34" charset="0"/>
+                          <a:ea typeface="Calibri" pitchFamily="34" charset="-122"/>
+                          <a:cs typeface="Calibri" pitchFamily="34" charset="-120"/>
+                        </a:rPr>
+                        <a:t>Uses OSM infrastructure + land-cover context</a:t>
+                      </a:r>
+                      <a:endParaRPr lang="en-US" sz="850" dirty="0">
+                        <a:latin typeface="Calibri" charset="0"/>
+                        <a:ea typeface="Calibri" charset="0"/>
+                        <a:cs typeface="Calibri" charset="0"/>
+                      </a:endParaRPr>
+                    </a:p>
+                  </a:txBody>
+                  <a:tcPr marL="27432" marR="27432" marT="27432" marB="27432">
+                    <a:lnL w="6350" cap="flat" cmpd="sng" algn="ctr">
+                      <a:solidFill>
+                        <a:srgbClr val="D1D5DB"/>
+                      </a:solidFill>
+                      <a:prstDash val="solid"/>
+                      <a:round/>
+                      <a:headEnd type="none" w="med" len="med"/>
+                      <a:tailEnd type="none" w="med" len="med"/>
+                    </a:lnL>
+                    <a:lnR w="6350" cap="flat" cmpd="sng" algn="ctr">
+                      <a:solidFill>
+                        <a:srgbClr val="D1D5DB"/>
+                      </a:solidFill>
+                      <a:prstDash val="solid"/>
+                      <a:round/>
+                      <a:headEnd type="none" w="med" len="med"/>
+                      <a:tailEnd type="none" w="med" len="med"/>
+                    </a:lnR>
+                    <a:lnT w="6350" cap="flat" cmpd="sng" algn="ctr">
+                      <a:solidFill>
+                        <a:srgbClr val="D1D5DB"/>
+                      </a:solidFill>
+                      <a:prstDash val="solid"/>
+                      <a:round/>
+                      <a:headEnd type="none" w="med" len="med"/>
+                      <a:tailEnd type="none" w="med" len="med"/>
+                    </a:lnT>
+                    <a:lnB w="6350" cap="flat" cmpd="sng" algn="ctr">
+                      <a:solidFill>
+                        <a:srgbClr val="D1D5DB"/>
+                      </a:solidFill>
+                      <a:prstDash val="solid"/>
+                      <a:round/>
+                      <a:headEnd type="none" w="med" len="med"/>
+                      <a:tailEnd type="none" w="med" len="med"/>
+                    </a:lnB>
+                    <a:solidFill>
+                      <a:srgbClr val="FFFFFF"/>
+                    </a:solidFill>
+                  </a:tcPr>
+                </a:tc>
+                <a:tc>
+                  <a:txBody>
+                    <a:bodyPr/>
+                    <a:lstStyle/>
+                    <a:p>
+                      <a:pPr algn="ctr" indent="0" marL="0">
+                        <a:buNone/>
+                      </a:pPr>
+                      <a:r>
+                        <a:rPr lang="en-US" sz="850" b="1" dirty="0">
+                          <a:solidFill>
+                            <a:srgbClr val="B91C1C"/>
+                          </a:solidFill>
+                          <a:latin typeface="Calibri" pitchFamily="34" charset="0"/>
+                          <a:ea typeface="Calibri" pitchFamily="34" charset="-122"/>
+                          <a:cs typeface="Calibri" pitchFamily="34" charset="-120"/>
+                        </a:rPr>
+                        <a:t>✖</a:t>
+                      </a:r>
+                      <a:endParaRPr lang="en-US" sz="850" dirty="0">
+                        <a:latin typeface="Calibri" charset="0"/>
+                        <a:ea typeface="Calibri" charset="0"/>
+                        <a:cs typeface="Calibri" charset="0"/>
+                      </a:endParaRPr>
+                    </a:p>
+                  </a:txBody>
+                  <a:tcPr marL="27432" marR="27432" marT="27432" marB="27432">
+                    <a:lnL w="6350" cap="flat" cmpd="sng" algn="ctr">
+                      <a:solidFill>
+                        <a:srgbClr val="D1D5DB"/>
+                      </a:solidFill>
+                      <a:prstDash val="solid"/>
+                      <a:round/>
+                      <a:headEnd type="none" w="med" len="med"/>
+                      <a:tailEnd type="none" w="med" len="med"/>
+                    </a:lnL>
+                    <a:lnR w="6350" cap="flat" cmpd="sng" algn="ctr">
+                      <a:solidFill>
+                        <a:srgbClr val="D1D5DB"/>
+                      </a:solidFill>
+                      <a:prstDash val="solid"/>
+                      <a:round/>
+                      <a:headEnd type="none" w="med" len="med"/>
+                      <a:tailEnd type="none" w="med" len="med"/>
+                    </a:lnR>
+                    <a:lnT w="6350" cap="flat" cmpd="sng" algn="ctr">
+                      <a:solidFill>
+                        <a:srgbClr val="D1D5DB"/>
+                      </a:solidFill>
+                      <a:prstDash val="solid"/>
+                      <a:round/>
+                      <a:headEnd type="none" w="med" len="med"/>
+                      <a:tailEnd type="none" w="med" len="med"/>
+                    </a:lnT>
+                    <a:lnB w="6350" cap="flat" cmpd="sng" algn="ctr">
+                      <a:solidFill>
+                        <a:srgbClr val="D1D5DB"/>
+                      </a:solidFill>
+                      <a:prstDash val="solid"/>
+                      <a:round/>
+                      <a:headEnd type="none" w="med" len="med"/>
+                      <a:tailEnd type="none" w="med" len="med"/>
+                    </a:lnB>
+                    <a:solidFill>
+                      <a:srgbClr val="FFFFFF"/>
+                    </a:solidFill>
+                  </a:tcPr>
+                </a:tc>
+                <a:tc>
+                  <a:txBody>
+                    <a:bodyPr/>
+                    <a:lstStyle/>
+                    <a:p>
+                      <a:pPr algn="ctr" indent="0" marL="0">
+                        <a:buNone/>
+                      </a:pPr>
+                      <a:r>
+                        <a:rPr lang="en-US" sz="750" dirty="0">
+                          <a:solidFill>
+                            <a:srgbClr val="B45309"/>
+                          </a:solidFill>
+                          <a:latin typeface="Calibri" pitchFamily="34" charset="0"/>
+                          <a:ea typeface="Calibri" pitchFamily="34" charset="-122"/>
+                          <a:cs typeface="Calibri" pitchFamily="34" charset="-120"/>
+                        </a:rPr>
+                        <a:t>land cover</a:t>
+                      </a:r>
+                      <a:endParaRPr lang="en-US" sz="750" dirty="0">
+                        <a:latin typeface="Calibri" charset="0"/>
+                        <a:ea typeface="Calibri" charset="0"/>
+                        <a:cs typeface="Calibri" charset="0"/>
+                      </a:endParaRPr>
+                    </a:p>
+                  </a:txBody>
+                  <a:tcPr marL="27432" marR="27432" marT="27432" marB="27432">
+                    <a:lnL w="6350" cap="flat" cmpd="sng" algn="ctr">
+                      <a:solidFill>
+                        <a:srgbClr val="D1D5DB"/>
+                      </a:solidFill>
+                      <a:prstDash val="solid"/>
+                      <a:round/>
+                      <a:headEnd type="none" w="med" len="med"/>
+                      <a:tailEnd type="none" w="med" len="med"/>
+                    </a:lnL>
+                    <a:lnR w="6350" cap="flat" cmpd="sng" algn="ctr">
+                      <a:solidFill>
+                        <a:srgbClr val="D1D5DB"/>
+                      </a:solidFill>
+                      <a:prstDash val="solid"/>
+                      <a:round/>
+                      <a:headEnd type="none" w="med" len="med"/>
+                      <a:tailEnd type="none" w="med" len="med"/>
+                    </a:lnR>
+                    <a:lnT w="6350" cap="flat" cmpd="sng" algn="ctr">
+                      <a:solidFill>
+                        <a:srgbClr val="D1D5DB"/>
+                      </a:solidFill>
+                      <a:prstDash val="solid"/>
+                      <a:round/>
+                      <a:headEnd type="none" w="med" len="med"/>
+                      <a:tailEnd type="none" w="med" len="med"/>
+                    </a:lnT>
+                    <a:lnB w="6350" cap="flat" cmpd="sng" algn="ctr">
+                      <a:solidFill>
+                        <a:srgbClr val="D1D5DB"/>
+                      </a:solidFill>
+                      <a:prstDash val="solid"/>
+                      <a:round/>
+                      <a:headEnd type="none" w="med" len="med"/>
+                      <a:tailEnd type="none" w="med" len="med"/>
+                    </a:lnB>
+                    <a:solidFill>
+                      <a:srgbClr val="FFFFFF"/>
+                    </a:solidFill>
+                  </a:tcPr>
+                </a:tc>
+                <a:tc>
+                  <a:txBody>
+                    <a:bodyPr/>
+                    <a:lstStyle/>
+                    <a:p>
+                      <a:pPr algn="ctr" indent="0" marL="0">
+                        <a:buNone/>
+                      </a:pPr>
+                      <a:r>
+                        <a:rPr lang="en-US" sz="750" dirty="0">
+                          <a:solidFill>
+                            <a:srgbClr val="B45309"/>
+                          </a:solidFill>
+                          <a:latin typeface="Calibri" pitchFamily="34" charset="0"/>
+                          <a:ea typeface="Calibri" pitchFamily="34" charset="-122"/>
+                          <a:cs typeface="Calibri" pitchFamily="34" charset="-120"/>
+                        </a:rPr>
+                        <a:t>land cover</a:t>
+                      </a:r>
+                      <a:endParaRPr lang="en-US" sz="750" dirty="0">
+                        <a:latin typeface="Calibri" charset="0"/>
+                        <a:ea typeface="Calibri" charset="0"/>
+                        <a:cs typeface="Calibri" charset="0"/>
+                      </a:endParaRPr>
+                    </a:p>
+                  </a:txBody>
+                  <a:tcPr marL="27432" marR="27432" marT="27432" marB="27432">
+                    <a:lnL w="6350" cap="flat" cmpd="sng" algn="ctr">
+                      <a:solidFill>
+                        <a:srgbClr val="D1D5DB"/>
+                      </a:solidFill>
+                      <a:prstDash val="solid"/>
+                      <a:round/>
+                      <a:headEnd type="none" w="med" len="med"/>
+                      <a:tailEnd type="none" w="med" len="med"/>
+                    </a:lnL>
+                    <a:lnR w="6350" cap="flat" cmpd="sng" algn="ctr">
+                      <a:solidFill>
+                        <a:srgbClr val="D1D5DB"/>
+                      </a:solidFill>
+                      <a:prstDash val="solid"/>
+                      <a:round/>
+                      <a:headEnd type="none" w="med" len="med"/>
+                      <a:tailEnd type="none" w="med" len="med"/>
+                    </a:lnR>
+                    <a:lnT w="6350" cap="flat" cmpd="sng" algn="ctr">
+                      <a:solidFill>
+                        <a:srgbClr val="D1D5DB"/>
+                      </a:solidFill>
+                      <a:prstDash val="solid"/>
+                      <a:round/>
+                      <a:headEnd type="none" w="med" len="med"/>
+                      <a:tailEnd type="none" w="med" len="med"/>
+                    </a:lnT>
+                    <a:lnB w="6350" cap="flat" cmpd="sng" algn="ctr">
+                      <a:solidFill>
+                        <a:srgbClr val="D1D5DB"/>
+                      </a:solidFill>
+                      <a:prstDash val="solid"/>
+                      <a:round/>
+                      <a:headEnd type="none" w="med" len="med"/>
+                      <a:tailEnd type="none" w="med" len="med"/>
+                    </a:lnB>
+                    <a:solidFill>
+                      <a:srgbClr val="FFFFFF"/>
+                    </a:solidFill>
+                  </a:tcPr>
+                </a:tc>
+                <a:tc>
+                  <a:txBody>
+                    <a:bodyPr/>
+                    <a:lstStyle/>
+                    <a:p>
+                      <a:pPr algn="ctr" indent="0" marL="0">
+                        <a:buNone/>
+                      </a:pPr>
+                      <a:r>
+                        <a:rPr lang="en-US" sz="850" b="1" dirty="0">
+                          <a:solidFill>
+                            <a:srgbClr val="B91C1C"/>
+                          </a:solidFill>
+                          <a:latin typeface="Calibri" pitchFamily="34" charset="0"/>
+                          <a:ea typeface="Calibri" pitchFamily="34" charset="-122"/>
+                          <a:cs typeface="Calibri" pitchFamily="34" charset="-120"/>
+                        </a:rPr>
+                        <a:t>✖</a:t>
+                      </a:r>
+                      <a:endParaRPr lang="en-US" sz="850" dirty="0">
+                        <a:latin typeface="Calibri" charset="0"/>
+                        <a:ea typeface="Calibri" charset="0"/>
+                        <a:cs typeface="Calibri" charset="0"/>
+                      </a:endParaRPr>
+                    </a:p>
+                  </a:txBody>
+                  <a:tcPr marL="27432" marR="27432" marT="27432" marB="27432">
+                    <a:lnL w="6350" cap="flat" cmpd="sng" algn="ctr">
+                      <a:solidFill>
+                        <a:srgbClr val="D1D5DB"/>
+                      </a:solidFill>
+                      <a:prstDash val="solid"/>
+                      <a:round/>
+                      <a:headEnd type="none" w="med" len="med"/>
+                      <a:tailEnd type="none" w="med" len="med"/>
+                    </a:lnL>
+                    <a:lnR w="6350" cap="flat" cmpd="sng" algn="ctr">
+                      <a:solidFill>
+                        <a:srgbClr val="D1D5DB"/>
+                      </a:solidFill>
+                      <a:prstDash val="solid"/>
+                      <a:round/>
+                      <a:headEnd type="none" w="med" len="med"/>
+                      <a:tailEnd type="none" w="med" len="med"/>
+                    </a:lnR>
+                    <a:lnT w="6350" cap="flat" cmpd="sng" algn="ctr">
+                      <a:solidFill>
+                        <a:srgbClr val="D1D5DB"/>
+                      </a:solidFill>
+                      <a:prstDash val="solid"/>
+                      <a:round/>
+                      <a:headEnd type="none" w="med" len="med"/>
+                      <a:tailEnd type="none" w="med" len="med"/>
+                    </a:lnT>
+                    <a:lnB w="6350" cap="flat" cmpd="sng" algn="ctr">
+                      <a:solidFill>
+                        <a:srgbClr val="D1D5DB"/>
+                      </a:solidFill>
+                      <a:prstDash val="solid"/>
+                      <a:round/>
+                      <a:headEnd type="none" w="med" len="med"/>
+                      <a:tailEnd type="none" w="med" len="med"/>
+                    </a:lnB>
+                    <a:solidFill>
+                      <a:srgbClr val="FFFFFF"/>
+                    </a:solidFill>
+                  </a:tcPr>
+                </a:tc>
+                <a:tc>
+                  <a:txBody>
+                    <a:bodyPr/>
+                    <a:lstStyle/>
+                    <a:p>
+                      <a:pPr algn="ctr" indent="0" marL="0">
+                        <a:buNone/>
+                      </a:pPr>
+                      <a:r>
+                        <a:rPr lang="en-US" sz="850" b="1" dirty="0">
+                          <a:solidFill>
+                            <a:srgbClr val="15803D"/>
+                          </a:solidFill>
+                          <a:latin typeface="Calibri" pitchFamily="34" charset="0"/>
+                          <a:ea typeface="Calibri" pitchFamily="34" charset="-122"/>
+                          <a:cs typeface="Calibri" pitchFamily="34" charset="-120"/>
+                        </a:rPr>
+                        <a:t>✔</a:t>
+                      </a:r>
+                      <a:endParaRPr lang="en-US" sz="850" dirty="0">
+                        <a:latin typeface="Calibri" charset="0"/>
+                        <a:ea typeface="Calibri" charset="0"/>
+                        <a:cs typeface="Calibri" charset="0"/>
+                      </a:endParaRPr>
+                    </a:p>
+                  </a:txBody>
+                  <a:tcPr marL="27432" marR="27432" marT="27432" marB="27432">
+                    <a:lnL w="6350" cap="flat" cmpd="sng" algn="ctr">
+                      <a:solidFill>
+                        <a:srgbClr val="D1D5DB"/>
+                      </a:solidFill>
+                      <a:prstDash val="solid"/>
+                      <a:round/>
+                      <a:headEnd type="none" w="med" len="med"/>
+                      <a:tailEnd type="none" w="med" len="med"/>
+                    </a:lnL>
+                    <a:lnR w="6350" cap="flat" cmpd="sng" algn="ctr">
+                      <a:solidFill>
+                        <a:srgbClr val="D1D5DB"/>
+                      </a:solidFill>
+                      <a:prstDash val="solid"/>
+                      <a:round/>
+                      <a:headEnd type="none" w="med" len="med"/>
+                      <a:tailEnd type="none" w="med" len="med"/>
+                    </a:lnR>
+                    <a:lnT w="6350" cap="flat" cmpd="sng" algn="ctr">
+                      <a:solidFill>
+                        <a:srgbClr val="D1D5DB"/>
+                      </a:solidFill>
+                      <a:prstDash val="solid"/>
+                      <a:round/>
+                      <a:headEnd type="none" w="med" len="med"/>
+                      <a:tailEnd type="none" w="med" len="med"/>
+                    </a:lnT>
+                    <a:lnB w="6350" cap="flat" cmpd="sng" algn="ctr">
+                      <a:solidFill>
+                        <a:srgbClr val="D1D5DB"/>
+                      </a:solidFill>
+                      <a:prstDash val="solid"/>
+                      <a:round/>
+                      <a:headEnd type="none" w="med" len="med"/>
+                      <a:tailEnd type="none" w="med" len="med"/>
+                    </a:lnB>
+                    <a:solidFill>
+                      <a:srgbClr val="ECFDF5"/>
+                    </a:solidFill>
+                  </a:tcPr>
+                </a:tc>
+              </a:tr>
+              <a:tr h="246888">
+                <a:tc>
+                  <a:txBody>
+                    <a:bodyPr/>
+                    <a:lstStyle/>
+                    <a:p>
+                      <a:pPr indent="0" marL="0">
+                        <a:buNone/>
+                      </a:pPr>
+                      <a:r>
+                        <a:rPr lang="en-US" sz="850" dirty="0">
+                          <a:solidFill>
+                            <a:srgbClr val="1F2937"/>
+                          </a:solidFill>
+                          <a:latin typeface="Calibri" pitchFamily="34" charset="0"/>
+                          <a:ea typeface="Calibri" pitchFamily="34" charset="-122"/>
+                          <a:cs typeface="Calibri" pitchFamily="34" charset="-120"/>
+                        </a:rPr>
+                        <a:t>Explains every decision (reasons)</a:t>
+                      </a:r>
+                      <a:endParaRPr lang="en-US" sz="850" dirty="0">
+                        <a:latin typeface="Calibri" charset="0"/>
+                        <a:ea typeface="Calibri" charset="0"/>
+                        <a:cs typeface="Calibri" charset="0"/>
+                      </a:endParaRPr>
+                    </a:p>
+                  </a:txBody>
+                  <a:tcPr marL="27432" marR="27432" marT="27432" marB="27432">
+                    <a:lnL w="6350" cap="flat" cmpd="sng" algn="ctr">
+                      <a:solidFill>
+                        <a:srgbClr val="D1D5DB"/>
+                      </a:solidFill>
+                      <a:prstDash val="solid"/>
+                      <a:round/>
+                      <a:headEnd type="none" w="med" len="med"/>
+                      <a:tailEnd type="none" w="med" len="med"/>
+                    </a:lnL>
+                    <a:lnR w="6350" cap="flat" cmpd="sng" algn="ctr">
+                      <a:solidFill>
+                        <a:srgbClr val="D1D5DB"/>
+                      </a:solidFill>
+                      <a:prstDash val="solid"/>
+                      <a:round/>
+                      <a:headEnd type="none" w="med" len="med"/>
+                      <a:tailEnd type="none" w="med" len="med"/>
+                    </a:lnR>
+                    <a:lnT w="6350" cap="flat" cmpd="sng" algn="ctr">
+                      <a:solidFill>
+                        <a:srgbClr val="D1D5DB"/>
+                      </a:solidFill>
+                      <a:prstDash val="solid"/>
+                      <a:round/>
+                      <a:headEnd type="none" w="med" len="med"/>
+                      <a:tailEnd type="none" w="med" len="med"/>
+                    </a:lnT>
+                    <a:lnB w="6350" cap="flat" cmpd="sng" algn="ctr">
+                      <a:solidFill>
+                        <a:srgbClr val="D1D5DB"/>
+                      </a:solidFill>
+                      <a:prstDash val="solid"/>
+                      <a:round/>
+                      <a:headEnd type="none" w="med" len="med"/>
+                      <a:tailEnd type="none" w="med" len="med"/>
+                    </a:lnB>
+                    <a:solidFill>
+                      <a:srgbClr val="F3F4F6"/>
+                    </a:solidFill>
+                  </a:tcPr>
+                </a:tc>
+                <a:tc>
+                  <a:txBody>
+                    <a:bodyPr/>
+                    <a:lstStyle/>
+                    <a:p>
+                      <a:pPr algn="ctr" indent="0" marL="0">
+                        <a:buNone/>
+                      </a:pPr>
+                      <a:r>
+                        <a:rPr lang="en-US" sz="850" b="1" dirty="0">
+                          <a:solidFill>
+                            <a:srgbClr val="B91C1C"/>
+                          </a:solidFill>
+                          <a:latin typeface="Calibri" pitchFamily="34" charset="0"/>
+                          <a:ea typeface="Calibri" pitchFamily="34" charset="-122"/>
+                          <a:cs typeface="Calibri" pitchFamily="34" charset="-120"/>
+                        </a:rPr>
+                        <a:t>✖</a:t>
+                      </a:r>
+                      <a:endParaRPr lang="en-US" sz="850" dirty="0">
+                        <a:latin typeface="Calibri" charset="0"/>
+                        <a:ea typeface="Calibri" charset="0"/>
+                        <a:cs typeface="Calibri" charset="0"/>
+                      </a:endParaRPr>
+                    </a:p>
+                  </a:txBody>
+                  <a:tcPr marL="27432" marR="27432" marT="27432" marB="27432">
+                    <a:lnL w="6350" cap="flat" cmpd="sng" algn="ctr">
+                      <a:solidFill>
+                        <a:srgbClr val="D1D5DB"/>
+                      </a:solidFill>
+                      <a:prstDash val="solid"/>
+                      <a:round/>
+                      <a:headEnd type="none" w="med" len="med"/>
+                      <a:tailEnd type="none" w="med" len="med"/>
+                    </a:lnL>
+                    <a:lnR w="6350" cap="flat" cmpd="sng" algn="ctr">
+                      <a:solidFill>
+                        <a:srgbClr val="D1D5DB"/>
+                      </a:solidFill>
+                      <a:prstDash val="solid"/>
+                      <a:round/>
+                      <a:headEnd type="none" w="med" len="med"/>
+                      <a:tailEnd type="none" w="med" len="med"/>
+                    </a:lnR>
+                    <a:lnT w="6350" cap="flat" cmpd="sng" algn="ctr">
+                      <a:solidFill>
+                        <a:srgbClr val="D1D5DB"/>
+                      </a:solidFill>
+                      <a:prstDash val="solid"/>
+                      <a:round/>
+                      <a:headEnd type="none" w="med" len="med"/>
+                      <a:tailEnd type="none" w="med" len="med"/>
+                    </a:lnT>
+                    <a:lnB w="6350" cap="flat" cmpd="sng" algn="ctr">
+                      <a:solidFill>
+                        <a:srgbClr val="D1D5DB"/>
+                      </a:solidFill>
+                      <a:prstDash val="solid"/>
+                      <a:round/>
+                      <a:headEnd type="none" w="med" len="med"/>
+                      <a:tailEnd type="none" w="med" len="med"/>
+                    </a:lnB>
+                    <a:solidFill>
+                      <a:srgbClr val="F3F4F6"/>
+                    </a:solidFill>
+                  </a:tcPr>
+                </a:tc>
+                <a:tc>
+                  <a:txBody>
+                    <a:bodyPr/>
+                    <a:lstStyle/>
+                    <a:p>
+                      <a:pPr algn="ctr" indent="0" marL="0">
+                        <a:buNone/>
+                      </a:pPr>
+                      <a:r>
+                        <a:rPr lang="en-US" sz="850" b="1" dirty="0">
+                          <a:solidFill>
+                            <a:srgbClr val="B91C1C"/>
+                          </a:solidFill>
+                          <a:latin typeface="Calibri" pitchFamily="34" charset="0"/>
+                          <a:ea typeface="Calibri" pitchFamily="34" charset="-122"/>
+                          <a:cs typeface="Calibri" pitchFamily="34" charset="-120"/>
+                        </a:rPr>
+                        <a:t>✖</a:t>
+                      </a:r>
+                      <a:endParaRPr lang="en-US" sz="850" dirty="0">
+                        <a:latin typeface="Calibri" charset="0"/>
+                        <a:ea typeface="Calibri" charset="0"/>
+                        <a:cs typeface="Calibri" charset="0"/>
+                      </a:endParaRPr>
+                    </a:p>
+                  </a:txBody>
+                  <a:tcPr marL="27432" marR="27432" marT="27432" marB="27432">
+                    <a:lnL w="6350" cap="flat" cmpd="sng" algn="ctr">
+                      <a:solidFill>
+                        <a:srgbClr val="D1D5DB"/>
+                      </a:solidFill>
+                      <a:prstDash val="solid"/>
+                      <a:round/>
+                      <a:headEnd type="none" w="med" len="med"/>
+                      <a:tailEnd type="none" w="med" len="med"/>
+                    </a:lnL>
+                    <a:lnR w="6350" cap="flat" cmpd="sng" algn="ctr">
+                      <a:solidFill>
+                        <a:srgbClr val="D1D5DB"/>
+                      </a:solidFill>
+                      <a:prstDash val="solid"/>
+                      <a:round/>
+                      <a:headEnd type="none" w="med" len="med"/>
+                      <a:tailEnd type="none" w="med" len="med"/>
+                    </a:lnR>
+                    <a:lnT w="6350" cap="flat" cmpd="sng" algn="ctr">
+                      <a:solidFill>
+                        <a:srgbClr val="D1D5DB"/>
+                      </a:solidFill>
+                      <a:prstDash val="solid"/>
+                      <a:round/>
+                      <a:headEnd type="none" w="med" len="med"/>
+                      <a:tailEnd type="none" w="med" len="med"/>
+                    </a:lnT>
+                    <a:lnB w="6350" cap="flat" cmpd="sng" algn="ctr">
+                      <a:solidFill>
+                        <a:srgbClr val="D1D5DB"/>
+                      </a:solidFill>
+                      <a:prstDash val="solid"/>
+                      <a:round/>
+                      <a:headEnd type="none" w="med" len="med"/>
+                      <a:tailEnd type="none" w="med" len="med"/>
+                    </a:lnB>
+                    <a:solidFill>
+                      <a:srgbClr val="F3F4F6"/>
+                    </a:solidFill>
+                  </a:tcPr>
+                </a:tc>
+                <a:tc>
+                  <a:txBody>
+                    <a:bodyPr/>
+                    <a:lstStyle/>
+                    <a:p>
+                      <a:pPr algn="ctr" indent="0" marL="0">
+                        <a:buNone/>
+                      </a:pPr>
+                      <a:r>
+                        <a:rPr lang="en-US" sz="850" b="1" dirty="0">
+                          <a:solidFill>
+                            <a:srgbClr val="B91C1C"/>
+                          </a:solidFill>
+                          <a:latin typeface="Calibri" pitchFamily="34" charset="0"/>
+                          <a:ea typeface="Calibri" pitchFamily="34" charset="-122"/>
+                          <a:cs typeface="Calibri" pitchFamily="34" charset="-120"/>
+                        </a:rPr>
+                        <a:t>✖</a:t>
+                      </a:r>
+                      <a:endParaRPr lang="en-US" sz="850" dirty="0">
+                        <a:latin typeface="Calibri" charset="0"/>
+                        <a:ea typeface="Calibri" charset="0"/>
+                        <a:cs typeface="Calibri" charset="0"/>
+                      </a:endParaRPr>
+                    </a:p>
+                  </a:txBody>
+                  <a:tcPr marL="27432" marR="27432" marT="27432" marB="27432">
+                    <a:lnL w="6350" cap="flat" cmpd="sng" algn="ctr">
+                      <a:solidFill>
+                        <a:srgbClr val="D1D5DB"/>
+                      </a:solidFill>
+                      <a:prstDash val="solid"/>
+                      <a:round/>
+                      <a:headEnd type="none" w="med" len="med"/>
+                      <a:tailEnd type="none" w="med" len="med"/>
+                    </a:lnL>
+                    <a:lnR w="6350" cap="flat" cmpd="sng" algn="ctr">
+                      <a:solidFill>
+                        <a:srgbClr val="D1D5DB"/>
+                      </a:solidFill>
+                      <a:prstDash val="solid"/>
+                      <a:round/>
+                      <a:headEnd type="none" w="med" len="med"/>
+                      <a:tailEnd type="none" w="med" len="med"/>
+                    </a:lnR>
+                    <a:lnT w="6350" cap="flat" cmpd="sng" algn="ctr">
+                      <a:solidFill>
+                        <a:srgbClr val="D1D5DB"/>
+                      </a:solidFill>
+                      <a:prstDash val="solid"/>
+                      <a:round/>
+                      <a:headEnd type="none" w="med" len="med"/>
+                      <a:tailEnd type="none" w="med" len="med"/>
+                    </a:lnT>
+                    <a:lnB w="6350" cap="flat" cmpd="sng" algn="ctr">
+                      <a:solidFill>
+                        <a:srgbClr val="D1D5DB"/>
+                      </a:solidFill>
+                      <a:prstDash val="solid"/>
+                      <a:round/>
+                      <a:headEnd type="none" w="med" len="med"/>
+                      <a:tailEnd type="none" w="med" len="med"/>
+                    </a:lnB>
+                    <a:solidFill>
+                      <a:srgbClr val="F3F4F6"/>
+                    </a:solidFill>
+                  </a:tcPr>
+                </a:tc>
+                <a:tc>
+                  <a:txBody>
+                    <a:bodyPr/>
+                    <a:lstStyle/>
+                    <a:p>
+                      <a:pPr algn="ctr" indent="0" marL="0">
+                        <a:buNone/>
+                      </a:pPr>
+                      <a:r>
+                        <a:rPr lang="en-US" sz="850" b="1" dirty="0">
+                          <a:solidFill>
+                            <a:srgbClr val="B91C1C"/>
+                          </a:solidFill>
+                          <a:latin typeface="Calibri" pitchFamily="34" charset="0"/>
+                          <a:ea typeface="Calibri" pitchFamily="34" charset="-122"/>
+                          <a:cs typeface="Calibri" pitchFamily="34" charset="-120"/>
+                        </a:rPr>
+                        <a:t>✖</a:t>
+                      </a:r>
+                      <a:endParaRPr lang="en-US" sz="850" dirty="0">
+                        <a:latin typeface="Calibri" charset="0"/>
+                        <a:ea typeface="Calibri" charset="0"/>
+                        <a:cs typeface="Calibri" charset="0"/>
+                      </a:endParaRPr>
+                    </a:p>
+                  </a:txBody>
+                  <a:tcPr marL="27432" marR="27432" marT="27432" marB="27432">
+                    <a:lnL w="6350" cap="flat" cmpd="sng" algn="ctr">
+                      <a:solidFill>
+                        <a:srgbClr val="D1D5DB"/>
+                      </a:solidFill>
+                      <a:prstDash val="solid"/>
+                      <a:round/>
+                      <a:headEnd type="none" w="med" len="med"/>
+                      <a:tailEnd type="none" w="med" len="med"/>
+                    </a:lnL>
+                    <a:lnR w="6350" cap="flat" cmpd="sng" algn="ctr">
+                      <a:solidFill>
+                        <a:srgbClr val="D1D5DB"/>
+                      </a:solidFill>
+                      <a:prstDash val="solid"/>
+                      <a:round/>
+                      <a:headEnd type="none" w="med" len="med"/>
+                      <a:tailEnd type="none" w="med" len="med"/>
+                    </a:lnR>
+                    <a:lnT w="6350" cap="flat" cmpd="sng" algn="ctr">
+                      <a:solidFill>
+                        <a:srgbClr val="D1D5DB"/>
+                      </a:solidFill>
+                      <a:prstDash val="solid"/>
+                      <a:round/>
+                      <a:headEnd type="none" w="med" len="med"/>
+                      <a:tailEnd type="none" w="med" len="med"/>
+                    </a:lnT>
+                    <a:lnB w="6350" cap="flat" cmpd="sng" algn="ctr">
+                      <a:solidFill>
+                        <a:srgbClr val="D1D5DB"/>
+                      </a:solidFill>
+                      <a:prstDash val="solid"/>
+                      <a:round/>
+                      <a:headEnd type="none" w="med" len="med"/>
+                      <a:tailEnd type="none" w="med" len="med"/>
+                    </a:lnB>
+                    <a:solidFill>
+                      <a:srgbClr val="F3F4F6"/>
+                    </a:solidFill>
+                  </a:tcPr>
+                </a:tc>
+                <a:tc>
+                  <a:txBody>
+                    <a:bodyPr/>
+                    <a:lstStyle/>
+                    <a:p>
+                      <a:pPr algn="ctr" indent="0" marL="0">
+                        <a:buNone/>
+                      </a:pPr>
+                      <a:r>
+                        <a:rPr lang="en-US" sz="850" b="1" dirty="0">
+                          <a:solidFill>
+                            <a:srgbClr val="15803D"/>
+                          </a:solidFill>
+                          <a:latin typeface="Calibri" pitchFamily="34" charset="0"/>
+                          <a:ea typeface="Calibri" pitchFamily="34" charset="-122"/>
+                          <a:cs typeface="Calibri" pitchFamily="34" charset="-120"/>
+                        </a:rPr>
+                        <a:t>✔</a:t>
+                      </a:r>
+                      <a:endParaRPr lang="en-US" sz="850" dirty="0">
+                        <a:latin typeface="Calibri" charset="0"/>
+                        <a:ea typeface="Calibri" charset="0"/>
+                        <a:cs typeface="Calibri" charset="0"/>
+                      </a:endParaRPr>
+                    </a:p>
+                  </a:txBody>
+                  <a:tcPr marL="27432" marR="27432" marT="27432" marB="27432">
+                    <a:lnL w="6350" cap="flat" cmpd="sng" algn="ctr">
+                      <a:solidFill>
+                        <a:srgbClr val="D1D5DB"/>
+                      </a:solidFill>
+                      <a:prstDash val="solid"/>
+                      <a:round/>
+                      <a:headEnd type="none" w="med" len="med"/>
+                      <a:tailEnd type="none" w="med" len="med"/>
+                    </a:lnL>
+                    <a:lnR w="6350" cap="flat" cmpd="sng" algn="ctr">
+                      <a:solidFill>
+                        <a:srgbClr val="D1D5DB"/>
+                      </a:solidFill>
+                      <a:prstDash val="solid"/>
+                      <a:round/>
+                      <a:headEnd type="none" w="med" len="med"/>
+                      <a:tailEnd type="none" w="med" len="med"/>
+                    </a:lnR>
+                    <a:lnT w="6350" cap="flat" cmpd="sng" algn="ctr">
+                      <a:solidFill>
+                        <a:srgbClr val="D1D5DB"/>
+                      </a:solidFill>
+                      <a:prstDash val="solid"/>
+                      <a:round/>
+                      <a:headEnd type="none" w="med" len="med"/>
+                      <a:tailEnd type="none" w="med" len="med"/>
+                    </a:lnT>
+                    <a:lnB w="6350" cap="flat" cmpd="sng" algn="ctr">
+                      <a:solidFill>
+                        <a:srgbClr val="D1D5DB"/>
+                      </a:solidFill>
+                      <a:prstDash val="solid"/>
+                      <a:round/>
+                      <a:headEnd type="none" w="med" len="med"/>
+                      <a:tailEnd type="none" w="med" len="med"/>
+                    </a:lnB>
+                    <a:solidFill>
+                      <a:srgbClr val="ECFDF5"/>
+                    </a:solidFill>
+                  </a:tcPr>
+                </a:tc>
+              </a:tr>
+              <a:tr h="246888">
+                <a:tc>
+                  <a:txBody>
+                    <a:bodyPr/>
+                    <a:lstStyle/>
+                    <a:p>
+                      <a:pPr indent="0" marL="0">
+                        <a:buNone/>
+                      </a:pPr>
+                      <a:r>
+                        <a:rPr lang="en-US" sz="850" dirty="0">
+                          <a:solidFill>
+                            <a:srgbClr val="1F2937"/>
+                          </a:solidFill>
+                          <a:latin typeface="Calibri" pitchFamily="34" charset="0"/>
+                          <a:ea typeface="Calibri" pitchFamily="34" charset="-122"/>
+                          <a:cs typeface="Calibri" pitchFamily="34" charset="-120"/>
+                        </a:rPr>
+                        <a:t>Near-real-time (≤ 3 h latency)</a:t>
+                      </a:r>
+                      <a:endParaRPr lang="en-US" sz="850" dirty="0">
+                        <a:latin typeface="Calibri" charset="0"/>
+                        <a:ea typeface="Calibri" charset="0"/>
+                        <a:cs typeface="Calibri" charset="0"/>
+                      </a:endParaRPr>
+                    </a:p>
+                  </a:txBody>
+                  <a:tcPr marL="27432" marR="27432" marT="27432" marB="27432">
+                    <a:lnL w="6350" cap="flat" cmpd="sng" algn="ctr">
+                      <a:solidFill>
+                        <a:srgbClr val="D1D5DB"/>
+                      </a:solidFill>
+                      <a:prstDash val="solid"/>
+                      <a:round/>
+                      <a:headEnd type="none" w="med" len="med"/>
+                      <a:tailEnd type="none" w="med" len="med"/>
+                    </a:lnL>
+                    <a:lnR w="6350" cap="flat" cmpd="sng" algn="ctr">
+                      <a:solidFill>
+                        <a:srgbClr val="D1D5DB"/>
+                      </a:solidFill>
+                      <a:prstDash val="solid"/>
+                      <a:round/>
+                      <a:headEnd type="none" w="med" len="med"/>
+                      <a:tailEnd type="none" w="med" len="med"/>
+                    </a:lnR>
+                    <a:lnT w="6350" cap="flat" cmpd="sng" algn="ctr">
+                      <a:solidFill>
+                        <a:srgbClr val="D1D5DB"/>
+                      </a:solidFill>
+                      <a:prstDash val="solid"/>
+                      <a:round/>
+                      <a:headEnd type="none" w="med" len="med"/>
+                      <a:tailEnd type="none" w="med" len="med"/>
+                    </a:lnT>
+                    <a:lnB w="6350" cap="flat" cmpd="sng" algn="ctr">
+                      <a:solidFill>
+                        <a:srgbClr val="D1D5DB"/>
+                      </a:solidFill>
+                      <a:prstDash val="solid"/>
+                      <a:round/>
+                      <a:headEnd type="none" w="med" len="med"/>
+                      <a:tailEnd type="none" w="med" len="med"/>
+                    </a:lnB>
+                    <a:solidFill>
+                      <a:srgbClr val="FFFFFF"/>
+                    </a:solidFill>
+                  </a:tcPr>
+                </a:tc>
+                <a:tc>
+                  <a:txBody>
+                    <a:bodyPr/>
+                    <a:lstStyle/>
+                    <a:p>
+                      <a:pPr algn="ctr" indent="0" marL="0">
+                        <a:buNone/>
+                      </a:pPr>
+                      <a:r>
+                        <a:rPr lang="en-US" sz="850" b="1" dirty="0">
+                          <a:solidFill>
+                            <a:srgbClr val="15803D"/>
+                          </a:solidFill>
+                          <a:latin typeface="Calibri" pitchFamily="34" charset="0"/>
+                          <a:ea typeface="Calibri" pitchFamily="34" charset="-122"/>
+                          <a:cs typeface="Calibri" pitchFamily="34" charset="-120"/>
+                        </a:rPr>
+                        <a:t>✔</a:t>
+                      </a:r>
+                      <a:endParaRPr lang="en-US" sz="850" dirty="0">
+                        <a:latin typeface="Calibri" charset="0"/>
+                        <a:ea typeface="Calibri" charset="0"/>
+                        <a:cs typeface="Calibri" charset="0"/>
+                      </a:endParaRPr>
+                    </a:p>
+                  </a:txBody>
+                  <a:tcPr marL="27432" marR="27432" marT="27432" marB="27432">
+                    <a:lnL w="6350" cap="flat" cmpd="sng" algn="ctr">
+                      <a:solidFill>
+                        <a:srgbClr val="D1D5DB"/>
+                      </a:solidFill>
+                      <a:prstDash val="solid"/>
+                      <a:round/>
+                      <a:headEnd type="none" w="med" len="med"/>
+                      <a:tailEnd type="none" w="med" len="med"/>
+                    </a:lnL>
+                    <a:lnR w="6350" cap="flat" cmpd="sng" algn="ctr">
+                      <a:solidFill>
+                        <a:srgbClr val="D1D5DB"/>
+                      </a:solidFill>
+                      <a:prstDash val="solid"/>
+                      <a:round/>
+                      <a:headEnd type="none" w="med" len="med"/>
+                      <a:tailEnd type="none" w="med" len="med"/>
+                    </a:lnR>
+                    <a:lnT w="6350" cap="flat" cmpd="sng" algn="ctr">
+                      <a:solidFill>
+                        <a:srgbClr val="D1D5DB"/>
+                      </a:solidFill>
+                      <a:prstDash val="solid"/>
+                      <a:round/>
+                      <a:headEnd type="none" w="med" len="med"/>
+                      <a:tailEnd type="none" w="med" len="med"/>
+                    </a:lnT>
+                    <a:lnB w="6350" cap="flat" cmpd="sng" algn="ctr">
+                      <a:solidFill>
+                        <a:srgbClr val="D1D5DB"/>
+                      </a:solidFill>
+                      <a:prstDash val="solid"/>
+                      <a:round/>
+                      <a:headEnd type="none" w="med" len="med"/>
+                      <a:tailEnd type="none" w="med" len="med"/>
+                    </a:lnB>
+                    <a:solidFill>
+                      <a:srgbClr val="FFFFFF"/>
+                    </a:solidFill>
+                  </a:tcPr>
+                </a:tc>
+                <a:tc>
+                  <a:txBody>
+                    <a:bodyPr/>
+                    <a:lstStyle/>
+                    <a:p>
+                      <a:pPr algn="ctr" indent="0" marL="0">
+                        <a:buNone/>
+                      </a:pPr>
+                      <a:r>
+                        <a:rPr lang="en-US" sz="850" b="1" dirty="0">
+                          <a:solidFill>
+                            <a:srgbClr val="15803D"/>
+                          </a:solidFill>
+                          <a:latin typeface="Calibri" pitchFamily="34" charset="0"/>
+                          <a:ea typeface="Calibri" pitchFamily="34" charset="-122"/>
+                          <a:cs typeface="Calibri" pitchFamily="34" charset="-120"/>
+                        </a:rPr>
+                        <a:t>✔</a:t>
+                      </a:r>
+                      <a:endParaRPr lang="en-US" sz="850" dirty="0">
+                        <a:latin typeface="Calibri" charset="0"/>
+                        <a:ea typeface="Calibri" charset="0"/>
+                        <a:cs typeface="Calibri" charset="0"/>
+                      </a:endParaRPr>
+                    </a:p>
+                  </a:txBody>
+                  <a:tcPr marL="27432" marR="27432" marT="27432" marB="27432">
+                    <a:lnL w="6350" cap="flat" cmpd="sng" algn="ctr">
+                      <a:solidFill>
+                        <a:srgbClr val="D1D5DB"/>
+                      </a:solidFill>
+                      <a:prstDash val="solid"/>
+                      <a:round/>
+                      <a:headEnd type="none" w="med" len="med"/>
+                      <a:tailEnd type="none" w="med" len="med"/>
+                    </a:lnL>
+                    <a:lnR w="6350" cap="flat" cmpd="sng" algn="ctr">
+                      <a:solidFill>
+                        <a:srgbClr val="D1D5DB"/>
+                      </a:solidFill>
+                      <a:prstDash val="solid"/>
+                      <a:round/>
+                      <a:headEnd type="none" w="med" len="med"/>
+                      <a:tailEnd type="none" w="med" len="med"/>
+                    </a:lnR>
+                    <a:lnT w="6350" cap="flat" cmpd="sng" algn="ctr">
+                      <a:solidFill>
+                        <a:srgbClr val="D1D5DB"/>
+                      </a:solidFill>
+                      <a:prstDash val="solid"/>
+                      <a:round/>
+                      <a:headEnd type="none" w="med" len="med"/>
+                      <a:tailEnd type="none" w="med" len="med"/>
+                    </a:lnT>
+                    <a:lnB w="6350" cap="flat" cmpd="sng" algn="ctr">
+                      <a:solidFill>
+                        <a:srgbClr val="D1D5DB"/>
+                      </a:solidFill>
+                      <a:prstDash val="solid"/>
+                      <a:round/>
+                      <a:headEnd type="none" w="med" len="med"/>
+                      <a:tailEnd type="none" w="med" len="med"/>
+                    </a:lnB>
+                    <a:solidFill>
+                      <a:srgbClr val="FFFFFF"/>
+                    </a:solidFill>
+                  </a:tcPr>
+                </a:tc>
+                <a:tc>
+                  <a:txBody>
+                    <a:bodyPr/>
+                    <a:lstStyle/>
+                    <a:p>
+                      <a:pPr algn="ctr" indent="0" marL="0">
+                        <a:buNone/>
+                      </a:pPr>
+                      <a:r>
+                        <a:rPr lang="en-US" sz="750" dirty="0">
+                          <a:solidFill>
+                            <a:srgbClr val="B45309"/>
+                          </a:solidFill>
+                          <a:latin typeface="Calibri" pitchFamily="34" charset="0"/>
+                          <a:ea typeface="Calibri" pitchFamily="34" charset="-122"/>
+                          <a:cs typeface="Calibri" pitchFamily="34" charset="-120"/>
+                        </a:rPr>
+                        <a:t>daily</a:t>
+                      </a:r>
+                      <a:endParaRPr lang="en-US" sz="750" dirty="0">
+                        <a:latin typeface="Calibri" charset="0"/>
+                        <a:ea typeface="Calibri" charset="0"/>
+                        <a:cs typeface="Calibri" charset="0"/>
+                      </a:endParaRPr>
+                    </a:p>
+                  </a:txBody>
+                  <a:tcPr marL="27432" marR="27432" marT="27432" marB="27432">
+                    <a:lnL w="6350" cap="flat" cmpd="sng" algn="ctr">
+                      <a:solidFill>
+                        <a:srgbClr val="D1D5DB"/>
+                      </a:solidFill>
+                      <a:prstDash val="solid"/>
+                      <a:round/>
+                      <a:headEnd type="none" w="med" len="med"/>
+                      <a:tailEnd type="none" w="med" len="med"/>
+                    </a:lnL>
+                    <a:lnR w="6350" cap="flat" cmpd="sng" algn="ctr">
+                      <a:solidFill>
+                        <a:srgbClr val="D1D5DB"/>
+                      </a:solidFill>
+                      <a:prstDash val="solid"/>
+                      <a:round/>
+                      <a:headEnd type="none" w="med" len="med"/>
+                      <a:tailEnd type="none" w="med" len="med"/>
+                    </a:lnR>
+                    <a:lnT w="6350" cap="flat" cmpd="sng" algn="ctr">
+                      <a:solidFill>
+                        <a:srgbClr val="D1D5DB"/>
+                      </a:solidFill>
+                      <a:prstDash val="solid"/>
+                      <a:round/>
+                      <a:headEnd type="none" w="med" len="med"/>
+                      <a:tailEnd type="none" w="med" len="med"/>
+                    </a:lnT>
+                    <a:lnB w="6350" cap="flat" cmpd="sng" algn="ctr">
+                      <a:solidFill>
+                        <a:srgbClr val="D1D5DB"/>
+                      </a:solidFill>
+                      <a:prstDash val="solid"/>
+                      <a:round/>
+                      <a:headEnd type="none" w="med" len="med"/>
+                      <a:tailEnd type="none" w="med" len="med"/>
+                    </a:lnB>
+                    <a:solidFill>
+                      <a:srgbClr val="FFFFFF"/>
+                    </a:solidFill>
+                  </a:tcPr>
+                </a:tc>
+                <a:tc>
+                  <a:txBody>
+                    <a:bodyPr/>
+                    <a:lstStyle/>
+                    <a:p>
+                      <a:pPr algn="ctr" indent="0" marL="0">
+                        <a:buNone/>
+                      </a:pPr>
+                      <a:r>
+                        <a:rPr lang="en-US" sz="850" b="1" dirty="0">
+                          <a:solidFill>
+                            <a:srgbClr val="B91C1C"/>
+                          </a:solidFill>
+                          <a:latin typeface="Calibri" pitchFamily="34" charset="0"/>
+                          <a:ea typeface="Calibri" pitchFamily="34" charset="-122"/>
+                          <a:cs typeface="Calibri" pitchFamily="34" charset="-120"/>
+                        </a:rPr>
+                        <a:t>✖</a:t>
+                      </a:r>
+                      <a:endParaRPr lang="en-US" sz="850" dirty="0">
+                        <a:latin typeface="Calibri" charset="0"/>
+                        <a:ea typeface="Calibri" charset="0"/>
+                        <a:cs typeface="Calibri" charset="0"/>
+                      </a:endParaRPr>
+                    </a:p>
+                  </a:txBody>
+                  <a:tcPr marL="27432" marR="27432" marT="27432" marB="27432">
+                    <a:lnL w="6350" cap="flat" cmpd="sng" algn="ctr">
+                      <a:solidFill>
+                        <a:srgbClr val="D1D5DB"/>
+                      </a:solidFill>
+                      <a:prstDash val="solid"/>
+                      <a:round/>
+                      <a:headEnd type="none" w="med" len="med"/>
+                      <a:tailEnd type="none" w="med" len="med"/>
+                    </a:lnL>
+                    <a:lnR w="6350" cap="flat" cmpd="sng" algn="ctr">
+                      <a:solidFill>
+                        <a:srgbClr val="D1D5DB"/>
+                      </a:solidFill>
+                      <a:prstDash val="solid"/>
+                      <a:round/>
+                      <a:headEnd type="none" w="med" len="med"/>
+                      <a:tailEnd type="none" w="med" len="med"/>
+                    </a:lnR>
+                    <a:lnT w="6350" cap="flat" cmpd="sng" algn="ctr">
+                      <a:solidFill>
+                        <a:srgbClr val="D1D5DB"/>
+                      </a:solidFill>
+                      <a:prstDash val="solid"/>
+                      <a:round/>
+                      <a:headEnd type="none" w="med" len="med"/>
+                      <a:tailEnd type="none" w="med" len="med"/>
+                    </a:lnT>
+                    <a:lnB w="6350" cap="flat" cmpd="sng" algn="ctr">
+                      <a:solidFill>
+                        <a:srgbClr val="D1D5DB"/>
+                      </a:solidFill>
+                      <a:prstDash val="solid"/>
+                      <a:round/>
+                      <a:headEnd type="none" w="med" len="med"/>
+                      <a:tailEnd type="none" w="med" len="med"/>
+                    </a:lnB>
+                    <a:solidFill>
+                      <a:srgbClr val="FFFFFF"/>
+                    </a:solidFill>
+                  </a:tcPr>
+                </a:tc>
+                <a:tc>
+                  <a:txBody>
+                    <a:bodyPr/>
+                    <a:lstStyle/>
+                    <a:p>
+                      <a:pPr algn="ctr" indent="0" marL="0">
+                        <a:buNone/>
+                      </a:pPr>
+                      <a:r>
+                        <a:rPr lang="en-US" sz="850" b="1" dirty="0">
+                          <a:solidFill>
+                            <a:srgbClr val="15803D"/>
+                          </a:solidFill>
+                          <a:latin typeface="Calibri" pitchFamily="34" charset="0"/>
+                          <a:ea typeface="Calibri" pitchFamily="34" charset="-122"/>
+                          <a:cs typeface="Calibri" pitchFamily="34" charset="-120"/>
+                        </a:rPr>
+                        <a:t>✔</a:t>
+                      </a:r>
+                      <a:endParaRPr lang="en-US" sz="850" dirty="0">
+                        <a:latin typeface="Calibri" charset="0"/>
+                        <a:ea typeface="Calibri" charset="0"/>
+                        <a:cs typeface="Calibri" charset="0"/>
+                      </a:endParaRPr>
+                    </a:p>
+                  </a:txBody>
+                  <a:tcPr marL="27432" marR="27432" marT="27432" marB="27432">
+                    <a:lnL w="6350" cap="flat" cmpd="sng" algn="ctr">
+                      <a:solidFill>
+                        <a:srgbClr val="D1D5DB"/>
+                      </a:solidFill>
+                      <a:prstDash val="solid"/>
+                      <a:round/>
+                      <a:headEnd type="none" w="med" len="med"/>
+                      <a:tailEnd type="none" w="med" len="med"/>
+                    </a:lnL>
+                    <a:lnR w="6350" cap="flat" cmpd="sng" algn="ctr">
+                      <a:solidFill>
+                        <a:srgbClr val="D1D5DB"/>
+                      </a:solidFill>
+                      <a:prstDash val="solid"/>
+                      <a:round/>
+                      <a:headEnd type="none" w="med" len="med"/>
+                      <a:tailEnd type="none" w="med" len="med"/>
+                    </a:lnR>
+                    <a:lnT w="6350" cap="flat" cmpd="sng" algn="ctr">
+                      <a:solidFill>
+                        <a:srgbClr val="D1D5DB"/>
+                      </a:solidFill>
+                      <a:prstDash val="solid"/>
+                      <a:round/>
+                      <a:headEnd type="none" w="med" len="med"/>
+                      <a:tailEnd type="none" w="med" len="med"/>
+                    </a:lnT>
+                    <a:lnB w="6350" cap="flat" cmpd="sng" algn="ctr">
+                      <a:solidFill>
+                        <a:srgbClr val="D1D5DB"/>
+                      </a:solidFill>
+                      <a:prstDash val="solid"/>
+                      <a:round/>
+                      <a:headEnd type="none" w="med" len="med"/>
+                      <a:tailEnd type="none" w="med" len="med"/>
+                    </a:lnB>
+                    <a:solidFill>
+                      <a:srgbClr val="ECFDF5"/>
+                    </a:solidFill>
+                  </a:tcPr>
+                </a:tc>
+              </a:tr>
+              <a:tr h="246888">
+                <a:tc>
+                  <a:txBody>
+                    <a:bodyPr/>
+                    <a:lstStyle/>
+                    <a:p>
+                      <a:pPr indent="0" marL="0">
+                        <a:buNone/>
+                      </a:pPr>
+                      <a:r>
+                        <a:rPr lang="en-US" sz="850" dirty="0">
+                          <a:solidFill>
+                            <a:srgbClr val="1F2937"/>
+                          </a:solidFill>
+                          <a:latin typeface="Calibri" pitchFamily="34" charset="0"/>
+                          <a:ea typeface="Calibri" pitchFamily="34" charset="-122"/>
+                          <a:cs typeface="Calibri" pitchFamily="34" charset="-120"/>
+                        </a:rPr>
+                        <a:t>India-specific priors (crop-residue seasons, kiln belts)</a:t>
+                      </a:r>
+                      <a:endParaRPr lang="en-US" sz="850" dirty="0">
+                        <a:latin typeface="Calibri" charset="0"/>
+                        <a:ea typeface="Calibri" charset="0"/>
+                        <a:cs typeface="Calibri" charset="0"/>
+                      </a:endParaRPr>
+                    </a:p>
+                  </a:txBody>
+                  <a:tcPr marL="27432" marR="27432" marT="27432" marB="27432">
+                    <a:lnL w="6350" cap="flat" cmpd="sng" algn="ctr">
+                      <a:solidFill>
+                        <a:srgbClr val="D1D5DB"/>
+                      </a:solidFill>
+                      <a:prstDash val="solid"/>
+                      <a:round/>
+                      <a:headEnd type="none" w="med" len="med"/>
+                      <a:tailEnd type="none" w="med" len="med"/>
+                    </a:lnL>
+                    <a:lnR w="6350" cap="flat" cmpd="sng" algn="ctr">
+                      <a:solidFill>
+                        <a:srgbClr val="D1D5DB"/>
+                      </a:solidFill>
+                      <a:prstDash val="solid"/>
+                      <a:round/>
+                      <a:headEnd type="none" w="med" len="med"/>
+                      <a:tailEnd type="none" w="med" len="med"/>
+                    </a:lnR>
+                    <a:lnT w="6350" cap="flat" cmpd="sng" algn="ctr">
+                      <a:solidFill>
+                        <a:srgbClr val="D1D5DB"/>
+                      </a:solidFill>
+                      <a:prstDash val="solid"/>
+                      <a:round/>
+                      <a:headEnd type="none" w="med" len="med"/>
+                      <a:tailEnd type="none" w="med" len="med"/>
+                    </a:lnT>
+                    <a:lnB w="6350" cap="flat" cmpd="sng" algn="ctr">
+                      <a:solidFill>
+                        <a:srgbClr val="D1D5DB"/>
+                      </a:solidFill>
+                      <a:prstDash val="solid"/>
+                      <a:round/>
+                      <a:headEnd type="none" w="med" len="med"/>
+                      <a:tailEnd type="none" w="med" len="med"/>
+                    </a:lnB>
+                    <a:solidFill>
+                      <a:srgbClr val="F3F4F6"/>
+                    </a:solidFill>
+                  </a:tcPr>
+                </a:tc>
+                <a:tc>
+                  <a:txBody>
+                    <a:bodyPr/>
+                    <a:lstStyle/>
+                    <a:p>
+                      <a:pPr algn="ctr" indent="0" marL="0">
+                        <a:buNone/>
+                      </a:pPr>
+                      <a:r>
+                        <a:rPr lang="en-US" sz="850" b="1" dirty="0">
+                          <a:solidFill>
+                            <a:srgbClr val="B91C1C"/>
+                          </a:solidFill>
+                          <a:latin typeface="Calibri" pitchFamily="34" charset="0"/>
+                          <a:ea typeface="Calibri" pitchFamily="34" charset="-122"/>
+                          <a:cs typeface="Calibri" pitchFamily="34" charset="-120"/>
+                        </a:rPr>
+                        <a:t>✖</a:t>
+                      </a:r>
+                      <a:endParaRPr lang="en-US" sz="850" dirty="0">
+                        <a:latin typeface="Calibri" charset="0"/>
+                        <a:ea typeface="Calibri" charset="0"/>
+                        <a:cs typeface="Calibri" charset="0"/>
+                      </a:endParaRPr>
+                    </a:p>
+                  </a:txBody>
+                  <a:tcPr marL="27432" marR="27432" marT="27432" marB="27432">
+                    <a:lnL w="6350" cap="flat" cmpd="sng" algn="ctr">
+                      <a:solidFill>
+                        <a:srgbClr val="D1D5DB"/>
+                      </a:solidFill>
+                      <a:prstDash val="solid"/>
+                      <a:round/>
+                      <a:headEnd type="none" w="med" len="med"/>
+                      <a:tailEnd type="none" w="med" len="med"/>
+                    </a:lnL>
+                    <a:lnR w="6350" cap="flat" cmpd="sng" algn="ctr">
+                      <a:solidFill>
+                        <a:srgbClr val="D1D5DB"/>
+                      </a:solidFill>
+                      <a:prstDash val="solid"/>
+                      <a:round/>
+                      <a:headEnd type="none" w="med" len="med"/>
+                      <a:tailEnd type="none" w="med" len="med"/>
+                    </a:lnR>
+                    <a:lnT w="6350" cap="flat" cmpd="sng" algn="ctr">
+                      <a:solidFill>
+                        <a:srgbClr val="D1D5DB"/>
+                      </a:solidFill>
+                      <a:prstDash val="solid"/>
+                      <a:round/>
+                      <a:headEnd type="none" w="med" len="med"/>
+                      <a:tailEnd type="none" w="med" len="med"/>
+                    </a:lnT>
+                    <a:lnB w="6350" cap="flat" cmpd="sng" algn="ctr">
+                      <a:solidFill>
+                        <a:srgbClr val="D1D5DB"/>
+                      </a:solidFill>
+                      <a:prstDash val="solid"/>
+                      <a:round/>
+                      <a:headEnd type="none" w="med" len="med"/>
+                      <a:tailEnd type="none" w="med" len="med"/>
+                    </a:lnB>
+                    <a:solidFill>
+                      <a:srgbClr val="F3F4F6"/>
+                    </a:solidFill>
+                  </a:tcPr>
+                </a:tc>
+                <a:tc>
+                  <a:txBody>
+                    <a:bodyPr/>
+                    <a:lstStyle/>
+                    <a:p>
+                      <a:pPr algn="ctr" indent="0" marL="0">
+                        <a:buNone/>
+                      </a:pPr>
+                      <a:r>
+                        <a:rPr lang="en-US" sz="850" b="1" dirty="0">
+                          <a:solidFill>
+                            <a:srgbClr val="B91C1C"/>
+                          </a:solidFill>
+                          <a:latin typeface="Calibri" pitchFamily="34" charset="0"/>
+                          <a:ea typeface="Calibri" pitchFamily="34" charset="-122"/>
+                          <a:cs typeface="Calibri" pitchFamily="34" charset="-120"/>
+                        </a:rPr>
+                        <a:t>✖</a:t>
+                      </a:r>
+                      <a:endParaRPr lang="en-US" sz="850" dirty="0">
+                        <a:latin typeface="Calibri" charset="0"/>
+                        <a:ea typeface="Calibri" charset="0"/>
+                        <a:cs typeface="Calibri" charset="0"/>
+                      </a:endParaRPr>
+                    </a:p>
+                  </a:txBody>
+                  <a:tcPr marL="27432" marR="27432" marT="27432" marB="27432">
+                    <a:lnL w="6350" cap="flat" cmpd="sng" algn="ctr">
+                      <a:solidFill>
+                        <a:srgbClr val="D1D5DB"/>
+                      </a:solidFill>
+                      <a:prstDash val="solid"/>
+                      <a:round/>
+                      <a:headEnd type="none" w="med" len="med"/>
+                      <a:tailEnd type="none" w="med" len="med"/>
+                    </a:lnL>
+                    <a:lnR w="6350" cap="flat" cmpd="sng" algn="ctr">
+                      <a:solidFill>
+                        <a:srgbClr val="D1D5DB"/>
+                      </a:solidFill>
+                      <a:prstDash val="solid"/>
+                      <a:round/>
+                      <a:headEnd type="none" w="med" len="med"/>
+                      <a:tailEnd type="none" w="med" len="med"/>
+                    </a:lnR>
+                    <a:lnT w="6350" cap="flat" cmpd="sng" algn="ctr">
+                      <a:solidFill>
+                        <a:srgbClr val="D1D5DB"/>
+                      </a:solidFill>
+                      <a:prstDash val="solid"/>
+                      <a:round/>
+                      <a:headEnd type="none" w="med" len="med"/>
+                      <a:tailEnd type="none" w="med" len="med"/>
+                    </a:lnT>
+                    <a:lnB w="6350" cap="flat" cmpd="sng" algn="ctr">
+                      <a:solidFill>
+                        <a:srgbClr val="D1D5DB"/>
+                      </a:solidFill>
+                      <a:prstDash val="solid"/>
+                      <a:round/>
+                      <a:headEnd type="none" w="med" len="med"/>
+                      <a:tailEnd type="none" w="med" len="med"/>
+                    </a:lnB>
+                    <a:solidFill>
+                      <a:srgbClr val="F3F4F6"/>
+                    </a:solidFill>
+                  </a:tcPr>
+                </a:tc>
+                <a:tc>
+                  <a:txBody>
+                    <a:bodyPr/>
+                    <a:lstStyle/>
+                    <a:p>
+                      <a:pPr algn="ctr" indent="0" marL="0">
+                        <a:buNone/>
+                      </a:pPr>
+                      <a:r>
+                        <a:rPr lang="en-US" sz="850" b="1" dirty="0">
+                          <a:solidFill>
+                            <a:srgbClr val="B91C1C"/>
+                          </a:solidFill>
+                          <a:latin typeface="Calibri" pitchFamily="34" charset="0"/>
+                          <a:ea typeface="Calibri" pitchFamily="34" charset="-122"/>
+                          <a:cs typeface="Calibri" pitchFamily="34" charset="-120"/>
+                        </a:rPr>
+                        <a:t>✖</a:t>
+                      </a:r>
+                      <a:endParaRPr lang="en-US" sz="850" dirty="0">
+                        <a:latin typeface="Calibri" charset="0"/>
+                        <a:ea typeface="Calibri" charset="0"/>
+                        <a:cs typeface="Calibri" charset="0"/>
+                      </a:endParaRPr>
+                    </a:p>
+                  </a:txBody>
+                  <a:tcPr marL="27432" marR="27432" marT="27432" marB="27432">
+                    <a:lnL w="6350" cap="flat" cmpd="sng" algn="ctr">
+                      <a:solidFill>
+                        <a:srgbClr val="D1D5DB"/>
+                      </a:solidFill>
+                      <a:prstDash val="solid"/>
+                      <a:round/>
+                      <a:headEnd type="none" w="med" len="med"/>
+                      <a:tailEnd type="none" w="med" len="med"/>
+                    </a:lnL>
+                    <a:lnR w="6350" cap="flat" cmpd="sng" algn="ctr">
+                      <a:solidFill>
+                        <a:srgbClr val="D1D5DB"/>
+                      </a:solidFill>
+                      <a:prstDash val="solid"/>
+                      <a:round/>
+                      <a:headEnd type="none" w="med" len="med"/>
+                      <a:tailEnd type="none" w="med" len="med"/>
+                    </a:lnR>
+                    <a:lnT w="6350" cap="flat" cmpd="sng" algn="ctr">
+                      <a:solidFill>
+                        <a:srgbClr val="D1D5DB"/>
+                      </a:solidFill>
+                      <a:prstDash val="solid"/>
+                      <a:round/>
+                      <a:headEnd type="none" w="med" len="med"/>
+                      <a:tailEnd type="none" w="med" len="med"/>
+                    </a:lnT>
+                    <a:lnB w="6350" cap="flat" cmpd="sng" algn="ctr">
+                      <a:solidFill>
+                        <a:srgbClr val="D1D5DB"/>
+                      </a:solidFill>
+                      <a:prstDash val="solid"/>
+                      <a:round/>
+                      <a:headEnd type="none" w="med" len="med"/>
+                      <a:tailEnd type="none" w="med" len="med"/>
+                    </a:lnB>
+                    <a:solidFill>
+                      <a:srgbClr val="F3F4F6"/>
+                    </a:solidFill>
+                  </a:tcPr>
+                </a:tc>
+                <a:tc>
+                  <a:txBody>
+                    <a:bodyPr/>
+                    <a:lstStyle/>
+                    <a:p>
+                      <a:pPr algn="ctr" indent="0" marL="0">
+                        <a:buNone/>
+                      </a:pPr>
+                      <a:r>
+                        <a:rPr lang="en-US" sz="850" b="1" dirty="0">
+                          <a:solidFill>
+                            <a:srgbClr val="B91C1C"/>
+                          </a:solidFill>
+                          <a:latin typeface="Calibri" pitchFamily="34" charset="0"/>
+                          <a:ea typeface="Calibri" pitchFamily="34" charset="-122"/>
+                          <a:cs typeface="Calibri" pitchFamily="34" charset="-120"/>
+                        </a:rPr>
+                        <a:t>✖</a:t>
+                      </a:r>
+                      <a:endParaRPr lang="en-US" sz="850" dirty="0">
+                        <a:latin typeface="Calibri" charset="0"/>
+                        <a:ea typeface="Calibri" charset="0"/>
+                        <a:cs typeface="Calibri" charset="0"/>
+                      </a:endParaRPr>
+                    </a:p>
+                  </a:txBody>
+                  <a:tcPr marL="27432" marR="27432" marT="27432" marB="27432">
+                    <a:lnL w="6350" cap="flat" cmpd="sng" algn="ctr">
+                      <a:solidFill>
+                        <a:srgbClr val="D1D5DB"/>
+                      </a:solidFill>
+                      <a:prstDash val="solid"/>
+                      <a:round/>
+                      <a:headEnd type="none" w="med" len="med"/>
+                      <a:tailEnd type="none" w="med" len="med"/>
+                    </a:lnL>
+                    <a:lnR w="6350" cap="flat" cmpd="sng" algn="ctr">
+                      <a:solidFill>
+                        <a:srgbClr val="D1D5DB"/>
+                      </a:solidFill>
+                      <a:prstDash val="solid"/>
+                      <a:round/>
+                      <a:headEnd type="none" w="med" len="med"/>
+                      <a:tailEnd type="none" w="med" len="med"/>
+                    </a:lnR>
+                    <a:lnT w="6350" cap="flat" cmpd="sng" algn="ctr">
+                      <a:solidFill>
+                        <a:srgbClr val="D1D5DB"/>
+                      </a:solidFill>
+                      <a:prstDash val="solid"/>
+                      <a:round/>
+                      <a:headEnd type="none" w="med" len="med"/>
+                      <a:tailEnd type="none" w="med" len="med"/>
+                    </a:lnT>
+                    <a:lnB w="6350" cap="flat" cmpd="sng" algn="ctr">
+                      <a:solidFill>
+                        <a:srgbClr val="D1D5DB"/>
+                      </a:solidFill>
+                      <a:prstDash val="solid"/>
+                      <a:round/>
+                      <a:headEnd type="none" w="med" len="med"/>
+                      <a:tailEnd type="none" w="med" len="med"/>
+                    </a:lnB>
+                    <a:solidFill>
+                      <a:srgbClr val="F3F4F6"/>
+                    </a:solidFill>
+                  </a:tcPr>
+                </a:tc>
+                <a:tc>
+                  <a:txBody>
+                    <a:bodyPr/>
+                    <a:lstStyle/>
+                    <a:p>
+                      <a:pPr algn="ctr" indent="0" marL="0">
+                        <a:buNone/>
+                      </a:pPr>
+                      <a:r>
+                        <a:rPr lang="en-US" sz="850" b="1" dirty="0">
+                          <a:solidFill>
+                            <a:srgbClr val="15803D"/>
+                          </a:solidFill>
+                          <a:latin typeface="Calibri" pitchFamily="34" charset="0"/>
+                          <a:ea typeface="Calibri" pitchFamily="34" charset="-122"/>
+                          <a:cs typeface="Calibri" pitchFamily="34" charset="-120"/>
+                        </a:rPr>
+                        <a:t>✔</a:t>
+                      </a:r>
+                      <a:endParaRPr lang="en-US" sz="850" dirty="0">
+                        <a:latin typeface="Calibri" charset="0"/>
+                        <a:ea typeface="Calibri" charset="0"/>
+                        <a:cs typeface="Calibri" charset="0"/>
+                      </a:endParaRPr>
+                    </a:p>
+                  </a:txBody>
+                  <a:tcPr marL="27432" marR="27432" marT="27432" marB="27432">
+                    <a:lnL w="6350" cap="flat" cmpd="sng" algn="ctr">
+                      <a:solidFill>
+                        <a:srgbClr val="D1D5DB"/>
+                      </a:solidFill>
+                      <a:prstDash val="solid"/>
+                      <a:round/>
+                      <a:headEnd type="none" w="med" len="med"/>
+                      <a:tailEnd type="none" w="med" len="med"/>
+                    </a:lnL>
+                    <a:lnR w="6350" cap="flat" cmpd="sng" algn="ctr">
+                      <a:solidFill>
+                        <a:srgbClr val="D1D5DB"/>
+                      </a:solidFill>
+                      <a:prstDash val="solid"/>
+                      <a:round/>
+                      <a:headEnd type="none" w="med" len="med"/>
+                      <a:tailEnd type="none" w="med" len="med"/>
+                    </a:lnR>
+                    <a:lnT w="6350" cap="flat" cmpd="sng" algn="ctr">
+                      <a:solidFill>
+                        <a:srgbClr val="D1D5DB"/>
+                      </a:solidFill>
+                      <a:prstDash val="solid"/>
+                      <a:round/>
+                      <a:headEnd type="none" w="med" len="med"/>
+                      <a:tailEnd type="none" w="med" len="med"/>
+                    </a:lnT>
+                    <a:lnB w="6350" cap="flat" cmpd="sng" algn="ctr">
+                      <a:solidFill>
+                        <a:srgbClr val="D1D5DB"/>
+                      </a:solidFill>
+                      <a:prstDash val="solid"/>
+                      <a:round/>
+                      <a:headEnd type="none" w="med" len="med"/>
+                      <a:tailEnd type="none" w="med" len="med"/>
+                    </a:lnB>
+                    <a:solidFill>
+                      <a:srgbClr val="ECFDF5"/>
+                    </a:solidFill>
+                  </a:tcPr>
+                </a:tc>
+              </a:tr>
+              <a:tr h="246888">
+                <a:tc>
+                  <a:txBody>
+                    <a:bodyPr/>
+                    <a:lstStyle/>
+                    <a:p>
+                      <a:pPr indent="0" marL="0">
+                        <a:buNone/>
+                      </a:pPr>
+                      <a:r>
+                        <a:rPr lang="en-US" sz="850" dirty="0">
+                          <a:solidFill>
+                            <a:srgbClr val="1F2937"/>
+                          </a:solidFill>
+                          <a:latin typeface="Calibri" pitchFamily="34" charset="0"/>
+                          <a:ea typeface="Calibri" pitchFamily="34" charset="-122"/>
+                          <a:cs typeface="Calibri" pitchFamily="34" charset="-120"/>
+                        </a:rPr>
+                        <a:t>Open GeoJSON API / GIS export</a:t>
+                      </a:r>
+                      <a:endParaRPr lang="en-US" sz="850" dirty="0">
+                        <a:latin typeface="Calibri" charset="0"/>
+                        <a:ea typeface="Calibri" charset="0"/>
+                        <a:cs typeface="Calibri" charset="0"/>
+                      </a:endParaRPr>
+                    </a:p>
+                  </a:txBody>
+                  <a:tcPr marL="27432" marR="27432" marT="27432" marB="27432">
+                    <a:lnL w="6350" cap="flat" cmpd="sng" algn="ctr">
+                      <a:solidFill>
+                        <a:srgbClr val="D1D5DB"/>
+                      </a:solidFill>
+                      <a:prstDash val="solid"/>
+                      <a:round/>
+                      <a:headEnd type="none" w="med" len="med"/>
+                      <a:tailEnd type="none" w="med" len="med"/>
+                    </a:lnL>
+                    <a:lnR w="6350" cap="flat" cmpd="sng" algn="ctr">
+                      <a:solidFill>
+                        <a:srgbClr val="D1D5DB"/>
+                      </a:solidFill>
+                      <a:prstDash val="solid"/>
+                      <a:round/>
+                      <a:headEnd type="none" w="med" len="med"/>
+                      <a:tailEnd type="none" w="med" len="med"/>
+                    </a:lnR>
+                    <a:lnT w="6350" cap="flat" cmpd="sng" algn="ctr">
+                      <a:solidFill>
+                        <a:srgbClr val="D1D5DB"/>
+                      </a:solidFill>
+                      <a:prstDash val="solid"/>
+                      <a:round/>
+                      <a:headEnd type="none" w="med" len="med"/>
+                      <a:tailEnd type="none" w="med" len="med"/>
+                    </a:lnT>
+                    <a:lnB w="6350" cap="flat" cmpd="sng" algn="ctr">
+                      <a:solidFill>
+                        <a:srgbClr val="D1D5DB"/>
+                      </a:solidFill>
+                      <a:prstDash val="solid"/>
+                      <a:round/>
+                      <a:headEnd type="none" w="med" len="med"/>
+                      <a:tailEnd type="none" w="med" len="med"/>
+                    </a:lnB>
+                    <a:solidFill>
+                      <a:srgbClr val="FFFFFF"/>
+                    </a:solidFill>
+                  </a:tcPr>
+                </a:tc>
+                <a:tc>
+                  <a:txBody>
+                    <a:bodyPr/>
+                    <a:lstStyle/>
+                    <a:p>
+                      <a:pPr algn="ctr" indent="0" marL="0">
+                        <a:buNone/>
+                      </a:pPr>
+                      <a:r>
+                        <a:rPr lang="en-US" sz="850" b="1" dirty="0">
+                          <a:solidFill>
+                            <a:srgbClr val="B45309"/>
+                          </a:solidFill>
+                          <a:latin typeface="Calibri" pitchFamily="34" charset="0"/>
+                          <a:ea typeface="Calibri" pitchFamily="34" charset="-122"/>
+                          <a:cs typeface="Calibri" pitchFamily="34" charset="-120"/>
+                        </a:rPr>
+                        <a:t>◐</a:t>
+                      </a:r>
+                      <a:endParaRPr lang="en-US" sz="850" dirty="0">
+                        <a:latin typeface="Calibri" charset="0"/>
+                        <a:ea typeface="Calibri" charset="0"/>
+                        <a:cs typeface="Calibri" charset="0"/>
+                      </a:endParaRPr>
+                    </a:p>
+                  </a:txBody>
+                  <a:tcPr marL="27432" marR="27432" marT="27432" marB="27432">
+                    <a:lnL w="6350" cap="flat" cmpd="sng" algn="ctr">
+                      <a:solidFill>
+                        <a:srgbClr val="D1D5DB"/>
+                      </a:solidFill>
+                      <a:prstDash val="solid"/>
+                      <a:round/>
+                      <a:headEnd type="none" w="med" len="med"/>
+                      <a:tailEnd type="none" w="med" len="med"/>
+                    </a:lnL>
+                    <a:lnR w="6350" cap="flat" cmpd="sng" algn="ctr">
+                      <a:solidFill>
+                        <a:srgbClr val="D1D5DB"/>
+                      </a:solidFill>
+                      <a:prstDash val="solid"/>
+                      <a:round/>
+                      <a:headEnd type="none" w="med" len="med"/>
+                      <a:tailEnd type="none" w="med" len="med"/>
+                    </a:lnR>
+                    <a:lnT w="6350" cap="flat" cmpd="sng" algn="ctr">
+                      <a:solidFill>
+                        <a:srgbClr val="D1D5DB"/>
+                      </a:solidFill>
+                      <a:prstDash val="solid"/>
+                      <a:round/>
+                      <a:headEnd type="none" w="med" len="med"/>
+                      <a:tailEnd type="none" w="med" len="med"/>
+                    </a:lnT>
+                    <a:lnB w="6350" cap="flat" cmpd="sng" algn="ctr">
+                      <a:solidFill>
+                        <a:srgbClr val="D1D5DB"/>
+                      </a:solidFill>
+                      <a:prstDash val="solid"/>
+                      <a:round/>
+                      <a:headEnd type="none" w="med" len="med"/>
+                      <a:tailEnd type="none" w="med" len="med"/>
+                    </a:lnB>
+                    <a:solidFill>
+                      <a:srgbClr val="FFFFFF"/>
+                    </a:solidFill>
+                  </a:tcPr>
+                </a:tc>
+                <a:tc>
+                  <a:txBody>
+                    <a:bodyPr/>
+                    <a:lstStyle/>
+                    <a:p>
+                      <a:pPr algn="ctr" indent="0" marL="0">
+                        <a:buNone/>
+                      </a:pPr>
+                      <a:r>
+                        <a:rPr lang="en-US" sz="850" b="1" dirty="0">
+                          <a:solidFill>
+                            <a:srgbClr val="B45309"/>
+                          </a:solidFill>
+                          <a:latin typeface="Calibri" pitchFamily="34" charset="0"/>
+                          <a:ea typeface="Calibri" pitchFamily="34" charset="-122"/>
+                          <a:cs typeface="Calibri" pitchFamily="34" charset="-120"/>
+                        </a:rPr>
+                        <a:t>◐</a:t>
+                      </a:r>
+                      <a:endParaRPr lang="en-US" sz="850" dirty="0">
+                        <a:latin typeface="Calibri" charset="0"/>
+                        <a:ea typeface="Calibri" charset="0"/>
+                        <a:cs typeface="Calibri" charset="0"/>
+                      </a:endParaRPr>
+                    </a:p>
+                  </a:txBody>
+                  <a:tcPr marL="27432" marR="27432" marT="27432" marB="27432">
+                    <a:lnL w="6350" cap="flat" cmpd="sng" algn="ctr">
+                      <a:solidFill>
+                        <a:srgbClr val="D1D5DB"/>
+                      </a:solidFill>
+                      <a:prstDash val="solid"/>
+                      <a:round/>
+                      <a:headEnd type="none" w="med" len="med"/>
+                      <a:tailEnd type="none" w="med" len="med"/>
+                    </a:lnL>
+                    <a:lnR w="6350" cap="flat" cmpd="sng" algn="ctr">
+                      <a:solidFill>
+                        <a:srgbClr val="D1D5DB"/>
+                      </a:solidFill>
+                      <a:prstDash val="solid"/>
+                      <a:round/>
+                      <a:headEnd type="none" w="med" len="med"/>
+                      <a:tailEnd type="none" w="med" len="med"/>
+                    </a:lnR>
+                    <a:lnT w="6350" cap="flat" cmpd="sng" algn="ctr">
+                      <a:solidFill>
+                        <a:srgbClr val="D1D5DB"/>
+                      </a:solidFill>
+                      <a:prstDash val="solid"/>
+                      <a:round/>
+                      <a:headEnd type="none" w="med" len="med"/>
+                      <a:tailEnd type="none" w="med" len="med"/>
+                    </a:lnT>
+                    <a:lnB w="6350" cap="flat" cmpd="sng" algn="ctr">
+                      <a:solidFill>
+                        <a:srgbClr val="D1D5DB"/>
+                      </a:solidFill>
+                      <a:prstDash val="solid"/>
+                      <a:round/>
+                      <a:headEnd type="none" w="med" len="med"/>
+                      <a:tailEnd type="none" w="med" len="med"/>
+                    </a:lnB>
+                    <a:solidFill>
+                      <a:srgbClr val="FFFFFF"/>
+                    </a:solidFill>
+                  </a:tcPr>
+                </a:tc>
+                <a:tc>
+                  <a:txBody>
+                    <a:bodyPr/>
+                    <a:lstStyle/>
+                    <a:p>
+                      <a:pPr algn="ctr" indent="0" marL="0">
+                        <a:buNone/>
+                      </a:pPr>
+                      <a:r>
+                        <a:rPr lang="en-US" sz="850" b="1" dirty="0">
+                          <a:solidFill>
+                            <a:srgbClr val="B45309"/>
+                          </a:solidFill>
+                          <a:latin typeface="Calibri" pitchFamily="34" charset="0"/>
+                          <a:ea typeface="Calibri" pitchFamily="34" charset="-122"/>
+                          <a:cs typeface="Calibri" pitchFamily="34" charset="-120"/>
+                        </a:rPr>
+                        <a:t>◐</a:t>
+                      </a:r>
+                      <a:endParaRPr lang="en-US" sz="850" dirty="0">
+                        <a:latin typeface="Calibri" charset="0"/>
+                        <a:ea typeface="Calibri" charset="0"/>
+                        <a:cs typeface="Calibri" charset="0"/>
+                      </a:endParaRPr>
+                    </a:p>
+                  </a:txBody>
+                  <a:tcPr marL="27432" marR="27432" marT="27432" marB="27432">
+                    <a:lnL w="6350" cap="flat" cmpd="sng" algn="ctr">
+                      <a:solidFill>
+                        <a:srgbClr val="D1D5DB"/>
+                      </a:solidFill>
+                      <a:prstDash val="solid"/>
+                      <a:round/>
+                      <a:headEnd type="none" w="med" len="med"/>
+                      <a:tailEnd type="none" w="med" len="med"/>
+                    </a:lnL>
+                    <a:lnR w="6350" cap="flat" cmpd="sng" algn="ctr">
+                      <a:solidFill>
+                        <a:srgbClr val="D1D5DB"/>
+                      </a:solidFill>
+                      <a:prstDash val="solid"/>
+                      <a:round/>
+                      <a:headEnd type="none" w="med" len="med"/>
+                      <a:tailEnd type="none" w="med" len="med"/>
+                    </a:lnR>
+                    <a:lnT w="6350" cap="flat" cmpd="sng" algn="ctr">
+                      <a:solidFill>
+                        <a:srgbClr val="D1D5DB"/>
+                      </a:solidFill>
+                      <a:prstDash val="solid"/>
+                      <a:round/>
+                      <a:headEnd type="none" w="med" len="med"/>
+                      <a:tailEnd type="none" w="med" len="med"/>
+                    </a:lnT>
+                    <a:lnB w="6350" cap="flat" cmpd="sng" algn="ctr">
+                      <a:solidFill>
+                        <a:srgbClr val="D1D5DB"/>
+                      </a:solidFill>
+                      <a:prstDash val="solid"/>
+                      <a:round/>
+                      <a:headEnd type="none" w="med" len="med"/>
+                      <a:tailEnd type="none" w="med" len="med"/>
+                    </a:lnB>
+                    <a:solidFill>
+                      <a:srgbClr val="FFFFFF"/>
+                    </a:solidFill>
+                  </a:tcPr>
+                </a:tc>
+                <a:tc>
+                  <a:txBody>
+                    <a:bodyPr/>
+                    <a:lstStyle/>
+                    <a:p>
+                      <a:pPr algn="ctr" indent="0" marL="0">
+                        <a:buNone/>
+                      </a:pPr>
+                      <a:r>
+                        <a:rPr lang="en-US" sz="750" dirty="0">
+                          <a:solidFill>
+                            <a:srgbClr val="B45309"/>
+                          </a:solidFill>
+                          <a:latin typeface="Calibri" pitchFamily="34" charset="0"/>
+                          <a:ea typeface="Calibri" pitchFamily="34" charset="-122"/>
+                          <a:cs typeface="Calibri" pitchFamily="34" charset="-120"/>
+                        </a:rPr>
+                        <a:t>CSV</a:t>
+                      </a:r>
+                      <a:endParaRPr lang="en-US" sz="750" dirty="0">
+                        <a:latin typeface="Calibri" charset="0"/>
+                        <a:ea typeface="Calibri" charset="0"/>
+                        <a:cs typeface="Calibri" charset="0"/>
+                      </a:endParaRPr>
+                    </a:p>
+                  </a:txBody>
+                  <a:tcPr marL="27432" marR="27432" marT="27432" marB="27432">
+                    <a:lnL w="6350" cap="flat" cmpd="sng" algn="ctr">
+                      <a:solidFill>
+                        <a:srgbClr val="D1D5DB"/>
+                      </a:solidFill>
+                      <a:prstDash val="solid"/>
+                      <a:round/>
+                      <a:headEnd type="none" w="med" len="med"/>
+                      <a:tailEnd type="none" w="med" len="med"/>
+                    </a:lnL>
+                    <a:lnR w="6350" cap="flat" cmpd="sng" algn="ctr">
+                      <a:solidFill>
+                        <a:srgbClr val="D1D5DB"/>
+                      </a:solidFill>
+                      <a:prstDash val="solid"/>
+                      <a:round/>
+                      <a:headEnd type="none" w="med" len="med"/>
+                      <a:tailEnd type="none" w="med" len="med"/>
+                    </a:lnR>
+                    <a:lnT w="6350" cap="flat" cmpd="sng" algn="ctr">
+                      <a:solidFill>
+                        <a:srgbClr val="D1D5DB"/>
+                      </a:solidFill>
+                      <a:prstDash val="solid"/>
+                      <a:round/>
+                      <a:headEnd type="none" w="med" len="med"/>
+                      <a:tailEnd type="none" w="med" len="med"/>
+                    </a:lnT>
+                    <a:lnB w="6350" cap="flat" cmpd="sng" algn="ctr">
+                      <a:solidFill>
+                        <a:srgbClr val="D1D5DB"/>
+                      </a:solidFill>
+                      <a:prstDash val="solid"/>
+                      <a:round/>
+                      <a:headEnd type="none" w="med" len="med"/>
+                      <a:tailEnd type="none" w="med" len="med"/>
+                    </a:lnB>
+                    <a:solidFill>
+                      <a:srgbClr val="FFFFFF"/>
+                    </a:solidFill>
+                  </a:tcPr>
+                </a:tc>
+                <a:tc>
+                  <a:txBody>
+                    <a:bodyPr/>
+                    <a:lstStyle/>
+                    <a:p>
+                      <a:pPr algn="ctr" indent="0" marL="0">
+                        <a:buNone/>
+                      </a:pPr>
+                      <a:r>
+                        <a:rPr lang="en-US" sz="850" b="1" dirty="0">
+                          <a:solidFill>
+                            <a:srgbClr val="15803D"/>
+                          </a:solidFill>
+                          <a:latin typeface="Calibri" pitchFamily="34" charset="0"/>
+                          <a:ea typeface="Calibri" pitchFamily="34" charset="-122"/>
+                          <a:cs typeface="Calibri" pitchFamily="34" charset="-120"/>
+                        </a:rPr>
+                        <a:t>✔</a:t>
+                      </a:r>
+                      <a:endParaRPr lang="en-US" sz="850" dirty="0">
+                        <a:latin typeface="Calibri" charset="0"/>
+                        <a:ea typeface="Calibri" charset="0"/>
+                        <a:cs typeface="Calibri" charset="0"/>
+                      </a:endParaRPr>
+                    </a:p>
+                  </a:txBody>
+                  <a:tcPr marL="27432" marR="27432" marT="27432" marB="27432">
+                    <a:lnL w="6350" cap="flat" cmpd="sng" algn="ctr">
+                      <a:solidFill>
+                        <a:srgbClr val="D1D5DB"/>
+                      </a:solidFill>
+                      <a:prstDash val="solid"/>
+                      <a:round/>
+                      <a:headEnd type="none" w="med" len="med"/>
+                      <a:tailEnd type="none" w="med" len="med"/>
+                    </a:lnL>
+                    <a:lnR w="6350" cap="flat" cmpd="sng" algn="ctr">
+                      <a:solidFill>
+                        <a:srgbClr val="D1D5DB"/>
+                      </a:solidFill>
+                      <a:prstDash val="solid"/>
+                      <a:round/>
+                      <a:headEnd type="none" w="med" len="med"/>
+                      <a:tailEnd type="none" w="med" len="med"/>
+                    </a:lnR>
+                    <a:lnT w="6350" cap="flat" cmpd="sng" algn="ctr">
+                      <a:solidFill>
+                        <a:srgbClr val="D1D5DB"/>
+                      </a:solidFill>
+                      <a:prstDash val="solid"/>
+                      <a:round/>
+                      <a:headEnd type="none" w="med" len="med"/>
+                      <a:tailEnd type="none" w="med" len="med"/>
+                    </a:lnT>
+                    <a:lnB w="6350" cap="flat" cmpd="sng" algn="ctr">
+                      <a:solidFill>
+                        <a:srgbClr val="D1D5DB"/>
+                      </a:solidFill>
+                      <a:prstDash val="solid"/>
+                      <a:round/>
+                      <a:headEnd type="none" w="med" len="med"/>
+                      <a:tailEnd type="none" w="med" len="med"/>
+                    </a:lnB>
+                    <a:solidFill>
+                      <a:srgbClr val="ECFDF5"/>
+                    </a:solidFill>
+                  </a:tcPr>
+                </a:tc>
+              </a:tr>
+              <a:tr h="246888">
+                <a:tc>
+                  <a:txBody>
+                    <a:bodyPr/>
+                    <a:lstStyle/>
+                    <a:p>
+                      <a:pPr indent="0" marL="0">
+                        <a:buNone/>
+                      </a:pPr>
+                      <a:r>
+                        <a:rPr lang="en-US" sz="850" dirty="0">
+                          <a:solidFill>
+                            <a:srgbClr val="1F2937"/>
+                          </a:solidFill>
+                          <a:latin typeface="Calibri" pitchFamily="34" charset="0"/>
+                          <a:ea typeface="Calibri" pitchFamily="34" charset="-122"/>
+                          <a:cs typeface="Calibri" pitchFamily="34" charset="-120"/>
+                        </a:rPr>
+                        <a:t>Free &amp; open data / self-hostable</a:t>
+                      </a:r>
+                      <a:endParaRPr lang="en-US" sz="850" dirty="0">
+                        <a:latin typeface="Calibri" charset="0"/>
+                        <a:ea typeface="Calibri" charset="0"/>
+                        <a:cs typeface="Calibri" charset="0"/>
+                      </a:endParaRPr>
+                    </a:p>
+                  </a:txBody>
+                  <a:tcPr marL="27432" marR="27432" marT="27432" marB="27432">
+                    <a:lnL w="6350" cap="flat" cmpd="sng" algn="ctr">
+                      <a:solidFill>
+                        <a:srgbClr val="D1D5DB"/>
+                      </a:solidFill>
+                      <a:prstDash val="solid"/>
+                      <a:round/>
+                      <a:headEnd type="none" w="med" len="med"/>
+                      <a:tailEnd type="none" w="med" len="med"/>
+                    </a:lnL>
+                    <a:lnR w="6350" cap="flat" cmpd="sng" algn="ctr">
+                      <a:solidFill>
+                        <a:srgbClr val="D1D5DB"/>
+                      </a:solidFill>
+                      <a:prstDash val="solid"/>
+                      <a:round/>
+                      <a:headEnd type="none" w="med" len="med"/>
+                      <a:tailEnd type="none" w="med" len="med"/>
+                    </a:lnR>
+                    <a:lnT w="6350" cap="flat" cmpd="sng" algn="ctr">
+                      <a:solidFill>
+                        <a:srgbClr val="D1D5DB"/>
+                      </a:solidFill>
+                      <a:prstDash val="solid"/>
+                      <a:round/>
+                      <a:headEnd type="none" w="med" len="med"/>
+                      <a:tailEnd type="none" w="med" len="med"/>
+                    </a:lnT>
+                    <a:lnB w="6350" cap="flat" cmpd="sng" algn="ctr">
+                      <a:solidFill>
+                        <a:srgbClr val="D1D5DB"/>
+                      </a:solidFill>
+                      <a:prstDash val="solid"/>
+                      <a:round/>
+                      <a:headEnd type="none" w="med" len="med"/>
+                      <a:tailEnd type="none" w="med" len="med"/>
+                    </a:lnB>
+                    <a:solidFill>
+                      <a:srgbClr val="F3F4F6"/>
+                    </a:solidFill>
+                  </a:tcPr>
+                </a:tc>
+                <a:tc>
+                  <a:txBody>
+                    <a:bodyPr/>
+                    <a:lstStyle/>
+                    <a:p>
+                      <a:pPr algn="ctr" indent="0" marL="0">
+                        <a:buNone/>
+                      </a:pPr>
+                      <a:r>
+                        <a:rPr lang="en-US" sz="850" b="1" dirty="0">
+                          <a:solidFill>
+                            <a:srgbClr val="15803D"/>
+                          </a:solidFill>
+                          <a:latin typeface="Calibri" pitchFamily="34" charset="0"/>
+                          <a:ea typeface="Calibri" pitchFamily="34" charset="-122"/>
+                          <a:cs typeface="Calibri" pitchFamily="34" charset="-120"/>
+                        </a:rPr>
+                        <a:t>✔</a:t>
+                      </a:r>
+                      <a:endParaRPr lang="en-US" sz="850" dirty="0">
+                        <a:latin typeface="Calibri" charset="0"/>
+                        <a:ea typeface="Calibri" charset="0"/>
+                        <a:cs typeface="Calibri" charset="0"/>
+                      </a:endParaRPr>
+                    </a:p>
+                  </a:txBody>
+                  <a:tcPr marL="27432" marR="27432" marT="27432" marB="27432">
+                    <a:lnL w="6350" cap="flat" cmpd="sng" algn="ctr">
+                      <a:solidFill>
+                        <a:srgbClr val="D1D5DB"/>
+                      </a:solidFill>
+                      <a:prstDash val="solid"/>
+                      <a:round/>
+                      <a:headEnd type="none" w="med" len="med"/>
+                      <a:tailEnd type="none" w="med" len="med"/>
+                    </a:lnL>
+                    <a:lnR w="6350" cap="flat" cmpd="sng" algn="ctr">
+                      <a:solidFill>
+                        <a:srgbClr val="D1D5DB"/>
+                      </a:solidFill>
+                      <a:prstDash val="solid"/>
+                      <a:round/>
+                      <a:headEnd type="none" w="med" len="med"/>
+                      <a:tailEnd type="none" w="med" len="med"/>
+                    </a:lnR>
+                    <a:lnT w="6350" cap="flat" cmpd="sng" algn="ctr">
+                      <a:solidFill>
+                        <a:srgbClr val="D1D5DB"/>
+                      </a:solidFill>
+                      <a:prstDash val="solid"/>
+                      <a:round/>
+                      <a:headEnd type="none" w="med" len="med"/>
+                      <a:tailEnd type="none" w="med" len="med"/>
+                    </a:lnT>
+                    <a:lnB w="6350" cap="flat" cmpd="sng" algn="ctr">
+                      <a:solidFill>
+                        <a:srgbClr val="D1D5DB"/>
+                      </a:solidFill>
+                      <a:prstDash val="solid"/>
+                      <a:round/>
+                      <a:headEnd type="none" w="med" len="med"/>
+                      <a:tailEnd type="none" w="med" len="med"/>
+                    </a:lnB>
+                    <a:solidFill>
+                      <a:srgbClr val="F3F4F6"/>
+                    </a:solidFill>
+                  </a:tcPr>
+                </a:tc>
+                <a:tc>
+                  <a:txBody>
+                    <a:bodyPr/>
+                    <a:lstStyle/>
+                    <a:p>
+                      <a:pPr algn="ctr" indent="0" marL="0">
+                        <a:buNone/>
+                      </a:pPr>
+                      <a:r>
+                        <a:rPr lang="en-US" sz="850" b="1" dirty="0">
+                          <a:solidFill>
+                            <a:srgbClr val="15803D"/>
+                          </a:solidFill>
+                          <a:latin typeface="Calibri" pitchFamily="34" charset="0"/>
+                          <a:ea typeface="Calibri" pitchFamily="34" charset="-122"/>
+                          <a:cs typeface="Calibri" pitchFamily="34" charset="-120"/>
+                        </a:rPr>
+                        <a:t>✔</a:t>
+                      </a:r>
+                      <a:endParaRPr lang="en-US" sz="850" dirty="0">
+                        <a:latin typeface="Calibri" charset="0"/>
+                        <a:ea typeface="Calibri" charset="0"/>
+                        <a:cs typeface="Calibri" charset="0"/>
+                      </a:endParaRPr>
+                    </a:p>
+                  </a:txBody>
+                  <a:tcPr marL="27432" marR="27432" marT="27432" marB="27432">
+                    <a:lnL w="6350" cap="flat" cmpd="sng" algn="ctr">
+                      <a:solidFill>
+                        <a:srgbClr val="D1D5DB"/>
+                      </a:solidFill>
+                      <a:prstDash val="solid"/>
+                      <a:round/>
+                      <a:headEnd type="none" w="med" len="med"/>
+                      <a:tailEnd type="none" w="med" len="med"/>
+                    </a:lnL>
+                    <a:lnR w="6350" cap="flat" cmpd="sng" algn="ctr">
+                      <a:solidFill>
+                        <a:srgbClr val="D1D5DB"/>
+                      </a:solidFill>
+                      <a:prstDash val="solid"/>
+                      <a:round/>
+                      <a:headEnd type="none" w="med" len="med"/>
+                      <a:tailEnd type="none" w="med" len="med"/>
+                    </a:lnR>
+                    <a:lnT w="6350" cap="flat" cmpd="sng" algn="ctr">
+                      <a:solidFill>
+                        <a:srgbClr val="D1D5DB"/>
+                      </a:solidFill>
+                      <a:prstDash val="solid"/>
+                      <a:round/>
+                      <a:headEnd type="none" w="med" len="med"/>
+                      <a:tailEnd type="none" w="med" len="med"/>
+                    </a:lnT>
+                    <a:lnB w="6350" cap="flat" cmpd="sng" algn="ctr">
+                      <a:solidFill>
+                        <a:srgbClr val="D1D5DB"/>
+                      </a:solidFill>
+                      <a:prstDash val="solid"/>
+                      <a:round/>
+                      <a:headEnd type="none" w="med" len="med"/>
+                      <a:tailEnd type="none" w="med" len="med"/>
+                    </a:lnB>
+                    <a:solidFill>
+                      <a:srgbClr val="F3F4F6"/>
+                    </a:solidFill>
+                  </a:tcPr>
+                </a:tc>
+                <a:tc>
+                  <a:txBody>
+                    <a:bodyPr/>
+                    <a:lstStyle/>
+                    <a:p>
+                      <a:pPr algn="ctr" indent="0" marL="0">
+                        <a:buNone/>
+                      </a:pPr>
+                      <a:r>
+                        <a:rPr lang="en-US" sz="850" b="1" dirty="0">
+                          <a:solidFill>
+                            <a:srgbClr val="15803D"/>
+                          </a:solidFill>
+                          <a:latin typeface="Calibri" pitchFamily="34" charset="0"/>
+                          <a:ea typeface="Calibri" pitchFamily="34" charset="-122"/>
+                          <a:cs typeface="Calibri" pitchFamily="34" charset="-120"/>
+                        </a:rPr>
+                        <a:t>✔</a:t>
+                      </a:r>
+                      <a:endParaRPr lang="en-US" sz="850" dirty="0">
+                        <a:latin typeface="Calibri" charset="0"/>
+                        <a:ea typeface="Calibri" charset="0"/>
+                        <a:cs typeface="Calibri" charset="0"/>
+                      </a:endParaRPr>
+                    </a:p>
+                  </a:txBody>
+                  <a:tcPr marL="27432" marR="27432" marT="27432" marB="27432">
+                    <a:lnL w="6350" cap="flat" cmpd="sng" algn="ctr">
+                      <a:solidFill>
+                        <a:srgbClr val="D1D5DB"/>
+                      </a:solidFill>
+                      <a:prstDash val="solid"/>
+                      <a:round/>
+                      <a:headEnd type="none" w="med" len="med"/>
+                      <a:tailEnd type="none" w="med" len="med"/>
+                    </a:lnL>
+                    <a:lnR w="6350" cap="flat" cmpd="sng" algn="ctr">
+                      <a:solidFill>
+                        <a:srgbClr val="D1D5DB"/>
+                      </a:solidFill>
+                      <a:prstDash val="solid"/>
+                      <a:round/>
+                      <a:headEnd type="none" w="med" len="med"/>
+                      <a:tailEnd type="none" w="med" len="med"/>
+                    </a:lnR>
+                    <a:lnT w="6350" cap="flat" cmpd="sng" algn="ctr">
+                      <a:solidFill>
+                        <a:srgbClr val="D1D5DB"/>
+                      </a:solidFill>
+                      <a:prstDash val="solid"/>
+                      <a:round/>
+                      <a:headEnd type="none" w="med" len="med"/>
+                      <a:tailEnd type="none" w="med" len="med"/>
+                    </a:lnT>
+                    <a:lnB w="6350" cap="flat" cmpd="sng" algn="ctr">
+                      <a:solidFill>
+                        <a:srgbClr val="D1D5DB"/>
+                      </a:solidFill>
+                      <a:prstDash val="solid"/>
+                      <a:round/>
+                      <a:headEnd type="none" w="med" len="med"/>
+                      <a:tailEnd type="none" w="med" len="med"/>
+                    </a:lnB>
+                    <a:solidFill>
+                      <a:srgbClr val="F3F4F6"/>
+                    </a:solidFill>
+                  </a:tcPr>
+                </a:tc>
+                <a:tc>
+                  <a:txBody>
+                    <a:bodyPr/>
+                    <a:lstStyle/>
+                    <a:p>
+                      <a:pPr algn="ctr" indent="0" marL="0">
+                        <a:buNone/>
+                      </a:pPr>
+                      <a:r>
+                        <a:rPr lang="en-US" sz="850" b="1" dirty="0">
+                          <a:solidFill>
+                            <a:srgbClr val="15803D"/>
+                          </a:solidFill>
+                          <a:latin typeface="Calibri" pitchFamily="34" charset="0"/>
+                          <a:ea typeface="Calibri" pitchFamily="34" charset="-122"/>
+                          <a:cs typeface="Calibri" pitchFamily="34" charset="-120"/>
+                        </a:rPr>
+                        <a:t>✔</a:t>
+                      </a:r>
+                      <a:endParaRPr lang="en-US" sz="850" dirty="0">
+                        <a:latin typeface="Calibri" charset="0"/>
+                        <a:ea typeface="Calibri" charset="0"/>
+                        <a:cs typeface="Calibri" charset="0"/>
+                      </a:endParaRPr>
+                    </a:p>
+                  </a:txBody>
+                  <a:tcPr marL="27432" marR="27432" marT="27432" marB="27432">
+                    <a:lnL w="6350" cap="flat" cmpd="sng" algn="ctr">
+                      <a:solidFill>
+                        <a:srgbClr val="D1D5DB"/>
+                      </a:solidFill>
+                      <a:prstDash val="solid"/>
+                      <a:round/>
+                      <a:headEnd type="none" w="med" len="med"/>
+                      <a:tailEnd type="none" w="med" len="med"/>
+                    </a:lnL>
+                    <a:lnR w="6350" cap="flat" cmpd="sng" algn="ctr">
+                      <a:solidFill>
+                        <a:srgbClr val="D1D5DB"/>
+                      </a:solidFill>
+                      <a:prstDash val="solid"/>
+                      <a:round/>
+                      <a:headEnd type="none" w="med" len="med"/>
+                      <a:tailEnd type="none" w="med" len="med"/>
+                    </a:lnR>
+                    <a:lnT w="6350" cap="flat" cmpd="sng" algn="ctr">
+                      <a:solidFill>
+                        <a:srgbClr val="D1D5DB"/>
+                      </a:solidFill>
+                      <a:prstDash val="solid"/>
+                      <a:round/>
+                      <a:headEnd type="none" w="med" len="med"/>
+                      <a:tailEnd type="none" w="med" len="med"/>
+                    </a:lnT>
+                    <a:lnB w="6350" cap="flat" cmpd="sng" algn="ctr">
+                      <a:solidFill>
+                        <a:srgbClr val="D1D5DB"/>
+                      </a:solidFill>
+                      <a:prstDash val="solid"/>
+                      <a:round/>
+                      <a:headEnd type="none" w="med" len="med"/>
+                      <a:tailEnd type="none" w="med" len="med"/>
+                    </a:lnB>
+                    <a:solidFill>
+                      <a:srgbClr val="F3F4F6"/>
+                    </a:solidFill>
+                  </a:tcPr>
+                </a:tc>
+                <a:tc>
+                  <a:txBody>
+                    <a:bodyPr/>
+                    <a:lstStyle/>
+                    <a:p>
+                      <a:pPr algn="ctr" indent="0" marL="0">
+                        <a:buNone/>
+                      </a:pPr>
+                      <a:r>
+                        <a:rPr lang="en-US" sz="850" b="1" dirty="0">
+                          <a:solidFill>
+                            <a:srgbClr val="15803D"/>
+                          </a:solidFill>
+                          <a:latin typeface="Calibri" pitchFamily="34" charset="0"/>
+                          <a:ea typeface="Calibri" pitchFamily="34" charset="-122"/>
+                          <a:cs typeface="Calibri" pitchFamily="34" charset="-120"/>
+                        </a:rPr>
+                        <a:t>✔</a:t>
+                      </a:r>
+                      <a:endParaRPr lang="en-US" sz="850" dirty="0">
+                        <a:latin typeface="Calibri" charset="0"/>
+                        <a:ea typeface="Calibri" charset="0"/>
+                        <a:cs typeface="Calibri" charset="0"/>
+                      </a:endParaRPr>
+                    </a:p>
+                  </a:txBody>
+                  <a:tcPr marL="27432" marR="27432" marT="27432" marB="27432">
+                    <a:lnL w="6350" cap="flat" cmpd="sng" algn="ctr">
+                      <a:solidFill>
+                        <a:srgbClr val="D1D5DB"/>
+                      </a:solidFill>
+                      <a:prstDash val="solid"/>
+                      <a:round/>
+                      <a:headEnd type="none" w="med" len="med"/>
+                      <a:tailEnd type="none" w="med" len="med"/>
+                    </a:lnL>
+                    <a:lnR w="6350" cap="flat" cmpd="sng" algn="ctr">
+                      <a:solidFill>
+                        <a:srgbClr val="D1D5DB"/>
+                      </a:solidFill>
+                      <a:prstDash val="solid"/>
+                      <a:round/>
+                      <a:headEnd type="none" w="med" len="med"/>
+                      <a:tailEnd type="none" w="med" len="med"/>
+                    </a:lnR>
+                    <a:lnT w="6350" cap="flat" cmpd="sng" algn="ctr">
+                      <a:solidFill>
+                        <a:srgbClr val="D1D5DB"/>
+                      </a:solidFill>
+                      <a:prstDash val="solid"/>
+                      <a:round/>
+                      <a:headEnd type="none" w="med" len="med"/>
+                      <a:tailEnd type="none" w="med" len="med"/>
+                    </a:lnT>
+                    <a:lnB w="6350" cap="flat" cmpd="sng" algn="ctr">
+                      <a:solidFill>
+                        <a:srgbClr val="D1D5DB"/>
+                      </a:solidFill>
+                      <a:prstDash val="solid"/>
+                      <a:round/>
+                      <a:headEnd type="none" w="med" len="med"/>
+                      <a:tailEnd type="none" w="med" len="med"/>
+                    </a:lnB>
+                    <a:solidFill>
+                      <a:srgbClr val="ECFDF5"/>
+                    </a:solidFill>
+                  </a:tcPr>
+                </a:tc>
+              </a:tr>
+            </a:tbl>
+          </a:graphicData>
+        </a:graphic>
+      </p:graphicFrame>
+      <p:sp>
+        <p:nvSpPr>
+          <p:cNvPr id="7" name="Shape 4"/>
+          <p:cNvSpPr/>
+          <p:nvPr/>
+        </p:nvSpPr>
+        <p:spPr>
+          <a:xfrm>
+            <a:off x="274320" y="3977640"/>
+            <a:ext cx="4206240" cy="777240"/>
+          </a:xfrm>
+          <a:prstGeom prst="roundRect">
+            <a:avLst>
+              <a:gd name="adj" fmla="val 5882"/>
+            </a:avLst>
+          </a:prstGeom>
+          <a:solidFill>
+            <a:srgbClr val="F3F4F6"/>
+          </a:solidFill>
+          <a:ln w="9525">
+            <a:solidFill>
+              <a:srgbClr val="F3F4F6"/>
+            </a:solidFill>
+            <a:prstDash val="solid"/>
+          </a:ln>
+        </p:spPr>
+      </p:sp>
+      <p:sp>
+        <p:nvSpPr>
+          <p:cNvPr id="8" name="Text 5"/>
+          <p:cNvSpPr txBox="1"/>
+          <p:nvPr/>
+        </p:nvSpPr>
+        <p:spPr>
+          <a:xfrm>
+            <a:off x="384048" y="4023360"/>
+            <a:ext cx="4023360" cy="201168"/>
+          </a:xfrm>
+          <a:prstGeom prst="rect">
+            <a:avLst/>
+          </a:prstGeom>
+          <a:noFill/>
+          <a:ln/>
+        </p:spPr>
+        <p:txBody>
+          <a:bodyPr wrap="square" lIns="0" tIns="0" rIns="0" bIns="0" rtlCol="0" anchor="t"/>
+          <a:lstStyle/>
+          <a:p>
+            <a:pPr algn="l" indent="0" marL="0">
+              <a:buNone/>
+            </a:pPr>
+            <a:r>
+              <a:rPr lang="en-US" sz="950" b="1" dirty="0">
+                <a:solidFill>
+                  <a:srgbClr val="E8590C"/>
+                </a:solidFill>
+                <a:latin typeface="Calibri" pitchFamily="34" charset="0"/>
+                <a:ea typeface="Calibri" pitchFamily="34" charset="-122"/>
+                <a:cs typeface="Calibri" pitchFamily="34" charset="-120"/>
+              </a:rPr>
+              <a:t>Versus published research</a:t>
+            </a:r>
+            <a:endParaRPr lang="en-US" sz="950" dirty="0"/>
+          </a:p>
+        </p:txBody>
+      </p:sp>
+      <p:sp>
+        <p:nvSpPr>
+          <p:cNvPr id="9" name="Text 6"/>
+          <p:cNvSpPr txBox="1"/>
+          <p:nvPr/>
+        </p:nvSpPr>
+        <p:spPr>
+          <a:xfrm>
+            <a:off x="384048" y="4224528"/>
+            <a:ext cx="4023360" cy="530352"/>
+          </a:xfrm>
+          <a:prstGeom prst="rect">
+            <a:avLst/>
+          </a:prstGeom>
+          <a:noFill/>
+          <a:ln/>
+        </p:spPr>
+        <p:txBody>
+          <a:bodyPr wrap="square" lIns="0" tIns="0" rIns="0" bIns="0" rtlCol="0" anchor="t"/>
+          <a:lstStyle/>
+          <a:p>
+            <a:pPr algn="l" indent="0" marL="0">
+              <a:buNone/>
+            </a:pPr>
+            <a:r>
+              <a:rPr lang="en-US" sz="800" dirty="0">
+                <a:solidFill>
+                  <a:srgbClr val="1F2937"/>
+                </a:solidFill>
+                <a:latin typeface="Calibri" pitchFamily="34" charset="0"/>
+                <a:ea typeface="Calibri" pitchFamily="34" charset="-122"/>
+                <a:cs typeface="Calibri" pitchFamily="34" charset="-120"/>
+              </a:rPr>
+              <a:t>Elvidge et al. (VIIRS Nightfire) catalogue flares globally; Liu et al. (2018) find industrial heat sources from Nightfire time-series. Both are offline, global, single-class studies. We add OSM context, six-class discrimination, per-source baselines with operational alerts, and a live GIS — for India.</a:t>
+            </a:r>
+            <a:endParaRPr lang="en-US" sz="800" dirty="0"/>
+          </a:p>
+        </p:txBody>
+      </p:sp>
+      <p:sp>
+        <p:nvSpPr>
+          <p:cNvPr id="10" name="Shape 7"/>
+          <p:cNvSpPr/>
+          <p:nvPr/>
+        </p:nvSpPr>
+        <p:spPr>
+          <a:xfrm>
+            <a:off x="4663440" y="3977640"/>
+            <a:ext cx="4206240" cy="777240"/>
+          </a:xfrm>
+          <a:prstGeom prst="roundRect">
+            <a:avLst>
+              <a:gd name="adj" fmla="val 5882"/>
+            </a:avLst>
+          </a:prstGeom>
+          <a:solidFill>
+            <a:srgbClr val="ECFDF5"/>
+          </a:solidFill>
+          <a:ln w="9525">
+            <a:solidFill>
+              <a:srgbClr val="ECFDF5"/>
+            </a:solidFill>
+            <a:prstDash val="solid"/>
+          </a:ln>
+        </p:spPr>
+      </p:sp>
+      <p:sp>
+        <p:nvSpPr>
+          <p:cNvPr id="11" name="Text 8"/>
+          <p:cNvSpPr txBox="1"/>
+          <p:nvPr/>
+        </p:nvSpPr>
+        <p:spPr>
+          <a:xfrm>
+            <a:off x="4773168" y="4023360"/>
+            <a:ext cx="4023360" cy="201168"/>
+          </a:xfrm>
+          <a:prstGeom prst="rect">
+            <a:avLst/>
+          </a:prstGeom>
+          <a:noFill/>
+          <a:ln/>
+        </p:spPr>
+        <p:txBody>
+          <a:bodyPr wrap="square" lIns="0" tIns="0" rIns="0" bIns="0" rtlCol="0" anchor="t"/>
+          <a:lstStyle/>
+          <a:p>
+            <a:pPr algn="l" indent="0" marL="0">
+              <a:buNone/>
+            </a:pPr>
+            <a:r>
+              <a:rPr lang="en-US" sz="950" b="1" dirty="0">
+                <a:solidFill>
+                  <a:srgbClr val="15803D"/>
+                </a:solidFill>
+                <a:latin typeface="Calibri" pitchFamily="34" charset="0"/>
+                <a:ea typeface="Calibri" pitchFamily="34" charset="-122"/>
+                <a:cs typeface="Calibri" pitchFamily="34" charset="-120"/>
+              </a:rPr>
+              <a:t>Bottom line</a:t>
+            </a:r>
+            <a:endParaRPr lang="en-US" sz="950" dirty="0"/>
+          </a:p>
+        </p:txBody>
+      </p:sp>
+      <p:sp>
+        <p:nvSpPr>
+          <p:cNvPr id="12" name="Text 9"/>
+          <p:cNvSpPr txBox="1"/>
+          <p:nvPr/>
+        </p:nvSpPr>
+        <p:spPr>
+          <a:xfrm>
+            <a:off x="4773168" y="4224528"/>
+            <a:ext cx="4023360" cy="530352"/>
+          </a:xfrm>
+          <a:prstGeom prst="rect">
+            <a:avLst/>
+          </a:prstGeom>
+          <a:noFill/>
+          <a:ln/>
+        </p:spPr>
+        <p:txBody>
+          <a:bodyPr wrap="square" lIns="0" tIns="0" rIns="0" bIns="0" rtlCol="0" anchor="t"/>
+          <a:lstStyle/>
+          <a:p>
+            <a:pPr algn="l" indent="0" marL="0">
+              <a:buNone/>
+            </a:pPr>
+            <a:r>
+              <a:rPr lang="en-US" sz="800" dirty="0">
+                <a:solidFill>
+                  <a:srgbClr val="1F2937"/>
+                </a:solidFill>
+                <a:latin typeface="Calibri" pitchFamily="34" charset="0"/>
+                <a:ea typeface="Calibri" pitchFamily="34" charset="-122"/>
+                <a:cs typeface="Calibri" pitchFamily="34" charset="-120"/>
+              </a:rPr>
+              <a:t>Existing tools answer "where is it hot?". ThermalSentinel answers "what is it, is it normal, and should someone respond?" — the gap NTRO's problem statement describes.</a:t>
+            </a:r>
+            <a:endParaRPr lang="en-US" sz="800" dirty="0"/>
+          </a:p>
+        </p:txBody>
+      </p:sp>
+    </p:spTree>
+  </p:cSld>
+  <p:clrMapOvr>
+    <a:masterClrMapping/>
+  </p:clrMapOvr>
+</p:sld>
+</file>
+
+<file path=ppt/slides/slide4.xml><?xml version="1.0" encoding="utf-8"?>
+<p:sld xmlns:a="http://schemas.openxmlformats.org/drawingml/2006/main" xmlns:r="http://schemas.openxmlformats.org/officeDocument/2006/relationships" xmlns:p="http://schemas.openxmlformats.org/presentationml/2006/main">
+  <p:cSld name="Slide 4">
+    <p:bg>
+      <p:bgPr>
+        <a:solidFill>
+          <a:srgbClr val="FFFFFF"/>
+        </a:solidFill>
+      </p:bgPr>
+    </p:bg>
+    <p:spTree>
+      <p:nvGrpSpPr>
+        <p:cNvPr id="1" name=""/>
+        <p:cNvGrpSpPr/>
+        <p:nvPr/>
+      </p:nvGrpSpPr>
+      <p:grpSpPr>
+        <a:xfrm>
+          <a:off x="0" y="0"/>
+          <a:ext cx="0" cy="0"/>
+          <a:chOff x="0" y="0"/>
+          <a:chExt cx="0" cy="0"/>
+        </a:xfrm>
+      </p:grpSpPr>
+      <p:sp>
+        <p:nvSpPr>
+          <p:cNvPr id="2" name="Text 0"/>
+          <p:cNvSpPr txBox="1"/>
+          <p:nvPr/>
+        </p:nvSpPr>
+        <p:spPr>
+          <a:xfrm>
+            <a:off x="274320" y="137160"/>
+            <a:ext cx="1463040" cy="502920"/>
+          </a:xfrm>
+          <a:prstGeom prst="rect">
+            <a:avLst/>
+          </a:prstGeom>
+          <a:noFill/>
+          <a:ln/>
+        </p:spPr>
+        <p:txBody>
+          <a:bodyPr wrap="square" lIns="0" tIns="0" rIns="0" bIns="0" rtlCol="0" anchor="t"/>
+          <a:lstStyle/>
+          <a:p>
+            <a:pPr indent="0" marL="0">
+              <a:buNone/>
+            </a:pPr>
+            <a:r>
+              <a:rPr lang="en-US" sz="900" dirty="0">
+                <a:solidFill>
+                  <a:srgbClr val="6B7280"/>
+                </a:solidFill>
+                <a:latin typeface="Calibri" pitchFamily="34" charset="0"/>
+                <a:ea typeface="Calibri" pitchFamily="34" charset="-122"/>
+                <a:cs typeface="Calibri" pitchFamily="34" charset="-120"/>
+              </a:rPr>
+              <a:t>Team
+</a:t>
+            </a:r>
+            <a:pPr indent="0" marL="0">
+              <a:buNone/>
+            </a:pPr>
+            <a:r>
+              <a:rPr lang="en-US" sz="1000" b="1" dirty="0">
+                <a:solidFill>
+                  <a:srgbClr val="1F2937"/>
+                </a:solidFill>
+                <a:latin typeface="Calibri" pitchFamily="34" charset="0"/>
+                <a:ea typeface="Calibri" pitchFamily="34" charset="-122"/>
+                <a:cs typeface="Calibri" pitchFamily="34" charset="-120"/>
+              </a:rPr>
+              <a:t>FireOrbit</a:t>
+            </a:r>
+            <a:endParaRPr lang="en-US" sz="900" dirty="0"/>
+          </a:p>
+        </p:txBody>
+      </p:sp>
+      <p:sp>
+        <p:nvSpPr>
+          <p:cNvPr id="3" name="Text 1"/>
+          <p:cNvSpPr txBox="1"/>
+          <p:nvPr/>
+        </p:nvSpPr>
+        <p:spPr>
+          <a:xfrm>
+            <a:off x="1737360" y="137160"/>
+            <a:ext cx="5669280" cy="457200"/>
+          </a:xfrm>
+          <a:prstGeom prst="rect">
+            <a:avLst/>
+          </a:prstGeom>
+          <a:noFill/>
+          <a:ln/>
+        </p:spPr>
+        <p:txBody>
+          <a:bodyPr wrap="square" lIns="0" tIns="0" rIns="0" bIns="0" rtlCol="0" anchor="ctr"/>
+          <a:lstStyle/>
+          <a:p>
+            <a:pPr algn="ctr" indent="0" marL="0">
+              <a:buNone/>
+            </a:pPr>
+            <a:r>
+              <a:rPr lang="en-US" sz="2200" b="1" dirty="0">
+                <a:solidFill>
+                  <a:srgbClr val="1F2937"/>
+                </a:solidFill>
+                <a:latin typeface="Calibri" pitchFamily="34" charset="0"/>
+                <a:ea typeface="Calibri" pitchFamily="34" charset="-122"/>
+                <a:cs typeface="Calibri" pitchFamily="34" charset="-120"/>
+              </a:rPr>
+              <a:t>TECHNICAL APPROACH</a:t>
+            </a:r>
+            <a:endParaRPr lang="en-US" sz="2200" dirty="0"/>
+          </a:p>
+        </p:txBody>
+      </p:sp>
+      <p:sp>
+        <p:nvSpPr>
+          <p:cNvPr id="4" name="Text 2"/>
+          <p:cNvSpPr txBox="1"/>
+          <p:nvPr/>
+        </p:nvSpPr>
+        <p:spPr>
+          <a:xfrm>
+            <a:off x="274320" y="4846320"/>
+            <a:ext cx="3657600" cy="201168"/>
+          </a:xfrm>
+          <a:prstGeom prst="rect">
+            <a:avLst/>
+          </a:prstGeom>
+          <a:noFill/>
+          <a:ln/>
+        </p:spPr>
+        <p:txBody>
+          <a:bodyPr wrap="square" lIns="0" tIns="0" rIns="0" bIns="0" rtlCol="0" anchor="ctr"/>
+          <a:lstStyle/>
+          <a:p>
+            <a:pPr indent="0" marL="0">
+              <a:buNone/>
+            </a:pPr>
+            <a:r>
+              <a:rPr lang="en-US" sz="800" dirty="0">
+                <a:solidFill>
+                  <a:srgbClr val="6B7280"/>
+                </a:solidFill>
+                <a:latin typeface="Calibri" pitchFamily="34" charset="0"/>
+                <a:ea typeface="Calibri" pitchFamily="34" charset="-122"/>
+                <a:cs typeface="Calibri" pitchFamily="34" charset="-120"/>
+              </a:rPr>
+              <a:t>@SIH Idea submission- Template</a:t>
+            </a:r>
+            <a:endParaRPr lang="en-US" sz="800" dirty="0"/>
+          </a:p>
+        </p:txBody>
+      </p:sp>
+      <p:sp>
+        <p:nvSpPr>
+          <p:cNvPr id="5" name="Text 3"/>
+          <p:cNvSpPr txBox="1"/>
+          <p:nvPr/>
+        </p:nvSpPr>
+        <p:spPr>
+          <a:xfrm>
+            <a:off x="8412480" y="4846320"/>
+            <a:ext cx="457200" cy="201168"/>
+          </a:xfrm>
+          <a:prstGeom prst="rect">
+            <a:avLst/>
+          </a:prstGeom>
+          <a:noFill/>
+          <a:ln/>
+        </p:spPr>
+        <p:txBody>
+          <a:bodyPr wrap="square" lIns="0" tIns="0" rIns="0" bIns="0" rtlCol="0" anchor="ctr"/>
+          <a:lstStyle/>
+          <a:p>
+            <a:pPr algn="r" indent="0" marL="0">
+              <a:buNone/>
+            </a:pPr>
+            <a:r>
+              <a:rPr lang="en-US" sz="900" dirty="0">
+                <a:solidFill>
+                  <a:srgbClr val="6B7280"/>
+                </a:solidFill>
+                <a:latin typeface="Calibri" pitchFamily="34" charset="0"/>
+                <a:ea typeface="Calibri" pitchFamily="34" charset="-122"/>
+                <a:cs typeface="Calibri" pitchFamily="34" charset="-120"/>
+              </a:rPr>
+              <a:t>4</a:t>
             </a:r>
             <a:endParaRPr lang="en-US" sz="900" dirty="0"/>
           </a:p>
@@ -7368,9 +13234,9 @@
 </p:sld>
 </file>
 
-<file path=ppt/slides/slide4.xml><?xml version="1.0" encoding="utf-8"?>
+<file path=ppt/slides/slide5.xml><?xml version="1.0" encoding="utf-8"?>
 <p:sld xmlns:a="http://schemas.openxmlformats.org/drawingml/2006/main" xmlns:r="http://schemas.openxmlformats.org/officeDocument/2006/relationships" xmlns:p="http://schemas.openxmlformats.org/presentationml/2006/main">
-  <p:cSld name="Slide 4">
+  <p:cSld name="Slide 5">
     <p:bg>
       <p:bgPr>
         <a:solidFill>
@@ -7440,7 +13306,7 @@
                 <a:ea typeface="Calibri" pitchFamily="34" charset="-122"/>
                 <a:cs typeface="Calibri" pitchFamily="34" charset="-120"/>
               </a:rPr>
-              <a:t>&lt;TEAM NAME&gt;</a:t>
+              <a:t>FireOrbit</a:t>
             </a:r>
             <a:endParaRPr lang="en-US" sz="900" dirty="0"/>
           </a:p>
@@ -7557,7 +13423,7 @@
                 <a:ea typeface="Calibri" pitchFamily="34" charset="-122"/>
                 <a:cs typeface="Calibri" pitchFamily="34" charset="-120"/>
               </a:rPr>
-              <a:t>4</a:t>
+              <a:t>5</a:t>
             </a:r>
             <a:endParaRPr lang="en-US" sz="900" dirty="0"/>
           </a:p>
@@ -8015,1307 +13881,6 @@
               <a:t>5. SQLite + FastAPI GeoJSON → React/Leaflet; GitHub Pages static demo</a:t>
             </a:r>
             <a:endParaRPr lang="en-US" sz="800" dirty="0"/>
-          </a:p>
-        </p:txBody>
-      </p:sp>
-    </p:spTree>
-  </p:cSld>
-  <p:clrMapOvr>
-    <a:masterClrMapping/>
-  </p:clrMapOvr>
-</p:sld>
-</file>
-
-<file path=ppt/slides/slide5.xml><?xml version="1.0" encoding="utf-8"?>
-<p:sld xmlns:a="http://schemas.openxmlformats.org/drawingml/2006/main" xmlns:r="http://schemas.openxmlformats.org/officeDocument/2006/relationships" xmlns:p="http://schemas.openxmlformats.org/presentationml/2006/main">
-  <p:cSld name="Slide 5">
-    <p:bg>
-      <p:bgPr>
-        <a:solidFill>
-          <a:srgbClr val="FFFFFF"/>
-        </a:solidFill>
-      </p:bgPr>
-    </p:bg>
-    <p:spTree>
-      <p:nvGrpSpPr>
-        <p:cNvPr id="1" name=""/>
-        <p:cNvGrpSpPr/>
-        <p:nvPr/>
-      </p:nvGrpSpPr>
-      <p:grpSpPr>
-        <a:xfrm>
-          <a:off x="0" y="0"/>
-          <a:ext cx="0" cy="0"/>
-          <a:chOff x="0" y="0"/>
-          <a:chExt cx="0" cy="0"/>
-        </a:xfrm>
-      </p:grpSpPr>
-      <p:sp>
-        <p:nvSpPr>
-          <p:cNvPr id="2" name="Text 0"/>
-          <p:cNvSpPr txBox="1"/>
-          <p:nvPr/>
-        </p:nvSpPr>
-        <p:spPr>
-          <a:xfrm>
-            <a:off x="274320" y="137160"/>
-            <a:ext cx="1463040" cy="502920"/>
-          </a:xfrm>
-          <a:prstGeom prst="rect">
-            <a:avLst/>
-          </a:prstGeom>
-          <a:noFill/>
-          <a:ln/>
-        </p:spPr>
-        <p:txBody>
-          <a:bodyPr wrap="square" lIns="0" tIns="0" rIns="0" bIns="0" rtlCol="0" anchor="t"/>
-          <a:lstStyle/>
-          <a:p>
-            <a:pPr indent="0" marL="0">
-              <a:buNone/>
-            </a:pPr>
-            <a:r>
-              <a:rPr lang="en-US" sz="900" dirty="0">
-                <a:solidFill>
-                  <a:srgbClr val="6B7280"/>
-                </a:solidFill>
-                <a:latin typeface="Calibri" pitchFamily="34" charset="0"/>
-                <a:ea typeface="Calibri" pitchFamily="34" charset="-122"/>
-                <a:cs typeface="Calibri" pitchFamily="34" charset="-120"/>
-              </a:rPr>
-              <a:t>Team
-</a:t>
-            </a:r>
-            <a:pPr indent="0" marL="0">
-              <a:buNone/>
-            </a:pPr>
-            <a:r>
-              <a:rPr lang="en-US" sz="1000" b="1" dirty="0">
-                <a:solidFill>
-                  <a:srgbClr val="1F2937"/>
-                </a:solidFill>
-                <a:latin typeface="Calibri" pitchFamily="34" charset="0"/>
-                <a:ea typeface="Calibri" pitchFamily="34" charset="-122"/>
-                <a:cs typeface="Calibri" pitchFamily="34" charset="-120"/>
-              </a:rPr>
-              <a:t>&lt;TEAM NAME&gt;</a:t>
-            </a:r>
-            <a:endParaRPr lang="en-US" sz="900" dirty="0"/>
-          </a:p>
-        </p:txBody>
-      </p:sp>
-      <p:sp>
-        <p:nvSpPr>
-          <p:cNvPr id="3" name="Text 1"/>
-          <p:cNvSpPr txBox="1"/>
-          <p:nvPr/>
-        </p:nvSpPr>
-        <p:spPr>
-          <a:xfrm>
-            <a:off x="1737360" y="137160"/>
-            <a:ext cx="5669280" cy="457200"/>
-          </a:xfrm>
-          <a:prstGeom prst="rect">
-            <a:avLst/>
-          </a:prstGeom>
-          <a:noFill/>
-          <a:ln/>
-        </p:spPr>
-        <p:txBody>
-          <a:bodyPr wrap="square" lIns="0" tIns="0" rIns="0" bIns="0" rtlCol="0" anchor="ctr"/>
-          <a:lstStyle/>
-          <a:p>
-            <a:pPr algn="ctr" indent="0" marL="0">
-              <a:buNone/>
-            </a:pPr>
-            <a:r>
-              <a:rPr lang="en-US" sz="2200" b="1" dirty="0">
-                <a:solidFill>
-                  <a:srgbClr val="1F2937"/>
-                </a:solidFill>
-                <a:latin typeface="Calibri" pitchFamily="34" charset="0"/>
-                <a:ea typeface="Calibri" pitchFamily="34" charset="-122"/>
-                <a:cs typeface="Calibri" pitchFamily="34" charset="-120"/>
-              </a:rPr>
-              <a:t>FEASIBILITY AND VIABILITY</a:t>
-            </a:r>
-            <a:endParaRPr lang="en-US" sz="2200" dirty="0"/>
-          </a:p>
-        </p:txBody>
-      </p:sp>
-      <p:sp>
-        <p:nvSpPr>
-          <p:cNvPr id="4" name="Text 2"/>
-          <p:cNvSpPr txBox="1"/>
-          <p:nvPr/>
-        </p:nvSpPr>
-        <p:spPr>
-          <a:xfrm>
-            <a:off x="274320" y="4846320"/>
-            <a:ext cx="3657600" cy="201168"/>
-          </a:xfrm>
-          <a:prstGeom prst="rect">
-            <a:avLst/>
-          </a:prstGeom>
-          <a:noFill/>
-          <a:ln/>
-        </p:spPr>
-        <p:txBody>
-          <a:bodyPr wrap="square" lIns="0" tIns="0" rIns="0" bIns="0" rtlCol="0" anchor="ctr"/>
-          <a:lstStyle/>
-          <a:p>
-            <a:pPr indent="0" marL="0">
-              <a:buNone/>
-            </a:pPr>
-            <a:r>
-              <a:rPr lang="en-US" sz="800" dirty="0">
-                <a:solidFill>
-                  <a:srgbClr val="6B7280"/>
-                </a:solidFill>
-                <a:latin typeface="Calibri" pitchFamily="34" charset="0"/>
-                <a:ea typeface="Calibri" pitchFamily="34" charset="-122"/>
-                <a:cs typeface="Calibri" pitchFamily="34" charset="-120"/>
-              </a:rPr>
-              <a:t>@SIH Idea submission- Template</a:t>
-            </a:r>
-            <a:endParaRPr lang="en-US" sz="800" dirty="0"/>
-          </a:p>
-        </p:txBody>
-      </p:sp>
-      <p:sp>
-        <p:nvSpPr>
-          <p:cNvPr id="5" name="Text 3"/>
-          <p:cNvSpPr txBox="1"/>
-          <p:nvPr/>
-        </p:nvSpPr>
-        <p:spPr>
-          <a:xfrm>
-            <a:off x="8412480" y="4846320"/>
-            <a:ext cx="457200" cy="201168"/>
-          </a:xfrm>
-          <a:prstGeom prst="rect">
-            <a:avLst/>
-          </a:prstGeom>
-          <a:noFill/>
-          <a:ln/>
-        </p:spPr>
-        <p:txBody>
-          <a:bodyPr wrap="square" lIns="0" tIns="0" rIns="0" bIns="0" rtlCol="0" anchor="ctr"/>
-          <a:lstStyle/>
-          <a:p>
-            <a:pPr algn="r" indent="0" marL="0">
-              <a:buNone/>
-            </a:pPr>
-            <a:r>
-              <a:rPr lang="en-US" sz="900" dirty="0">
-                <a:solidFill>
-                  <a:srgbClr val="6B7280"/>
-                </a:solidFill>
-                <a:latin typeface="Calibri" pitchFamily="34" charset="0"/>
-                <a:ea typeface="Calibri" pitchFamily="34" charset="-122"/>
-                <a:cs typeface="Calibri" pitchFamily="34" charset="-120"/>
-              </a:rPr>
-              <a:t>5</a:t>
-            </a:r>
-            <a:endParaRPr lang="en-US" sz="900" dirty="0"/>
-          </a:p>
-        </p:txBody>
-      </p:sp>
-      <p:sp>
-        <p:nvSpPr>
-          <p:cNvPr id="6" name="Shape 4"/>
-          <p:cNvSpPr/>
-          <p:nvPr/>
-        </p:nvSpPr>
-        <p:spPr>
-          <a:xfrm>
-            <a:off x="274320" y="685800"/>
-            <a:ext cx="2788920" cy="3154680"/>
-          </a:xfrm>
-          <a:prstGeom prst="roundRect">
-            <a:avLst>
-              <a:gd name="adj" fmla="val 1639"/>
-            </a:avLst>
-          </a:prstGeom>
-          <a:solidFill>
-            <a:srgbClr val="FFFFFF"/>
-          </a:solidFill>
-          <a:ln w="9525">
-            <a:solidFill>
-              <a:srgbClr val="D1D5DB"/>
-            </a:solidFill>
-            <a:prstDash val="solid"/>
-          </a:ln>
-        </p:spPr>
-      </p:sp>
-      <p:sp>
-        <p:nvSpPr>
-          <p:cNvPr id="7" name="Text 5"/>
-          <p:cNvSpPr txBox="1"/>
-          <p:nvPr/>
-        </p:nvSpPr>
-        <p:spPr>
-          <a:xfrm>
-            <a:off x="365760" y="731520"/>
-            <a:ext cx="2651760" cy="228600"/>
-          </a:xfrm>
-          <a:prstGeom prst="rect">
-            <a:avLst/>
-          </a:prstGeom>
-          <a:noFill/>
-          <a:ln/>
-        </p:spPr>
-        <p:txBody>
-          <a:bodyPr wrap="square" lIns="0" tIns="0" rIns="0" bIns="0" rtlCol="0" anchor="t"/>
-          <a:lstStyle/>
-          <a:p>
-            <a:pPr algn="l" indent="0" marL="0">
-              <a:buNone/>
-            </a:pPr>
-            <a:r>
-              <a:rPr lang="en-US" sz="1050" b="1" dirty="0">
-                <a:solidFill>
-                  <a:srgbClr val="15803D"/>
-                </a:solidFill>
-                <a:latin typeface="Calibri" pitchFamily="34" charset="0"/>
-                <a:ea typeface="Calibri" pitchFamily="34" charset="-122"/>
-                <a:cs typeface="Calibri" pitchFamily="34" charset="-120"/>
-              </a:rPr>
-              <a:t>➤ Analysis of the feasibility of the idea</a:t>
-            </a:r>
-            <a:endParaRPr lang="en-US" sz="1050" dirty="0"/>
-          </a:p>
-        </p:txBody>
-      </p:sp>
-      <p:sp>
-        <p:nvSpPr>
-          <p:cNvPr id="8" name="Text 6"/>
-          <p:cNvSpPr txBox="1"/>
-          <p:nvPr/>
-        </p:nvSpPr>
-        <p:spPr>
-          <a:xfrm>
-            <a:off x="365760" y="1005840"/>
-            <a:ext cx="2606040" cy="2788920"/>
-          </a:xfrm>
-          <a:prstGeom prst="rect">
-            <a:avLst/>
-          </a:prstGeom>
-          <a:noFill/>
-          <a:ln/>
-        </p:spPr>
-        <p:txBody>
-          <a:bodyPr wrap="square" lIns="12700" tIns="12700" rIns="12700" bIns="12700" rtlCol="0" anchor="t"/>
-          <a:lstStyle/>
-          <a:p>
-            <a:pPr marL="127000" indent="-127000">
-              <a:spcAft>
-                <a:spcPts val="200"/>
-              </a:spcAft>
-              <a:buSzPct val="100000"/>
-              <a:buChar char="•"/>
-            </a:pPr>
-            <a:r>
-              <a:rPr lang="en-US" sz="950" dirty="0">
-                <a:solidFill>
-                  <a:srgbClr val="1F2937"/>
-                </a:solidFill>
-                <a:latin typeface="Calibri" pitchFamily="34" charset="0"/>
-                <a:ea typeface="Calibri" pitchFamily="34" charset="-122"/>
-                <a:cs typeface="Calibri" pitchFamily="34" charset="-120"/>
-              </a:rPr>
-              <a:t>All inputs are free &amp; open: FIRMS MAP_KEY (instant), OSM Overpass, Copernicus Sentinel-2, NASA Worldview.</a:t>
-            </a:r>
-            <a:endParaRPr lang="en-US" sz="950" dirty="0"/>
-          </a:p>
-          <a:p>
-            <a:pPr marL="127000" indent="-127000">
-              <a:spcAft>
-                <a:spcPts val="200"/>
-              </a:spcAft>
-              <a:buSzPct val="100000"/>
-              <a:buChar char="•"/>
-            </a:pPr>
-            <a:r>
-              <a:rPr lang="en-US" sz="950" dirty="0">
-                <a:solidFill>
-                  <a:srgbClr val="1F2937"/>
-                </a:solidFill>
-                <a:latin typeface="Calibri" pitchFamily="34" charset="0"/>
-                <a:ea typeface="Calibri" pitchFamily="34" charset="-122"/>
-                <a:cs typeface="Calibri" pitchFamily="34" charset="-120"/>
-              </a:rPr>
-              <a:t>Working end-to-end prototype already exists: 22 k detections → classified in 7 s on a laptop; model trains in seconds.</a:t>
-            </a:r>
-            <a:endParaRPr lang="en-US" sz="950" dirty="0"/>
-          </a:p>
-          <a:p>
-            <a:pPr marL="127000" indent="-127000">
-              <a:spcAft>
-                <a:spcPts val="200"/>
-              </a:spcAft>
-              <a:buSzPct val="100000"/>
-              <a:buChar char="•"/>
-            </a:pPr>
-            <a:r>
-              <a:rPr lang="en-US" sz="950" dirty="0">
-                <a:solidFill>
-                  <a:srgbClr val="1F2937"/>
-                </a:solidFill>
-                <a:latin typeface="Calibri" pitchFamily="34" charset="0"/>
-                <a:ea typeface="Calibri" pitchFamily="34" charset="-122"/>
-                <a:cs typeface="Calibri" pitchFamily="34" charset="-120"/>
-              </a:rPr>
-              <a:t>Same pipeline switches to live FIRMS with one env variable; Overpass is queried only around hotspot cells → India-wide in minutes.</a:t>
-            </a:r>
-            <a:endParaRPr lang="en-US" sz="950" dirty="0"/>
-          </a:p>
-          <a:p>
-            <a:pPr marL="127000" indent="-127000">
-              <a:spcAft>
-                <a:spcPts val="200"/>
-              </a:spcAft>
-              <a:buSzPct val="100000"/>
-              <a:buChar char="•"/>
-            </a:pPr>
-            <a:r>
-              <a:rPr lang="en-US" sz="950" dirty="0">
-                <a:solidFill>
-                  <a:srgbClr val="1F2937"/>
-                </a:solidFill>
-                <a:latin typeface="Calibri" pitchFamily="34" charset="0"/>
-                <a:ea typeface="Calibri" pitchFamily="34" charset="-122"/>
-                <a:cs typeface="Calibri" pitchFamily="34" charset="-120"/>
-              </a:rPr>
-              <a:t>Lightweight stack (SQLite / FastAPI / React) → one VM, NIC cloud or an air-gapped NTRO server.</a:t>
-            </a:r>
-            <a:endParaRPr lang="en-US" sz="950" dirty="0"/>
-          </a:p>
-          <a:p>
-            <a:pPr marL="127000" indent="-127000">
-              <a:spcAft>
-                <a:spcPts val="200"/>
-              </a:spcAft>
-              <a:buSzPct val="100000"/>
-              <a:buChar char="•"/>
-            </a:pPr>
-            <a:r>
-              <a:rPr lang="en-US" sz="950" dirty="0">
-                <a:solidFill>
-                  <a:srgbClr val="1F2937"/>
-                </a:solidFill>
-                <a:latin typeface="Calibri" pitchFamily="34" charset="0"/>
-                <a:ea typeface="Calibri" pitchFamily="34" charset="-122"/>
-                <a:cs typeface="Calibri" pitchFamily="34" charset="-120"/>
-              </a:rPr>
-              <a:t>Explainable rules let analysts audit and tune; ML improves as labelled incidents accumulate.</a:t>
-            </a:r>
-            <a:endParaRPr lang="en-US" sz="950" dirty="0"/>
-          </a:p>
-          <a:p>
-            <a:pPr marL="127000" indent="-127000">
-              <a:spcAft>
-                <a:spcPts val="200"/>
-              </a:spcAft>
-              <a:buSzPct val="100000"/>
-              <a:buChar char="•"/>
-            </a:pPr>
-            <a:r>
-              <a:rPr lang="en-US" sz="950" dirty="0">
-                <a:solidFill>
-                  <a:srgbClr val="1F2937"/>
-                </a:solidFill>
-                <a:latin typeface="Calibri" pitchFamily="34" charset="0"/>
-                <a:ea typeface="Calibri" pitchFamily="34" charset="-122"/>
-                <a:cs typeface="Calibri" pitchFamily="34" charset="-120"/>
-              </a:rPr>
-              <a:t>Static demo already live on GitHub Pages.</a:t>
-            </a:r>
-            <a:endParaRPr lang="en-US" sz="950" dirty="0"/>
-          </a:p>
-        </p:txBody>
-      </p:sp>
-      <p:sp>
-        <p:nvSpPr>
-          <p:cNvPr id="9" name="Shape 7"/>
-          <p:cNvSpPr/>
-          <p:nvPr/>
-        </p:nvSpPr>
-        <p:spPr>
-          <a:xfrm>
-            <a:off x="3154680" y="685800"/>
-            <a:ext cx="2788920" cy="3154680"/>
-          </a:xfrm>
-          <a:prstGeom prst="roundRect">
-            <a:avLst>
-              <a:gd name="adj" fmla="val 1639"/>
-            </a:avLst>
-          </a:prstGeom>
-          <a:solidFill>
-            <a:srgbClr val="FFFFFF"/>
-          </a:solidFill>
-          <a:ln w="9525">
-            <a:solidFill>
-              <a:srgbClr val="D1D5DB"/>
-            </a:solidFill>
-            <a:prstDash val="solid"/>
-          </a:ln>
-        </p:spPr>
-      </p:sp>
-      <p:sp>
-        <p:nvSpPr>
-          <p:cNvPr id="10" name="Text 8"/>
-          <p:cNvSpPr txBox="1"/>
-          <p:nvPr/>
-        </p:nvSpPr>
-        <p:spPr>
-          <a:xfrm>
-            <a:off x="3246120" y="731520"/>
-            <a:ext cx="2651760" cy="228600"/>
-          </a:xfrm>
-          <a:prstGeom prst="rect">
-            <a:avLst/>
-          </a:prstGeom>
-          <a:noFill/>
-          <a:ln/>
-        </p:spPr>
-        <p:txBody>
-          <a:bodyPr wrap="square" lIns="0" tIns="0" rIns="0" bIns="0" rtlCol="0" anchor="t"/>
-          <a:lstStyle/>
-          <a:p>
-            <a:pPr algn="l" indent="0" marL="0">
-              <a:buNone/>
-            </a:pPr>
-            <a:r>
-              <a:rPr lang="en-US" sz="1050" b="1" dirty="0">
-                <a:solidFill>
-                  <a:srgbClr val="B91C1C"/>
-                </a:solidFill>
-                <a:latin typeface="Calibri" pitchFamily="34" charset="0"/>
-                <a:ea typeface="Calibri" pitchFamily="34" charset="-122"/>
-                <a:cs typeface="Calibri" pitchFamily="34" charset="-120"/>
-              </a:rPr>
-              <a:t>➤ Potential challenges and risks</a:t>
-            </a:r>
-            <a:endParaRPr lang="en-US" sz="1050" dirty="0"/>
-          </a:p>
-        </p:txBody>
-      </p:sp>
-      <p:sp>
-        <p:nvSpPr>
-          <p:cNvPr id="11" name="Text 9"/>
-          <p:cNvSpPr txBox="1"/>
-          <p:nvPr/>
-        </p:nvSpPr>
-        <p:spPr>
-          <a:xfrm>
-            <a:off x="3246120" y="1005840"/>
-            <a:ext cx="2606040" cy="2788920"/>
-          </a:xfrm>
-          <a:prstGeom prst="rect">
-            <a:avLst/>
-          </a:prstGeom>
-          <a:noFill/>
-          <a:ln/>
-        </p:spPr>
-        <p:txBody>
-          <a:bodyPr wrap="square" lIns="12700" tIns="12700" rIns="12700" bIns="12700" rtlCol="0" anchor="t"/>
-          <a:lstStyle/>
-          <a:p>
-            <a:pPr marL="127000" indent="-127000">
-              <a:spcAft>
-                <a:spcPts val="200"/>
-              </a:spcAft>
-              <a:buSzPct val="100000"/>
-              <a:buChar char="•"/>
-            </a:pPr>
-            <a:r>
-              <a:rPr lang="en-US" sz="950" dirty="0">
-                <a:solidFill>
-                  <a:srgbClr val="1F2937"/>
-                </a:solidFill>
-                <a:latin typeface="Calibri" pitchFamily="34" charset="0"/>
-                <a:ea typeface="Calibri" pitchFamily="34" charset="-122"/>
-                <a:cs typeface="Calibri" pitchFamily="34" charset="-120"/>
-              </a:rPr>
-              <a:t>Incomplete OSM coverage of Indian industry (small kilns, sponge-iron units).</a:t>
-            </a:r>
-            <a:endParaRPr lang="en-US" sz="950" dirty="0"/>
-          </a:p>
-          <a:p>
-            <a:pPr marL="127000" indent="-127000">
-              <a:spcAft>
-                <a:spcPts val="200"/>
-              </a:spcAft>
-              <a:buSzPct val="100000"/>
-              <a:buChar char="•"/>
-            </a:pPr>
-            <a:r>
-              <a:rPr lang="en-US" sz="950" dirty="0">
-                <a:solidFill>
-                  <a:srgbClr val="1F2937"/>
-                </a:solidFill>
-                <a:latin typeface="Calibri" pitchFamily="34" charset="0"/>
-                <a:ea typeface="Calibri" pitchFamily="34" charset="-122"/>
-                <a:cs typeface="Calibri" pitchFamily="34" charset="-120"/>
-              </a:rPr>
-              <a:t>Cloud cover &amp; 375 m pixel offsets between passes.</a:t>
-            </a:r>
-            <a:endParaRPr lang="en-US" sz="950" dirty="0"/>
-          </a:p>
-          <a:p>
-            <a:pPr marL="127000" indent="-127000">
-              <a:spcAft>
-                <a:spcPts val="200"/>
-              </a:spcAft>
-              <a:buSzPct val="100000"/>
-              <a:buChar char="•"/>
-            </a:pPr>
-            <a:r>
-              <a:rPr lang="en-US" sz="950" dirty="0">
-                <a:solidFill>
-                  <a:srgbClr val="1F2937"/>
-                </a:solidFill>
-                <a:latin typeface="Calibri" pitchFamily="34" charset="0"/>
-                <a:ea typeface="Calibri" pitchFamily="34" charset="-122"/>
-                <a:cs typeface="Calibri" pitchFamily="34" charset="-120"/>
-              </a:rPr>
-              <a:t>Few labelled real incidents for supervised ML; synthetic archive is cleaner than reality.</a:t>
-            </a:r>
-            <a:endParaRPr lang="en-US" sz="950" dirty="0"/>
-          </a:p>
-          <a:p>
-            <a:pPr marL="127000" indent="-127000">
-              <a:spcAft>
-                <a:spcPts val="200"/>
-              </a:spcAft>
-              <a:buSzPct val="100000"/>
-              <a:buChar char="•"/>
-            </a:pPr>
-            <a:r>
-              <a:rPr lang="en-US" sz="950" dirty="0">
-                <a:solidFill>
-                  <a:srgbClr val="1F2937"/>
-                </a:solidFill>
-                <a:latin typeface="Calibri" pitchFamily="34" charset="0"/>
-                <a:ea typeface="Calibri" pitchFamily="34" charset="-122"/>
-                <a:cs typeface="Calibri" pitchFamily="34" charset="-120"/>
-              </a:rPr>
-              <a:t>Overpass rate limits when scaling to national, multi-year archives.</a:t>
-            </a:r>
-            <a:endParaRPr lang="en-US" sz="950" dirty="0"/>
-          </a:p>
-          <a:p>
-            <a:pPr marL="127000" indent="-127000">
-              <a:spcAft>
-                <a:spcPts val="200"/>
-              </a:spcAft>
-              <a:buSzPct val="100000"/>
-              <a:buChar char="•"/>
-            </a:pPr>
-            <a:r>
-              <a:rPr lang="en-US" sz="950" dirty="0">
-                <a:solidFill>
-                  <a:srgbClr val="1F2937"/>
-                </a:solidFill>
-                <a:latin typeface="Calibri" pitchFamily="34" charset="0"/>
-                <a:ea typeface="Calibri" pitchFamily="34" charset="-122"/>
-                <a:cs typeface="Calibri" pitchFamily="34" charset="-120"/>
-              </a:rPr>
-              <a:t>False alarms from legitimate process changes (furnace restart, flaring during maintenance).</a:t>
-            </a:r>
-            <a:endParaRPr lang="en-US" sz="950" dirty="0"/>
-          </a:p>
-          <a:p>
-            <a:pPr marL="127000" indent="-127000">
-              <a:spcAft>
-                <a:spcPts val="200"/>
-              </a:spcAft>
-              <a:buSzPct val="100000"/>
-              <a:buChar char="•"/>
-            </a:pPr>
-            <a:r>
-              <a:rPr lang="en-US" sz="950" dirty="0">
-                <a:solidFill>
-                  <a:srgbClr val="1F2937"/>
-                </a:solidFill>
-                <a:latin typeface="Calibri" pitchFamily="34" charset="0"/>
-                <a:ea typeface="Calibri" pitchFamily="34" charset="-122"/>
-                <a:cs typeface="Calibri" pitchFamily="34" charset="-120"/>
-              </a:rPr>
-              <a:t>Sub-pixel sources (small flares) below VIIRS detection threshold.</a:t>
-            </a:r>
-            <a:endParaRPr lang="en-US" sz="950" dirty="0"/>
-          </a:p>
-        </p:txBody>
-      </p:sp>
-      <p:sp>
-        <p:nvSpPr>
-          <p:cNvPr id="12" name="Shape 10"/>
-          <p:cNvSpPr/>
-          <p:nvPr/>
-        </p:nvSpPr>
-        <p:spPr>
-          <a:xfrm>
-            <a:off x="6035040" y="685800"/>
-            <a:ext cx="2834640" cy="3154680"/>
-          </a:xfrm>
-          <a:prstGeom prst="roundRect">
-            <a:avLst>
-              <a:gd name="adj" fmla="val 1613"/>
-            </a:avLst>
-          </a:prstGeom>
-          <a:solidFill>
-            <a:srgbClr val="FFFFFF"/>
-          </a:solidFill>
-          <a:ln w="9525">
-            <a:solidFill>
-              <a:srgbClr val="D1D5DB"/>
-            </a:solidFill>
-            <a:prstDash val="solid"/>
-          </a:ln>
-        </p:spPr>
-      </p:sp>
-      <p:sp>
-        <p:nvSpPr>
-          <p:cNvPr id="13" name="Text 11"/>
-          <p:cNvSpPr txBox="1"/>
-          <p:nvPr/>
-        </p:nvSpPr>
-        <p:spPr>
-          <a:xfrm>
-            <a:off x="6126480" y="731520"/>
-            <a:ext cx="2697480" cy="228600"/>
-          </a:xfrm>
-          <a:prstGeom prst="rect">
-            <a:avLst/>
-          </a:prstGeom>
-          <a:noFill/>
-          <a:ln/>
-        </p:spPr>
-        <p:txBody>
-          <a:bodyPr wrap="square" lIns="0" tIns="0" rIns="0" bIns="0" rtlCol="0" anchor="t"/>
-          <a:lstStyle/>
-          <a:p>
-            <a:pPr algn="l" indent="0" marL="0">
-              <a:buNone/>
-            </a:pPr>
-            <a:r>
-              <a:rPr lang="en-US" sz="1050" b="1" dirty="0">
-                <a:solidFill>
-                  <a:srgbClr val="1D4ED8"/>
-                </a:solidFill>
-                <a:latin typeface="Calibri" pitchFamily="34" charset="0"/>
-                <a:ea typeface="Calibri" pitchFamily="34" charset="-122"/>
-                <a:cs typeface="Calibri" pitchFamily="34" charset="-120"/>
-              </a:rPr>
-              <a:t>➤ Strategies for overcoming these challenges</a:t>
-            </a:r>
-            <a:endParaRPr lang="en-US" sz="1050" dirty="0"/>
-          </a:p>
-        </p:txBody>
-      </p:sp>
-      <p:sp>
-        <p:nvSpPr>
-          <p:cNvPr id="14" name="Text 12"/>
-          <p:cNvSpPr txBox="1"/>
-          <p:nvPr/>
-        </p:nvSpPr>
-        <p:spPr>
-          <a:xfrm>
-            <a:off x="6126480" y="1005840"/>
-            <a:ext cx="2651760" cy="2788920"/>
-          </a:xfrm>
-          <a:prstGeom prst="rect">
-            <a:avLst/>
-          </a:prstGeom>
-          <a:noFill/>
-          <a:ln/>
-        </p:spPr>
-        <p:txBody>
-          <a:bodyPr wrap="square" lIns="12700" tIns="12700" rIns="12700" bIns="12700" rtlCol="0" anchor="t"/>
-          <a:lstStyle/>
-          <a:p>
-            <a:pPr marL="127000" indent="-127000">
-              <a:spcAft>
-                <a:spcPts val="200"/>
-              </a:spcAft>
-              <a:buSzPct val="100000"/>
-              <a:buChar char="•"/>
-            </a:pPr>
-            <a:r>
-              <a:rPr lang="en-US" sz="950" dirty="0">
-                <a:solidFill>
-                  <a:srgbClr val="1F2937"/>
-                </a:solidFill>
-                <a:latin typeface="Calibri" pitchFamily="34" charset="0"/>
-                <a:ea typeface="Calibri" pitchFamily="34" charset="-122"/>
-                <a:cs typeface="Calibri" pitchFamily="34" charset="-120"/>
-              </a:rPr>
-              <a:t>Persistence signature detects unregistered sources even with no OSM facility; curated facility list merged with OSM; Sentinel-2 chip verification.</a:t>
-            </a:r>
-            <a:endParaRPr lang="en-US" sz="950" dirty="0"/>
-          </a:p>
-          <a:p>
-            <a:pPr marL="127000" indent="-127000">
-              <a:spcAft>
-                <a:spcPts val="200"/>
-              </a:spcAft>
-              <a:buSzPct val="100000"/>
-              <a:buChar char="•"/>
-            </a:pPr>
-            <a:r>
-              <a:rPr lang="en-US" sz="950" dirty="0">
-                <a:solidFill>
-                  <a:srgbClr val="1F2937"/>
-                </a:solidFill>
-                <a:latin typeface="Calibri" pitchFamily="34" charset="0"/>
-                <a:ea typeface="Calibri" pitchFamily="34" charset="-122"/>
-                <a:cs typeface="Calibri" pitchFamily="34" charset="-120"/>
-              </a:rPr>
-              <a:t>90-day window + 4 passes/day from 3 VIIRS satellites; DBSCAN grouping absorbs pixel jitter.</a:t>
-            </a:r>
-            <a:endParaRPr lang="en-US" sz="950" dirty="0"/>
-          </a:p>
-          <a:p>
-            <a:pPr marL="127000" indent="-127000">
-              <a:spcAft>
-                <a:spcPts val="200"/>
-              </a:spcAft>
-              <a:buSzPct val="100000"/>
-              <a:buChar char="•"/>
-            </a:pPr>
-            <a:r>
-              <a:rPr lang="en-US" sz="950" dirty="0">
-                <a:solidFill>
-                  <a:srgbClr val="1F2937"/>
-                </a:solidFill>
-                <a:latin typeface="Calibri" pitchFamily="34" charset="0"/>
-                <a:ea typeface="Calibri" pitchFamily="34" charset="-122"/>
-                <a:cs typeface="Calibri" pitchFamily="34" charset="-120"/>
-              </a:rPr>
-              <a:t>Rules as strong prior; validate on documented incidents (news / PESO / CPCB); analyst feedback loop → retrain.</a:t>
-            </a:r>
-            <a:endParaRPr lang="en-US" sz="950" dirty="0"/>
-          </a:p>
-          <a:p>
-            <a:pPr marL="127000" indent="-127000">
-              <a:spcAft>
-                <a:spcPts val="200"/>
-              </a:spcAft>
-              <a:buSzPct val="100000"/>
-              <a:buChar char="•"/>
-            </a:pPr>
-            <a:r>
-              <a:rPr lang="en-US" sz="950" dirty="0">
-                <a:solidFill>
-                  <a:srgbClr val="1F2937"/>
-                </a:solidFill>
-                <a:latin typeface="Calibri" pitchFamily="34" charset="0"/>
-                <a:ea typeface="Calibri" pitchFamily="34" charset="-122"/>
-                <a:cs typeface="Calibri" pitchFamily="34" charset="-120"/>
-              </a:rPr>
-              <a:t>Around-cell queries + disk cache; self-hosted Overpass or ESA WorldCover raster for scale.</a:t>
-            </a:r>
-            <a:endParaRPr lang="en-US" sz="950" dirty="0"/>
-          </a:p>
-          <a:p>
-            <a:pPr marL="127000" indent="-127000">
-              <a:spcAft>
-                <a:spcPts val="200"/>
-              </a:spcAft>
-              <a:buSzPct val="100000"/>
-              <a:buChar char="•"/>
-            </a:pPr>
-            <a:r>
-              <a:rPr lang="en-US" sz="950" dirty="0">
-                <a:solidFill>
-                  <a:srgbClr val="1F2937"/>
-                </a:solidFill>
-                <a:latin typeface="Calibri" pitchFamily="34" charset="0"/>
-                <a:ea typeface="Calibri" pitchFamily="34" charset="-122"/>
-                <a:cs typeface="Calibri" pitchFamily="34" charset="-120"/>
-              </a:rPr>
-              <a:t>Baseline-relative thresholds + analyst override; confidence shown on every alert.</a:t>
-            </a:r>
-            <a:endParaRPr lang="en-US" sz="950" dirty="0"/>
-          </a:p>
-          <a:p>
-            <a:pPr marL="127000" indent="-127000">
-              <a:spcAft>
-                <a:spcPts val="200"/>
-              </a:spcAft>
-              <a:buSzPct val="100000"/>
-              <a:buChar char="•"/>
-            </a:pPr>
-            <a:r>
-              <a:rPr lang="en-US" sz="950" dirty="0">
-                <a:solidFill>
-                  <a:srgbClr val="1F2937"/>
-                </a:solidFill>
-                <a:latin typeface="Calibri" pitchFamily="34" charset="0"/>
-                <a:ea typeface="Calibri" pitchFamily="34" charset="-122"/>
-                <a:cs typeface="Calibri" pitchFamily="34" charset="-120"/>
-              </a:rPr>
-              <a:t>Add VIIRS Nightfire (VNF) for flare temperature; Landsat TIRS for small sources.</a:t>
-            </a:r>
-            <a:endParaRPr lang="en-US" sz="950" dirty="0"/>
-          </a:p>
-        </p:txBody>
-      </p:sp>
-      <p:sp>
-        <p:nvSpPr>
-          <p:cNvPr id="15" name="Shape 13"/>
-          <p:cNvSpPr/>
-          <p:nvPr/>
-        </p:nvSpPr>
-        <p:spPr>
-          <a:xfrm>
-            <a:off x="274320" y="3950208"/>
-            <a:ext cx="8595360" cy="804672"/>
-          </a:xfrm>
-          <a:prstGeom prst="roundRect">
-            <a:avLst>
-              <a:gd name="adj" fmla="val 5682"/>
-            </a:avLst>
-          </a:prstGeom>
-          <a:solidFill>
-            <a:srgbClr val="0F172A"/>
-          </a:solidFill>
-          <a:ln w="9525">
-            <a:solidFill>
-              <a:srgbClr val="0F172A"/>
-            </a:solidFill>
-            <a:prstDash val="solid"/>
-          </a:ln>
-        </p:spPr>
-      </p:sp>
-      <p:sp>
-        <p:nvSpPr>
-          <p:cNvPr id="16" name="Text 14"/>
-          <p:cNvSpPr txBox="1"/>
-          <p:nvPr/>
-        </p:nvSpPr>
-        <p:spPr>
-          <a:xfrm>
-            <a:off x="411480" y="4005072"/>
-            <a:ext cx="1828800" cy="201168"/>
-          </a:xfrm>
-          <a:prstGeom prst="rect">
-            <a:avLst/>
-          </a:prstGeom>
-          <a:noFill/>
-          <a:ln/>
-        </p:spPr>
-        <p:txBody>
-          <a:bodyPr wrap="square" lIns="0" tIns="0" rIns="0" bIns="0" rtlCol="0" anchor="t"/>
-          <a:lstStyle/>
-          <a:p>
-            <a:pPr algn="l" indent="0" marL="0">
-              <a:buNone/>
-            </a:pPr>
-            <a:r>
-              <a:rPr lang="en-US" sz="900" b="1" dirty="0">
-                <a:solidFill>
-                  <a:srgbClr val="FBBF24"/>
-                </a:solidFill>
-                <a:latin typeface="Calibri" pitchFamily="34" charset="0"/>
-                <a:ea typeface="Calibri" pitchFamily="34" charset="-122"/>
-                <a:cs typeface="Calibri" pitchFamily="34" charset="-120"/>
-              </a:rPr>
-              <a:t>VIABILITY</a:t>
-            </a:r>
-            <a:endParaRPr lang="en-US" sz="900" dirty="0"/>
-          </a:p>
-        </p:txBody>
-      </p:sp>
-      <p:sp>
-        <p:nvSpPr>
-          <p:cNvPr id="17" name="Text 15"/>
-          <p:cNvSpPr txBox="1"/>
-          <p:nvPr/>
-        </p:nvSpPr>
-        <p:spPr>
-          <a:xfrm>
-            <a:off x="411480" y="4206240"/>
-            <a:ext cx="1645920" cy="274320"/>
-          </a:xfrm>
-          <a:prstGeom prst="rect">
-            <a:avLst/>
-          </a:prstGeom>
-          <a:noFill/>
-          <a:ln/>
-        </p:spPr>
-        <p:txBody>
-          <a:bodyPr wrap="square" lIns="0" tIns="0" rIns="0" bIns="0" rtlCol="0" anchor="t"/>
-          <a:lstStyle/>
-          <a:p>
-            <a:pPr algn="l" indent="0" marL="0">
-              <a:buNone/>
-            </a:pPr>
-            <a:r>
-              <a:rPr lang="en-US" sz="1500" b="1" dirty="0">
-                <a:solidFill>
-                  <a:srgbClr val="FB923C"/>
-                </a:solidFill>
-                <a:latin typeface="Calibri" pitchFamily="34" charset="0"/>
-                <a:ea typeface="Calibri" pitchFamily="34" charset="-122"/>
-                <a:cs typeface="Calibri" pitchFamily="34" charset="-120"/>
-              </a:rPr>
-              <a:t>₹ 0</a:t>
-            </a:r>
-            <a:endParaRPr lang="en-US" sz="1500" dirty="0"/>
-          </a:p>
-        </p:txBody>
-      </p:sp>
-      <p:sp>
-        <p:nvSpPr>
-          <p:cNvPr id="18" name="Text 16"/>
-          <p:cNvSpPr txBox="1"/>
-          <p:nvPr/>
-        </p:nvSpPr>
-        <p:spPr>
-          <a:xfrm>
-            <a:off x="411480" y="4480560"/>
-            <a:ext cx="1600200" cy="274320"/>
-          </a:xfrm>
-          <a:prstGeom prst="rect">
-            <a:avLst/>
-          </a:prstGeom>
-          <a:noFill/>
-          <a:ln/>
-        </p:spPr>
-        <p:txBody>
-          <a:bodyPr wrap="square" lIns="0" tIns="0" rIns="0" bIns="0" rtlCol="0" anchor="t"/>
-          <a:lstStyle/>
-          <a:p>
-            <a:pPr algn="l" indent="0" marL="0">
-              <a:buNone/>
-            </a:pPr>
-            <a:r>
-              <a:rPr lang="en-US" sz="750" dirty="0">
-                <a:solidFill>
-                  <a:srgbClr val="E5E7EB"/>
-                </a:solidFill>
-                <a:latin typeface="Calibri" pitchFamily="34" charset="0"/>
-                <a:ea typeface="Calibri" pitchFamily="34" charset="-122"/>
-                <a:cs typeface="Calibri" pitchFamily="34" charset="-120"/>
-              </a:rPr>
-              <a:t>data licensing — all open sources</a:t>
-            </a:r>
-            <a:endParaRPr lang="en-US" sz="750" dirty="0"/>
-          </a:p>
-        </p:txBody>
-      </p:sp>
-      <p:sp>
-        <p:nvSpPr>
-          <p:cNvPr id="19" name="Text 17"/>
-          <p:cNvSpPr txBox="1"/>
-          <p:nvPr/>
-        </p:nvSpPr>
-        <p:spPr>
-          <a:xfrm>
-            <a:off x="2112264" y="4206240"/>
-            <a:ext cx="1645920" cy="274320"/>
-          </a:xfrm>
-          <a:prstGeom prst="rect">
-            <a:avLst/>
-          </a:prstGeom>
-          <a:noFill/>
-          <a:ln/>
-        </p:spPr>
-        <p:txBody>
-          <a:bodyPr wrap="square" lIns="0" tIns="0" rIns="0" bIns="0" rtlCol="0" anchor="t"/>
-          <a:lstStyle/>
-          <a:p>
-            <a:pPr algn="l" indent="0" marL="0">
-              <a:buNone/>
-            </a:pPr>
-            <a:r>
-              <a:rPr lang="en-US" sz="1500" b="1" dirty="0">
-                <a:solidFill>
-                  <a:srgbClr val="FB923C"/>
-                </a:solidFill>
-                <a:latin typeface="Calibri" pitchFamily="34" charset="0"/>
-                <a:ea typeface="Calibri" pitchFamily="34" charset="-122"/>
-                <a:cs typeface="Calibri" pitchFamily="34" charset="-120"/>
-              </a:rPr>
-              <a:t>1 VM</a:t>
-            </a:r>
-            <a:endParaRPr lang="en-US" sz="1500" dirty="0"/>
-          </a:p>
-        </p:txBody>
-      </p:sp>
-      <p:sp>
-        <p:nvSpPr>
-          <p:cNvPr id="20" name="Text 18"/>
-          <p:cNvSpPr txBox="1"/>
-          <p:nvPr/>
-        </p:nvSpPr>
-        <p:spPr>
-          <a:xfrm>
-            <a:off x="2112264" y="4480560"/>
-            <a:ext cx="1600200" cy="274320"/>
-          </a:xfrm>
-          <a:prstGeom prst="rect">
-            <a:avLst/>
-          </a:prstGeom>
-          <a:noFill/>
-          <a:ln/>
-        </p:spPr>
-        <p:txBody>
-          <a:bodyPr wrap="square" lIns="0" tIns="0" rIns="0" bIns="0" rtlCol="0" anchor="t"/>
-          <a:lstStyle/>
-          <a:p>
-            <a:pPr algn="l" indent="0" marL="0">
-              <a:buNone/>
-            </a:pPr>
-            <a:r>
-              <a:rPr lang="en-US" sz="750" dirty="0">
-                <a:solidFill>
-                  <a:srgbClr val="E5E7EB"/>
-                </a:solidFill>
-                <a:latin typeface="Calibri" pitchFamily="34" charset="0"/>
-                <a:ea typeface="Calibri" pitchFamily="34" charset="-122"/>
-                <a:cs typeface="Calibri" pitchFamily="34" charset="-120"/>
-              </a:rPr>
-              <a:t>or air-gapped server; SQLite → PostGIS when scaling</a:t>
-            </a:r>
-            <a:endParaRPr lang="en-US" sz="750" dirty="0"/>
-          </a:p>
-        </p:txBody>
-      </p:sp>
-      <p:sp>
-        <p:nvSpPr>
-          <p:cNvPr id="21" name="Text 19"/>
-          <p:cNvSpPr txBox="1"/>
-          <p:nvPr/>
-        </p:nvSpPr>
-        <p:spPr>
-          <a:xfrm>
-            <a:off x="3813048" y="4206240"/>
-            <a:ext cx="1645920" cy="274320"/>
-          </a:xfrm>
-          <a:prstGeom prst="rect">
-            <a:avLst/>
-          </a:prstGeom>
-          <a:noFill/>
-          <a:ln/>
-        </p:spPr>
-        <p:txBody>
-          <a:bodyPr wrap="square" lIns="0" tIns="0" rIns="0" bIns="0" rtlCol="0" anchor="t"/>
-          <a:lstStyle/>
-          <a:p>
-            <a:pPr algn="l" indent="0" marL="0">
-              <a:buNone/>
-            </a:pPr>
-            <a:r>
-              <a:rPr lang="en-US" sz="1500" b="1" dirty="0">
-                <a:solidFill>
-                  <a:srgbClr val="FB923C"/>
-                </a:solidFill>
-                <a:latin typeface="Calibri" pitchFamily="34" charset="0"/>
-                <a:ea typeface="Calibri" pitchFamily="34" charset="-122"/>
-                <a:cs typeface="Calibri" pitchFamily="34" charset="-120"/>
-              </a:rPr>
-              <a:t>~7 s</a:t>
-            </a:r>
-            <a:endParaRPr lang="en-US" sz="1500" dirty="0"/>
-          </a:p>
-        </p:txBody>
-      </p:sp>
-      <p:sp>
-        <p:nvSpPr>
-          <p:cNvPr id="22" name="Text 20"/>
-          <p:cNvSpPr txBox="1"/>
-          <p:nvPr/>
-        </p:nvSpPr>
-        <p:spPr>
-          <a:xfrm>
-            <a:off x="3813048" y="4480560"/>
-            <a:ext cx="1600200" cy="274320"/>
-          </a:xfrm>
-          <a:prstGeom prst="rect">
-            <a:avLst/>
-          </a:prstGeom>
-          <a:noFill/>
-          <a:ln/>
-        </p:spPr>
-        <p:txBody>
-          <a:bodyPr wrap="square" lIns="0" tIns="0" rIns="0" bIns="0" rtlCol="0" anchor="t"/>
-          <a:lstStyle/>
-          <a:p>
-            <a:pPr algn="l" indent="0" marL="0">
-              <a:buNone/>
-            </a:pPr>
-            <a:r>
-              <a:rPr lang="en-US" sz="750" dirty="0">
-                <a:solidFill>
-                  <a:srgbClr val="E5E7EB"/>
-                </a:solidFill>
-                <a:latin typeface="Calibri" pitchFamily="34" charset="0"/>
-                <a:ea typeface="Calibri" pitchFamily="34" charset="-122"/>
-                <a:cs typeface="Calibri" pitchFamily="34" charset="-120"/>
-              </a:rPr>
-              <a:t>to classify a 90-day national archive</a:t>
-            </a:r>
-            <a:endParaRPr lang="en-US" sz="750" dirty="0"/>
-          </a:p>
-        </p:txBody>
-      </p:sp>
-      <p:sp>
-        <p:nvSpPr>
-          <p:cNvPr id="23" name="Text 21"/>
-          <p:cNvSpPr txBox="1"/>
-          <p:nvPr/>
-        </p:nvSpPr>
-        <p:spPr>
-          <a:xfrm>
-            <a:off x="5513832" y="4206240"/>
-            <a:ext cx="1645920" cy="274320"/>
-          </a:xfrm>
-          <a:prstGeom prst="rect">
-            <a:avLst/>
-          </a:prstGeom>
-          <a:noFill/>
-          <a:ln/>
-        </p:spPr>
-        <p:txBody>
-          <a:bodyPr wrap="square" lIns="0" tIns="0" rIns="0" bIns="0" rtlCol="0" anchor="t"/>
-          <a:lstStyle/>
-          <a:p>
-            <a:pPr algn="l" indent="0" marL="0">
-              <a:buNone/>
-            </a:pPr>
-            <a:r>
-              <a:rPr lang="en-US" sz="1500" b="1" dirty="0">
-                <a:solidFill>
-                  <a:srgbClr val="FB923C"/>
-                </a:solidFill>
-                <a:latin typeface="Calibri" pitchFamily="34" charset="0"/>
-                <a:ea typeface="Calibri" pitchFamily="34" charset="-122"/>
-                <a:cs typeface="Calibri" pitchFamily="34" charset="-120"/>
-              </a:rPr>
-              <a:t>1 env var</a:t>
-            </a:r>
-            <a:endParaRPr lang="en-US" sz="1500" dirty="0"/>
-          </a:p>
-        </p:txBody>
-      </p:sp>
-      <p:sp>
-        <p:nvSpPr>
-          <p:cNvPr id="24" name="Text 22"/>
-          <p:cNvSpPr txBox="1"/>
-          <p:nvPr/>
-        </p:nvSpPr>
-        <p:spPr>
-          <a:xfrm>
-            <a:off x="5513832" y="4480560"/>
-            <a:ext cx="1600200" cy="274320"/>
-          </a:xfrm>
-          <a:prstGeom prst="rect">
-            <a:avLst/>
-          </a:prstGeom>
-          <a:noFill/>
-          <a:ln/>
-        </p:spPr>
-        <p:txBody>
-          <a:bodyPr wrap="square" lIns="0" tIns="0" rIns="0" bIns="0" rtlCol="0" anchor="t"/>
-          <a:lstStyle/>
-          <a:p>
-            <a:pPr algn="l" indent="0" marL="0">
-              <a:buNone/>
-            </a:pPr>
-            <a:r>
-              <a:rPr lang="en-US" sz="750" dirty="0">
-                <a:solidFill>
-                  <a:srgbClr val="E5E7EB"/>
-                </a:solidFill>
-                <a:latin typeface="Calibri" pitchFamily="34" charset="0"/>
-                <a:ea typeface="Calibri" pitchFamily="34" charset="-122"/>
-                <a:cs typeface="Calibri" pitchFamily="34" charset="-120"/>
-              </a:rPr>
-              <a:t>switches offline archive → live NASA FIRMS</a:t>
-            </a:r>
-            <a:endParaRPr lang="en-US" sz="750" dirty="0"/>
-          </a:p>
-        </p:txBody>
-      </p:sp>
-      <p:sp>
-        <p:nvSpPr>
-          <p:cNvPr id="25" name="Text 23"/>
-          <p:cNvSpPr txBox="1"/>
-          <p:nvPr/>
-        </p:nvSpPr>
-        <p:spPr>
-          <a:xfrm>
-            <a:off x="7214616" y="4206240"/>
-            <a:ext cx="1645920" cy="274320"/>
-          </a:xfrm>
-          <a:prstGeom prst="rect">
-            <a:avLst/>
-          </a:prstGeom>
-          <a:noFill/>
-          <a:ln/>
-        </p:spPr>
-        <p:txBody>
-          <a:bodyPr wrap="square" lIns="0" tIns="0" rIns="0" bIns="0" rtlCol="0" anchor="t"/>
-          <a:lstStyle/>
-          <a:p>
-            <a:pPr algn="l" indent="0" marL="0">
-              <a:buNone/>
-            </a:pPr>
-            <a:r>
-              <a:rPr lang="en-US" sz="1500" b="1" dirty="0">
-                <a:solidFill>
-                  <a:srgbClr val="FB923C"/>
-                </a:solidFill>
-                <a:latin typeface="Calibri" pitchFamily="34" charset="0"/>
-                <a:ea typeface="Calibri" pitchFamily="34" charset="-122"/>
-                <a:cs typeface="Calibri" pitchFamily="34" charset="-120"/>
-              </a:rPr>
-              <a:t>Open</a:t>
-            </a:r>
-            <a:endParaRPr lang="en-US" sz="1500" dirty="0"/>
-          </a:p>
-        </p:txBody>
-      </p:sp>
-      <p:sp>
-        <p:nvSpPr>
-          <p:cNvPr id="26" name="Text 24"/>
-          <p:cNvSpPr txBox="1"/>
-          <p:nvPr/>
-        </p:nvSpPr>
-        <p:spPr>
-          <a:xfrm>
-            <a:off x="7214616" y="4480560"/>
-            <a:ext cx="1600200" cy="274320"/>
-          </a:xfrm>
-          <a:prstGeom prst="rect">
-            <a:avLst/>
-          </a:prstGeom>
-          <a:noFill/>
-          <a:ln/>
-        </p:spPr>
-        <p:txBody>
-          <a:bodyPr wrap="square" lIns="0" tIns="0" rIns="0" bIns="0" rtlCol="0" anchor="t"/>
-          <a:lstStyle/>
-          <a:p>
-            <a:pPr algn="l" indent="0" marL="0">
-              <a:buNone/>
-            </a:pPr>
-            <a:r>
-              <a:rPr lang="en-US" sz="750" dirty="0">
-                <a:solidFill>
-                  <a:srgbClr val="E5E7EB"/>
-                </a:solidFill>
-                <a:latin typeface="Calibri" pitchFamily="34" charset="0"/>
-                <a:ea typeface="Calibri" pitchFamily="34" charset="-122"/>
-                <a:cs typeface="Calibri" pitchFamily="34" charset="-120"/>
-              </a:rPr>
-              <a:t>GeoJSON / API — plugs into any GIS NTRO runs</a:t>
-            </a:r>
-            <a:endParaRPr lang="en-US" sz="750" dirty="0"/>
           </a:p>
         </p:txBody>
       </p:sp>
@@ -9399,7 +13964,7 @@
                 <a:ea typeface="Calibri" pitchFamily="34" charset="-122"/>
                 <a:cs typeface="Calibri" pitchFamily="34" charset="-120"/>
               </a:rPr>
-              <a:t>&lt;TEAM NAME&gt;</a:t>
+              <a:t>FireOrbit</a:t>
             </a:r>
             <a:endParaRPr lang="en-US" sz="900" dirty="0"/>
           </a:p>
@@ -9438,7 +14003,7 @@
                 <a:ea typeface="Calibri" pitchFamily="34" charset="-122"/>
                 <a:cs typeface="Calibri" pitchFamily="34" charset="-120"/>
               </a:rPr>
-              <a:t>IMPACT AND BENEFITS</a:t>
+              <a:t>FEASIBILITY AND VIABILITY</a:t>
             </a:r>
             <a:endParaRPr lang="en-US" sz="2200" dirty="0"/>
           </a:p>
@@ -9531,11 +14096,11 @@
         <p:spPr>
           <a:xfrm>
             <a:off x="274320" y="685800"/>
-            <a:ext cx="4206240" cy="2103120"/>
+            <a:ext cx="2788920" cy="3154680"/>
           </a:xfrm>
           <a:prstGeom prst="roundRect">
             <a:avLst>
-              <a:gd name="adj" fmla="val 2174"/>
+              <a:gd name="adj" fmla="val 1639"/>
             </a:avLst>
           </a:prstGeom>
           <a:solidFill>
@@ -9558,7 +14123,7 @@
         <p:spPr>
           <a:xfrm>
             <a:off x="365760" y="731520"/>
-            <a:ext cx="4023360" cy="228600"/>
+            <a:ext cx="2651760" cy="228600"/>
           </a:xfrm>
           <a:prstGeom prst="rect">
             <a:avLst/>
@@ -9576,13 +14141,13 @@
             <a:r>
               <a:rPr lang="en-US" sz="1050" b="1" dirty="0">
                 <a:solidFill>
-                  <a:srgbClr val="1D4ED8"/>
-                </a:solidFill>
-                <a:latin typeface="Calibri" pitchFamily="34" charset="0"/>
-                <a:ea typeface="Calibri" pitchFamily="34" charset="-122"/>
-                <a:cs typeface="Calibri" pitchFamily="34" charset="-120"/>
-              </a:rPr>
-              <a:t>➤ Potential impact on the target audience</a:t>
+                  <a:srgbClr val="15803D"/>
+                </a:solidFill>
+                <a:latin typeface="Calibri" pitchFamily="34" charset="0"/>
+                <a:ea typeface="Calibri" pitchFamily="34" charset="-122"/>
+                <a:cs typeface="Calibri" pitchFamily="34" charset="-120"/>
+              </a:rPr>
+              <a:t>➤ Analysis of the feasibility of the idea</a:t>
             </a:r>
             <a:endParaRPr lang="en-US" sz="1050" dirty="0"/>
           </a:p>
@@ -9597,7 +14162,7 @@
         <p:spPr>
           <a:xfrm>
             <a:off x="365760" y="1005840"/>
-            <a:ext cx="4023360" cy="1737360"/>
+            <a:ext cx="2606040" cy="2788920"/>
           </a:xfrm>
           <a:prstGeom prst="rect">
             <a:avLst/>
@@ -9625,7 +14190,7 @@
                 <a:ea typeface="Calibri" pitchFamily="34" charset="-122"/>
                 <a:cs typeface="Calibri" pitchFamily="34" charset="-120"/>
               </a:rPr>
-              <a:t>Disaster management (NDMA / SDMAs / fire services): alerts only on abnormal industrial heat → faster, correctly-targeted response to plant fires &amp; explosions.</a:t>
+              <a:t>All inputs are free &amp; open: FIRMS MAP_KEY (instant), OSM Overpass, Copernicus Sentinel-2, NASA Worldview.</a:t>
             </a:r>
             <a:endParaRPr lang="en-US" sz="950" dirty="0"/>
           </a:p>
@@ -9646,7 +14211,7 @@
                 <a:ea typeface="Calibri" pitchFamily="34" charset="-122"/>
                 <a:cs typeface="Calibri" pitchFamily="34" charset="-120"/>
               </a:rPr>
-              <a:t>NTRO &amp; security agencies: a national registry of persistent thermal sources with activity history; detects undeclared industrial activity; change detection (shutdowns, restarts, surges).</a:t>
+              <a:t>Working end-to-end prototype already exists: 22 k detections → classified in 7 s on a laptop; model trains in seconds.</a:t>
             </a:r>
             <a:endParaRPr lang="en-US" sz="950" dirty="0"/>
           </a:p>
@@ -9667,7 +14232,7 @@
                 <a:ea typeface="Calibri" pitchFamily="34" charset="-122"/>
                 <a:cs typeface="Calibri" pitchFamily="34" charset="-120"/>
               </a:rPr>
-              <a:t>CPCB / MoEFCC: attribute district fires to stubble burning vs industry; flaring inventories.</a:t>
+              <a:t>Same pipeline switches to live FIRMS with one env variable; Overpass is queried only around hotspot cells → India-wide in minutes.</a:t>
             </a:r>
             <a:endParaRPr lang="en-US" sz="950" dirty="0"/>
           </a:p>
@@ -9688,7 +14253,49 @@
                 <a:ea typeface="Calibri" pitchFamily="34" charset="-122"/>
                 <a:cs typeface="Calibri" pitchFamily="34" charset="-120"/>
               </a:rPr>
-              <a:t>Insurers &amp; industry: verified incident records; compliance evidence.</a:t>
+              <a:t>Lightweight stack (SQLite / FastAPI / React) → one VM, NIC cloud or an air-gapped NTRO server.</a:t>
+            </a:r>
+            <a:endParaRPr lang="en-US" sz="950" dirty="0"/>
+          </a:p>
+          <a:p>
+            <a:pPr marL="127000" indent="-127000">
+              <a:spcAft>
+                <a:spcPts val="200"/>
+              </a:spcAft>
+              <a:buSzPct val="100000"/>
+              <a:buChar char="•"/>
+            </a:pPr>
+            <a:r>
+              <a:rPr lang="en-US" sz="950" dirty="0">
+                <a:solidFill>
+                  <a:srgbClr val="1F2937"/>
+                </a:solidFill>
+                <a:latin typeface="Calibri" pitchFamily="34" charset="0"/>
+                <a:ea typeface="Calibri" pitchFamily="34" charset="-122"/>
+                <a:cs typeface="Calibri" pitchFamily="34" charset="-120"/>
+              </a:rPr>
+              <a:t>Explainable rules let analysts audit and tune; ML improves as labelled incidents accumulate.</a:t>
+            </a:r>
+            <a:endParaRPr lang="en-US" sz="950" dirty="0"/>
+          </a:p>
+          <a:p>
+            <a:pPr marL="127000" indent="-127000">
+              <a:spcAft>
+                <a:spcPts val="200"/>
+              </a:spcAft>
+              <a:buSzPct val="100000"/>
+              <a:buChar char="•"/>
+            </a:pPr>
+            <a:r>
+              <a:rPr lang="en-US" sz="950" dirty="0">
+                <a:solidFill>
+                  <a:srgbClr val="1F2937"/>
+                </a:solidFill>
+                <a:latin typeface="Calibri" pitchFamily="34" charset="0"/>
+                <a:ea typeface="Calibri" pitchFamily="34" charset="-122"/>
+                <a:cs typeface="Calibri" pitchFamily="34" charset="-120"/>
+              </a:rPr>
+              <a:t>Static demo already live on GitHub Pages.</a:t>
             </a:r>
             <a:endParaRPr lang="en-US" sz="950" dirty="0"/>
           </a:p>
@@ -9702,12 +14309,12 @@
         </p:nvSpPr>
         <p:spPr>
           <a:xfrm>
-            <a:off x="4572000" y="685800"/>
-            <a:ext cx="4297680" cy="2103120"/>
+            <a:off x="3154680" y="685800"/>
+            <a:ext cx="2788920" cy="3154680"/>
           </a:xfrm>
           <a:prstGeom prst="roundRect">
             <a:avLst>
-              <a:gd name="adj" fmla="val 2174"/>
+              <a:gd name="adj" fmla="val 1639"/>
             </a:avLst>
           </a:prstGeom>
           <a:solidFill>
@@ -9729,8 +14336,8 @@
         </p:nvSpPr>
         <p:spPr>
           <a:xfrm>
-            <a:off x="4663440" y="731520"/>
-            <a:ext cx="4114800" cy="228600"/>
+            <a:off x="3246120" y="731520"/>
+            <a:ext cx="2651760" cy="228600"/>
           </a:xfrm>
           <a:prstGeom prst="rect">
             <a:avLst/>
@@ -9748,13 +14355,13 @@
             <a:r>
               <a:rPr lang="en-US" sz="1050" b="1" dirty="0">
                 <a:solidFill>
-                  <a:srgbClr val="15803D"/>
-                </a:solidFill>
-                <a:latin typeface="Calibri" pitchFamily="34" charset="0"/>
-                <a:ea typeface="Calibri" pitchFamily="34" charset="-122"/>
-                <a:cs typeface="Calibri" pitchFamily="34" charset="-120"/>
-              </a:rPr>
-              <a:t>➤ Benefits of the solution</a:t>
+                  <a:srgbClr val="B91C1C"/>
+                </a:solidFill>
+                <a:latin typeface="Calibri" pitchFamily="34" charset="0"/>
+                <a:ea typeface="Calibri" pitchFamily="34" charset="-122"/>
+                <a:cs typeface="Calibri" pitchFamily="34" charset="-120"/>
+              </a:rPr>
+              <a:t>➤ Potential challenges and risks</a:t>
             </a:r>
             <a:endParaRPr lang="en-US" sz="1050" dirty="0"/>
           </a:p>
@@ -9768,8 +14375,8 @@
         </p:nvSpPr>
         <p:spPr>
           <a:xfrm>
-            <a:off x="4663440" y="1005840"/>
-            <a:ext cx="4114800" cy="1737360"/>
+            <a:off x="3246120" y="1005840"/>
+            <a:ext cx="2606040" cy="2788920"/>
           </a:xfrm>
           <a:prstGeom prst="rect">
             <a:avLst/>
@@ -9797,7 +14404,7 @@
                 <a:ea typeface="Calibri" pitchFamily="34" charset="-122"/>
                 <a:cs typeface="Calibri" pitchFamily="34" charset="-120"/>
               </a:rPr>
-              <a:t>Social: earlier warning for communities near refineries, steel plants, chemical complexes; better use of fire-service capacity.</a:t>
+              <a:t>Incomplete OSM coverage of Indian industry (small kilns, sponge-iron units).</a:t>
             </a:r>
             <a:endParaRPr lang="en-US" sz="950" dirty="0"/>
           </a:p>
@@ -9818,7 +14425,7 @@
                 <a:ea typeface="Calibri" pitchFamily="34" charset="-122"/>
                 <a:cs typeface="Calibri" pitchFamily="34" charset="-120"/>
               </a:rPr>
-              <a:t>Economic: 99 % fewer hotspots to triage; ₹0 data licensing; reduced losses through early detection; runs on one VM.</a:t>
+              <a:t>Cloud cover &amp; 375 m pixel offsets between passes.</a:t>
             </a:r>
             <a:endParaRPr lang="en-US" sz="950" dirty="0"/>
           </a:p>
@@ -9839,7 +14446,7 @@
                 <a:ea typeface="Calibri" pitchFamily="34" charset="-122"/>
                 <a:cs typeface="Calibri" pitchFamily="34" charset="-120"/>
               </a:rPr>
-              <a:t>Environmental: separates agricultural burning from industrial emissions; flaring and coal-fire monitoring for climate reporting.</a:t>
+              <a:t>Few labelled real incidents for supervised ML; synthetic archive is cleaner than reality.</a:t>
             </a:r>
             <a:endParaRPr lang="en-US" sz="950" dirty="0"/>
           </a:p>
@@ -9860,7 +14467,49 @@
                 <a:ea typeface="Calibri" pitchFamily="34" charset="-122"/>
                 <a:cs typeface="Calibri" pitchFamily="34" charset="-120"/>
               </a:rPr>
-              <a:t>Strategic: open, explainable, auditable — deployable on sovereign / air-gapped infrastructure.</a:t>
+              <a:t>Overpass rate limits when scaling to national, multi-year archives.</a:t>
+            </a:r>
+            <a:endParaRPr lang="en-US" sz="950" dirty="0"/>
+          </a:p>
+          <a:p>
+            <a:pPr marL="127000" indent="-127000">
+              <a:spcAft>
+                <a:spcPts val="200"/>
+              </a:spcAft>
+              <a:buSzPct val="100000"/>
+              <a:buChar char="•"/>
+            </a:pPr>
+            <a:r>
+              <a:rPr lang="en-US" sz="950" dirty="0">
+                <a:solidFill>
+                  <a:srgbClr val="1F2937"/>
+                </a:solidFill>
+                <a:latin typeface="Calibri" pitchFamily="34" charset="0"/>
+                <a:ea typeface="Calibri" pitchFamily="34" charset="-122"/>
+                <a:cs typeface="Calibri" pitchFamily="34" charset="-120"/>
+              </a:rPr>
+              <a:t>False alarms from legitimate process changes (furnace restart, flaring during maintenance).</a:t>
+            </a:r>
+            <a:endParaRPr lang="en-US" sz="950" dirty="0"/>
+          </a:p>
+          <a:p>
+            <a:pPr marL="127000" indent="-127000">
+              <a:spcAft>
+                <a:spcPts val="200"/>
+              </a:spcAft>
+              <a:buSzPct val="100000"/>
+              <a:buChar char="•"/>
+            </a:pPr>
+            <a:r>
+              <a:rPr lang="en-US" sz="950" dirty="0">
+                <a:solidFill>
+                  <a:srgbClr val="1F2937"/>
+                </a:solidFill>
+                <a:latin typeface="Calibri" pitchFamily="34" charset="0"/>
+                <a:ea typeface="Calibri" pitchFamily="34" charset="-122"/>
+                <a:cs typeface="Calibri" pitchFamily="34" charset="-120"/>
+              </a:rPr>
+              <a:t>Sub-pixel sources (small flares) below VIIRS detection threshold.</a:t>
             </a:r>
             <a:endParaRPr lang="en-US" sz="950" dirty="0"/>
           </a:p>
@@ -9874,12 +14523,226 @@
         </p:nvSpPr>
         <p:spPr>
           <a:xfrm>
-            <a:off x="274320" y="2880360"/>
-            <a:ext cx="8595360" cy="1874520"/>
+            <a:off x="6035040" y="685800"/>
+            <a:ext cx="2834640" cy="3154680"/>
           </a:xfrm>
           <a:prstGeom prst="roundRect">
             <a:avLst>
-              <a:gd name="adj" fmla="val 2439"/>
+              <a:gd name="adj" fmla="val 1613"/>
+            </a:avLst>
+          </a:prstGeom>
+          <a:solidFill>
+            <a:srgbClr val="FFFFFF"/>
+          </a:solidFill>
+          <a:ln w="9525">
+            <a:solidFill>
+              <a:srgbClr val="D1D5DB"/>
+            </a:solidFill>
+            <a:prstDash val="solid"/>
+          </a:ln>
+        </p:spPr>
+      </p:sp>
+      <p:sp>
+        <p:nvSpPr>
+          <p:cNvPr id="13" name="Text 11"/>
+          <p:cNvSpPr txBox="1"/>
+          <p:nvPr/>
+        </p:nvSpPr>
+        <p:spPr>
+          <a:xfrm>
+            <a:off x="6126480" y="731520"/>
+            <a:ext cx="2697480" cy="228600"/>
+          </a:xfrm>
+          <a:prstGeom prst="rect">
+            <a:avLst/>
+          </a:prstGeom>
+          <a:noFill/>
+          <a:ln/>
+        </p:spPr>
+        <p:txBody>
+          <a:bodyPr wrap="square" lIns="0" tIns="0" rIns="0" bIns="0" rtlCol="0" anchor="t"/>
+          <a:lstStyle/>
+          <a:p>
+            <a:pPr algn="l" indent="0" marL="0">
+              <a:buNone/>
+            </a:pPr>
+            <a:r>
+              <a:rPr lang="en-US" sz="1050" b="1" dirty="0">
+                <a:solidFill>
+                  <a:srgbClr val="1D4ED8"/>
+                </a:solidFill>
+                <a:latin typeface="Calibri" pitchFamily="34" charset="0"/>
+                <a:ea typeface="Calibri" pitchFamily="34" charset="-122"/>
+                <a:cs typeface="Calibri" pitchFamily="34" charset="-120"/>
+              </a:rPr>
+              <a:t>➤ Strategies for overcoming these challenges</a:t>
+            </a:r>
+            <a:endParaRPr lang="en-US" sz="1050" dirty="0"/>
+          </a:p>
+        </p:txBody>
+      </p:sp>
+      <p:sp>
+        <p:nvSpPr>
+          <p:cNvPr id="14" name="Text 12"/>
+          <p:cNvSpPr txBox="1"/>
+          <p:nvPr/>
+        </p:nvSpPr>
+        <p:spPr>
+          <a:xfrm>
+            <a:off x="6126480" y="1005840"/>
+            <a:ext cx="2651760" cy="2788920"/>
+          </a:xfrm>
+          <a:prstGeom prst="rect">
+            <a:avLst/>
+          </a:prstGeom>
+          <a:noFill/>
+          <a:ln/>
+        </p:spPr>
+        <p:txBody>
+          <a:bodyPr wrap="square" lIns="12700" tIns="12700" rIns="12700" bIns="12700" rtlCol="0" anchor="t"/>
+          <a:lstStyle/>
+          <a:p>
+            <a:pPr marL="127000" indent="-127000">
+              <a:spcAft>
+                <a:spcPts val="200"/>
+              </a:spcAft>
+              <a:buSzPct val="100000"/>
+              <a:buChar char="•"/>
+            </a:pPr>
+            <a:r>
+              <a:rPr lang="en-US" sz="950" dirty="0">
+                <a:solidFill>
+                  <a:srgbClr val="1F2937"/>
+                </a:solidFill>
+                <a:latin typeface="Calibri" pitchFamily="34" charset="0"/>
+                <a:ea typeface="Calibri" pitchFamily="34" charset="-122"/>
+                <a:cs typeface="Calibri" pitchFamily="34" charset="-120"/>
+              </a:rPr>
+              <a:t>Persistence signature detects unregistered sources even with no OSM facility; curated facility list merged with OSM; Sentinel-2 chip verification.</a:t>
+            </a:r>
+            <a:endParaRPr lang="en-US" sz="950" dirty="0"/>
+          </a:p>
+          <a:p>
+            <a:pPr marL="127000" indent="-127000">
+              <a:spcAft>
+                <a:spcPts val="200"/>
+              </a:spcAft>
+              <a:buSzPct val="100000"/>
+              <a:buChar char="•"/>
+            </a:pPr>
+            <a:r>
+              <a:rPr lang="en-US" sz="950" dirty="0">
+                <a:solidFill>
+                  <a:srgbClr val="1F2937"/>
+                </a:solidFill>
+                <a:latin typeface="Calibri" pitchFamily="34" charset="0"/>
+                <a:ea typeface="Calibri" pitchFamily="34" charset="-122"/>
+                <a:cs typeface="Calibri" pitchFamily="34" charset="-120"/>
+              </a:rPr>
+              <a:t>90-day window + 4 passes/day from 3 VIIRS satellites; DBSCAN grouping absorbs pixel jitter.</a:t>
+            </a:r>
+            <a:endParaRPr lang="en-US" sz="950" dirty="0"/>
+          </a:p>
+          <a:p>
+            <a:pPr marL="127000" indent="-127000">
+              <a:spcAft>
+                <a:spcPts val="200"/>
+              </a:spcAft>
+              <a:buSzPct val="100000"/>
+              <a:buChar char="•"/>
+            </a:pPr>
+            <a:r>
+              <a:rPr lang="en-US" sz="950" dirty="0">
+                <a:solidFill>
+                  <a:srgbClr val="1F2937"/>
+                </a:solidFill>
+                <a:latin typeface="Calibri" pitchFamily="34" charset="0"/>
+                <a:ea typeface="Calibri" pitchFamily="34" charset="-122"/>
+                <a:cs typeface="Calibri" pitchFamily="34" charset="-120"/>
+              </a:rPr>
+              <a:t>Rules as strong prior; validate on documented incidents (news / PESO / CPCB); analyst feedback loop → retrain.</a:t>
+            </a:r>
+            <a:endParaRPr lang="en-US" sz="950" dirty="0"/>
+          </a:p>
+          <a:p>
+            <a:pPr marL="127000" indent="-127000">
+              <a:spcAft>
+                <a:spcPts val="200"/>
+              </a:spcAft>
+              <a:buSzPct val="100000"/>
+              <a:buChar char="•"/>
+            </a:pPr>
+            <a:r>
+              <a:rPr lang="en-US" sz="950" dirty="0">
+                <a:solidFill>
+                  <a:srgbClr val="1F2937"/>
+                </a:solidFill>
+                <a:latin typeface="Calibri" pitchFamily="34" charset="0"/>
+                <a:ea typeface="Calibri" pitchFamily="34" charset="-122"/>
+                <a:cs typeface="Calibri" pitchFamily="34" charset="-120"/>
+              </a:rPr>
+              <a:t>Around-cell queries + disk cache; self-hosted Overpass or ESA WorldCover raster for scale.</a:t>
+            </a:r>
+            <a:endParaRPr lang="en-US" sz="950" dirty="0"/>
+          </a:p>
+          <a:p>
+            <a:pPr marL="127000" indent="-127000">
+              <a:spcAft>
+                <a:spcPts val="200"/>
+              </a:spcAft>
+              <a:buSzPct val="100000"/>
+              <a:buChar char="•"/>
+            </a:pPr>
+            <a:r>
+              <a:rPr lang="en-US" sz="950" dirty="0">
+                <a:solidFill>
+                  <a:srgbClr val="1F2937"/>
+                </a:solidFill>
+                <a:latin typeface="Calibri" pitchFamily="34" charset="0"/>
+                <a:ea typeface="Calibri" pitchFamily="34" charset="-122"/>
+                <a:cs typeface="Calibri" pitchFamily="34" charset="-120"/>
+              </a:rPr>
+              <a:t>Baseline-relative thresholds + analyst override; confidence shown on every alert.</a:t>
+            </a:r>
+            <a:endParaRPr lang="en-US" sz="950" dirty="0"/>
+          </a:p>
+          <a:p>
+            <a:pPr marL="127000" indent="-127000">
+              <a:spcAft>
+                <a:spcPts val="200"/>
+              </a:spcAft>
+              <a:buSzPct val="100000"/>
+              <a:buChar char="•"/>
+            </a:pPr>
+            <a:r>
+              <a:rPr lang="en-US" sz="950" dirty="0">
+                <a:solidFill>
+                  <a:srgbClr val="1F2937"/>
+                </a:solidFill>
+                <a:latin typeface="Calibri" pitchFamily="34" charset="0"/>
+                <a:ea typeface="Calibri" pitchFamily="34" charset="-122"/>
+                <a:cs typeface="Calibri" pitchFamily="34" charset="-120"/>
+              </a:rPr>
+              <a:t>Add VIIRS Nightfire (VNF) for flare temperature; Landsat TIRS for small sources.</a:t>
+            </a:r>
+            <a:endParaRPr lang="en-US" sz="950" dirty="0"/>
+          </a:p>
+        </p:txBody>
+      </p:sp>
+      <p:sp>
+        <p:nvSpPr>
+          <p:cNvPr id="15" name="Shape 13"/>
+          <p:cNvSpPr/>
+          <p:nvPr/>
+        </p:nvSpPr>
+        <p:spPr>
+          <a:xfrm>
+            <a:off x="274320" y="3950208"/>
+            <a:ext cx="8595360" cy="804672"/>
+          </a:xfrm>
+          <a:prstGeom prst="roundRect">
+            <a:avLst>
+              <a:gd name="adj" fmla="val 5682"/>
             </a:avLst>
           </a:prstGeom>
           <a:solidFill>
@@ -9895,14 +14758,14 @@
       </p:sp>
       <p:sp>
         <p:nvSpPr>
-          <p:cNvPr id="13" name="Text 11"/>
+          <p:cNvPr id="16" name="Text 14"/>
           <p:cNvSpPr txBox="1"/>
           <p:nvPr/>
         </p:nvSpPr>
         <p:spPr>
           <a:xfrm>
-            <a:off x="411480" y="2926080"/>
-            <a:ext cx="8321040" cy="256032"/>
+            <a:off x="411480" y="4005072"/>
+            <a:ext cx="1828800" cy="201168"/>
           </a:xfrm>
           <a:prstGeom prst="rect">
             <a:avLst/>
@@ -9918,7 +14781,7 @@
               <a:buNone/>
             </a:pPr>
             <a:r>
-              <a:rPr lang="en-US" sz="1050" b="1" dirty="0">
+              <a:rPr lang="en-US" sz="900" b="1" dirty="0">
                 <a:solidFill>
                   <a:srgbClr val="FBBF24"/>
                 </a:solidFill>
@@ -9926,126 +14789,9 @@
                 <a:ea typeface="Calibri" pitchFamily="34" charset="-122"/>
                 <a:cs typeface="Calibri" pitchFamily="34" charset="-120"/>
               </a:rPr>
-              <a:t>REPORT — results of the working prototype (90-day labelled archive over real Indian sites)</a:t>
-            </a:r>
-            <a:endParaRPr lang="en-US" sz="1050" dirty="0"/>
-          </a:p>
-        </p:txBody>
-      </p:sp>
-      <p:sp>
-        <p:nvSpPr>
-          <p:cNvPr id="14" name="Text 12"/>
-          <p:cNvSpPr txBox="1"/>
-          <p:nvPr/>
-        </p:nvSpPr>
-        <p:spPr>
-          <a:xfrm>
-            <a:off x="411480" y="3218688"/>
-            <a:ext cx="1005840" cy="411480"/>
-          </a:xfrm>
-          <a:prstGeom prst="rect">
-            <a:avLst/>
-          </a:prstGeom>
-          <a:noFill/>
-          <a:ln/>
-        </p:spPr>
-        <p:txBody>
-          <a:bodyPr wrap="square" lIns="0" tIns="0" rIns="0" bIns="0" rtlCol="0" anchor="ctr"/>
-          <a:lstStyle/>
-          <a:p>
-            <a:pPr algn="l" indent="0" marL="0">
-              <a:buNone/>
-            </a:pPr>
-            <a:r>
-              <a:rPr lang="en-US" sz="2000" b="1" dirty="0">
-                <a:solidFill>
-                  <a:srgbClr val="FB923C"/>
-                </a:solidFill>
-                <a:latin typeface="Calibri" pitchFamily="34" charset="0"/>
-                <a:ea typeface="Calibri" pitchFamily="34" charset="-122"/>
-                <a:cs typeface="Calibri" pitchFamily="34" charset="-120"/>
-              </a:rPr>
-              <a:t>22,179</a:t>
-            </a:r>
-            <a:endParaRPr lang="en-US" sz="2000" dirty="0"/>
-          </a:p>
-        </p:txBody>
-      </p:sp>
-      <p:sp>
-        <p:nvSpPr>
-          <p:cNvPr id="15" name="Text 13"/>
-          <p:cNvSpPr txBox="1"/>
-          <p:nvPr/>
-        </p:nvSpPr>
-        <p:spPr>
-          <a:xfrm>
-            <a:off x="1463040" y="3218688"/>
-            <a:ext cx="1691640" cy="411480"/>
-          </a:xfrm>
-          <a:prstGeom prst="rect">
-            <a:avLst/>
-          </a:prstGeom>
-          <a:noFill/>
-          <a:ln/>
-        </p:spPr>
-        <p:txBody>
-          <a:bodyPr wrap="square" lIns="0" tIns="0" rIns="0" bIns="0" rtlCol="0" anchor="ctr"/>
-          <a:lstStyle/>
-          <a:p>
-            <a:pPr algn="l" indent="0" marL="0">
-              <a:buNone/>
-            </a:pPr>
-            <a:r>
-              <a:rPr lang="en-US" sz="850" dirty="0">
-                <a:solidFill>
-                  <a:srgbClr val="E5E7EB"/>
-                </a:solidFill>
-                <a:latin typeface="Calibri" pitchFamily="34" charset="0"/>
-                <a:ea typeface="Calibri" pitchFamily="34" charset="-122"/>
-                <a:cs typeface="Calibri" pitchFamily="34" charset="-120"/>
-              </a:rPr>
-              <a:t>FIRMS detections classified in ~7 s</a:t>
-            </a:r>
-            <a:endParaRPr lang="en-US" sz="850" dirty="0"/>
-          </a:p>
-        </p:txBody>
-      </p:sp>
-      <p:sp>
-        <p:nvSpPr>
-          <p:cNvPr id="16" name="Text 14"/>
-          <p:cNvSpPr txBox="1"/>
-          <p:nvPr/>
-        </p:nvSpPr>
-        <p:spPr>
-          <a:xfrm>
-            <a:off x="3200400" y="3218688"/>
-            <a:ext cx="1005840" cy="411480"/>
-          </a:xfrm>
-          <a:prstGeom prst="rect">
-            <a:avLst/>
-          </a:prstGeom>
-          <a:noFill/>
-          <a:ln/>
-        </p:spPr>
-        <p:txBody>
-          <a:bodyPr wrap="square" lIns="0" tIns="0" rIns="0" bIns="0" rtlCol="0" anchor="ctr"/>
-          <a:lstStyle/>
-          <a:p>
-            <a:pPr algn="l" indent="0" marL="0">
-              <a:buNone/>
-            </a:pPr>
-            <a:r>
-              <a:rPr lang="en-US" sz="2000" b="1" dirty="0">
-                <a:solidFill>
-                  <a:srgbClr val="FB923C"/>
-                </a:solidFill>
-                <a:latin typeface="Calibri" pitchFamily="34" charset="0"/>
-                <a:ea typeface="Calibri" pitchFamily="34" charset="-122"/>
-                <a:cs typeface="Calibri" pitchFamily="34" charset="-120"/>
-              </a:rPr>
-              <a:t>114</a:t>
-            </a:r>
-            <a:endParaRPr lang="en-US" sz="2000" dirty="0"/>
+              <a:t>VIABILITY</a:t>
+            </a:r>
+            <a:endParaRPr lang="en-US" sz="900" dirty="0"/>
           </a:p>
         </p:txBody>
       </p:sp>
@@ -10057,359 +14803,8 @@
         </p:nvSpPr>
         <p:spPr>
           <a:xfrm>
-            <a:off x="4251960" y="3218688"/>
-            <a:ext cx="1691640" cy="411480"/>
-          </a:xfrm>
-          <a:prstGeom prst="rect">
-            <a:avLst/>
-          </a:prstGeom>
-          <a:noFill/>
-          <a:ln/>
-        </p:spPr>
-        <p:txBody>
-          <a:bodyPr wrap="square" lIns="0" tIns="0" rIns="0" bIns="0" rtlCol="0" anchor="ctr"/>
-          <a:lstStyle/>
-          <a:p>
-            <a:pPr algn="l" indent="0" marL="0">
-              <a:buNone/>
-            </a:pPr>
-            <a:r>
-              <a:rPr lang="en-US" sz="850" dirty="0">
-                <a:solidFill>
-                  <a:srgbClr val="E5E7EB"/>
-                </a:solidFill>
-                <a:latin typeface="Calibri" pitchFamily="34" charset="0"/>
-                <a:ea typeface="Calibri" pitchFamily="34" charset="-122"/>
-                <a:cs typeface="Calibri" pitchFamily="34" charset="-120"/>
-              </a:rPr>
-              <a:t>persistent sources registered</a:t>
-            </a:r>
-            <a:endParaRPr lang="en-US" sz="850" dirty="0"/>
-          </a:p>
-        </p:txBody>
-      </p:sp>
-      <p:sp>
-        <p:nvSpPr>
-          <p:cNvPr id="18" name="Text 16"/>
-          <p:cNvSpPr txBox="1"/>
-          <p:nvPr/>
-        </p:nvSpPr>
-        <p:spPr>
-          <a:xfrm>
-            <a:off x="5989320" y="3218688"/>
-            <a:ext cx="1005840" cy="411480"/>
-          </a:xfrm>
-          <a:prstGeom prst="rect">
-            <a:avLst/>
-          </a:prstGeom>
-          <a:noFill/>
-          <a:ln/>
-        </p:spPr>
-        <p:txBody>
-          <a:bodyPr wrap="square" lIns="0" tIns="0" rIns="0" bIns="0" rtlCol="0" anchor="ctr"/>
-          <a:lstStyle/>
-          <a:p>
-            <a:pPr algn="l" indent="0" marL="0">
-              <a:buNone/>
-            </a:pPr>
-            <a:r>
-              <a:rPr lang="en-US" sz="2000" b="1" dirty="0">
-                <a:solidFill>
-                  <a:srgbClr val="FB923C"/>
-                </a:solidFill>
-                <a:latin typeface="Calibri" pitchFamily="34" charset="0"/>
-                <a:ea typeface="Calibri" pitchFamily="34" charset="-122"/>
-                <a:cs typeface="Calibri" pitchFamily="34" charset="-120"/>
-              </a:rPr>
-              <a:t>138</a:t>
-            </a:r>
-            <a:endParaRPr lang="en-US" sz="2000" dirty="0"/>
-          </a:p>
-        </p:txBody>
-      </p:sp>
-      <p:sp>
-        <p:nvSpPr>
-          <p:cNvPr id="19" name="Text 17"/>
-          <p:cNvSpPr txBox="1"/>
-          <p:nvPr/>
-        </p:nvSpPr>
-        <p:spPr>
-          <a:xfrm>
-            <a:off x="7040880" y="3218688"/>
-            <a:ext cx="1691640" cy="411480"/>
-          </a:xfrm>
-          <a:prstGeom prst="rect">
-            <a:avLst/>
-          </a:prstGeom>
-          <a:noFill/>
-          <a:ln/>
-        </p:spPr>
-        <p:txBody>
-          <a:bodyPr wrap="square" lIns="0" tIns="0" rIns="0" bIns="0" rtlCol="0" anchor="ctr"/>
-          <a:lstStyle/>
-          <a:p>
-            <a:pPr algn="l" indent="0" marL="0">
-              <a:buNone/>
-            </a:pPr>
-            <a:r>
-              <a:rPr lang="en-US" sz="850" dirty="0">
-                <a:solidFill>
-                  <a:srgbClr val="E5E7EB"/>
-                </a:solidFill>
-                <a:latin typeface="Calibri" pitchFamily="34" charset="0"/>
-                <a:ea typeface="Calibri" pitchFamily="34" charset="-122"/>
-                <a:cs typeface="Calibri" pitchFamily="34" charset="-120"/>
-              </a:rPr>
-              <a:t>incident candidates (0.6 % of detections)</a:t>
-            </a:r>
-            <a:endParaRPr lang="en-US" sz="850" dirty="0"/>
-          </a:p>
-        </p:txBody>
-      </p:sp>
-      <p:sp>
-        <p:nvSpPr>
-          <p:cNvPr id="20" name="Text 18"/>
-          <p:cNvSpPr txBox="1"/>
-          <p:nvPr/>
-        </p:nvSpPr>
-        <p:spPr>
-          <a:xfrm>
-            <a:off x="411480" y="3968496"/>
-            <a:ext cx="1005840" cy="411480"/>
-          </a:xfrm>
-          <a:prstGeom prst="rect">
-            <a:avLst/>
-          </a:prstGeom>
-          <a:noFill/>
-          <a:ln/>
-        </p:spPr>
-        <p:txBody>
-          <a:bodyPr wrap="square" lIns="0" tIns="0" rIns="0" bIns="0" rtlCol="0" anchor="ctr"/>
-          <a:lstStyle/>
-          <a:p>
-            <a:pPr algn="l" indent="0" marL="0">
-              <a:buNone/>
-            </a:pPr>
-            <a:r>
-              <a:rPr lang="en-US" sz="2000" b="1" dirty="0">
-                <a:solidFill>
-                  <a:srgbClr val="FB923C"/>
-                </a:solidFill>
-                <a:latin typeface="Calibri" pitchFamily="34" charset="0"/>
-                <a:ea typeface="Calibri" pitchFamily="34" charset="-122"/>
-                <a:cs typeface="Calibri" pitchFamily="34" charset="-120"/>
-              </a:rPr>
-              <a:t>99.9 %</a:t>
-            </a:r>
-            <a:endParaRPr lang="en-US" sz="2000" dirty="0"/>
-          </a:p>
-        </p:txBody>
-      </p:sp>
-      <p:sp>
-        <p:nvSpPr>
-          <p:cNvPr id="21" name="Text 19"/>
-          <p:cNvSpPr txBox="1"/>
-          <p:nvPr/>
-        </p:nvSpPr>
-        <p:spPr>
-          <a:xfrm>
-            <a:off x="1463040" y="3968496"/>
-            <a:ext cx="1691640" cy="411480"/>
-          </a:xfrm>
-          <a:prstGeom prst="rect">
-            <a:avLst/>
-          </a:prstGeom>
-          <a:noFill/>
-          <a:ln/>
-        </p:spPr>
-        <p:txBody>
-          <a:bodyPr wrap="square" lIns="0" tIns="0" rIns="0" bIns="0" rtlCol="0" anchor="ctr"/>
-          <a:lstStyle/>
-          <a:p>
-            <a:pPr algn="l" indent="0" marL="0">
-              <a:buNone/>
-            </a:pPr>
-            <a:r>
-              <a:rPr lang="en-US" sz="850" dirty="0">
-                <a:solidFill>
-                  <a:srgbClr val="E5E7EB"/>
-                </a:solidFill>
-                <a:latin typeface="Calibri" pitchFamily="34" charset="0"/>
-                <a:ea typeface="Calibri" pitchFamily="34" charset="-122"/>
-                <a:cs typeface="Calibri" pitchFamily="34" charset="-120"/>
-              </a:rPr>
-              <a:t>hybrid accuracy (group-aware test split)</a:t>
-            </a:r>
-            <a:endParaRPr lang="en-US" sz="850" dirty="0"/>
-          </a:p>
-        </p:txBody>
-      </p:sp>
-      <p:sp>
-        <p:nvSpPr>
-          <p:cNvPr id="22" name="Text 20"/>
-          <p:cNvSpPr txBox="1"/>
-          <p:nvPr/>
-        </p:nvSpPr>
-        <p:spPr>
-          <a:xfrm>
-            <a:off x="3200400" y="3968496"/>
-            <a:ext cx="1005840" cy="411480"/>
-          </a:xfrm>
-          <a:prstGeom prst="rect">
-            <a:avLst/>
-          </a:prstGeom>
-          <a:noFill/>
-          <a:ln/>
-        </p:spPr>
-        <p:txBody>
-          <a:bodyPr wrap="square" lIns="0" tIns="0" rIns="0" bIns="0" rtlCol="0" anchor="ctr"/>
-          <a:lstStyle/>
-          <a:p>
-            <a:pPr algn="l" indent="0" marL="0">
-              <a:buNone/>
-            </a:pPr>
-            <a:r>
-              <a:rPr lang="en-US" sz="2000" b="1" dirty="0">
-                <a:solidFill>
-                  <a:srgbClr val="FB923C"/>
-                </a:solidFill>
-                <a:latin typeface="Calibri" pitchFamily="34" charset="0"/>
-                <a:ea typeface="Calibri" pitchFamily="34" charset="-122"/>
-                <a:cs typeface="Calibri" pitchFamily="34" charset="-120"/>
-              </a:rPr>
-              <a:t>98.4 %</a:t>
-            </a:r>
-            <a:endParaRPr lang="en-US" sz="2000" dirty="0"/>
-          </a:p>
-        </p:txBody>
-      </p:sp>
-      <p:sp>
-        <p:nvSpPr>
-          <p:cNvPr id="23" name="Text 21"/>
-          <p:cNvSpPr txBox="1"/>
-          <p:nvPr/>
-        </p:nvSpPr>
-        <p:spPr>
-          <a:xfrm>
-            <a:off x="4251960" y="3968496"/>
-            <a:ext cx="1691640" cy="411480"/>
-          </a:xfrm>
-          <a:prstGeom prst="rect">
-            <a:avLst/>
-          </a:prstGeom>
-          <a:noFill/>
-          <a:ln/>
-        </p:spPr>
-        <p:txBody>
-          <a:bodyPr wrap="square" lIns="0" tIns="0" rIns="0" bIns="0" rtlCol="0" anchor="ctr"/>
-          <a:lstStyle/>
-          <a:p>
-            <a:pPr algn="l" indent="0" marL="0">
-              <a:buNone/>
-            </a:pPr>
-            <a:r>
-              <a:rPr lang="en-US" sz="850" dirty="0">
-                <a:solidFill>
-                  <a:srgbClr val="E5E7EB"/>
-                </a:solidFill>
-                <a:latin typeface="Calibri" pitchFamily="34" charset="0"/>
-                <a:ea typeface="Calibri" pitchFamily="34" charset="-122"/>
-                <a:cs typeface="Calibri" pitchFamily="34" charset="-120"/>
-              </a:rPr>
-              <a:t>rules-only accuracy (explainable baseline)</a:t>
-            </a:r>
-            <a:endParaRPr lang="en-US" sz="850" dirty="0"/>
-          </a:p>
-        </p:txBody>
-      </p:sp>
-      <p:sp>
-        <p:nvSpPr>
-          <p:cNvPr id="24" name="Text 22"/>
-          <p:cNvSpPr txBox="1"/>
-          <p:nvPr/>
-        </p:nvSpPr>
-        <p:spPr>
-          <a:xfrm>
-            <a:off x="5989320" y="3968496"/>
-            <a:ext cx="1005840" cy="411480"/>
-          </a:xfrm>
-          <a:prstGeom prst="rect">
-            <a:avLst/>
-          </a:prstGeom>
-          <a:noFill/>
-          <a:ln/>
-        </p:spPr>
-        <p:txBody>
-          <a:bodyPr wrap="square" lIns="0" tIns="0" rIns="0" bIns="0" rtlCol="0" anchor="ctr"/>
-          <a:lstStyle/>
-          <a:p>
-            <a:pPr algn="l" indent="0" marL="0">
-              <a:buNone/>
-            </a:pPr>
-            <a:r>
-              <a:rPr lang="en-US" sz="2000" b="1" dirty="0">
-                <a:solidFill>
-                  <a:srgbClr val="FB923C"/>
-                </a:solidFill>
-                <a:latin typeface="Calibri" pitchFamily="34" charset="0"/>
-                <a:ea typeface="Calibri" pitchFamily="34" charset="-122"/>
-                <a:cs typeface="Calibri" pitchFamily="34" charset="-120"/>
-              </a:rPr>
-              <a:t>6</a:t>
-            </a:r>
-            <a:endParaRPr lang="en-US" sz="2000" dirty="0"/>
-          </a:p>
-        </p:txBody>
-      </p:sp>
-      <p:sp>
-        <p:nvSpPr>
-          <p:cNvPr id="25" name="Text 23"/>
-          <p:cNvSpPr txBox="1"/>
-          <p:nvPr/>
-        </p:nvSpPr>
-        <p:spPr>
-          <a:xfrm>
-            <a:off x="7040880" y="3968496"/>
-            <a:ext cx="1691640" cy="411480"/>
-          </a:xfrm>
-          <a:prstGeom prst="rect">
-            <a:avLst/>
-          </a:prstGeom>
-          <a:noFill/>
-          <a:ln/>
-        </p:spPr>
-        <p:txBody>
-          <a:bodyPr wrap="square" lIns="0" tIns="0" rIns="0" bIns="0" rtlCol="0" anchor="ctr"/>
-          <a:lstStyle/>
-          <a:p>
-            <a:pPr algn="l" indent="0" marL="0">
-              <a:buNone/>
-            </a:pPr>
-            <a:r>
-              <a:rPr lang="en-US" sz="850" dirty="0">
-                <a:solidFill>
-                  <a:srgbClr val="E5E7EB"/>
-                </a:solidFill>
-                <a:latin typeface="Calibri" pitchFamily="34" charset="0"/>
-                <a:ea typeface="Calibri" pitchFamily="34" charset="-122"/>
-                <a:cs typeface="Calibri" pitchFamily="34" charset="-120"/>
-              </a:rPr>
-              <a:t>classes: industrial, flare, mining, agri, wildfire, other</a:t>
-            </a:r>
-            <a:endParaRPr lang="en-US" sz="850" dirty="0"/>
-          </a:p>
-        </p:txBody>
-      </p:sp>
-      <p:sp>
-        <p:nvSpPr>
-          <p:cNvPr id="26" name="Text 24"/>
-          <p:cNvSpPr txBox="1"/>
-          <p:nvPr/>
-        </p:nvSpPr>
-        <p:spPr>
-          <a:xfrm>
-            <a:off x="411480" y="4407408"/>
-            <a:ext cx="8321040" cy="320040"/>
+            <a:off x="411480" y="4206240"/>
+            <a:ext cx="1645920" cy="274320"/>
           </a:xfrm>
           <a:prstGeom prst="rect">
             <a:avLst/>
@@ -10425,15 +14820,366 @@
               <a:buNone/>
             </a:pPr>
             <a:r>
-              <a:rPr lang="en-US" sz="750" i="1" dirty="0">
-                <a:solidFill>
-                  <a:srgbClr val="CBD5E1"/>
-                </a:solidFill>
-                <a:latin typeface="Calibri" pitchFamily="34" charset="0"/>
-                <a:ea typeface="Calibri" pitchFamily="34" charset="-122"/>
-                <a:cs typeface="Calibri" pitchFamily="34" charset="-120"/>
-              </a:rPr>
-              <a:t>Example alerts found: Bhilai Steel 414 MW vs 32 MW baseline · Jamnagar 207 MW vs 19 MW · Tata Steel 101 MW vs 26 MW.  Note: archive is physically simulated and labelled; real-world accuracy will be lower — validation on real incidents is the next-round goal.</a:t>
+              <a:rPr lang="en-US" sz="1500" b="1" dirty="0">
+                <a:solidFill>
+                  <a:srgbClr val="FB923C"/>
+                </a:solidFill>
+                <a:latin typeface="Calibri" pitchFamily="34" charset="0"/>
+                <a:ea typeface="Calibri" pitchFamily="34" charset="-122"/>
+                <a:cs typeface="Calibri" pitchFamily="34" charset="-120"/>
+              </a:rPr>
+              <a:t>₹ 0</a:t>
+            </a:r>
+            <a:endParaRPr lang="en-US" sz="1500" dirty="0"/>
+          </a:p>
+        </p:txBody>
+      </p:sp>
+      <p:sp>
+        <p:nvSpPr>
+          <p:cNvPr id="18" name="Text 16"/>
+          <p:cNvSpPr txBox="1"/>
+          <p:nvPr/>
+        </p:nvSpPr>
+        <p:spPr>
+          <a:xfrm>
+            <a:off x="411480" y="4480560"/>
+            <a:ext cx="1600200" cy="274320"/>
+          </a:xfrm>
+          <a:prstGeom prst="rect">
+            <a:avLst/>
+          </a:prstGeom>
+          <a:noFill/>
+          <a:ln/>
+        </p:spPr>
+        <p:txBody>
+          <a:bodyPr wrap="square" lIns="0" tIns="0" rIns="0" bIns="0" rtlCol="0" anchor="t"/>
+          <a:lstStyle/>
+          <a:p>
+            <a:pPr algn="l" indent="0" marL="0">
+              <a:buNone/>
+            </a:pPr>
+            <a:r>
+              <a:rPr lang="en-US" sz="750" dirty="0">
+                <a:solidFill>
+                  <a:srgbClr val="E5E7EB"/>
+                </a:solidFill>
+                <a:latin typeface="Calibri" pitchFamily="34" charset="0"/>
+                <a:ea typeface="Calibri" pitchFamily="34" charset="-122"/>
+                <a:cs typeface="Calibri" pitchFamily="34" charset="-120"/>
+              </a:rPr>
+              <a:t>data licensing — all open sources</a:t>
+            </a:r>
+            <a:endParaRPr lang="en-US" sz="750" dirty="0"/>
+          </a:p>
+        </p:txBody>
+      </p:sp>
+      <p:sp>
+        <p:nvSpPr>
+          <p:cNvPr id="19" name="Text 17"/>
+          <p:cNvSpPr txBox="1"/>
+          <p:nvPr/>
+        </p:nvSpPr>
+        <p:spPr>
+          <a:xfrm>
+            <a:off x="2112264" y="4206240"/>
+            <a:ext cx="1645920" cy="274320"/>
+          </a:xfrm>
+          <a:prstGeom prst="rect">
+            <a:avLst/>
+          </a:prstGeom>
+          <a:noFill/>
+          <a:ln/>
+        </p:spPr>
+        <p:txBody>
+          <a:bodyPr wrap="square" lIns="0" tIns="0" rIns="0" bIns="0" rtlCol="0" anchor="t"/>
+          <a:lstStyle/>
+          <a:p>
+            <a:pPr algn="l" indent="0" marL="0">
+              <a:buNone/>
+            </a:pPr>
+            <a:r>
+              <a:rPr lang="en-US" sz="1500" b="1" dirty="0">
+                <a:solidFill>
+                  <a:srgbClr val="FB923C"/>
+                </a:solidFill>
+                <a:latin typeface="Calibri" pitchFamily="34" charset="0"/>
+                <a:ea typeface="Calibri" pitchFamily="34" charset="-122"/>
+                <a:cs typeface="Calibri" pitchFamily="34" charset="-120"/>
+              </a:rPr>
+              <a:t>1 VM</a:t>
+            </a:r>
+            <a:endParaRPr lang="en-US" sz="1500" dirty="0"/>
+          </a:p>
+        </p:txBody>
+      </p:sp>
+      <p:sp>
+        <p:nvSpPr>
+          <p:cNvPr id="20" name="Text 18"/>
+          <p:cNvSpPr txBox="1"/>
+          <p:nvPr/>
+        </p:nvSpPr>
+        <p:spPr>
+          <a:xfrm>
+            <a:off x="2112264" y="4480560"/>
+            <a:ext cx="1600200" cy="274320"/>
+          </a:xfrm>
+          <a:prstGeom prst="rect">
+            <a:avLst/>
+          </a:prstGeom>
+          <a:noFill/>
+          <a:ln/>
+        </p:spPr>
+        <p:txBody>
+          <a:bodyPr wrap="square" lIns="0" tIns="0" rIns="0" bIns="0" rtlCol="0" anchor="t"/>
+          <a:lstStyle/>
+          <a:p>
+            <a:pPr algn="l" indent="0" marL="0">
+              <a:buNone/>
+            </a:pPr>
+            <a:r>
+              <a:rPr lang="en-US" sz="750" dirty="0">
+                <a:solidFill>
+                  <a:srgbClr val="E5E7EB"/>
+                </a:solidFill>
+                <a:latin typeface="Calibri" pitchFamily="34" charset="0"/>
+                <a:ea typeface="Calibri" pitchFamily="34" charset="-122"/>
+                <a:cs typeface="Calibri" pitchFamily="34" charset="-120"/>
+              </a:rPr>
+              <a:t>or air-gapped server; SQLite → PostGIS when scaling</a:t>
+            </a:r>
+            <a:endParaRPr lang="en-US" sz="750" dirty="0"/>
+          </a:p>
+        </p:txBody>
+      </p:sp>
+      <p:sp>
+        <p:nvSpPr>
+          <p:cNvPr id="21" name="Text 19"/>
+          <p:cNvSpPr txBox="1"/>
+          <p:nvPr/>
+        </p:nvSpPr>
+        <p:spPr>
+          <a:xfrm>
+            <a:off x="3813048" y="4206240"/>
+            <a:ext cx="1645920" cy="274320"/>
+          </a:xfrm>
+          <a:prstGeom prst="rect">
+            <a:avLst/>
+          </a:prstGeom>
+          <a:noFill/>
+          <a:ln/>
+        </p:spPr>
+        <p:txBody>
+          <a:bodyPr wrap="square" lIns="0" tIns="0" rIns="0" bIns="0" rtlCol="0" anchor="t"/>
+          <a:lstStyle/>
+          <a:p>
+            <a:pPr algn="l" indent="0" marL="0">
+              <a:buNone/>
+            </a:pPr>
+            <a:r>
+              <a:rPr lang="en-US" sz="1500" b="1" dirty="0">
+                <a:solidFill>
+                  <a:srgbClr val="FB923C"/>
+                </a:solidFill>
+                <a:latin typeface="Calibri" pitchFamily="34" charset="0"/>
+                <a:ea typeface="Calibri" pitchFamily="34" charset="-122"/>
+                <a:cs typeface="Calibri" pitchFamily="34" charset="-120"/>
+              </a:rPr>
+              <a:t>~7 s</a:t>
+            </a:r>
+            <a:endParaRPr lang="en-US" sz="1500" dirty="0"/>
+          </a:p>
+        </p:txBody>
+      </p:sp>
+      <p:sp>
+        <p:nvSpPr>
+          <p:cNvPr id="22" name="Text 20"/>
+          <p:cNvSpPr txBox="1"/>
+          <p:nvPr/>
+        </p:nvSpPr>
+        <p:spPr>
+          <a:xfrm>
+            <a:off x="3813048" y="4480560"/>
+            <a:ext cx="1600200" cy="274320"/>
+          </a:xfrm>
+          <a:prstGeom prst="rect">
+            <a:avLst/>
+          </a:prstGeom>
+          <a:noFill/>
+          <a:ln/>
+        </p:spPr>
+        <p:txBody>
+          <a:bodyPr wrap="square" lIns="0" tIns="0" rIns="0" bIns="0" rtlCol="0" anchor="t"/>
+          <a:lstStyle/>
+          <a:p>
+            <a:pPr algn="l" indent="0" marL="0">
+              <a:buNone/>
+            </a:pPr>
+            <a:r>
+              <a:rPr lang="en-US" sz="750" dirty="0">
+                <a:solidFill>
+                  <a:srgbClr val="E5E7EB"/>
+                </a:solidFill>
+                <a:latin typeface="Calibri" pitchFamily="34" charset="0"/>
+                <a:ea typeface="Calibri" pitchFamily="34" charset="-122"/>
+                <a:cs typeface="Calibri" pitchFamily="34" charset="-120"/>
+              </a:rPr>
+              <a:t>to classify a 90-day national archive</a:t>
+            </a:r>
+            <a:endParaRPr lang="en-US" sz="750" dirty="0"/>
+          </a:p>
+        </p:txBody>
+      </p:sp>
+      <p:sp>
+        <p:nvSpPr>
+          <p:cNvPr id="23" name="Text 21"/>
+          <p:cNvSpPr txBox="1"/>
+          <p:nvPr/>
+        </p:nvSpPr>
+        <p:spPr>
+          <a:xfrm>
+            <a:off x="5513832" y="4206240"/>
+            <a:ext cx="1645920" cy="274320"/>
+          </a:xfrm>
+          <a:prstGeom prst="rect">
+            <a:avLst/>
+          </a:prstGeom>
+          <a:noFill/>
+          <a:ln/>
+        </p:spPr>
+        <p:txBody>
+          <a:bodyPr wrap="square" lIns="0" tIns="0" rIns="0" bIns="0" rtlCol="0" anchor="t"/>
+          <a:lstStyle/>
+          <a:p>
+            <a:pPr algn="l" indent="0" marL="0">
+              <a:buNone/>
+            </a:pPr>
+            <a:r>
+              <a:rPr lang="en-US" sz="1500" b="1" dirty="0">
+                <a:solidFill>
+                  <a:srgbClr val="FB923C"/>
+                </a:solidFill>
+                <a:latin typeface="Calibri" pitchFamily="34" charset="0"/>
+                <a:ea typeface="Calibri" pitchFamily="34" charset="-122"/>
+                <a:cs typeface="Calibri" pitchFamily="34" charset="-120"/>
+              </a:rPr>
+              <a:t>1 env var</a:t>
+            </a:r>
+            <a:endParaRPr lang="en-US" sz="1500" dirty="0"/>
+          </a:p>
+        </p:txBody>
+      </p:sp>
+      <p:sp>
+        <p:nvSpPr>
+          <p:cNvPr id="24" name="Text 22"/>
+          <p:cNvSpPr txBox="1"/>
+          <p:nvPr/>
+        </p:nvSpPr>
+        <p:spPr>
+          <a:xfrm>
+            <a:off x="5513832" y="4480560"/>
+            <a:ext cx="1600200" cy="274320"/>
+          </a:xfrm>
+          <a:prstGeom prst="rect">
+            <a:avLst/>
+          </a:prstGeom>
+          <a:noFill/>
+          <a:ln/>
+        </p:spPr>
+        <p:txBody>
+          <a:bodyPr wrap="square" lIns="0" tIns="0" rIns="0" bIns="0" rtlCol="0" anchor="t"/>
+          <a:lstStyle/>
+          <a:p>
+            <a:pPr algn="l" indent="0" marL="0">
+              <a:buNone/>
+            </a:pPr>
+            <a:r>
+              <a:rPr lang="en-US" sz="750" dirty="0">
+                <a:solidFill>
+                  <a:srgbClr val="E5E7EB"/>
+                </a:solidFill>
+                <a:latin typeface="Calibri" pitchFamily="34" charset="0"/>
+                <a:ea typeface="Calibri" pitchFamily="34" charset="-122"/>
+                <a:cs typeface="Calibri" pitchFamily="34" charset="-120"/>
+              </a:rPr>
+              <a:t>switches offline archive → live NASA FIRMS</a:t>
+            </a:r>
+            <a:endParaRPr lang="en-US" sz="750" dirty="0"/>
+          </a:p>
+        </p:txBody>
+      </p:sp>
+      <p:sp>
+        <p:nvSpPr>
+          <p:cNvPr id="25" name="Text 23"/>
+          <p:cNvSpPr txBox="1"/>
+          <p:nvPr/>
+        </p:nvSpPr>
+        <p:spPr>
+          <a:xfrm>
+            <a:off x="7214616" y="4206240"/>
+            <a:ext cx="1645920" cy="274320"/>
+          </a:xfrm>
+          <a:prstGeom prst="rect">
+            <a:avLst/>
+          </a:prstGeom>
+          <a:noFill/>
+          <a:ln/>
+        </p:spPr>
+        <p:txBody>
+          <a:bodyPr wrap="square" lIns="0" tIns="0" rIns="0" bIns="0" rtlCol="0" anchor="t"/>
+          <a:lstStyle/>
+          <a:p>
+            <a:pPr algn="l" indent="0" marL="0">
+              <a:buNone/>
+            </a:pPr>
+            <a:r>
+              <a:rPr lang="en-US" sz="1500" b="1" dirty="0">
+                <a:solidFill>
+                  <a:srgbClr val="FB923C"/>
+                </a:solidFill>
+                <a:latin typeface="Calibri" pitchFamily="34" charset="0"/>
+                <a:ea typeface="Calibri" pitchFamily="34" charset="-122"/>
+                <a:cs typeface="Calibri" pitchFamily="34" charset="-120"/>
+              </a:rPr>
+              <a:t>Open</a:t>
+            </a:r>
+            <a:endParaRPr lang="en-US" sz="1500" dirty="0"/>
+          </a:p>
+        </p:txBody>
+      </p:sp>
+      <p:sp>
+        <p:nvSpPr>
+          <p:cNvPr id="26" name="Text 24"/>
+          <p:cNvSpPr txBox="1"/>
+          <p:nvPr/>
+        </p:nvSpPr>
+        <p:spPr>
+          <a:xfrm>
+            <a:off x="7214616" y="4480560"/>
+            <a:ext cx="1600200" cy="274320"/>
+          </a:xfrm>
+          <a:prstGeom prst="rect">
+            <a:avLst/>
+          </a:prstGeom>
+          <a:noFill/>
+          <a:ln/>
+        </p:spPr>
+        <p:txBody>
+          <a:bodyPr wrap="square" lIns="0" tIns="0" rIns="0" bIns="0" rtlCol="0" anchor="t"/>
+          <a:lstStyle/>
+          <a:p>
+            <a:pPr algn="l" indent="0" marL="0">
+              <a:buNone/>
+            </a:pPr>
+            <a:r>
+              <a:rPr lang="en-US" sz="750" dirty="0">
+                <a:solidFill>
+                  <a:srgbClr val="E5E7EB"/>
+                </a:solidFill>
+                <a:latin typeface="Calibri" pitchFamily="34" charset="0"/>
+                <a:ea typeface="Calibri" pitchFamily="34" charset="-122"/>
+                <a:cs typeface="Calibri" pitchFamily="34" charset="-120"/>
+              </a:rPr>
+              <a:t>GeoJSON / API — plugs into any GIS NTRO runs</a:t>
             </a:r>
             <a:endParaRPr lang="en-US" sz="750" dirty="0"/>
           </a:p>
@@ -10519,7 +15265,7 @@
                 <a:ea typeface="Calibri" pitchFamily="34" charset="-122"/>
                 <a:cs typeface="Calibri" pitchFamily="34" charset="-120"/>
               </a:rPr>
-              <a:t>&lt;TEAM NAME&gt;</a:t>
+              <a:t>FireOrbit</a:t>
             </a:r>
             <a:endParaRPr lang="en-US" sz="900" dirty="0"/>
           </a:p>
@@ -10558,7 +15304,7 @@
                 <a:ea typeface="Calibri" pitchFamily="34" charset="-122"/>
                 <a:cs typeface="Calibri" pitchFamily="34" charset="-120"/>
               </a:rPr>
-              <a:t>REPORT — EVALUATION OF THE PROTOTYPE</a:t>
+              <a:t>IMPACT AND BENEFITS</a:t>
             </a:r>
             <a:endParaRPr lang="en-US" sz="2200" dirty="0"/>
           </a:p>
@@ -10637,6 +15383,1126 @@
                 <a:cs typeface="Calibri" pitchFamily="34" charset="-120"/>
               </a:rPr>
               <a:t>7</a:t>
+            </a:r>
+            <a:endParaRPr lang="en-US" sz="900" dirty="0"/>
+          </a:p>
+        </p:txBody>
+      </p:sp>
+      <p:sp>
+        <p:nvSpPr>
+          <p:cNvPr id="6" name="Shape 4"/>
+          <p:cNvSpPr/>
+          <p:nvPr/>
+        </p:nvSpPr>
+        <p:spPr>
+          <a:xfrm>
+            <a:off x="274320" y="685800"/>
+            <a:ext cx="4206240" cy="2103120"/>
+          </a:xfrm>
+          <a:prstGeom prst="roundRect">
+            <a:avLst>
+              <a:gd name="adj" fmla="val 2174"/>
+            </a:avLst>
+          </a:prstGeom>
+          <a:solidFill>
+            <a:srgbClr val="FFFFFF"/>
+          </a:solidFill>
+          <a:ln w="9525">
+            <a:solidFill>
+              <a:srgbClr val="D1D5DB"/>
+            </a:solidFill>
+            <a:prstDash val="solid"/>
+          </a:ln>
+        </p:spPr>
+      </p:sp>
+      <p:sp>
+        <p:nvSpPr>
+          <p:cNvPr id="7" name="Text 5"/>
+          <p:cNvSpPr txBox="1"/>
+          <p:nvPr/>
+        </p:nvSpPr>
+        <p:spPr>
+          <a:xfrm>
+            <a:off x="365760" y="731520"/>
+            <a:ext cx="4023360" cy="228600"/>
+          </a:xfrm>
+          <a:prstGeom prst="rect">
+            <a:avLst/>
+          </a:prstGeom>
+          <a:noFill/>
+          <a:ln/>
+        </p:spPr>
+        <p:txBody>
+          <a:bodyPr wrap="square" lIns="0" tIns="0" rIns="0" bIns="0" rtlCol="0" anchor="t"/>
+          <a:lstStyle/>
+          <a:p>
+            <a:pPr algn="l" indent="0" marL="0">
+              <a:buNone/>
+            </a:pPr>
+            <a:r>
+              <a:rPr lang="en-US" sz="1050" b="1" dirty="0">
+                <a:solidFill>
+                  <a:srgbClr val="1D4ED8"/>
+                </a:solidFill>
+                <a:latin typeface="Calibri" pitchFamily="34" charset="0"/>
+                <a:ea typeface="Calibri" pitchFamily="34" charset="-122"/>
+                <a:cs typeface="Calibri" pitchFamily="34" charset="-120"/>
+              </a:rPr>
+              <a:t>➤ Potential impact on the target audience</a:t>
+            </a:r>
+            <a:endParaRPr lang="en-US" sz="1050" dirty="0"/>
+          </a:p>
+        </p:txBody>
+      </p:sp>
+      <p:sp>
+        <p:nvSpPr>
+          <p:cNvPr id="8" name="Text 6"/>
+          <p:cNvSpPr txBox="1"/>
+          <p:nvPr/>
+        </p:nvSpPr>
+        <p:spPr>
+          <a:xfrm>
+            <a:off x="365760" y="1005840"/>
+            <a:ext cx="4023360" cy="1737360"/>
+          </a:xfrm>
+          <a:prstGeom prst="rect">
+            <a:avLst/>
+          </a:prstGeom>
+          <a:noFill/>
+          <a:ln/>
+        </p:spPr>
+        <p:txBody>
+          <a:bodyPr wrap="square" lIns="12700" tIns="12700" rIns="12700" bIns="12700" rtlCol="0" anchor="t"/>
+          <a:lstStyle/>
+          <a:p>
+            <a:pPr marL="127000" indent="-127000">
+              <a:spcAft>
+                <a:spcPts val="200"/>
+              </a:spcAft>
+              <a:buSzPct val="100000"/>
+              <a:buChar char="•"/>
+            </a:pPr>
+            <a:r>
+              <a:rPr lang="en-US" sz="950" dirty="0">
+                <a:solidFill>
+                  <a:srgbClr val="1F2937"/>
+                </a:solidFill>
+                <a:latin typeface="Calibri" pitchFamily="34" charset="0"/>
+                <a:ea typeface="Calibri" pitchFamily="34" charset="-122"/>
+                <a:cs typeface="Calibri" pitchFamily="34" charset="-120"/>
+              </a:rPr>
+              <a:t>Disaster management (NDMA / SDMAs / fire services): alerts only on abnormal industrial heat → faster, correctly-targeted response to plant fires &amp; explosions.</a:t>
+            </a:r>
+            <a:endParaRPr lang="en-US" sz="950" dirty="0"/>
+          </a:p>
+          <a:p>
+            <a:pPr marL="127000" indent="-127000">
+              <a:spcAft>
+                <a:spcPts val="200"/>
+              </a:spcAft>
+              <a:buSzPct val="100000"/>
+              <a:buChar char="•"/>
+            </a:pPr>
+            <a:r>
+              <a:rPr lang="en-US" sz="950" dirty="0">
+                <a:solidFill>
+                  <a:srgbClr val="1F2937"/>
+                </a:solidFill>
+                <a:latin typeface="Calibri" pitchFamily="34" charset="0"/>
+                <a:ea typeface="Calibri" pitchFamily="34" charset="-122"/>
+                <a:cs typeface="Calibri" pitchFamily="34" charset="-120"/>
+              </a:rPr>
+              <a:t>NTRO &amp; security agencies: a national registry of persistent thermal sources with activity history; detects undeclared industrial activity; change detection (shutdowns, restarts, surges).</a:t>
+            </a:r>
+            <a:endParaRPr lang="en-US" sz="950" dirty="0"/>
+          </a:p>
+          <a:p>
+            <a:pPr marL="127000" indent="-127000">
+              <a:spcAft>
+                <a:spcPts val="200"/>
+              </a:spcAft>
+              <a:buSzPct val="100000"/>
+              <a:buChar char="•"/>
+            </a:pPr>
+            <a:r>
+              <a:rPr lang="en-US" sz="950" dirty="0">
+                <a:solidFill>
+                  <a:srgbClr val="1F2937"/>
+                </a:solidFill>
+                <a:latin typeface="Calibri" pitchFamily="34" charset="0"/>
+                <a:ea typeface="Calibri" pitchFamily="34" charset="-122"/>
+                <a:cs typeface="Calibri" pitchFamily="34" charset="-120"/>
+              </a:rPr>
+              <a:t>CPCB / MoEFCC: attribute district fires to stubble burning vs industry; flaring inventories.</a:t>
+            </a:r>
+            <a:endParaRPr lang="en-US" sz="950" dirty="0"/>
+          </a:p>
+          <a:p>
+            <a:pPr marL="127000" indent="-127000">
+              <a:spcAft>
+                <a:spcPts val="200"/>
+              </a:spcAft>
+              <a:buSzPct val="100000"/>
+              <a:buChar char="•"/>
+            </a:pPr>
+            <a:r>
+              <a:rPr lang="en-US" sz="950" dirty="0">
+                <a:solidFill>
+                  <a:srgbClr val="1F2937"/>
+                </a:solidFill>
+                <a:latin typeface="Calibri" pitchFamily="34" charset="0"/>
+                <a:ea typeface="Calibri" pitchFamily="34" charset="-122"/>
+                <a:cs typeface="Calibri" pitchFamily="34" charset="-120"/>
+              </a:rPr>
+              <a:t>Insurers &amp; industry: verified incident records; compliance evidence.</a:t>
+            </a:r>
+            <a:endParaRPr lang="en-US" sz="950" dirty="0"/>
+          </a:p>
+        </p:txBody>
+      </p:sp>
+      <p:sp>
+        <p:nvSpPr>
+          <p:cNvPr id="9" name="Shape 7"/>
+          <p:cNvSpPr/>
+          <p:nvPr/>
+        </p:nvSpPr>
+        <p:spPr>
+          <a:xfrm>
+            <a:off x="4572000" y="685800"/>
+            <a:ext cx="4297680" cy="2103120"/>
+          </a:xfrm>
+          <a:prstGeom prst="roundRect">
+            <a:avLst>
+              <a:gd name="adj" fmla="val 2174"/>
+            </a:avLst>
+          </a:prstGeom>
+          <a:solidFill>
+            <a:srgbClr val="FFFFFF"/>
+          </a:solidFill>
+          <a:ln w="9525">
+            <a:solidFill>
+              <a:srgbClr val="D1D5DB"/>
+            </a:solidFill>
+            <a:prstDash val="solid"/>
+          </a:ln>
+        </p:spPr>
+      </p:sp>
+      <p:sp>
+        <p:nvSpPr>
+          <p:cNvPr id="10" name="Text 8"/>
+          <p:cNvSpPr txBox="1"/>
+          <p:nvPr/>
+        </p:nvSpPr>
+        <p:spPr>
+          <a:xfrm>
+            <a:off x="4663440" y="731520"/>
+            <a:ext cx="4114800" cy="228600"/>
+          </a:xfrm>
+          <a:prstGeom prst="rect">
+            <a:avLst/>
+          </a:prstGeom>
+          <a:noFill/>
+          <a:ln/>
+        </p:spPr>
+        <p:txBody>
+          <a:bodyPr wrap="square" lIns="0" tIns="0" rIns="0" bIns="0" rtlCol="0" anchor="t"/>
+          <a:lstStyle/>
+          <a:p>
+            <a:pPr algn="l" indent="0" marL="0">
+              <a:buNone/>
+            </a:pPr>
+            <a:r>
+              <a:rPr lang="en-US" sz="1050" b="1" dirty="0">
+                <a:solidFill>
+                  <a:srgbClr val="15803D"/>
+                </a:solidFill>
+                <a:latin typeface="Calibri" pitchFamily="34" charset="0"/>
+                <a:ea typeface="Calibri" pitchFamily="34" charset="-122"/>
+                <a:cs typeface="Calibri" pitchFamily="34" charset="-120"/>
+              </a:rPr>
+              <a:t>➤ Benefits of the solution</a:t>
+            </a:r>
+            <a:endParaRPr lang="en-US" sz="1050" dirty="0"/>
+          </a:p>
+        </p:txBody>
+      </p:sp>
+      <p:sp>
+        <p:nvSpPr>
+          <p:cNvPr id="11" name="Text 9"/>
+          <p:cNvSpPr txBox="1"/>
+          <p:nvPr/>
+        </p:nvSpPr>
+        <p:spPr>
+          <a:xfrm>
+            <a:off x="4663440" y="1005840"/>
+            <a:ext cx="4114800" cy="1737360"/>
+          </a:xfrm>
+          <a:prstGeom prst="rect">
+            <a:avLst/>
+          </a:prstGeom>
+          <a:noFill/>
+          <a:ln/>
+        </p:spPr>
+        <p:txBody>
+          <a:bodyPr wrap="square" lIns="12700" tIns="12700" rIns="12700" bIns="12700" rtlCol="0" anchor="t"/>
+          <a:lstStyle/>
+          <a:p>
+            <a:pPr marL="127000" indent="-127000">
+              <a:spcAft>
+                <a:spcPts val="200"/>
+              </a:spcAft>
+              <a:buSzPct val="100000"/>
+              <a:buChar char="•"/>
+            </a:pPr>
+            <a:r>
+              <a:rPr lang="en-US" sz="950" dirty="0">
+                <a:solidFill>
+                  <a:srgbClr val="1F2937"/>
+                </a:solidFill>
+                <a:latin typeface="Calibri" pitchFamily="34" charset="0"/>
+                <a:ea typeface="Calibri" pitchFamily="34" charset="-122"/>
+                <a:cs typeface="Calibri" pitchFamily="34" charset="-120"/>
+              </a:rPr>
+              <a:t>Social: earlier warning for communities near refineries, steel plants, chemical complexes; better use of fire-service capacity.</a:t>
+            </a:r>
+            <a:endParaRPr lang="en-US" sz="950" dirty="0"/>
+          </a:p>
+          <a:p>
+            <a:pPr marL="127000" indent="-127000">
+              <a:spcAft>
+                <a:spcPts val="200"/>
+              </a:spcAft>
+              <a:buSzPct val="100000"/>
+              <a:buChar char="•"/>
+            </a:pPr>
+            <a:r>
+              <a:rPr lang="en-US" sz="950" dirty="0">
+                <a:solidFill>
+                  <a:srgbClr val="1F2937"/>
+                </a:solidFill>
+                <a:latin typeface="Calibri" pitchFamily="34" charset="0"/>
+                <a:ea typeface="Calibri" pitchFamily="34" charset="-122"/>
+                <a:cs typeface="Calibri" pitchFamily="34" charset="-120"/>
+              </a:rPr>
+              <a:t>Economic: 99 % fewer hotspots to triage; ₹0 data licensing; reduced losses through early detection; runs on one VM.</a:t>
+            </a:r>
+            <a:endParaRPr lang="en-US" sz="950" dirty="0"/>
+          </a:p>
+          <a:p>
+            <a:pPr marL="127000" indent="-127000">
+              <a:spcAft>
+                <a:spcPts val="200"/>
+              </a:spcAft>
+              <a:buSzPct val="100000"/>
+              <a:buChar char="•"/>
+            </a:pPr>
+            <a:r>
+              <a:rPr lang="en-US" sz="950" dirty="0">
+                <a:solidFill>
+                  <a:srgbClr val="1F2937"/>
+                </a:solidFill>
+                <a:latin typeface="Calibri" pitchFamily="34" charset="0"/>
+                <a:ea typeface="Calibri" pitchFamily="34" charset="-122"/>
+                <a:cs typeface="Calibri" pitchFamily="34" charset="-120"/>
+              </a:rPr>
+              <a:t>Environmental: separates agricultural burning from industrial emissions; flaring and coal-fire monitoring for climate reporting.</a:t>
+            </a:r>
+            <a:endParaRPr lang="en-US" sz="950" dirty="0"/>
+          </a:p>
+          <a:p>
+            <a:pPr marL="127000" indent="-127000">
+              <a:spcAft>
+                <a:spcPts val="200"/>
+              </a:spcAft>
+              <a:buSzPct val="100000"/>
+              <a:buChar char="•"/>
+            </a:pPr>
+            <a:r>
+              <a:rPr lang="en-US" sz="950" dirty="0">
+                <a:solidFill>
+                  <a:srgbClr val="1F2937"/>
+                </a:solidFill>
+                <a:latin typeface="Calibri" pitchFamily="34" charset="0"/>
+                <a:ea typeface="Calibri" pitchFamily="34" charset="-122"/>
+                <a:cs typeface="Calibri" pitchFamily="34" charset="-120"/>
+              </a:rPr>
+              <a:t>Strategic: open, explainable, auditable — deployable on sovereign / air-gapped infrastructure.</a:t>
+            </a:r>
+            <a:endParaRPr lang="en-US" sz="950" dirty="0"/>
+          </a:p>
+        </p:txBody>
+      </p:sp>
+      <p:sp>
+        <p:nvSpPr>
+          <p:cNvPr id="12" name="Shape 10"/>
+          <p:cNvSpPr/>
+          <p:nvPr/>
+        </p:nvSpPr>
+        <p:spPr>
+          <a:xfrm>
+            <a:off x="274320" y="2880360"/>
+            <a:ext cx="8595360" cy="1874520"/>
+          </a:xfrm>
+          <a:prstGeom prst="roundRect">
+            <a:avLst>
+              <a:gd name="adj" fmla="val 2439"/>
+            </a:avLst>
+          </a:prstGeom>
+          <a:solidFill>
+            <a:srgbClr val="0F172A"/>
+          </a:solidFill>
+          <a:ln w="9525">
+            <a:solidFill>
+              <a:srgbClr val="0F172A"/>
+            </a:solidFill>
+            <a:prstDash val="solid"/>
+          </a:ln>
+        </p:spPr>
+      </p:sp>
+      <p:sp>
+        <p:nvSpPr>
+          <p:cNvPr id="13" name="Text 11"/>
+          <p:cNvSpPr txBox="1"/>
+          <p:nvPr/>
+        </p:nvSpPr>
+        <p:spPr>
+          <a:xfrm>
+            <a:off x="411480" y="2926080"/>
+            <a:ext cx="8321040" cy="256032"/>
+          </a:xfrm>
+          <a:prstGeom prst="rect">
+            <a:avLst/>
+          </a:prstGeom>
+          <a:noFill/>
+          <a:ln/>
+        </p:spPr>
+        <p:txBody>
+          <a:bodyPr wrap="square" lIns="0" tIns="0" rIns="0" bIns="0" rtlCol="0" anchor="t"/>
+          <a:lstStyle/>
+          <a:p>
+            <a:pPr algn="l" indent="0" marL="0">
+              <a:buNone/>
+            </a:pPr>
+            <a:r>
+              <a:rPr lang="en-US" sz="1050" b="1" dirty="0">
+                <a:solidFill>
+                  <a:srgbClr val="FBBF24"/>
+                </a:solidFill>
+                <a:latin typeface="Calibri" pitchFamily="34" charset="0"/>
+                <a:ea typeface="Calibri" pitchFamily="34" charset="-122"/>
+                <a:cs typeface="Calibri" pitchFamily="34" charset="-120"/>
+              </a:rPr>
+              <a:t>REPORT — results of the working prototype (90-day labelled archive over real Indian sites)</a:t>
+            </a:r>
+            <a:endParaRPr lang="en-US" sz="1050" dirty="0"/>
+          </a:p>
+        </p:txBody>
+      </p:sp>
+      <p:sp>
+        <p:nvSpPr>
+          <p:cNvPr id="14" name="Text 12"/>
+          <p:cNvSpPr txBox="1"/>
+          <p:nvPr/>
+        </p:nvSpPr>
+        <p:spPr>
+          <a:xfrm>
+            <a:off x="411480" y="3218688"/>
+            <a:ext cx="1005840" cy="411480"/>
+          </a:xfrm>
+          <a:prstGeom prst="rect">
+            <a:avLst/>
+          </a:prstGeom>
+          <a:noFill/>
+          <a:ln/>
+        </p:spPr>
+        <p:txBody>
+          <a:bodyPr wrap="square" lIns="0" tIns="0" rIns="0" bIns="0" rtlCol="0" anchor="ctr"/>
+          <a:lstStyle/>
+          <a:p>
+            <a:pPr algn="l" indent="0" marL="0">
+              <a:buNone/>
+            </a:pPr>
+            <a:r>
+              <a:rPr lang="en-US" sz="2000" b="1" dirty="0">
+                <a:solidFill>
+                  <a:srgbClr val="FB923C"/>
+                </a:solidFill>
+                <a:latin typeface="Calibri" pitchFamily="34" charset="0"/>
+                <a:ea typeface="Calibri" pitchFamily="34" charset="-122"/>
+                <a:cs typeface="Calibri" pitchFamily="34" charset="-120"/>
+              </a:rPr>
+              <a:t>22,179</a:t>
+            </a:r>
+            <a:endParaRPr lang="en-US" sz="2000" dirty="0"/>
+          </a:p>
+        </p:txBody>
+      </p:sp>
+      <p:sp>
+        <p:nvSpPr>
+          <p:cNvPr id="15" name="Text 13"/>
+          <p:cNvSpPr txBox="1"/>
+          <p:nvPr/>
+        </p:nvSpPr>
+        <p:spPr>
+          <a:xfrm>
+            <a:off x="1463040" y="3218688"/>
+            <a:ext cx="1691640" cy="411480"/>
+          </a:xfrm>
+          <a:prstGeom prst="rect">
+            <a:avLst/>
+          </a:prstGeom>
+          <a:noFill/>
+          <a:ln/>
+        </p:spPr>
+        <p:txBody>
+          <a:bodyPr wrap="square" lIns="0" tIns="0" rIns="0" bIns="0" rtlCol="0" anchor="ctr"/>
+          <a:lstStyle/>
+          <a:p>
+            <a:pPr algn="l" indent="0" marL="0">
+              <a:buNone/>
+            </a:pPr>
+            <a:r>
+              <a:rPr lang="en-US" sz="850" dirty="0">
+                <a:solidFill>
+                  <a:srgbClr val="E5E7EB"/>
+                </a:solidFill>
+                <a:latin typeface="Calibri" pitchFamily="34" charset="0"/>
+                <a:ea typeface="Calibri" pitchFamily="34" charset="-122"/>
+                <a:cs typeface="Calibri" pitchFamily="34" charset="-120"/>
+              </a:rPr>
+              <a:t>FIRMS detections classified in ~7 s</a:t>
+            </a:r>
+            <a:endParaRPr lang="en-US" sz="850" dirty="0"/>
+          </a:p>
+        </p:txBody>
+      </p:sp>
+      <p:sp>
+        <p:nvSpPr>
+          <p:cNvPr id="16" name="Text 14"/>
+          <p:cNvSpPr txBox="1"/>
+          <p:nvPr/>
+        </p:nvSpPr>
+        <p:spPr>
+          <a:xfrm>
+            <a:off x="3200400" y="3218688"/>
+            <a:ext cx="1005840" cy="411480"/>
+          </a:xfrm>
+          <a:prstGeom prst="rect">
+            <a:avLst/>
+          </a:prstGeom>
+          <a:noFill/>
+          <a:ln/>
+        </p:spPr>
+        <p:txBody>
+          <a:bodyPr wrap="square" lIns="0" tIns="0" rIns="0" bIns="0" rtlCol="0" anchor="ctr"/>
+          <a:lstStyle/>
+          <a:p>
+            <a:pPr algn="l" indent="0" marL="0">
+              <a:buNone/>
+            </a:pPr>
+            <a:r>
+              <a:rPr lang="en-US" sz="2000" b="1" dirty="0">
+                <a:solidFill>
+                  <a:srgbClr val="FB923C"/>
+                </a:solidFill>
+                <a:latin typeface="Calibri" pitchFamily="34" charset="0"/>
+                <a:ea typeface="Calibri" pitchFamily="34" charset="-122"/>
+                <a:cs typeface="Calibri" pitchFamily="34" charset="-120"/>
+              </a:rPr>
+              <a:t>114</a:t>
+            </a:r>
+            <a:endParaRPr lang="en-US" sz="2000" dirty="0"/>
+          </a:p>
+        </p:txBody>
+      </p:sp>
+      <p:sp>
+        <p:nvSpPr>
+          <p:cNvPr id="17" name="Text 15"/>
+          <p:cNvSpPr txBox="1"/>
+          <p:nvPr/>
+        </p:nvSpPr>
+        <p:spPr>
+          <a:xfrm>
+            <a:off x="4251960" y="3218688"/>
+            <a:ext cx="1691640" cy="411480"/>
+          </a:xfrm>
+          <a:prstGeom prst="rect">
+            <a:avLst/>
+          </a:prstGeom>
+          <a:noFill/>
+          <a:ln/>
+        </p:spPr>
+        <p:txBody>
+          <a:bodyPr wrap="square" lIns="0" tIns="0" rIns="0" bIns="0" rtlCol="0" anchor="ctr"/>
+          <a:lstStyle/>
+          <a:p>
+            <a:pPr algn="l" indent="0" marL="0">
+              <a:buNone/>
+            </a:pPr>
+            <a:r>
+              <a:rPr lang="en-US" sz="850" dirty="0">
+                <a:solidFill>
+                  <a:srgbClr val="E5E7EB"/>
+                </a:solidFill>
+                <a:latin typeface="Calibri" pitchFamily="34" charset="0"/>
+                <a:ea typeface="Calibri" pitchFamily="34" charset="-122"/>
+                <a:cs typeface="Calibri" pitchFamily="34" charset="-120"/>
+              </a:rPr>
+              <a:t>persistent sources registered</a:t>
+            </a:r>
+            <a:endParaRPr lang="en-US" sz="850" dirty="0"/>
+          </a:p>
+        </p:txBody>
+      </p:sp>
+      <p:sp>
+        <p:nvSpPr>
+          <p:cNvPr id="18" name="Text 16"/>
+          <p:cNvSpPr txBox="1"/>
+          <p:nvPr/>
+        </p:nvSpPr>
+        <p:spPr>
+          <a:xfrm>
+            <a:off x="5989320" y="3218688"/>
+            <a:ext cx="1005840" cy="411480"/>
+          </a:xfrm>
+          <a:prstGeom prst="rect">
+            <a:avLst/>
+          </a:prstGeom>
+          <a:noFill/>
+          <a:ln/>
+        </p:spPr>
+        <p:txBody>
+          <a:bodyPr wrap="square" lIns="0" tIns="0" rIns="0" bIns="0" rtlCol="0" anchor="ctr"/>
+          <a:lstStyle/>
+          <a:p>
+            <a:pPr algn="l" indent="0" marL="0">
+              <a:buNone/>
+            </a:pPr>
+            <a:r>
+              <a:rPr lang="en-US" sz="2000" b="1" dirty="0">
+                <a:solidFill>
+                  <a:srgbClr val="FB923C"/>
+                </a:solidFill>
+                <a:latin typeface="Calibri" pitchFamily="34" charset="0"/>
+                <a:ea typeface="Calibri" pitchFamily="34" charset="-122"/>
+                <a:cs typeface="Calibri" pitchFamily="34" charset="-120"/>
+              </a:rPr>
+              <a:t>138</a:t>
+            </a:r>
+            <a:endParaRPr lang="en-US" sz="2000" dirty="0"/>
+          </a:p>
+        </p:txBody>
+      </p:sp>
+      <p:sp>
+        <p:nvSpPr>
+          <p:cNvPr id="19" name="Text 17"/>
+          <p:cNvSpPr txBox="1"/>
+          <p:nvPr/>
+        </p:nvSpPr>
+        <p:spPr>
+          <a:xfrm>
+            <a:off x="7040880" y="3218688"/>
+            <a:ext cx="1691640" cy="411480"/>
+          </a:xfrm>
+          <a:prstGeom prst="rect">
+            <a:avLst/>
+          </a:prstGeom>
+          <a:noFill/>
+          <a:ln/>
+        </p:spPr>
+        <p:txBody>
+          <a:bodyPr wrap="square" lIns="0" tIns="0" rIns="0" bIns="0" rtlCol="0" anchor="ctr"/>
+          <a:lstStyle/>
+          <a:p>
+            <a:pPr algn="l" indent="0" marL="0">
+              <a:buNone/>
+            </a:pPr>
+            <a:r>
+              <a:rPr lang="en-US" sz="850" dirty="0">
+                <a:solidFill>
+                  <a:srgbClr val="E5E7EB"/>
+                </a:solidFill>
+                <a:latin typeface="Calibri" pitchFamily="34" charset="0"/>
+                <a:ea typeface="Calibri" pitchFamily="34" charset="-122"/>
+                <a:cs typeface="Calibri" pitchFamily="34" charset="-120"/>
+              </a:rPr>
+              <a:t>incident candidates (0.6 % of detections)</a:t>
+            </a:r>
+            <a:endParaRPr lang="en-US" sz="850" dirty="0"/>
+          </a:p>
+        </p:txBody>
+      </p:sp>
+      <p:sp>
+        <p:nvSpPr>
+          <p:cNvPr id="20" name="Text 18"/>
+          <p:cNvSpPr txBox="1"/>
+          <p:nvPr/>
+        </p:nvSpPr>
+        <p:spPr>
+          <a:xfrm>
+            <a:off x="411480" y="3968496"/>
+            <a:ext cx="1005840" cy="411480"/>
+          </a:xfrm>
+          <a:prstGeom prst="rect">
+            <a:avLst/>
+          </a:prstGeom>
+          <a:noFill/>
+          <a:ln/>
+        </p:spPr>
+        <p:txBody>
+          <a:bodyPr wrap="square" lIns="0" tIns="0" rIns="0" bIns="0" rtlCol="0" anchor="ctr"/>
+          <a:lstStyle/>
+          <a:p>
+            <a:pPr algn="l" indent="0" marL="0">
+              <a:buNone/>
+            </a:pPr>
+            <a:r>
+              <a:rPr lang="en-US" sz="2000" b="1" dirty="0">
+                <a:solidFill>
+                  <a:srgbClr val="FB923C"/>
+                </a:solidFill>
+                <a:latin typeface="Calibri" pitchFamily="34" charset="0"/>
+                <a:ea typeface="Calibri" pitchFamily="34" charset="-122"/>
+                <a:cs typeface="Calibri" pitchFamily="34" charset="-120"/>
+              </a:rPr>
+              <a:t>99.9 %</a:t>
+            </a:r>
+            <a:endParaRPr lang="en-US" sz="2000" dirty="0"/>
+          </a:p>
+        </p:txBody>
+      </p:sp>
+      <p:sp>
+        <p:nvSpPr>
+          <p:cNvPr id="21" name="Text 19"/>
+          <p:cNvSpPr txBox="1"/>
+          <p:nvPr/>
+        </p:nvSpPr>
+        <p:spPr>
+          <a:xfrm>
+            <a:off x="1463040" y="3968496"/>
+            <a:ext cx="1691640" cy="411480"/>
+          </a:xfrm>
+          <a:prstGeom prst="rect">
+            <a:avLst/>
+          </a:prstGeom>
+          <a:noFill/>
+          <a:ln/>
+        </p:spPr>
+        <p:txBody>
+          <a:bodyPr wrap="square" lIns="0" tIns="0" rIns="0" bIns="0" rtlCol="0" anchor="ctr"/>
+          <a:lstStyle/>
+          <a:p>
+            <a:pPr algn="l" indent="0" marL="0">
+              <a:buNone/>
+            </a:pPr>
+            <a:r>
+              <a:rPr lang="en-US" sz="850" dirty="0">
+                <a:solidFill>
+                  <a:srgbClr val="E5E7EB"/>
+                </a:solidFill>
+                <a:latin typeface="Calibri" pitchFamily="34" charset="0"/>
+                <a:ea typeface="Calibri" pitchFamily="34" charset="-122"/>
+                <a:cs typeface="Calibri" pitchFamily="34" charset="-120"/>
+              </a:rPr>
+              <a:t>hybrid accuracy (group-aware test split)</a:t>
+            </a:r>
+            <a:endParaRPr lang="en-US" sz="850" dirty="0"/>
+          </a:p>
+        </p:txBody>
+      </p:sp>
+      <p:sp>
+        <p:nvSpPr>
+          <p:cNvPr id="22" name="Text 20"/>
+          <p:cNvSpPr txBox="1"/>
+          <p:nvPr/>
+        </p:nvSpPr>
+        <p:spPr>
+          <a:xfrm>
+            <a:off x="3200400" y="3968496"/>
+            <a:ext cx="1005840" cy="411480"/>
+          </a:xfrm>
+          <a:prstGeom prst="rect">
+            <a:avLst/>
+          </a:prstGeom>
+          <a:noFill/>
+          <a:ln/>
+        </p:spPr>
+        <p:txBody>
+          <a:bodyPr wrap="square" lIns="0" tIns="0" rIns="0" bIns="0" rtlCol="0" anchor="ctr"/>
+          <a:lstStyle/>
+          <a:p>
+            <a:pPr algn="l" indent="0" marL="0">
+              <a:buNone/>
+            </a:pPr>
+            <a:r>
+              <a:rPr lang="en-US" sz="2000" b="1" dirty="0">
+                <a:solidFill>
+                  <a:srgbClr val="FB923C"/>
+                </a:solidFill>
+                <a:latin typeface="Calibri" pitchFamily="34" charset="0"/>
+                <a:ea typeface="Calibri" pitchFamily="34" charset="-122"/>
+                <a:cs typeface="Calibri" pitchFamily="34" charset="-120"/>
+              </a:rPr>
+              <a:t>98.4 %</a:t>
+            </a:r>
+            <a:endParaRPr lang="en-US" sz="2000" dirty="0"/>
+          </a:p>
+        </p:txBody>
+      </p:sp>
+      <p:sp>
+        <p:nvSpPr>
+          <p:cNvPr id="23" name="Text 21"/>
+          <p:cNvSpPr txBox="1"/>
+          <p:nvPr/>
+        </p:nvSpPr>
+        <p:spPr>
+          <a:xfrm>
+            <a:off x="4251960" y="3968496"/>
+            <a:ext cx="1691640" cy="411480"/>
+          </a:xfrm>
+          <a:prstGeom prst="rect">
+            <a:avLst/>
+          </a:prstGeom>
+          <a:noFill/>
+          <a:ln/>
+        </p:spPr>
+        <p:txBody>
+          <a:bodyPr wrap="square" lIns="0" tIns="0" rIns="0" bIns="0" rtlCol="0" anchor="ctr"/>
+          <a:lstStyle/>
+          <a:p>
+            <a:pPr algn="l" indent="0" marL="0">
+              <a:buNone/>
+            </a:pPr>
+            <a:r>
+              <a:rPr lang="en-US" sz="850" dirty="0">
+                <a:solidFill>
+                  <a:srgbClr val="E5E7EB"/>
+                </a:solidFill>
+                <a:latin typeface="Calibri" pitchFamily="34" charset="0"/>
+                <a:ea typeface="Calibri" pitchFamily="34" charset="-122"/>
+                <a:cs typeface="Calibri" pitchFamily="34" charset="-120"/>
+              </a:rPr>
+              <a:t>rules-only accuracy (explainable baseline)</a:t>
+            </a:r>
+            <a:endParaRPr lang="en-US" sz="850" dirty="0"/>
+          </a:p>
+        </p:txBody>
+      </p:sp>
+      <p:sp>
+        <p:nvSpPr>
+          <p:cNvPr id="24" name="Text 22"/>
+          <p:cNvSpPr txBox="1"/>
+          <p:nvPr/>
+        </p:nvSpPr>
+        <p:spPr>
+          <a:xfrm>
+            <a:off x="5989320" y="3968496"/>
+            <a:ext cx="1005840" cy="411480"/>
+          </a:xfrm>
+          <a:prstGeom prst="rect">
+            <a:avLst/>
+          </a:prstGeom>
+          <a:noFill/>
+          <a:ln/>
+        </p:spPr>
+        <p:txBody>
+          <a:bodyPr wrap="square" lIns="0" tIns="0" rIns="0" bIns="0" rtlCol="0" anchor="ctr"/>
+          <a:lstStyle/>
+          <a:p>
+            <a:pPr algn="l" indent="0" marL="0">
+              <a:buNone/>
+            </a:pPr>
+            <a:r>
+              <a:rPr lang="en-US" sz="2000" b="1" dirty="0">
+                <a:solidFill>
+                  <a:srgbClr val="FB923C"/>
+                </a:solidFill>
+                <a:latin typeface="Calibri" pitchFamily="34" charset="0"/>
+                <a:ea typeface="Calibri" pitchFamily="34" charset="-122"/>
+                <a:cs typeface="Calibri" pitchFamily="34" charset="-120"/>
+              </a:rPr>
+              <a:t>6</a:t>
+            </a:r>
+            <a:endParaRPr lang="en-US" sz="2000" dirty="0"/>
+          </a:p>
+        </p:txBody>
+      </p:sp>
+      <p:sp>
+        <p:nvSpPr>
+          <p:cNvPr id="25" name="Text 23"/>
+          <p:cNvSpPr txBox="1"/>
+          <p:nvPr/>
+        </p:nvSpPr>
+        <p:spPr>
+          <a:xfrm>
+            <a:off x="7040880" y="3968496"/>
+            <a:ext cx="1691640" cy="411480"/>
+          </a:xfrm>
+          <a:prstGeom prst="rect">
+            <a:avLst/>
+          </a:prstGeom>
+          <a:noFill/>
+          <a:ln/>
+        </p:spPr>
+        <p:txBody>
+          <a:bodyPr wrap="square" lIns="0" tIns="0" rIns="0" bIns="0" rtlCol="0" anchor="ctr"/>
+          <a:lstStyle/>
+          <a:p>
+            <a:pPr algn="l" indent="0" marL="0">
+              <a:buNone/>
+            </a:pPr>
+            <a:r>
+              <a:rPr lang="en-US" sz="850" dirty="0">
+                <a:solidFill>
+                  <a:srgbClr val="E5E7EB"/>
+                </a:solidFill>
+                <a:latin typeface="Calibri" pitchFamily="34" charset="0"/>
+                <a:ea typeface="Calibri" pitchFamily="34" charset="-122"/>
+                <a:cs typeface="Calibri" pitchFamily="34" charset="-120"/>
+              </a:rPr>
+              <a:t>classes: industrial, flare, mining, agri, wildfire, other</a:t>
+            </a:r>
+            <a:endParaRPr lang="en-US" sz="850" dirty="0"/>
+          </a:p>
+        </p:txBody>
+      </p:sp>
+      <p:sp>
+        <p:nvSpPr>
+          <p:cNvPr id="26" name="Text 24"/>
+          <p:cNvSpPr txBox="1"/>
+          <p:nvPr/>
+        </p:nvSpPr>
+        <p:spPr>
+          <a:xfrm>
+            <a:off x="411480" y="4407408"/>
+            <a:ext cx="8321040" cy="320040"/>
+          </a:xfrm>
+          <a:prstGeom prst="rect">
+            <a:avLst/>
+          </a:prstGeom>
+          <a:noFill/>
+          <a:ln/>
+        </p:spPr>
+        <p:txBody>
+          <a:bodyPr wrap="square" lIns="0" tIns="0" rIns="0" bIns="0" rtlCol="0" anchor="t"/>
+          <a:lstStyle/>
+          <a:p>
+            <a:pPr algn="l" indent="0" marL="0">
+              <a:buNone/>
+            </a:pPr>
+            <a:r>
+              <a:rPr lang="en-US" sz="750" i="1" dirty="0">
+                <a:solidFill>
+                  <a:srgbClr val="CBD5E1"/>
+                </a:solidFill>
+                <a:latin typeface="Calibri" pitchFamily="34" charset="0"/>
+                <a:ea typeface="Calibri" pitchFamily="34" charset="-122"/>
+                <a:cs typeface="Calibri" pitchFamily="34" charset="-120"/>
+              </a:rPr>
+              <a:t>Example alerts found: Bhilai Steel 414 MW vs 32 MW baseline · Jamnagar 207 MW vs 19 MW · Tata Steel 101 MW vs 26 MW.  Note: archive is physically simulated and labelled; real-world accuracy will be lower — validation on real incidents is the next-round goal.</a:t>
+            </a:r>
+            <a:endParaRPr lang="en-US" sz="750" dirty="0"/>
+          </a:p>
+        </p:txBody>
+      </p:sp>
+    </p:spTree>
+  </p:cSld>
+  <p:clrMapOvr>
+    <a:masterClrMapping/>
+  </p:clrMapOvr>
+</p:sld>
+</file>
+
+<file path=ppt/slides/slide8.xml><?xml version="1.0" encoding="utf-8"?>
+<p:sld xmlns:a="http://schemas.openxmlformats.org/drawingml/2006/main" xmlns:r="http://schemas.openxmlformats.org/officeDocument/2006/relationships" xmlns:p="http://schemas.openxmlformats.org/presentationml/2006/main">
+  <p:cSld name="Slide 8">
+    <p:bg>
+      <p:bgPr>
+        <a:solidFill>
+          <a:srgbClr val="FFFFFF"/>
+        </a:solidFill>
+      </p:bgPr>
+    </p:bg>
+    <p:spTree>
+      <p:nvGrpSpPr>
+        <p:cNvPr id="1" name=""/>
+        <p:cNvGrpSpPr/>
+        <p:nvPr/>
+      </p:nvGrpSpPr>
+      <p:grpSpPr>
+        <a:xfrm>
+          <a:off x="0" y="0"/>
+          <a:ext cx="0" cy="0"/>
+          <a:chOff x="0" y="0"/>
+          <a:chExt cx="0" cy="0"/>
+        </a:xfrm>
+      </p:grpSpPr>
+      <p:sp>
+        <p:nvSpPr>
+          <p:cNvPr id="2" name="Text 0"/>
+          <p:cNvSpPr txBox="1"/>
+          <p:nvPr/>
+        </p:nvSpPr>
+        <p:spPr>
+          <a:xfrm>
+            <a:off x="274320" y="137160"/>
+            <a:ext cx="1463040" cy="502920"/>
+          </a:xfrm>
+          <a:prstGeom prst="rect">
+            <a:avLst/>
+          </a:prstGeom>
+          <a:noFill/>
+          <a:ln/>
+        </p:spPr>
+        <p:txBody>
+          <a:bodyPr wrap="square" lIns="0" tIns="0" rIns="0" bIns="0" rtlCol="0" anchor="t"/>
+          <a:lstStyle/>
+          <a:p>
+            <a:pPr indent="0" marL="0">
+              <a:buNone/>
+            </a:pPr>
+            <a:r>
+              <a:rPr lang="en-US" sz="900" dirty="0">
+                <a:solidFill>
+                  <a:srgbClr val="6B7280"/>
+                </a:solidFill>
+                <a:latin typeface="Calibri" pitchFamily="34" charset="0"/>
+                <a:ea typeface="Calibri" pitchFamily="34" charset="-122"/>
+                <a:cs typeface="Calibri" pitchFamily="34" charset="-120"/>
+              </a:rPr>
+              <a:t>Team
+</a:t>
+            </a:r>
+            <a:pPr indent="0" marL="0">
+              <a:buNone/>
+            </a:pPr>
+            <a:r>
+              <a:rPr lang="en-US" sz="1000" b="1" dirty="0">
+                <a:solidFill>
+                  <a:srgbClr val="1F2937"/>
+                </a:solidFill>
+                <a:latin typeface="Calibri" pitchFamily="34" charset="0"/>
+                <a:ea typeface="Calibri" pitchFamily="34" charset="-122"/>
+                <a:cs typeface="Calibri" pitchFamily="34" charset="-120"/>
+              </a:rPr>
+              <a:t>FireOrbit</a:t>
+            </a:r>
+            <a:endParaRPr lang="en-US" sz="900" dirty="0"/>
+          </a:p>
+        </p:txBody>
+      </p:sp>
+      <p:sp>
+        <p:nvSpPr>
+          <p:cNvPr id="3" name="Text 1"/>
+          <p:cNvSpPr txBox="1"/>
+          <p:nvPr/>
+        </p:nvSpPr>
+        <p:spPr>
+          <a:xfrm>
+            <a:off x="1737360" y="137160"/>
+            <a:ext cx="5669280" cy="457200"/>
+          </a:xfrm>
+          <a:prstGeom prst="rect">
+            <a:avLst/>
+          </a:prstGeom>
+          <a:noFill/>
+          <a:ln/>
+        </p:spPr>
+        <p:txBody>
+          <a:bodyPr wrap="square" lIns="0" tIns="0" rIns="0" bIns="0" rtlCol="0" anchor="ctr"/>
+          <a:lstStyle/>
+          <a:p>
+            <a:pPr algn="ctr" indent="0" marL="0">
+              <a:buNone/>
+            </a:pPr>
+            <a:r>
+              <a:rPr lang="en-US" sz="2200" b="1" dirty="0">
+                <a:solidFill>
+                  <a:srgbClr val="1F2937"/>
+                </a:solidFill>
+                <a:latin typeface="Calibri" pitchFamily="34" charset="0"/>
+                <a:ea typeface="Calibri" pitchFamily="34" charset="-122"/>
+                <a:cs typeface="Calibri" pitchFamily="34" charset="-120"/>
+              </a:rPr>
+              <a:t>REPORT — EVALUATION OF THE PROTOTYPE</a:t>
+            </a:r>
+            <a:endParaRPr lang="en-US" sz="2200" dirty="0"/>
+          </a:p>
+        </p:txBody>
+      </p:sp>
+      <p:sp>
+        <p:nvSpPr>
+          <p:cNvPr id="4" name="Text 2"/>
+          <p:cNvSpPr txBox="1"/>
+          <p:nvPr/>
+        </p:nvSpPr>
+        <p:spPr>
+          <a:xfrm>
+            <a:off x="274320" y="4846320"/>
+            <a:ext cx="3657600" cy="201168"/>
+          </a:xfrm>
+          <a:prstGeom prst="rect">
+            <a:avLst/>
+          </a:prstGeom>
+          <a:noFill/>
+          <a:ln/>
+        </p:spPr>
+        <p:txBody>
+          <a:bodyPr wrap="square" lIns="0" tIns="0" rIns="0" bIns="0" rtlCol="0" anchor="ctr"/>
+          <a:lstStyle/>
+          <a:p>
+            <a:pPr indent="0" marL="0">
+              <a:buNone/>
+            </a:pPr>
+            <a:r>
+              <a:rPr lang="en-US" sz="800" dirty="0">
+                <a:solidFill>
+                  <a:srgbClr val="6B7280"/>
+                </a:solidFill>
+                <a:latin typeface="Calibri" pitchFamily="34" charset="0"/>
+                <a:ea typeface="Calibri" pitchFamily="34" charset="-122"/>
+                <a:cs typeface="Calibri" pitchFamily="34" charset="-120"/>
+              </a:rPr>
+              <a:t>@SIH Idea submission- Template</a:t>
+            </a:r>
+            <a:endParaRPr lang="en-US" sz="800" dirty="0"/>
+          </a:p>
+        </p:txBody>
+      </p:sp>
+      <p:sp>
+        <p:nvSpPr>
+          <p:cNvPr id="5" name="Text 3"/>
+          <p:cNvSpPr txBox="1"/>
+          <p:nvPr/>
+        </p:nvSpPr>
+        <p:spPr>
+          <a:xfrm>
+            <a:off x="8412480" y="4846320"/>
+            <a:ext cx="457200" cy="201168"/>
+          </a:xfrm>
+          <a:prstGeom prst="rect">
+            <a:avLst/>
+          </a:prstGeom>
+          <a:noFill/>
+          <a:ln/>
+        </p:spPr>
+        <p:txBody>
+          <a:bodyPr wrap="square" lIns="0" tIns="0" rIns="0" bIns="0" rtlCol="0" anchor="ctr"/>
+          <a:lstStyle/>
+          <a:p>
+            <a:pPr algn="r" indent="0" marL="0">
+              <a:buNone/>
+            </a:pPr>
+            <a:r>
+              <a:rPr lang="en-US" sz="900" dirty="0">
+                <a:solidFill>
+                  <a:srgbClr val="6B7280"/>
+                </a:solidFill>
+                <a:latin typeface="Calibri" pitchFamily="34" charset="0"/>
+                <a:ea typeface="Calibri" pitchFamily="34" charset="-122"/>
+                <a:cs typeface="Calibri" pitchFamily="34" charset="-120"/>
+              </a:rPr>
+              <a:t>8</a:t>
             </a:r>
             <a:endParaRPr lang="en-US" sz="900" dirty="0"/>
           </a:p>
@@ -10808,7 +16674,7 @@
       </p:graphicFrame>
       <p:graphicFrame>
         <p:nvGraphicFramePr>
-          <p:cNvPr id="8" name="Table 0"/>
+          <p:cNvPr id="9" name="Table 0"/>
           <p:cNvGraphicFramePr>
             <a:graphicFrameLocks noGrp="1"/>
           </p:cNvGraphicFramePr>
@@ -13718,9 +19584,9 @@
 </p:sld>
 </file>
 
-<file path=ppt/slides/slide8.xml><?xml version="1.0" encoding="utf-8"?>
+<file path=ppt/slides/slide9.xml><?xml version="1.0" encoding="utf-8"?>
 <p:sld xmlns:a="http://schemas.openxmlformats.org/drawingml/2006/main" xmlns:r="http://schemas.openxmlformats.org/officeDocument/2006/relationships" xmlns:p="http://schemas.openxmlformats.org/presentationml/2006/main">
-  <p:cSld name="Slide 8">
+  <p:cSld name="Slide 9">
     <p:bg>
       <p:bgPr>
         <a:solidFill>
@@ -13790,7 +19656,7 @@
                 <a:ea typeface="Calibri" pitchFamily="34" charset="-122"/>
                 <a:cs typeface="Calibri" pitchFamily="34" charset="-120"/>
               </a:rPr>
-              <a:t>&lt;TEAM NAME&gt;</a:t>
+              <a:t>FireOrbit</a:t>
             </a:r>
             <a:endParaRPr lang="en-US" sz="900" dirty="0"/>
           </a:p>
@@ -13907,7 +19773,7 @@
                 <a:ea typeface="Calibri" pitchFamily="34" charset="-122"/>
                 <a:cs typeface="Calibri" pitchFamily="34" charset="-120"/>
               </a:rPr>
-              <a:t>8</a:t>
+              <a:t>9</a:t>
             </a:r>
             <a:endParaRPr lang="en-US" sz="900" dirty="0"/>
           </a:p>

--- a/docs/SIH26162_ThermalSentinel_Idea_extended.pptx
+++ b/docs/SIH26162_ThermalSentinel_Idea_extended.pptx
@@ -2662,7 +2662,7 @@
                 <a:ea typeface="Times New Roman" pitchFamily="34" charset="-122"/>
                 <a:cs typeface="Times New Roman" pitchFamily="34" charset="-120"/>
               </a:rPr>
-              <a:t>ThermalSentinel — AI Classification of Industrial Fires &amp; Persistent Thermal Sources</a:t>
+              <a:t>ThermalSentinel — Know WHAT is burning, and whether it should be</a:t>
             </a:r>
             <a:endParaRPr lang="en-US" sz="1500" dirty="0"/>
           </a:p>
@@ -2856,7 +2856,7 @@
         </p:nvSpPr>
         <p:spPr>
           <a:xfrm>
-            <a:off x="274320" y="1207008"/>
+            <a:off x="274320" y="1188720"/>
             <a:ext cx="5394960" cy="256032"/>
           </a:xfrm>
           <a:prstGeom prst="rect">
@@ -2903,14 +2903,39 @@
       </p:sp>
       <p:sp>
         <p:nvSpPr>
-          <p:cNvPr id="11" name="Text 8"/>
+          <p:cNvPr id="11" name="Shape 8"/>
+          <p:cNvSpPr/>
+          <p:nvPr/>
+        </p:nvSpPr>
+        <p:spPr>
+          <a:xfrm>
+            <a:off x="365760" y="1472184"/>
+            <a:ext cx="237744" cy="237744"/>
+          </a:xfrm>
+          <a:prstGeom prst="ellipse">
+            <a:avLst/>
+          </a:prstGeom>
+          <a:solidFill>
+            <a:srgbClr val="E8590C"/>
+          </a:solidFill>
+          <a:ln w="12700">
+            <a:solidFill>
+              <a:srgbClr val="E8590C"/>
+            </a:solidFill>
+            <a:prstDash val="solid"/>
+          </a:ln>
+        </p:spPr>
+      </p:sp>
+      <p:sp>
+        <p:nvSpPr>
+          <p:cNvPr id="12" name="Text 9"/>
           <p:cNvSpPr txBox="1"/>
           <p:nvPr/>
         </p:nvSpPr>
         <p:spPr>
           <a:xfrm>
-            <a:off x="411480" y="1463040"/>
-            <a:ext cx="5257800" cy="2057400"/>
+            <a:off x="365760" y="1472184"/>
+            <a:ext cx="237744" cy="237744"/>
           </a:xfrm>
           <a:prstGeom prst="rect">
             <a:avLst/>
@@ -2919,60 +2944,67 @@
           <a:ln/>
         </p:spPr>
         <p:txBody>
-          <a:bodyPr wrap="square" lIns="12700" tIns="12700" rIns="12700" bIns="12700" rtlCol="0" anchor="t"/>
+          <a:bodyPr wrap="square" lIns="0" tIns="0" rIns="0" bIns="0" rtlCol="0" anchor="ctr"/>
           <a:lstStyle/>
           <a:p>
-            <a:pPr marL="127000" indent="-127000">
-              <a:spcAft>
-                <a:spcPts val="150"/>
-              </a:spcAft>
-              <a:buSzPct val="100000"/>
-              <a:buChar char="•"/>
-            </a:pPr>
-            <a:r>
-              <a:rPr lang="en-US" sz="850" dirty="0">
-                <a:solidFill>
-                  <a:srgbClr val="1F2937"/>
+            <a:pPr algn="ctr" indent="0" marL="0">
+              <a:buNone/>
+            </a:pPr>
+            <a:r>
+              <a:rPr lang="en-US" sz="800" b="1" dirty="0">
+                <a:solidFill>
+                  <a:srgbClr val="FFFFFF"/>
                 </a:solidFill>
                 <a:latin typeface="Arial" pitchFamily="34" charset="0"/>
                 <a:ea typeface="Arial" pitchFamily="34" charset="-122"/>
                 <a:cs typeface="Arial" pitchFamily="34" charset="-120"/>
               </a:rPr>
-              <a:t>Ingest VIIRS / MODIS hotspots from the NASA FIRMS API (near-real-time + archive), normalise both sensors to one schema.</a:t>
-            </a:r>
-            <a:endParaRPr lang="en-US" sz="850" dirty="0"/>
+              <a:t>1</a:t>
+            </a:r>
+            <a:endParaRPr lang="en-US" sz="800" dirty="0"/>
           </a:p>
+        </p:txBody>
+      </p:sp>
+      <p:sp>
+        <p:nvSpPr>
+          <p:cNvPr id="13" name="Text 10"/>
+          <p:cNvSpPr txBox="1"/>
+          <p:nvPr/>
+        </p:nvSpPr>
+        <p:spPr>
+          <a:xfrm>
+            <a:off x="685800" y="1444752"/>
+            <a:ext cx="4983480" cy="347472"/>
+          </a:xfrm>
+          <a:prstGeom prst="rect">
+            <a:avLst/>
+          </a:prstGeom>
+          <a:noFill/>
+          <a:ln/>
+        </p:spPr>
+        <p:txBody>
+          <a:bodyPr wrap="square" lIns="0" tIns="0" rIns="0" bIns="0" rtlCol="0" anchor="t"/>
+          <a:lstStyle/>
           <a:p>
-            <a:pPr marL="127000" indent="-127000">
-              <a:spcAft>
-                <a:spcPts val="150"/>
-              </a:spcAft>
-              <a:buSzPct val="100000"/>
-              <a:buChar char="•"/>
-            </a:pPr>
-            <a:r>
-              <a:rPr lang="en-US" sz="850" dirty="0">
-                <a:solidFill>
-                  <a:srgbClr val="1F2937"/>
+            <a:pPr indent="0" marL="0">
+              <a:buNone/>
+            </a:pPr>
+            <a:r>
+              <a:rPr lang="en-US" sz="800" b="1" dirty="0">
+                <a:solidFill>
+                  <a:srgbClr val="E8590C"/>
                 </a:solidFill>
                 <a:latin typeface="Arial" pitchFamily="34" charset="0"/>
                 <a:ea typeface="Arial" pitchFamily="34" charset="-122"/>
                 <a:cs typeface="Arial" pitchFamily="34" charset="-120"/>
               </a:rPr>
-              <a:t>Cluster detections into thermal SOURCES (haversine DBSCAN, 750 m) and track each over 90 days → active days, night fraction, FRP baseline, persistence score.</a:t>
-            </a:r>
-            <a:endParaRPr lang="en-US" sz="850" dirty="0"/>
-          </a:p>
-          <a:p>
-            <a:pPr marL="127000" indent="-127000">
-              <a:spcAft>
-                <a:spcPts val="150"/>
-              </a:spcAft>
-              <a:buSzPct val="100000"/>
-              <a:buChar char="•"/>
-            </a:pPr>
-            <a:r>
-              <a:rPr lang="en-US" sz="850" dirty="0">
+              <a:t>Ingest:  </a:t>
+            </a:r>
+            <a:pPr indent="0" marL="0">
+              <a:buNone/>
+            </a:pPr>
+            <a:r>
+              <a:rPr lang="en-US" sz="800" dirty="0">
                 <a:solidFill>
                   <a:srgbClr val="1F2937"/>
                 </a:solidFill>
@@ -2980,62 +3012,116 @@
                 <a:ea typeface="Arial" pitchFamily="34" charset="-122"/>
                 <a:cs typeface="Arial" pitchFamily="34" charset="-120"/>
               </a:rPr>
-              <a:t>Add context from OpenStreetMap: nearest refinery / steel / power plant / gas flare / kiln / mine and land cover (cropland, forest, industrial).</a:t>
-            </a:r>
-            <a:endParaRPr lang="en-US" sz="850" dirty="0"/>
+              <a:t>NASA FIRMS VIIRS 375 m + MODIS hotspots (NRT ≤ 3 h + archive), both sensors normalised to one schema.</a:t>
+            </a:r>
+            <a:endParaRPr lang="en-US" sz="800" dirty="0"/>
           </a:p>
+        </p:txBody>
+      </p:sp>
+      <p:sp>
+        <p:nvSpPr>
+          <p:cNvPr id="14" name="Shape 11"/>
+          <p:cNvSpPr/>
+          <p:nvPr/>
+        </p:nvSpPr>
+        <p:spPr>
+          <a:xfrm>
+            <a:off x="365760" y="1801368"/>
+            <a:ext cx="237744" cy="237744"/>
+          </a:xfrm>
+          <a:prstGeom prst="ellipse">
+            <a:avLst/>
+          </a:prstGeom>
+          <a:solidFill>
+            <a:srgbClr val="1D4ED8"/>
+          </a:solidFill>
+          <a:ln w="12700">
+            <a:solidFill>
+              <a:srgbClr val="1D4ED8"/>
+            </a:solidFill>
+            <a:prstDash val="solid"/>
+          </a:ln>
+        </p:spPr>
+      </p:sp>
+      <p:sp>
+        <p:nvSpPr>
+          <p:cNvPr id="15" name="Text 12"/>
+          <p:cNvSpPr txBox="1"/>
+          <p:nvPr/>
+        </p:nvSpPr>
+        <p:spPr>
+          <a:xfrm>
+            <a:off x="365760" y="1801368"/>
+            <a:ext cx="237744" cy="237744"/>
+          </a:xfrm>
+          <a:prstGeom prst="rect">
+            <a:avLst/>
+          </a:prstGeom>
+          <a:noFill/>
+          <a:ln/>
+        </p:spPr>
+        <p:txBody>
+          <a:bodyPr wrap="square" lIns="0" tIns="0" rIns="0" bIns="0" rtlCol="0" anchor="ctr"/>
+          <a:lstStyle/>
           <a:p>
-            <a:pPr marL="127000" indent="-127000">
-              <a:spcAft>
-                <a:spcPts val="150"/>
-              </a:spcAft>
-              <a:buSzPct val="100000"/>
-              <a:buChar char="•"/>
-            </a:pPr>
-            <a:r>
-              <a:rPr lang="en-US" sz="850" dirty="0">
-                <a:solidFill>
-                  <a:srgbClr val="1F2937"/>
+            <a:pPr algn="ctr" indent="0" marL="0">
+              <a:buNone/>
+            </a:pPr>
+            <a:r>
+              <a:rPr lang="en-US" sz="800" b="1" dirty="0">
+                <a:solidFill>
+                  <a:srgbClr val="FFFFFF"/>
                 </a:solidFill>
                 <a:latin typeface="Arial" pitchFamily="34" charset="0"/>
                 <a:ea typeface="Arial" pitchFamily="34" charset="-122"/>
                 <a:cs typeface="Arial" pitchFamily="34" charset="-120"/>
               </a:rPr>
-              <a:t>Hybrid classifier — explainable rules + gradient-boosted trees — labels every detection: Industrial fire · Gas flare · Mining / coal-seam fire · Agricultural burn · Wildfire · Other, with confidence and reasons.</a:t>
-            </a:r>
-            <a:endParaRPr lang="en-US" sz="850" dirty="0"/>
+              <a:t>2</a:t>
+            </a:r>
+            <a:endParaRPr lang="en-US" sz="800" dirty="0"/>
           </a:p>
+        </p:txBody>
+      </p:sp>
+      <p:sp>
+        <p:nvSpPr>
+          <p:cNvPr id="16" name="Text 13"/>
+          <p:cNvSpPr txBox="1"/>
+          <p:nvPr/>
+        </p:nvSpPr>
+        <p:spPr>
+          <a:xfrm>
+            <a:off x="685800" y="1773936"/>
+            <a:ext cx="4983480" cy="347472"/>
+          </a:xfrm>
+          <a:prstGeom prst="rect">
+            <a:avLst/>
+          </a:prstGeom>
+          <a:noFill/>
+          <a:ln/>
+        </p:spPr>
+        <p:txBody>
+          <a:bodyPr wrap="square" lIns="0" tIns="0" rIns="0" bIns="0" rtlCol="0" anchor="t"/>
+          <a:lstStyle/>
           <a:p>
-            <a:pPr marL="127000" indent="-127000">
-              <a:spcAft>
-                <a:spcPts val="150"/>
-              </a:spcAft>
-              <a:buSzPct val="100000"/>
-              <a:buChar char="•"/>
-            </a:pPr>
-            <a:r>
-              <a:rPr lang="en-US" sz="850" dirty="0">
-                <a:solidFill>
-                  <a:srgbClr val="1F2937"/>
+            <a:pPr indent="0" marL="0">
+              <a:buNone/>
+            </a:pPr>
+            <a:r>
+              <a:rPr lang="en-US" sz="800" b="1" dirty="0">
+                <a:solidFill>
+                  <a:srgbClr val="1D4ED8"/>
                 </a:solidFill>
                 <a:latin typeface="Arial" pitchFamily="34" charset="0"/>
                 <a:ea typeface="Arial" pitchFamily="34" charset="-122"/>
                 <a:cs typeface="Arial" pitchFamily="34" charset="-120"/>
               </a:rPr>
-              <a:t>FRP-anomaly detector: a known source burning ≥ 2.5× its own baseline → incident alert (a real fire, not routine heat).</a:t>
-            </a:r>
-            <a:endParaRPr lang="en-US" sz="850" dirty="0"/>
-          </a:p>
-          <a:p>
-            <a:pPr marL="127000" indent="-127000">
-              <a:spcAft>
-                <a:spcPts val="150"/>
-              </a:spcAft>
-              <a:buSzPct val="100000"/>
-              <a:buChar char="•"/>
-            </a:pPr>
-            <a:r>
-              <a:rPr lang="en-US" sz="850" dirty="0">
+              <a:t>Track:  </a:t>
+            </a:r>
+            <a:pPr indent="0" marL="0">
+              <a:buNone/>
+            </a:pPr>
+            <a:r>
+              <a:rPr lang="en-US" sz="800" dirty="0">
                 <a:solidFill>
                   <a:srgbClr val="1F2937"/>
                 </a:solidFill>
@@ -3043,22 +3129,517 @@
                 <a:ea typeface="Arial" pitchFamily="34" charset="-122"/>
                 <a:cs typeface="Arial" pitchFamily="34" charset="-120"/>
               </a:rPr>
-              <a:t>Stored in a spatial DB, served as GeoJSON to a Leaflet GIS dashboard; export to QGIS / ArcGIS.</a:t>
-            </a:r>
-            <a:endParaRPr lang="en-US" sz="850" dirty="0"/>
+              <a:t>DBSCAN (750 m) groups pixel-jittered detections into thermal SOURCES; 90-day history → active days, night %, FRP baseline μ/σ, persistence score.</a:t>
+            </a:r>
+            <a:endParaRPr lang="en-US" sz="800" dirty="0"/>
           </a:p>
         </p:txBody>
       </p:sp>
       <p:sp>
         <p:nvSpPr>
-          <p:cNvPr id="12" name="Text 9"/>
+          <p:cNvPr id="17" name="Shape 14"/>
+          <p:cNvSpPr/>
+          <p:nvPr/>
+        </p:nvSpPr>
+        <p:spPr>
+          <a:xfrm>
+            <a:off x="365760" y="2130552"/>
+            <a:ext cx="237744" cy="237744"/>
+          </a:xfrm>
+          <a:prstGeom prst="ellipse">
+            <a:avLst/>
+          </a:prstGeom>
+          <a:solidFill>
+            <a:srgbClr val="15803D"/>
+          </a:solidFill>
+          <a:ln w="12700">
+            <a:solidFill>
+              <a:srgbClr val="15803D"/>
+            </a:solidFill>
+            <a:prstDash val="solid"/>
+          </a:ln>
+        </p:spPr>
+      </p:sp>
+      <p:sp>
+        <p:nvSpPr>
+          <p:cNvPr id="18" name="Text 15"/>
           <p:cNvSpPr txBox="1"/>
           <p:nvPr/>
         </p:nvSpPr>
         <p:spPr>
           <a:xfrm>
-            <a:off x="274320" y="3547872"/>
-            <a:ext cx="5394960" cy="256032"/>
+            <a:off x="365760" y="2130552"/>
+            <a:ext cx="237744" cy="237744"/>
+          </a:xfrm>
+          <a:prstGeom prst="rect">
+            <a:avLst/>
+          </a:prstGeom>
+          <a:noFill/>
+          <a:ln/>
+        </p:spPr>
+        <p:txBody>
+          <a:bodyPr wrap="square" lIns="0" tIns="0" rIns="0" bIns="0" rtlCol="0" anchor="ctr"/>
+          <a:lstStyle/>
+          <a:p>
+            <a:pPr algn="ctr" indent="0" marL="0">
+              <a:buNone/>
+            </a:pPr>
+            <a:r>
+              <a:rPr lang="en-US" sz="800" b="1" dirty="0">
+                <a:solidFill>
+                  <a:srgbClr val="FFFFFF"/>
+                </a:solidFill>
+                <a:latin typeface="Arial" pitchFamily="34" charset="0"/>
+                <a:ea typeface="Arial" pitchFamily="34" charset="-122"/>
+                <a:cs typeface="Arial" pitchFamily="34" charset="-120"/>
+              </a:rPr>
+              <a:t>3</a:t>
+            </a:r>
+            <a:endParaRPr lang="en-US" sz="800" dirty="0"/>
+          </a:p>
+        </p:txBody>
+      </p:sp>
+      <p:sp>
+        <p:nvSpPr>
+          <p:cNvPr id="19" name="Text 16"/>
+          <p:cNvSpPr txBox="1"/>
+          <p:nvPr/>
+        </p:nvSpPr>
+        <p:spPr>
+          <a:xfrm>
+            <a:off x="685800" y="2103120"/>
+            <a:ext cx="4983480" cy="347472"/>
+          </a:xfrm>
+          <a:prstGeom prst="rect">
+            <a:avLst/>
+          </a:prstGeom>
+          <a:noFill/>
+          <a:ln/>
+        </p:spPr>
+        <p:txBody>
+          <a:bodyPr wrap="square" lIns="0" tIns="0" rIns="0" bIns="0" rtlCol="0" anchor="t"/>
+          <a:lstStyle/>
+          <a:p>
+            <a:pPr indent="0" marL="0">
+              <a:buNone/>
+            </a:pPr>
+            <a:r>
+              <a:rPr lang="en-US" sz="800" b="1" dirty="0">
+                <a:solidFill>
+                  <a:srgbClr val="15803D"/>
+                </a:solidFill>
+                <a:latin typeface="Arial" pitchFamily="34" charset="0"/>
+                <a:ea typeface="Arial" pitchFamily="34" charset="-122"/>
+                <a:cs typeface="Arial" pitchFamily="34" charset="-120"/>
+              </a:rPr>
+              <a:t>Contextualise:  </a:t>
+            </a:r>
+            <a:pPr indent="0" marL="0">
+              <a:buNone/>
+            </a:pPr>
+            <a:r>
+              <a:rPr lang="en-US" sz="800" dirty="0">
+                <a:solidFill>
+                  <a:srgbClr val="1F2937"/>
+                </a:solidFill>
+                <a:latin typeface="Arial" pitchFamily="34" charset="0"/>
+                <a:ea typeface="Arial" pitchFamily="34" charset="-122"/>
+                <a:cs typeface="Arial" pitchFamily="34" charset="-120"/>
+              </a:rPr>
+              <a:t>OpenStreetMap: nearest refinery / steel / power / flare / kiln / mine (type + distance) and land cover (cropland, forest, industrial).</a:t>
+            </a:r>
+            <a:endParaRPr lang="en-US" sz="800" dirty="0"/>
+          </a:p>
+        </p:txBody>
+      </p:sp>
+      <p:sp>
+        <p:nvSpPr>
+          <p:cNvPr id="20" name="Shape 17"/>
+          <p:cNvSpPr/>
+          <p:nvPr/>
+        </p:nvSpPr>
+        <p:spPr>
+          <a:xfrm>
+            <a:off x="365760" y="2459736"/>
+            <a:ext cx="237744" cy="237744"/>
+          </a:xfrm>
+          <a:prstGeom prst="ellipse">
+            <a:avLst/>
+          </a:prstGeom>
+          <a:solidFill>
+            <a:srgbClr val="6D28D9"/>
+          </a:solidFill>
+          <a:ln w="12700">
+            <a:solidFill>
+              <a:srgbClr val="6D28D9"/>
+            </a:solidFill>
+            <a:prstDash val="solid"/>
+          </a:ln>
+        </p:spPr>
+      </p:sp>
+      <p:sp>
+        <p:nvSpPr>
+          <p:cNvPr id="21" name="Text 18"/>
+          <p:cNvSpPr txBox="1"/>
+          <p:nvPr/>
+        </p:nvSpPr>
+        <p:spPr>
+          <a:xfrm>
+            <a:off x="365760" y="2459736"/>
+            <a:ext cx="237744" cy="237744"/>
+          </a:xfrm>
+          <a:prstGeom prst="rect">
+            <a:avLst/>
+          </a:prstGeom>
+          <a:noFill/>
+          <a:ln/>
+        </p:spPr>
+        <p:txBody>
+          <a:bodyPr wrap="square" lIns="0" tIns="0" rIns="0" bIns="0" rtlCol="0" anchor="ctr"/>
+          <a:lstStyle/>
+          <a:p>
+            <a:pPr algn="ctr" indent="0" marL="0">
+              <a:buNone/>
+            </a:pPr>
+            <a:r>
+              <a:rPr lang="en-US" sz="800" b="1" dirty="0">
+                <a:solidFill>
+                  <a:srgbClr val="FFFFFF"/>
+                </a:solidFill>
+                <a:latin typeface="Arial" pitchFamily="34" charset="0"/>
+                <a:ea typeface="Arial" pitchFamily="34" charset="-122"/>
+                <a:cs typeface="Arial" pitchFamily="34" charset="-120"/>
+              </a:rPr>
+              <a:t>4</a:t>
+            </a:r>
+            <a:endParaRPr lang="en-US" sz="800" dirty="0"/>
+          </a:p>
+        </p:txBody>
+      </p:sp>
+      <p:sp>
+        <p:nvSpPr>
+          <p:cNvPr id="22" name="Text 19"/>
+          <p:cNvSpPr txBox="1"/>
+          <p:nvPr/>
+        </p:nvSpPr>
+        <p:spPr>
+          <a:xfrm>
+            <a:off x="685800" y="2432304"/>
+            <a:ext cx="4983480" cy="347472"/>
+          </a:xfrm>
+          <a:prstGeom prst="rect">
+            <a:avLst/>
+          </a:prstGeom>
+          <a:noFill/>
+          <a:ln/>
+        </p:spPr>
+        <p:txBody>
+          <a:bodyPr wrap="square" lIns="0" tIns="0" rIns="0" bIns="0" rtlCol="0" anchor="t"/>
+          <a:lstStyle/>
+          <a:p>
+            <a:pPr indent="0" marL="0">
+              <a:buNone/>
+            </a:pPr>
+            <a:r>
+              <a:rPr lang="en-US" sz="800" b="1" dirty="0">
+                <a:solidFill>
+                  <a:srgbClr val="6D28D9"/>
+                </a:solidFill>
+                <a:latin typeface="Arial" pitchFamily="34" charset="0"/>
+                <a:ea typeface="Arial" pitchFamily="34" charset="-122"/>
+                <a:cs typeface="Arial" pitchFamily="34" charset="-120"/>
+              </a:rPr>
+              <a:t>Classify:  </a:t>
+            </a:r>
+            <a:pPr indent="0" marL="0">
+              <a:buNone/>
+            </a:pPr>
+            <a:r>
+              <a:rPr lang="en-US" sz="800" dirty="0">
+                <a:solidFill>
+                  <a:srgbClr val="1F2937"/>
+                </a:solidFill>
+                <a:latin typeface="Arial" pitchFamily="34" charset="0"/>
+                <a:ea typeface="Arial" pitchFamily="34" charset="-122"/>
+                <a:cs typeface="Arial" pitchFamily="34" charset="-120"/>
+              </a:rPr>
+              <a:t>Hybrid AI = explainable rule engine + gradient-boosted trees on 34 features → 6 classes with confidence and plain-language reasons.</a:t>
+            </a:r>
+            <a:endParaRPr lang="en-US" sz="800" dirty="0"/>
+          </a:p>
+        </p:txBody>
+      </p:sp>
+      <p:sp>
+        <p:nvSpPr>
+          <p:cNvPr id="23" name="Shape 20"/>
+          <p:cNvSpPr/>
+          <p:nvPr/>
+        </p:nvSpPr>
+        <p:spPr>
+          <a:xfrm>
+            <a:off x="365760" y="2788920"/>
+            <a:ext cx="237744" cy="237744"/>
+          </a:xfrm>
+          <a:prstGeom prst="ellipse">
+            <a:avLst/>
+          </a:prstGeom>
+          <a:solidFill>
+            <a:srgbClr val="B91C1C"/>
+          </a:solidFill>
+          <a:ln w="12700">
+            <a:solidFill>
+              <a:srgbClr val="B91C1C"/>
+            </a:solidFill>
+            <a:prstDash val="solid"/>
+          </a:ln>
+        </p:spPr>
+      </p:sp>
+      <p:sp>
+        <p:nvSpPr>
+          <p:cNvPr id="24" name="Text 21"/>
+          <p:cNvSpPr txBox="1"/>
+          <p:nvPr/>
+        </p:nvSpPr>
+        <p:spPr>
+          <a:xfrm>
+            <a:off x="365760" y="2788920"/>
+            <a:ext cx="237744" cy="237744"/>
+          </a:xfrm>
+          <a:prstGeom prst="rect">
+            <a:avLst/>
+          </a:prstGeom>
+          <a:noFill/>
+          <a:ln/>
+        </p:spPr>
+        <p:txBody>
+          <a:bodyPr wrap="square" lIns="0" tIns="0" rIns="0" bIns="0" rtlCol="0" anchor="ctr"/>
+          <a:lstStyle/>
+          <a:p>
+            <a:pPr algn="ctr" indent="0" marL="0">
+              <a:buNone/>
+            </a:pPr>
+            <a:r>
+              <a:rPr lang="en-US" sz="800" b="1" dirty="0">
+                <a:solidFill>
+                  <a:srgbClr val="FFFFFF"/>
+                </a:solidFill>
+                <a:latin typeface="Arial" pitchFamily="34" charset="0"/>
+                <a:ea typeface="Arial" pitchFamily="34" charset="-122"/>
+                <a:cs typeface="Arial" pitchFamily="34" charset="-120"/>
+              </a:rPr>
+              <a:t>5</a:t>
+            </a:r>
+            <a:endParaRPr lang="en-US" sz="800" dirty="0"/>
+          </a:p>
+        </p:txBody>
+      </p:sp>
+      <p:sp>
+        <p:nvSpPr>
+          <p:cNvPr id="25" name="Text 22"/>
+          <p:cNvSpPr txBox="1"/>
+          <p:nvPr/>
+        </p:nvSpPr>
+        <p:spPr>
+          <a:xfrm>
+            <a:off x="685800" y="2761488"/>
+            <a:ext cx="4983480" cy="347472"/>
+          </a:xfrm>
+          <a:prstGeom prst="rect">
+            <a:avLst/>
+          </a:prstGeom>
+          <a:noFill/>
+          <a:ln/>
+        </p:spPr>
+        <p:txBody>
+          <a:bodyPr wrap="square" lIns="0" tIns="0" rIns="0" bIns="0" rtlCol="0" anchor="t"/>
+          <a:lstStyle/>
+          <a:p>
+            <a:pPr indent="0" marL="0">
+              <a:buNone/>
+            </a:pPr>
+            <a:r>
+              <a:rPr lang="en-US" sz="800" b="1" dirty="0">
+                <a:solidFill>
+                  <a:srgbClr val="B91C1C"/>
+                </a:solidFill>
+                <a:latin typeface="Arial" pitchFamily="34" charset="0"/>
+                <a:ea typeface="Arial" pitchFamily="34" charset="-122"/>
+                <a:cs typeface="Arial" pitchFamily="34" charset="-120"/>
+              </a:rPr>
+              <a:t>Alert:  </a:t>
+            </a:r>
+            <a:pPr indent="0" marL="0">
+              <a:buNone/>
+            </a:pPr>
+            <a:r>
+              <a:rPr lang="en-US" sz="800" dirty="0">
+                <a:solidFill>
+                  <a:srgbClr val="1F2937"/>
+                </a:solidFill>
+                <a:latin typeface="Arial" pitchFamily="34" charset="0"/>
+                <a:ea typeface="Arial" pitchFamily="34" charset="-122"/>
+                <a:cs typeface="Arial" pitchFamily="34" charset="-120"/>
+              </a:rPr>
+              <a:t>Baseline-relative anomaly: FRP ≥ 2.5 μ and z ≥ 3 at a known source → incident candidate. Routine heat stays silent.</a:t>
+            </a:r>
+            <a:endParaRPr lang="en-US" sz="800" dirty="0"/>
+          </a:p>
+        </p:txBody>
+      </p:sp>
+      <p:sp>
+        <p:nvSpPr>
+          <p:cNvPr id="26" name="Shape 23"/>
+          <p:cNvSpPr/>
+          <p:nvPr/>
+        </p:nvSpPr>
+        <p:spPr>
+          <a:xfrm>
+            <a:off x="365760" y="3118104"/>
+            <a:ext cx="237744" cy="237744"/>
+          </a:xfrm>
+          <a:prstGeom prst="ellipse">
+            <a:avLst/>
+          </a:prstGeom>
+          <a:solidFill>
+            <a:srgbClr val="0F172A"/>
+          </a:solidFill>
+          <a:ln w="12700">
+            <a:solidFill>
+              <a:srgbClr val="0F172A"/>
+            </a:solidFill>
+            <a:prstDash val="solid"/>
+          </a:ln>
+        </p:spPr>
+      </p:sp>
+      <p:sp>
+        <p:nvSpPr>
+          <p:cNvPr id="27" name="Text 24"/>
+          <p:cNvSpPr txBox="1"/>
+          <p:nvPr/>
+        </p:nvSpPr>
+        <p:spPr>
+          <a:xfrm>
+            <a:off x="365760" y="3118104"/>
+            <a:ext cx="237744" cy="237744"/>
+          </a:xfrm>
+          <a:prstGeom prst="rect">
+            <a:avLst/>
+          </a:prstGeom>
+          <a:noFill/>
+          <a:ln/>
+        </p:spPr>
+        <p:txBody>
+          <a:bodyPr wrap="square" lIns="0" tIns="0" rIns="0" bIns="0" rtlCol="0" anchor="ctr"/>
+          <a:lstStyle/>
+          <a:p>
+            <a:pPr algn="ctr" indent="0" marL="0">
+              <a:buNone/>
+            </a:pPr>
+            <a:r>
+              <a:rPr lang="en-US" sz="800" b="1" dirty="0">
+                <a:solidFill>
+                  <a:srgbClr val="FFFFFF"/>
+                </a:solidFill>
+                <a:latin typeface="Arial" pitchFamily="34" charset="0"/>
+                <a:ea typeface="Arial" pitchFamily="34" charset="-122"/>
+                <a:cs typeface="Arial" pitchFamily="34" charset="-120"/>
+              </a:rPr>
+              <a:t>6</a:t>
+            </a:r>
+            <a:endParaRPr lang="en-US" sz="800" dirty="0"/>
+          </a:p>
+        </p:txBody>
+      </p:sp>
+      <p:sp>
+        <p:nvSpPr>
+          <p:cNvPr id="28" name="Text 25"/>
+          <p:cNvSpPr txBox="1"/>
+          <p:nvPr/>
+        </p:nvSpPr>
+        <p:spPr>
+          <a:xfrm>
+            <a:off x="685800" y="3090672"/>
+            <a:ext cx="4983480" cy="347472"/>
+          </a:xfrm>
+          <a:prstGeom prst="rect">
+            <a:avLst/>
+          </a:prstGeom>
+          <a:noFill/>
+          <a:ln/>
+        </p:spPr>
+        <p:txBody>
+          <a:bodyPr wrap="square" lIns="0" tIns="0" rIns="0" bIns="0" rtlCol="0" anchor="t"/>
+          <a:lstStyle/>
+          <a:p>
+            <a:pPr indent="0" marL="0">
+              <a:buNone/>
+            </a:pPr>
+            <a:r>
+              <a:rPr lang="en-US" sz="800" b="1" dirty="0">
+                <a:solidFill>
+                  <a:srgbClr val="0F172A"/>
+                </a:solidFill>
+                <a:latin typeface="Arial" pitchFamily="34" charset="0"/>
+                <a:ea typeface="Arial" pitchFamily="34" charset="-122"/>
+                <a:cs typeface="Arial" pitchFamily="34" charset="-120"/>
+              </a:rPr>
+              <a:t>Serve:  </a:t>
+            </a:r>
+            <a:pPr indent="0" marL="0">
+              <a:buNone/>
+            </a:pPr>
+            <a:r>
+              <a:rPr lang="en-US" sz="800" dirty="0">
+                <a:solidFill>
+                  <a:srgbClr val="1F2937"/>
+                </a:solidFill>
+                <a:latin typeface="Arial" pitchFamily="34" charset="0"/>
+                <a:ea typeface="Arial" pitchFamily="34" charset="-122"/>
+                <a:cs typeface="Arial" pitchFamily="34" charset="-120"/>
+              </a:rPr>
+              <a:t>Spatial DB → GeoJSON REST API → Leaflet GIS dashboard; QGIS / ArcGIS / Bhuvan-ready export.</a:t>
+            </a:r>
+            <a:endParaRPr lang="en-US" sz="800" dirty="0"/>
+          </a:p>
+        </p:txBody>
+      </p:sp>
+      <p:sp>
+        <p:nvSpPr>
+          <p:cNvPr id="29" name="Shape 26"/>
+          <p:cNvSpPr/>
+          <p:nvPr/>
+        </p:nvSpPr>
+        <p:spPr>
+          <a:xfrm>
+            <a:off x="274320" y="3438144"/>
+            <a:ext cx="5394960" cy="512064"/>
+          </a:xfrm>
+          <a:prstGeom prst="roundRect">
+            <a:avLst>
+              <a:gd name="adj" fmla="val 8929"/>
+            </a:avLst>
+          </a:prstGeom>
+          <a:solidFill>
+            <a:srgbClr val="FFF7ED"/>
+          </a:solidFill>
+          <a:ln w="9525">
+            <a:solidFill>
+              <a:srgbClr val="FDBA74"/>
+            </a:solidFill>
+            <a:prstDash val="solid"/>
+          </a:ln>
+        </p:spPr>
+      </p:sp>
+      <p:sp>
+        <p:nvSpPr>
+          <p:cNvPr id="30" name="Text 27"/>
+          <p:cNvSpPr txBox="1"/>
+          <p:nvPr/>
+        </p:nvSpPr>
+        <p:spPr>
+          <a:xfrm>
+            <a:off x="365760" y="3438144"/>
+            <a:ext cx="5212080" cy="512064"/>
           </a:xfrm>
           <a:prstGeom prst="rect">
             <a:avLst/>
@@ -3074,129 +3655,58 @@
               <a:buNone/>
             </a:pPr>
             <a:r>
-              <a:rPr lang="en-US" sz="1050" b="1" dirty="0">
-                <a:solidFill>
-                  <a:srgbClr val="000000"/>
+              <a:rPr lang="en-US" sz="720" b="1" dirty="0">
+                <a:solidFill>
+                  <a:srgbClr val="E8590C"/>
                 </a:solidFill>
                 <a:latin typeface="Arial" pitchFamily="34" charset="0"/>
                 <a:ea typeface="Arial" pitchFamily="34" charset="-122"/>
                 <a:cs typeface="Arial" pitchFamily="34" charset="-120"/>
               </a:rPr>
-              <a:t>•  </a:t>
+              <a:t>One detection, end-to-end:  </a:t>
             </a:r>
             <a:pPr indent="0" marL="0">
               <a:buNone/>
             </a:pPr>
             <a:r>
-              <a:rPr lang="en-US" sz="1050" b="1" dirty="0">
-                <a:solidFill>
-                  <a:srgbClr val="15803D"/>
+              <a:rPr lang="en-US" sz="720" dirty="0">
+                <a:solidFill>
+                  <a:srgbClr val="1F2937"/>
                 </a:solidFill>
                 <a:latin typeface="Arial" pitchFamily="34" charset="0"/>
                 <a:ea typeface="Arial" pitchFamily="34" charset="-122"/>
                 <a:cs typeface="Arial" pitchFamily="34" charset="-120"/>
               </a:rPr>
-              <a:t>How it addresses the problem</a:t>
-            </a:r>
-            <a:endParaRPr lang="en-US" sz="1050" dirty="0"/>
-          </a:p>
-        </p:txBody>
-      </p:sp>
-      <p:sp>
-        <p:nvSpPr>
-          <p:cNvPr id="13" name="Text 10"/>
-          <p:cNvSpPr txBox="1"/>
-          <p:nvPr/>
-        </p:nvSpPr>
-        <p:spPr>
-          <a:xfrm>
-            <a:off x="411480" y="3794760"/>
-            <a:ext cx="5257800" cy="1005840"/>
-          </a:xfrm>
-          <a:prstGeom prst="rect">
-            <a:avLst/>
-          </a:prstGeom>
-          <a:noFill/>
-          <a:ln/>
-        </p:spPr>
-        <p:txBody>
-          <a:bodyPr wrap="square" lIns="12700" tIns="12700" rIns="12700" bIns="12700" rtlCol="0" anchor="t"/>
-          <a:lstStyle/>
-          <a:p>
-            <a:pPr marL="127000" indent="-127000">
-              <a:spcAft>
-                <a:spcPts val="150"/>
-              </a:spcAft>
-              <a:buSzPct val="100000"/>
-              <a:buChar char="•"/>
-            </a:pPr>
-            <a:r>
-              <a:rPr lang="en-US" sz="850" dirty="0">
-                <a:solidFill>
-                  <a:srgbClr val="1F2937"/>
+              <a:t>FIRMS pixel 22.352° N 70.049° E, FRP 207 MW, 21 Apr 08:06 UTC  →  </a:t>
+            </a:r>
+            <a:pPr indent="0" marL="0">
+              <a:buNone/>
+            </a:pPr>
+            <a:r>
+              <a:rPr lang="en-US" sz="720" b="1" dirty="0">
+                <a:solidFill>
+                  <a:srgbClr val="0F172A"/>
                 </a:solidFill>
                 <a:latin typeface="Arial" pitchFamily="34" charset="0"/>
                 <a:ea typeface="Arial" pitchFamily="34" charset="-122"/>
                 <a:cs typeface="Arial" pitchFamily="34" charset="-120"/>
               </a:rPr>
-              <a:t>Segregates industrial fires from forest fires, crop burning, flares and mine fires — exactly the PS requirement.</a:t>
-            </a:r>
-            <a:endParaRPr lang="en-US" sz="850" dirty="0"/>
-          </a:p>
-          <a:p>
-            <a:pPr marL="127000" indent="-127000">
-              <a:spcAft>
-                <a:spcPts val="150"/>
-              </a:spcAft>
-              <a:buSzPct val="100000"/>
-              <a:buChar char="•"/>
-            </a:pPr>
-            <a:r>
-              <a:rPr lang="en-US" sz="850" dirty="0">
-                <a:solidFill>
-                  <a:srgbClr val="1F2937"/>
-                </a:solidFill>
-                <a:latin typeface="Arial" pitchFamily="34" charset="0"/>
-                <a:ea typeface="Arial" pitchFamily="34" charset="-122"/>
-                <a:cs typeface="Arial" pitchFamily="34" charset="-120"/>
-              </a:rPr>
-              <a:t>Only abnormal industrial heat raises an alert → 99 % fewer hotspots for a control room to triage.</a:t>
-            </a:r>
-            <a:endParaRPr lang="en-US" sz="850" dirty="0"/>
-          </a:p>
-          <a:p>
-            <a:pPr marL="127000" indent="-127000">
-              <a:spcAft>
-                <a:spcPts val="150"/>
-              </a:spcAft>
-              <a:buSzPct val="100000"/>
-              <a:buChar char="•"/>
-            </a:pPr>
-            <a:r>
-              <a:rPr lang="en-US" sz="850" dirty="0">
-                <a:solidFill>
-                  <a:srgbClr val="1F2937"/>
-                </a:solidFill>
-                <a:latin typeface="Arial" pitchFamily="34" charset="0"/>
-                <a:ea typeface="Arial" pitchFamily="34" charset="-122"/>
-                <a:cs typeface="Arial" pitchFamily="34" charset="-120"/>
-              </a:rPr>
-              <a:t>Every result is a map overlay + stored record → the GIS storage / visualisation requirement.</a:t>
-            </a:r>
-            <a:endParaRPr lang="en-US" sz="850" dirty="0"/>
+              <a:t>Industrial fire · Jamnagar Refinery (30 m from OSM polygon) · persistent 86/90 days · 10× its 19 MW baseline · ⚠ incident candidate · confidence 0.97 · verify: Sentinel-2 SWIR link</a:t>
+            </a:r>
+            <a:endParaRPr lang="en-US" sz="720" dirty="0"/>
           </a:p>
         </p:txBody>
       </p:sp>
       <p:sp>
         <p:nvSpPr>
-          <p:cNvPr id="14" name="Text 11"/>
+          <p:cNvPr id="31" name="Text 28"/>
           <p:cNvSpPr txBox="1"/>
           <p:nvPr/>
         </p:nvSpPr>
         <p:spPr>
           <a:xfrm>
-            <a:off x="5806440" y="1207008"/>
-            <a:ext cx="3108960" cy="256032"/>
+            <a:off x="274320" y="3986784"/>
+            <a:ext cx="5394960" cy="256032"/>
           </a:xfrm>
           <a:prstGeom prst="rect">
             <a:avLst/>
@@ -3228,13 +3738,13 @@
             <a:r>
               <a:rPr lang="en-US" sz="1050" b="1" dirty="0">
                 <a:solidFill>
-                  <a:srgbClr val="6D28D9"/>
+                  <a:srgbClr val="15803D"/>
                 </a:solidFill>
                 <a:latin typeface="Arial" pitchFamily="34" charset="0"/>
                 <a:ea typeface="Arial" pitchFamily="34" charset="-122"/>
                 <a:cs typeface="Arial" pitchFamily="34" charset="-120"/>
               </a:rPr>
-              <a:t>Innovation and uniqueness of the solution</a:t>
+              <a:t>How it addresses the problem</a:t>
             </a:r>
             <a:endParaRPr lang="en-US" sz="1050" dirty="0"/>
           </a:p>
@@ -3242,14 +3752,14 @@
       </p:sp>
       <p:sp>
         <p:nvSpPr>
-          <p:cNvPr id="15" name="Text 12"/>
+          <p:cNvPr id="32" name="Text 29"/>
           <p:cNvSpPr txBox="1"/>
           <p:nvPr/>
         </p:nvSpPr>
         <p:spPr>
           <a:xfrm>
-            <a:off x="5943600" y="1463040"/>
-            <a:ext cx="2971800" cy="1600200"/>
+            <a:off x="411480" y="4242816"/>
+            <a:ext cx="5257800" cy="182880"/>
           </a:xfrm>
           <a:prstGeom prst="rect">
             <a:avLst/>
@@ -3258,18 +3768,14 @@
           <a:ln/>
         </p:spPr>
         <p:txBody>
-          <a:bodyPr wrap="square" lIns="12700" tIns="12700" rIns="12700" bIns="12700" rtlCol="0" anchor="t"/>
+          <a:bodyPr wrap="square" lIns="0" tIns="0" rIns="0" bIns="0" rtlCol="0" anchor="ctr"/>
           <a:lstStyle/>
           <a:p>
-            <a:pPr marL="127000" indent="-127000">
-              <a:spcAft>
-                <a:spcPts val="150"/>
-              </a:spcAft>
-              <a:buSzPct val="100000"/>
-              <a:buChar char="•"/>
-            </a:pPr>
-            <a:r>
-              <a:rPr lang="en-US" sz="850" dirty="0">
+            <a:pPr indent="0" marL="0">
+              <a:buNone/>
+            </a:pPr>
+            <a:r>
+              <a:rPr lang="en-US" sz="700" dirty="0">
                 <a:solidFill>
                   <a:srgbClr val="1F2937"/>
                 </a:solidFill>
@@ -3277,41 +3783,52 @@
                 <a:ea typeface="Arial" pitchFamily="34" charset="-122"/>
                 <a:cs typeface="Arial" pitchFamily="34" charset="-120"/>
               </a:rPr>
-              <a:t>Fuses temporal persistence + OSM infrastructure + physical signature in ONE explainable classifier.</a:t>
-            </a:r>
-            <a:endParaRPr lang="en-US" sz="850" dirty="0"/>
-          </a:p>
-          <a:p>
-            <a:pPr marL="127000" indent="-127000">
-              <a:spcAft>
-                <a:spcPts val="150"/>
-              </a:spcAft>
-              <a:buSzPct val="100000"/>
-              <a:buChar char="•"/>
-            </a:pPr>
-            <a:r>
-              <a:rPr lang="en-US" sz="850" dirty="0">
-                <a:solidFill>
-                  <a:srgbClr val="1F2937"/>
+              <a:t>PS asks: segregate industrial fires from forest &amp; natural fires </a:t>
+            </a:r>
+            <a:pPr indent="0" marL="0">
+              <a:buNone/>
+            </a:pPr>
+            <a:r>
+              <a:rPr lang="en-US" sz="700" b="1" dirty="0">
+                <a:solidFill>
+                  <a:srgbClr val="15803D"/>
                 </a:solidFill>
                 <a:latin typeface="Arial" pitchFamily="34" charset="0"/>
                 <a:ea typeface="Arial" pitchFamily="34" charset="-122"/>
                 <a:cs typeface="Arial" pitchFamily="34" charset="-120"/>
               </a:rPr>
-              <a:t>Baseline-relative alerts tell "refinery operating" from "refinery on fire".</a:t>
-            </a:r>
-            <a:endParaRPr lang="en-US" sz="850" dirty="0"/>
+              <a:t>→ 6-class AI: industrial · wildfire · crop burn · flare · mine</a:t>
+            </a:r>
+            <a:endParaRPr lang="en-US" sz="700" dirty="0"/>
           </a:p>
+        </p:txBody>
+      </p:sp>
+      <p:sp>
+        <p:nvSpPr>
+          <p:cNvPr id="33" name="Text 30"/>
+          <p:cNvSpPr txBox="1"/>
+          <p:nvPr/>
+        </p:nvSpPr>
+        <p:spPr>
+          <a:xfrm>
+            <a:off x="411480" y="4425696"/>
+            <a:ext cx="5257800" cy="182880"/>
+          </a:xfrm>
+          <a:prstGeom prst="rect">
+            <a:avLst/>
+          </a:prstGeom>
+          <a:noFill/>
+          <a:ln/>
+        </p:spPr>
+        <p:txBody>
+          <a:bodyPr wrap="square" lIns="0" tIns="0" rIns="0" bIns="0" rtlCol="0" anchor="ctr"/>
+          <a:lstStyle/>
           <a:p>
-            <a:pPr marL="127000" indent="-127000">
-              <a:spcAft>
-                <a:spcPts val="150"/>
-              </a:spcAft>
-              <a:buSzPct val="100000"/>
-              <a:buChar char="•"/>
-            </a:pPr>
-            <a:r>
-              <a:rPr lang="en-US" sz="850" dirty="0">
+            <a:pPr indent="0" marL="0">
+              <a:buNone/>
+            </a:pPr>
+            <a:r>
+              <a:rPr lang="en-US" sz="700" dirty="0">
                 <a:solidFill>
                   <a:srgbClr val="1F2937"/>
                 </a:solidFill>
@@ -3319,30 +3836,447 @@
                 <a:ea typeface="Arial" pitchFamily="34" charset="-122"/>
                 <a:cs typeface="Arial" pitchFamily="34" charset="-120"/>
               </a:rPr>
-              <a:t>Finds UNREGISTERED sources: persistent heat where no facility is mapped.</a:t>
-            </a:r>
-            <a:endParaRPr lang="en-US" sz="850" dirty="0"/>
-          </a:p>
-          <a:p>
-            <a:pPr marL="127000" indent="-127000">
-              <a:spcAft>
-                <a:spcPts val="150"/>
-              </a:spcAft>
-              <a:buSzPct val="100000"/>
-              <a:buChar char="•"/>
-            </a:pPr>
-            <a:r>
-              <a:rPr lang="en-US" sz="850" dirty="0">
-                <a:solidFill>
-                  <a:srgbClr val="1F2937"/>
+              <a:t>PS asks: GIS storage + map overlay </a:t>
+            </a:r>
+            <a:pPr indent="0" marL="0">
+              <a:buNone/>
+            </a:pPr>
+            <a:r>
+              <a:rPr lang="en-US" sz="700" b="1" dirty="0">
+                <a:solidFill>
+                  <a:srgbClr val="15803D"/>
                 </a:solidFill>
                 <a:latin typeface="Arial" pitchFamily="34" charset="0"/>
                 <a:ea typeface="Arial" pitchFamily="34" charset="-122"/>
                 <a:cs typeface="Arial" pitchFamily="34" charset="-120"/>
               </a:rPr>
-              <a:t>Zero data cost; offline archive or live with one API key; working prototype online.</a:t>
-            </a:r>
-            <a:endParaRPr lang="en-US" sz="850" dirty="0"/>
+              <a:t>→ spatial DB, GeoJSON API, dashboard, QGIS export (live now)</a:t>
+            </a:r>
+            <a:endParaRPr lang="en-US" sz="700" dirty="0"/>
+          </a:p>
+        </p:txBody>
+      </p:sp>
+      <p:sp>
+        <p:nvSpPr>
+          <p:cNvPr id="34" name="Text 31"/>
+          <p:cNvSpPr txBox="1"/>
+          <p:nvPr/>
+        </p:nvSpPr>
+        <p:spPr>
+          <a:xfrm>
+            <a:off x="411480" y="4608576"/>
+            <a:ext cx="5257800" cy="182880"/>
+          </a:xfrm>
+          <a:prstGeom prst="rect">
+            <a:avLst/>
+          </a:prstGeom>
+          <a:noFill/>
+          <a:ln/>
+        </p:spPr>
+        <p:txBody>
+          <a:bodyPr wrap="square" lIns="0" tIns="0" rIns="0" bIns="0" rtlCol="0" anchor="ctr"/>
+          <a:lstStyle/>
+          <a:p>
+            <a:pPr indent="0" marL="0">
+              <a:buNone/>
+            </a:pPr>
+            <a:r>
+              <a:rPr lang="en-US" sz="700" dirty="0">
+                <a:solidFill>
+                  <a:srgbClr val="1F2937"/>
+                </a:solidFill>
+                <a:latin typeface="Arial" pitchFamily="34" charset="0"/>
+                <a:ea typeface="Arial" pitchFamily="34" charset="-122"/>
+                <a:cs typeface="Arial" pitchFamily="34" charset="-120"/>
+              </a:rPr>
+              <a:t>Disaster management needs: act only on real incidents </a:t>
+            </a:r>
+            <a:pPr indent="0" marL="0">
+              <a:buNone/>
+            </a:pPr>
+            <a:r>
+              <a:rPr lang="en-US" sz="700" b="1" dirty="0">
+                <a:solidFill>
+                  <a:srgbClr val="15803D"/>
+                </a:solidFill>
+                <a:latin typeface="Arial" pitchFamily="34" charset="0"/>
+                <a:ea typeface="Arial" pitchFamily="34" charset="-122"/>
+                <a:cs typeface="Arial" pitchFamily="34" charset="-120"/>
+              </a:rPr>
+              <a:t>→ 138 of 22,179 detections flagged (0.6 %) — 99 % less to triage</a:t>
+            </a:r>
+            <a:endParaRPr lang="en-US" sz="700" dirty="0"/>
+          </a:p>
+        </p:txBody>
+      </p:sp>
+      <p:sp>
+        <p:nvSpPr>
+          <p:cNvPr id="35" name="Text 32"/>
+          <p:cNvSpPr txBox="1"/>
+          <p:nvPr/>
+        </p:nvSpPr>
+        <p:spPr>
+          <a:xfrm>
+            <a:off x="5806440" y="1188720"/>
+            <a:ext cx="3108960" cy="256032"/>
+          </a:xfrm>
+          <a:prstGeom prst="rect">
+            <a:avLst/>
+          </a:prstGeom>
+          <a:noFill/>
+          <a:ln/>
+        </p:spPr>
+        <p:txBody>
+          <a:bodyPr wrap="square" lIns="0" tIns="0" rIns="0" bIns="0" rtlCol="0" anchor="ctr"/>
+          <a:lstStyle/>
+          <a:p>
+            <a:pPr indent="0" marL="0">
+              <a:buNone/>
+            </a:pPr>
+            <a:r>
+              <a:rPr lang="en-US" sz="1050" b="1" dirty="0">
+                <a:solidFill>
+                  <a:srgbClr val="000000"/>
+                </a:solidFill>
+                <a:latin typeface="Arial" pitchFamily="34" charset="0"/>
+                <a:ea typeface="Arial" pitchFamily="34" charset="-122"/>
+                <a:cs typeface="Arial" pitchFamily="34" charset="-120"/>
+              </a:rPr>
+              <a:t>•  </a:t>
+            </a:r>
+            <a:pPr indent="0" marL="0">
+              <a:buNone/>
+            </a:pPr>
+            <a:r>
+              <a:rPr lang="en-US" sz="1050" b="1" dirty="0">
+                <a:solidFill>
+                  <a:srgbClr val="6D28D9"/>
+                </a:solidFill>
+                <a:latin typeface="Arial" pitchFamily="34" charset="0"/>
+                <a:ea typeface="Arial" pitchFamily="34" charset="-122"/>
+                <a:cs typeface="Arial" pitchFamily="34" charset="-120"/>
+              </a:rPr>
+              <a:t>Innovation and uniqueness of the solution</a:t>
+            </a:r>
+            <a:endParaRPr lang="en-US" sz="1050" dirty="0"/>
+          </a:p>
+        </p:txBody>
+      </p:sp>
+      <p:sp>
+        <p:nvSpPr>
+          <p:cNvPr id="36" name="Text 33"/>
+          <p:cNvSpPr txBox="1"/>
+          <p:nvPr/>
+        </p:nvSpPr>
+        <p:spPr>
+          <a:xfrm>
+            <a:off x="5852160" y="1463040"/>
+            <a:ext cx="3063240" cy="274320"/>
+          </a:xfrm>
+          <a:prstGeom prst="rect">
+            <a:avLst/>
+          </a:prstGeom>
+          <a:noFill/>
+          <a:ln/>
+        </p:spPr>
+        <p:txBody>
+          <a:bodyPr wrap="square" lIns="0" tIns="0" rIns="0" bIns="0" rtlCol="0" anchor="t"/>
+          <a:lstStyle/>
+          <a:p>
+            <a:pPr indent="0" marL="0">
+              <a:buNone/>
+            </a:pPr>
+            <a:r>
+              <a:rPr lang="en-US" sz="750" b="1" dirty="0">
+                <a:solidFill>
+                  <a:srgbClr val="6D28D9"/>
+                </a:solidFill>
+                <a:latin typeface="Arial" pitchFamily="34" charset="0"/>
+                <a:ea typeface="Arial" pitchFamily="34" charset="-122"/>
+                <a:cs typeface="Arial" pitchFamily="34" charset="-120"/>
+              </a:rPr>
+              <a:t>✦ Source-level persistence fingerprint — </a:t>
+            </a:r>
+            <a:pPr indent="0" marL="0">
+              <a:buNone/>
+            </a:pPr>
+            <a:r>
+              <a:rPr lang="en-US" sz="750" dirty="0">
+                <a:solidFill>
+                  <a:srgbClr val="1F2937"/>
+                </a:solidFill>
+                <a:latin typeface="Arial" pitchFamily="34" charset="0"/>
+                <a:ea typeface="Arial" pitchFamily="34" charset="-122"/>
+                <a:cs typeface="Arial" pitchFamily="34" charset="-120"/>
+              </a:rPr>
+              <a:t>classify the SOURCE over 90 days, not a single pixel</a:t>
+            </a:r>
+            <a:endParaRPr lang="en-US" sz="750" dirty="0"/>
+          </a:p>
+        </p:txBody>
+      </p:sp>
+      <p:sp>
+        <p:nvSpPr>
+          <p:cNvPr id="37" name="Text 34"/>
+          <p:cNvSpPr txBox="1"/>
+          <p:nvPr/>
+        </p:nvSpPr>
+        <p:spPr>
+          <a:xfrm>
+            <a:off x="5852160" y="1737360"/>
+            <a:ext cx="3063240" cy="274320"/>
+          </a:xfrm>
+          <a:prstGeom prst="rect">
+            <a:avLst/>
+          </a:prstGeom>
+          <a:noFill/>
+          <a:ln/>
+        </p:spPr>
+        <p:txBody>
+          <a:bodyPr wrap="square" lIns="0" tIns="0" rIns="0" bIns="0" rtlCol="0" anchor="t"/>
+          <a:lstStyle/>
+          <a:p>
+            <a:pPr indent="0" marL="0">
+              <a:buNone/>
+            </a:pPr>
+            <a:r>
+              <a:rPr lang="en-US" sz="750" b="1" dirty="0">
+                <a:solidFill>
+                  <a:srgbClr val="6D28D9"/>
+                </a:solidFill>
+                <a:latin typeface="Arial" pitchFamily="34" charset="0"/>
+                <a:ea typeface="Arial" pitchFamily="34" charset="-122"/>
+                <a:cs typeface="Arial" pitchFamily="34" charset="-120"/>
+              </a:rPr>
+              <a:t>✦ Baseline-relative anomaly alerts — </a:t>
+            </a:r>
+            <a:pPr indent="0" marL="0">
+              <a:buNone/>
+            </a:pPr>
+            <a:r>
+              <a:rPr lang="en-US" sz="750" dirty="0">
+                <a:solidFill>
+                  <a:srgbClr val="1F2937"/>
+                </a:solidFill>
+                <a:latin typeface="Arial" pitchFamily="34" charset="0"/>
+                <a:ea typeface="Arial" pitchFamily="34" charset="-122"/>
+                <a:cs typeface="Arial" pitchFamily="34" charset="-120"/>
+              </a:rPr>
+              <a:t>each site compared with its own normal → "operating" vs "on fire"</a:t>
+            </a:r>
+            <a:endParaRPr lang="en-US" sz="750" dirty="0"/>
+          </a:p>
+        </p:txBody>
+      </p:sp>
+      <p:sp>
+        <p:nvSpPr>
+          <p:cNvPr id="38" name="Text 35"/>
+          <p:cNvSpPr txBox="1"/>
+          <p:nvPr/>
+        </p:nvSpPr>
+        <p:spPr>
+          <a:xfrm>
+            <a:off x="5852160" y="2011680"/>
+            <a:ext cx="3063240" cy="274320"/>
+          </a:xfrm>
+          <a:prstGeom prst="rect">
+            <a:avLst/>
+          </a:prstGeom>
+          <a:noFill/>
+          <a:ln/>
+        </p:spPr>
+        <p:txBody>
+          <a:bodyPr wrap="square" lIns="0" tIns="0" rIns="0" bIns="0" rtlCol="0" anchor="t"/>
+          <a:lstStyle/>
+          <a:p>
+            <a:pPr indent="0" marL="0">
+              <a:buNone/>
+            </a:pPr>
+            <a:r>
+              <a:rPr lang="en-US" sz="750" b="1" dirty="0">
+                <a:solidFill>
+                  <a:srgbClr val="6D28D9"/>
+                </a:solidFill>
+                <a:latin typeface="Arial" pitchFamily="34" charset="0"/>
+                <a:ea typeface="Arial" pitchFamily="34" charset="-122"/>
+                <a:cs typeface="Arial" pitchFamily="34" charset="-120"/>
+              </a:rPr>
+              <a:t>✦ OSM infrastructure fusion — </a:t>
+            </a:r>
+            <a:pPr indent="0" marL="0">
+              <a:buNone/>
+            </a:pPr>
+            <a:r>
+              <a:rPr lang="en-US" sz="750" dirty="0">
+                <a:solidFill>
+                  <a:srgbClr val="1F2937"/>
+                </a:solidFill>
+                <a:latin typeface="Arial" pitchFamily="34" charset="0"/>
+                <a:ea typeface="Arial" pitchFamily="34" charset="-122"/>
+                <a:cs typeface="Arial" pitchFamily="34" charset="-120"/>
+              </a:rPr>
+              <a:t>facility type + distance + land cover as features</a:t>
+            </a:r>
+            <a:endParaRPr lang="en-US" sz="750" dirty="0"/>
+          </a:p>
+        </p:txBody>
+      </p:sp>
+      <p:sp>
+        <p:nvSpPr>
+          <p:cNvPr id="39" name="Text 36"/>
+          <p:cNvSpPr txBox="1"/>
+          <p:nvPr/>
+        </p:nvSpPr>
+        <p:spPr>
+          <a:xfrm>
+            <a:off x="5852160" y="2286000"/>
+            <a:ext cx="3063240" cy="274320"/>
+          </a:xfrm>
+          <a:prstGeom prst="rect">
+            <a:avLst/>
+          </a:prstGeom>
+          <a:noFill/>
+          <a:ln/>
+        </p:spPr>
+        <p:txBody>
+          <a:bodyPr wrap="square" lIns="0" tIns="0" rIns="0" bIns="0" rtlCol="0" anchor="t"/>
+          <a:lstStyle/>
+          <a:p>
+            <a:pPr indent="0" marL="0">
+              <a:buNone/>
+            </a:pPr>
+            <a:r>
+              <a:rPr lang="en-US" sz="750" b="1" dirty="0">
+                <a:solidFill>
+                  <a:srgbClr val="6D28D9"/>
+                </a:solidFill>
+                <a:latin typeface="Arial" pitchFamily="34" charset="0"/>
+                <a:ea typeface="Arial" pitchFamily="34" charset="-122"/>
+                <a:cs typeface="Arial" pitchFamily="34" charset="-120"/>
+              </a:rPr>
+              <a:t>✦ Explainable hybrid AI — </a:t>
+            </a:r>
+            <a:pPr indent="0" marL="0">
+              <a:buNone/>
+            </a:pPr>
+            <a:r>
+              <a:rPr lang="en-US" sz="750" dirty="0">
+                <a:solidFill>
+                  <a:srgbClr val="1F2937"/>
+                </a:solidFill>
+                <a:latin typeface="Arial" pitchFamily="34" charset="0"/>
+                <a:ea typeface="Arial" pitchFamily="34" charset="-122"/>
+                <a:cs typeface="Arial" pitchFamily="34" charset="-120"/>
+              </a:rPr>
+              <a:t>every label ships with human-readable reasons — auditable</a:t>
+            </a:r>
+            <a:endParaRPr lang="en-US" sz="750" dirty="0"/>
+          </a:p>
+        </p:txBody>
+      </p:sp>
+      <p:sp>
+        <p:nvSpPr>
+          <p:cNvPr id="40" name="Text 37"/>
+          <p:cNvSpPr txBox="1"/>
+          <p:nvPr/>
+        </p:nvSpPr>
+        <p:spPr>
+          <a:xfrm>
+            <a:off x="5852160" y="2560320"/>
+            <a:ext cx="3063240" cy="274320"/>
+          </a:xfrm>
+          <a:prstGeom prst="rect">
+            <a:avLst/>
+          </a:prstGeom>
+          <a:noFill/>
+          <a:ln/>
+        </p:spPr>
+        <p:txBody>
+          <a:bodyPr wrap="square" lIns="0" tIns="0" rIns="0" bIns="0" rtlCol="0" anchor="t"/>
+          <a:lstStyle/>
+          <a:p>
+            <a:pPr indent="0" marL="0">
+              <a:buNone/>
+            </a:pPr>
+            <a:r>
+              <a:rPr lang="en-US" sz="750" b="1" dirty="0">
+                <a:solidFill>
+                  <a:srgbClr val="6D28D9"/>
+                </a:solidFill>
+                <a:latin typeface="Arial" pitchFamily="34" charset="0"/>
+                <a:ea typeface="Arial" pitchFamily="34" charset="-122"/>
+                <a:cs typeface="Arial" pitchFamily="34" charset="-120"/>
+              </a:rPr>
+              <a:t>✦ Unregistered-source discovery — </a:t>
+            </a:r>
+            <a:pPr indent="0" marL="0">
+              <a:buNone/>
+            </a:pPr>
+            <a:r>
+              <a:rPr lang="en-US" sz="750" dirty="0">
+                <a:solidFill>
+                  <a:srgbClr val="1F2937"/>
+                </a:solidFill>
+                <a:latin typeface="Arial" pitchFamily="34" charset="0"/>
+                <a:ea typeface="Arial" pitchFamily="34" charset="-122"/>
+                <a:cs typeface="Arial" pitchFamily="34" charset="-120"/>
+              </a:rPr>
+              <a:t>persistent heat with no mapped facility is itself a finding</a:t>
+            </a:r>
+            <a:endParaRPr lang="en-US" sz="750" dirty="0"/>
+          </a:p>
+        </p:txBody>
+      </p:sp>
+      <p:sp>
+        <p:nvSpPr>
+          <p:cNvPr id="41" name="Text 38"/>
+          <p:cNvSpPr txBox="1"/>
+          <p:nvPr/>
+        </p:nvSpPr>
+        <p:spPr>
+          <a:xfrm>
+            <a:off x="5852160" y="2834640"/>
+            <a:ext cx="3063240" cy="274320"/>
+          </a:xfrm>
+          <a:prstGeom prst="rect">
+            <a:avLst/>
+          </a:prstGeom>
+          <a:noFill/>
+          <a:ln/>
+        </p:spPr>
+        <p:txBody>
+          <a:bodyPr wrap="square" lIns="0" tIns="0" rIns="0" bIns="0" rtlCol="0" anchor="t"/>
+          <a:lstStyle/>
+          <a:p>
+            <a:pPr indent="0" marL="0">
+              <a:buNone/>
+            </a:pPr>
+            <a:r>
+              <a:rPr lang="en-US" sz="750" b="1" dirty="0">
+                <a:solidFill>
+                  <a:srgbClr val="6D28D9"/>
+                </a:solidFill>
+                <a:latin typeface="Arial" pitchFamily="34" charset="0"/>
+                <a:ea typeface="Arial" pitchFamily="34" charset="-122"/>
+                <a:cs typeface="Arial" pitchFamily="34" charset="-120"/>
+              </a:rPr>
+              <a:t>✦ Open &amp; sovereign — </a:t>
+            </a:r>
+            <a:pPr indent="0" marL="0">
+              <a:buNone/>
+            </a:pPr>
+            <a:r>
+              <a:rPr lang="en-US" sz="750" dirty="0">
+                <a:solidFill>
+                  <a:srgbClr val="1F2937"/>
+                </a:solidFill>
+                <a:latin typeface="Arial" pitchFamily="34" charset="0"/>
+                <a:ea typeface="Arial" pitchFamily="34" charset="-122"/>
+                <a:cs typeface="Arial" pitchFamily="34" charset="-120"/>
+              </a:rPr>
+              <a:t>₹0 data, self-hostable, prototype live on GitHub Pages</a:t>
+            </a:r>
+            <a:endParaRPr lang="en-US" sz="750" dirty="0"/>
           </a:p>
         </p:txBody>
       </p:sp>
@@ -3361,7 +4295,7 @@
           </p:nvPr>
         </p:nvGraphicFramePr>
         <p:xfrm>
-          <a:off x="5806440" y="3127248"/>
+          <a:off x="5806440" y="3154680"/>
           <a:ext cx="3108960" cy="914400"/>
         </p:xfrm>
         <a:graphic>
@@ -3369,12 +4303,12 @@
             <a:tbl>
               <a:tblPr/>
               <a:tblGrid>
-                <a:gridCol w="1417320"/>
-                <a:gridCol w="502920"/>
-                <a:gridCol w="685800"/>
+                <a:gridCol w="1463040"/>
+                <a:gridCol w="548640"/>
+                <a:gridCol w="594360"/>
                 <a:gridCol w="502920"/>
               </a:tblGrid>
-              <a:tr h="224028">
+              <a:tr h="205740">
                 <a:tc>
                   <a:txBody>
                     <a:bodyPr/>
@@ -3384,7 +4318,7 @@
                         <a:buNone/>
                       </a:pPr>
                       <a:r>
-                        <a:rPr lang="en-US" sz="750" b="1" dirty="0">
+                        <a:rPr lang="en-US" sz="700" b="1" dirty="0">
                           <a:solidFill>
                             <a:srgbClr val="FFFFFF"/>
                           </a:solidFill>
@@ -3392,9 +4326,9 @@
                           <a:ea typeface="Arial" pitchFamily="34" charset="-122"/>
                           <a:cs typeface="Arial" pitchFamily="34" charset="-120"/>
                         </a:rPr>
-                        <a:t>Comparison</a:t>
+                        <a:t>vs existing tools</a:t>
                       </a:r>
-                      <a:endParaRPr lang="en-US" sz="750" dirty="0">
+                      <a:endParaRPr lang="en-US" sz="700" dirty="0">
                         <a:latin typeface="Arial" charset="0"/>
                         <a:ea typeface="Arial" charset="0"/>
                         <a:cs typeface="Arial" charset="0"/>
@@ -3452,7 +4386,7 @@
                         <a:buNone/>
                       </a:pPr>
                       <a:r>
-                        <a:rPr lang="en-US" sz="750" b="1" dirty="0">
+                        <a:rPr lang="en-US" sz="700" b="1" dirty="0">
                           <a:solidFill>
                             <a:srgbClr val="FFFFFF"/>
                           </a:solidFill>
@@ -3460,9 +4394,9 @@
                           <a:ea typeface="Arial" pitchFamily="34" charset="-122"/>
                           <a:cs typeface="Arial" pitchFamily="34" charset="-120"/>
                         </a:rPr>
-                        <a:t>FIRMS</a:t>
+                        <a:t>FIRMS map</a:t>
                       </a:r>
-                      <a:endParaRPr lang="en-US" sz="750" dirty="0">
+                      <a:endParaRPr lang="en-US" sz="700" dirty="0">
                         <a:latin typeface="Arial" charset="0"/>
                         <a:ea typeface="Arial" charset="0"/>
                         <a:cs typeface="Arial" charset="0"/>
@@ -3520,7 +4454,7 @@
                         <a:buNone/>
                       </a:pPr>
                       <a:r>
-                        <a:rPr lang="en-US" sz="750" b="1" dirty="0">
+                        <a:rPr lang="en-US" sz="700" b="1" dirty="0">
                           <a:solidFill>
                             <a:srgbClr val="FFFFFF"/>
                           </a:solidFill>
@@ -3528,9 +4462,9 @@
                           <a:ea typeface="Arial" pitchFamily="34" charset="-122"/>
                           <a:cs typeface="Arial" pitchFamily="34" charset="-120"/>
                         </a:rPr>
-                        <a:t>Fire dashboards</a:t>
+                        <a:t>GFW / EFFIS</a:t>
                       </a:r>
-                      <a:endParaRPr lang="en-US" sz="750" dirty="0">
+                      <a:endParaRPr lang="en-US" sz="700" dirty="0">
                         <a:latin typeface="Arial" charset="0"/>
                         <a:ea typeface="Arial" charset="0"/>
                         <a:cs typeface="Arial" charset="0"/>
@@ -3588,7 +4522,7 @@
                         <a:buNone/>
                       </a:pPr>
                       <a:r>
-                        <a:rPr lang="en-US" sz="750" b="1" dirty="0">
+                        <a:rPr lang="en-US" sz="700" b="1" dirty="0">
                           <a:solidFill>
                             <a:srgbClr val="FFFFFF"/>
                           </a:solidFill>
@@ -3598,7 +4532,7 @@
                         </a:rPr>
                         <a:t>Ours</a:t>
                       </a:r>
-                      <a:endParaRPr lang="en-US" sz="750" dirty="0">
+                      <a:endParaRPr lang="en-US" sz="700" dirty="0">
                         <a:latin typeface="Arial" charset="0"/>
                         <a:ea typeface="Arial" charset="0"/>
                         <a:cs typeface="Arial" charset="0"/>
@@ -3648,7 +4582,7 @@
                   </a:tcPr>
                 </a:tc>
               </a:tr>
-              <a:tr h="224028">
+              <a:tr h="205740">
                 <a:tc>
                   <a:txBody>
                     <a:bodyPr/>
@@ -3658,7 +4592,7 @@
                         <a:buNone/>
                       </a:pPr>
                       <a:r>
-                        <a:rPr lang="en-US" sz="750" dirty="0">
+                        <a:rPr lang="en-US" sz="700" dirty="0">
                           <a:solidFill>
                             <a:srgbClr val="1F2937"/>
                           </a:solidFill>
@@ -3666,9 +4600,9 @@
                           <a:ea typeface="Arial" pitchFamily="34" charset="-122"/>
                           <a:cs typeface="Arial" pitchFamily="34" charset="-120"/>
                         </a:rPr>
-                        <a:t>Hotspots on a map</a:t>
+                        <a:t>Tells WHAT is burning</a:t>
                       </a:r>
-                      <a:endParaRPr lang="en-US" sz="750" dirty="0">
+                      <a:endParaRPr lang="en-US" sz="700" dirty="0">
                         <a:latin typeface="Arial" charset="0"/>
                         <a:ea typeface="Arial" charset="0"/>
                         <a:cs typeface="Arial" charset="0"/>
@@ -3726,17 +4660,17 @@
                         <a:buNone/>
                       </a:pPr>
                       <a:r>
-                        <a:rPr lang="en-US" sz="750" b="1" dirty="0">
+                        <a:rPr lang="en-US" sz="700" b="1" dirty="0">
                           <a:solidFill>
-                            <a:srgbClr val="15803D"/>
+                            <a:srgbClr val="B91C1C"/>
                           </a:solidFill>
                           <a:latin typeface="Arial" pitchFamily="34" charset="0"/>
                           <a:ea typeface="Arial" pitchFamily="34" charset="-122"/>
                           <a:cs typeface="Arial" pitchFamily="34" charset="-120"/>
                         </a:rPr>
-                        <a:t>✔</a:t>
+                        <a:t>✖</a:t>
                       </a:r>
-                      <a:endParaRPr lang="en-US" sz="750" dirty="0">
+                      <a:endParaRPr lang="en-US" sz="700" dirty="0">
                         <a:latin typeface="Arial" charset="0"/>
                         <a:ea typeface="Arial" charset="0"/>
                         <a:cs typeface="Arial" charset="0"/>
@@ -3794,17 +4728,17 @@
                         <a:buNone/>
                       </a:pPr>
                       <a:r>
-                        <a:rPr lang="en-US" sz="750" b="1" dirty="0">
+                        <a:rPr lang="en-US" sz="700" b="1" dirty="0">
                           <a:solidFill>
-                            <a:srgbClr val="15803D"/>
+                            <a:srgbClr val="B91C1C"/>
                           </a:solidFill>
                           <a:latin typeface="Arial" pitchFamily="34" charset="0"/>
                           <a:ea typeface="Arial" pitchFamily="34" charset="-122"/>
                           <a:cs typeface="Arial" pitchFamily="34" charset="-120"/>
                         </a:rPr>
-                        <a:t>✔</a:t>
+                        <a:t>✖</a:t>
                       </a:r>
-                      <a:endParaRPr lang="en-US" sz="750" dirty="0">
+                      <a:endParaRPr lang="en-US" sz="700" dirty="0">
                         <a:latin typeface="Arial" charset="0"/>
                         <a:ea typeface="Arial" charset="0"/>
                         <a:cs typeface="Arial" charset="0"/>
@@ -3862,7 +4796,7 @@
                         <a:buNone/>
                       </a:pPr>
                       <a:r>
-                        <a:rPr lang="en-US" sz="750" b="1" dirty="0">
+                        <a:rPr lang="en-US" sz="700" b="1" dirty="0">
                           <a:solidFill>
                             <a:srgbClr val="15803D"/>
                           </a:solidFill>
@@ -3872,7 +4806,7 @@
                         </a:rPr>
                         <a:t>✔</a:t>
                       </a:r>
-                      <a:endParaRPr lang="en-US" sz="750" dirty="0">
+                      <a:endParaRPr lang="en-US" sz="700" dirty="0">
                         <a:latin typeface="Arial" charset="0"/>
                         <a:ea typeface="Arial" charset="0"/>
                         <a:cs typeface="Arial" charset="0"/>
@@ -3922,7 +4856,7 @@
                   </a:tcPr>
                 </a:tc>
               </a:tr>
-              <a:tr h="224028">
+              <a:tr h="205740">
                 <a:tc>
                   <a:txBody>
                     <a:bodyPr/>
@@ -3932,7 +4866,7 @@
                         <a:buNone/>
                       </a:pPr>
                       <a:r>
-                        <a:rPr lang="en-US" sz="750" dirty="0">
+                        <a:rPr lang="en-US" sz="700" dirty="0">
                           <a:solidFill>
                             <a:srgbClr val="1F2937"/>
                           </a:solidFill>
@@ -3940,9 +4874,9 @@
                           <a:ea typeface="Arial" pitchFamily="34" charset="-122"/>
                           <a:cs typeface="Arial" pitchFamily="34" charset="-120"/>
                         </a:rPr>
-                        <a:t>Tells WHAT is burning</a:t>
+                        <a:t>Industrial vs wildfire vs crop</a:t>
                       </a:r>
-                      <a:endParaRPr lang="en-US" sz="750" dirty="0">
+                      <a:endParaRPr lang="en-US" sz="700" dirty="0">
                         <a:latin typeface="Arial" charset="0"/>
                         <a:ea typeface="Arial" charset="0"/>
                         <a:cs typeface="Arial" charset="0"/>
@@ -4000,7 +4934,7 @@
                         <a:buNone/>
                       </a:pPr>
                       <a:r>
-                        <a:rPr lang="en-US" sz="750" b="1" dirty="0">
+                        <a:rPr lang="en-US" sz="700" b="1" dirty="0">
                           <a:solidFill>
                             <a:srgbClr val="B91C1C"/>
                           </a:solidFill>
@@ -4010,7 +4944,7 @@
                         </a:rPr>
                         <a:t>✖</a:t>
                       </a:r>
-                      <a:endParaRPr lang="en-US" sz="750" dirty="0">
+                      <a:endParaRPr lang="en-US" sz="700" dirty="0">
                         <a:latin typeface="Arial" charset="0"/>
                         <a:ea typeface="Arial" charset="0"/>
                         <a:cs typeface="Arial" charset="0"/>
@@ -4068,17 +5002,17 @@
                         <a:buNone/>
                       </a:pPr>
                       <a:r>
-                        <a:rPr lang="en-US" sz="750" b="1" dirty="0">
+                        <a:rPr lang="en-US" sz="700" b="1" dirty="0">
                           <a:solidFill>
-                            <a:srgbClr val="B91C1C"/>
+                            <a:srgbClr val="B45309"/>
                           </a:solidFill>
                           <a:latin typeface="Arial" pitchFamily="34" charset="0"/>
                           <a:ea typeface="Arial" pitchFamily="34" charset="-122"/>
                           <a:cs typeface="Arial" pitchFamily="34" charset="-120"/>
                         </a:rPr>
-                        <a:t>✖</a:t>
+                        <a:t>◐</a:t>
                       </a:r>
-                      <a:endParaRPr lang="en-US" sz="750" dirty="0">
+                      <a:endParaRPr lang="en-US" sz="700" dirty="0">
                         <a:latin typeface="Arial" charset="0"/>
                         <a:ea typeface="Arial" charset="0"/>
                         <a:cs typeface="Arial" charset="0"/>
@@ -4136,7 +5070,7 @@
                         <a:buNone/>
                       </a:pPr>
                       <a:r>
-                        <a:rPr lang="en-US" sz="750" b="1" dirty="0">
+                        <a:rPr lang="en-US" sz="700" b="1" dirty="0">
                           <a:solidFill>
                             <a:srgbClr val="15803D"/>
                           </a:solidFill>
@@ -4146,7 +5080,7 @@
                         </a:rPr>
                         <a:t>✔</a:t>
                       </a:r>
-                      <a:endParaRPr lang="en-US" sz="750" dirty="0">
+                      <a:endParaRPr lang="en-US" sz="700" dirty="0">
                         <a:latin typeface="Arial" charset="0"/>
                         <a:ea typeface="Arial" charset="0"/>
                         <a:cs typeface="Arial" charset="0"/>
@@ -4196,7 +5130,7 @@
                   </a:tcPr>
                 </a:tc>
               </a:tr>
-              <a:tr h="224028">
+              <a:tr h="205740">
                 <a:tc>
                   <a:txBody>
                     <a:bodyPr/>
@@ -4206,7 +5140,7 @@
                         <a:buNone/>
                       </a:pPr>
                       <a:r>
-                        <a:rPr lang="en-US" sz="750" dirty="0">
+                        <a:rPr lang="en-US" sz="700" dirty="0">
                           <a:solidFill>
                             <a:srgbClr val="1F2937"/>
                           </a:solidFill>
@@ -4214,9 +5148,9 @@
                           <a:ea typeface="Arial" pitchFamily="34" charset="-122"/>
                           <a:cs typeface="Arial" pitchFamily="34" charset="-120"/>
                         </a:rPr>
-                        <a:t>Industrial vs wildfire vs crop</a:t>
+                        <a:t>Persistent-source registry</a:t>
                       </a:r>
-                      <a:endParaRPr lang="en-US" sz="750" dirty="0">
+                      <a:endParaRPr lang="en-US" sz="700" dirty="0">
                         <a:latin typeface="Arial" charset="0"/>
                         <a:ea typeface="Arial" charset="0"/>
                         <a:cs typeface="Arial" charset="0"/>
@@ -4274,7 +5208,7 @@
                         <a:buNone/>
                       </a:pPr>
                       <a:r>
-                        <a:rPr lang="en-US" sz="750" b="1" dirty="0">
+                        <a:rPr lang="en-US" sz="700" b="1" dirty="0">
                           <a:solidFill>
                             <a:srgbClr val="B91C1C"/>
                           </a:solidFill>
@@ -4284,7 +5218,7 @@
                         </a:rPr>
                         <a:t>✖</a:t>
                       </a:r>
-                      <a:endParaRPr lang="en-US" sz="750" dirty="0">
+                      <a:endParaRPr lang="en-US" sz="700" dirty="0">
                         <a:latin typeface="Arial" charset="0"/>
                         <a:ea typeface="Arial" charset="0"/>
                         <a:cs typeface="Arial" charset="0"/>
@@ -4342,17 +5276,17 @@
                         <a:buNone/>
                       </a:pPr>
                       <a:r>
-                        <a:rPr lang="en-US" sz="750" b="1" dirty="0">
+                        <a:rPr lang="en-US" sz="700" b="1" dirty="0">
                           <a:solidFill>
-                            <a:srgbClr val="B45309"/>
+                            <a:srgbClr val="B91C1C"/>
                           </a:solidFill>
                           <a:latin typeface="Arial" pitchFamily="34" charset="0"/>
                           <a:ea typeface="Arial" pitchFamily="34" charset="-122"/>
                           <a:cs typeface="Arial" pitchFamily="34" charset="-120"/>
                         </a:rPr>
-                        <a:t>◐</a:t>
+                        <a:t>✖</a:t>
                       </a:r>
-                      <a:endParaRPr lang="en-US" sz="750" dirty="0">
+                      <a:endParaRPr lang="en-US" sz="700" dirty="0">
                         <a:latin typeface="Arial" charset="0"/>
                         <a:ea typeface="Arial" charset="0"/>
                         <a:cs typeface="Arial" charset="0"/>
@@ -4410,7 +5344,7 @@
                         <a:buNone/>
                       </a:pPr>
                       <a:r>
-                        <a:rPr lang="en-US" sz="750" b="1" dirty="0">
+                        <a:rPr lang="en-US" sz="700" b="1" dirty="0">
                           <a:solidFill>
                             <a:srgbClr val="15803D"/>
                           </a:solidFill>
@@ -4420,7 +5354,7 @@
                         </a:rPr>
                         <a:t>✔</a:t>
                       </a:r>
-                      <a:endParaRPr lang="en-US" sz="750" dirty="0">
+                      <a:endParaRPr lang="en-US" sz="700" dirty="0">
                         <a:latin typeface="Arial" charset="0"/>
                         <a:ea typeface="Arial" charset="0"/>
                         <a:cs typeface="Arial" charset="0"/>
@@ -4470,7 +5404,7 @@
                   </a:tcPr>
                 </a:tc>
               </a:tr>
-              <a:tr h="224028">
+              <a:tr h="205740">
                 <a:tc>
                   <a:txBody>
                     <a:bodyPr/>
@@ -4480,7 +5414,7 @@
                         <a:buNone/>
                       </a:pPr>
                       <a:r>
-                        <a:rPr lang="en-US" sz="750" dirty="0">
+                        <a:rPr lang="en-US" sz="700" dirty="0">
                           <a:solidFill>
                             <a:srgbClr val="1F2937"/>
                           </a:solidFill>
@@ -4488,9 +5422,9 @@
                           <a:ea typeface="Arial" pitchFamily="34" charset="-122"/>
                           <a:cs typeface="Arial" pitchFamily="34" charset="-120"/>
                         </a:rPr>
-                        <a:t>Persistent-source registry</a:t>
+                        <a:t>Alert vs own baseline</a:t>
                       </a:r>
-                      <a:endParaRPr lang="en-US" sz="750" dirty="0">
+                      <a:endParaRPr lang="en-US" sz="700" dirty="0">
                         <a:latin typeface="Arial" charset="0"/>
                         <a:ea typeface="Arial" charset="0"/>
                         <a:cs typeface="Arial" charset="0"/>
@@ -4548,7 +5482,7 @@
                         <a:buNone/>
                       </a:pPr>
                       <a:r>
-                        <a:rPr lang="en-US" sz="750" b="1" dirty="0">
+                        <a:rPr lang="en-US" sz="700" b="1" dirty="0">
                           <a:solidFill>
                             <a:srgbClr val="B91C1C"/>
                           </a:solidFill>
@@ -4558,7 +5492,7 @@
                         </a:rPr>
                         <a:t>✖</a:t>
                       </a:r>
-                      <a:endParaRPr lang="en-US" sz="750" dirty="0">
+                      <a:endParaRPr lang="en-US" sz="700" dirty="0">
                         <a:latin typeface="Arial" charset="0"/>
                         <a:ea typeface="Arial" charset="0"/>
                         <a:cs typeface="Arial" charset="0"/>
@@ -4616,7 +5550,7 @@
                         <a:buNone/>
                       </a:pPr>
                       <a:r>
-                        <a:rPr lang="en-US" sz="750" b="1" dirty="0">
+                        <a:rPr lang="en-US" sz="700" b="1" dirty="0">
                           <a:solidFill>
                             <a:srgbClr val="B91C1C"/>
                           </a:solidFill>
@@ -4626,7 +5560,7 @@
                         </a:rPr>
                         <a:t>✖</a:t>
                       </a:r>
-                      <a:endParaRPr lang="en-US" sz="750" dirty="0">
+                      <a:endParaRPr lang="en-US" sz="700" dirty="0">
                         <a:latin typeface="Arial" charset="0"/>
                         <a:ea typeface="Arial" charset="0"/>
                         <a:cs typeface="Arial" charset="0"/>
@@ -4684,7 +5618,7 @@
                         <a:buNone/>
                       </a:pPr>
                       <a:r>
-                        <a:rPr lang="en-US" sz="750" b="1" dirty="0">
+                        <a:rPr lang="en-US" sz="700" b="1" dirty="0">
                           <a:solidFill>
                             <a:srgbClr val="15803D"/>
                           </a:solidFill>
@@ -4694,7 +5628,7 @@
                         </a:rPr>
                         <a:t>✔</a:t>
                       </a:r>
-                      <a:endParaRPr lang="en-US" sz="750" dirty="0">
+                      <a:endParaRPr lang="en-US" sz="700" dirty="0">
                         <a:latin typeface="Arial" charset="0"/>
                         <a:ea typeface="Arial" charset="0"/>
                         <a:cs typeface="Arial" charset="0"/>
@@ -4744,7 +5678,7 @@
                   </a:tcPr>
                 </a:tc>
               </a:tr>
-              <a:tr h="224028">
+              <a:tr h="205740">
                 <a:tc>
                   <a:txBody>
                     <a:bodyPr/>
@@ -4754,7 +5688,7 @@
                         <a:buNone/>
                       </a:pPr>
                       <a:r>
-                        <a:rPr lang="en-US" sz="750" dirty="0">
+                        <a:rPr lang="en-US" sz="700" dirty="0">
                           <a:solidFill>
                             <a:srgbClr val="1F2937"/>
                           </a:solidFill>
@@ -4762,9 +5696,9 @@
                           <a:ea typeface="Arial" pitchFamily="34" charset="-122"/>
                           <a:cs typeface="Arial" pitchFamily="34" charset="-120"/>
                         </a:rPr>
-                        <a:t>Alert vs own baseline</a:t>
+                        <a:t>OSM context + explanations</a:t>
                       </a:r>
-                      <a:endParaRPr lang="en-US" sz="750" dirty="0">
+                      <a:endParaRPr lang="en-US" sz="700" dirty="0">
                         <a:latin typeface="Arial" charset="0"/>
                         <a:ea typeface="Arial" charset="0"/>
                         <a:cs typeface="Arial" charset="0"/>
@@ -4822,7 +5756,7 @@
                         <a:buNone/>
                       </a:pPr>
                       <a:r>
-                        <a:rPr lang="en-US" sz="750" b="1" dirty="0">
+                        <a:rPr lang="en-US" sz="700" b="1" dirty="0">
                           <a:solidFill>
                             <a:srgbClr val="B91C1C"/>
                           </a:solidFill>
@@ -4832,7 +5766,7 @@
                         </a:rPr>
                         <a:t>✖</a:t>
                       </a:r>
-                      <a:endParaRPr lang="en-US" sz="750" dirty="0">
+                      <a:endParaRPr lang="en-US" sz="700" dirty="0">
                         <a:latin typeface="Arial" charset="0"/>
                         <a:ea typeface="Arial" charset="0"/>
                         <a:cs typeface="Arial" charset="0"/>
@@ -4890,7 +5824,7 @@
                         <a:buNone/>
                       </a:pPr>
                       <a:r>
-                        <a:rPr lang="en-US" sz="750" b="1" dirty="0">
+                        <a:rPr lang="en-US" sz="700" b="1" dirty="0">
                           <a:solidFill>
                             <a:srgbClr val="B91C1C"/>
                           </a:solidFill>
@@ -4900,7 +5834,7 @@
                         </a:rPr>
                         <a:t>✖</a:t>
                       </a:r>
-                      <a:endParaRPr lang="en-US" sz="750" dirty="0">
+                      <a:endParaRPr lang="en-US" sz="700" dirty="0">
                         <a:latin typeface="Arial" charset="0"/>
                         <a:ea typeface="Arial" charset="0"/>
                         <a:cs typeface="Arial" charset="0"/>
@@ -4958,7 +5892,7 @@
                         <a:buNone/>
                       </a:pPr>
                       <a:r>
-                        <a:rPr lang="en-US" sz="750" b="1" dirty="0">
+                        <a:rPr lang="en-US" sz="700" b="1" dirty="0">
                           <a:solidFill>
                             <a:srgbClr val="15803D"/>
                           </a:solidFill>
@@ -4968,7 +5902,7 @@
                         </a:rPr>
                         <a:t>✔</a:t>
                       </a:r>
-                      <a:endParaRPr lang="en-US" sz="750" dirty="0">
+                      <a:endParaRPr lang="en-US" sz="700" dirty="0">
                         <a:latin typeface="Arial" charset="0"/>
                         <a:ea typeface="Arial" charset="0"/>
                         <a:cs typeface="Arial" charset="0"/>
@@ -5018,7 +5952,7 @@
                   </a:tcPr>
                 </a:tc>
               </a:tr>
-              <a:tr h="224028">
+              <a:tr h="205740">
                 <a:tc>
                   <a:txBody>
                     <a:bodyPr/>
@@ -5028,7 +5962,7 @@
                         <a:buNone/>
                       </a:pPr>
                       <a:r>
-                        <a:rPr lang="en-US" sz="750" dirty="0">
+                        <a:rPr lang="en-US" sz="700" dirty="0">
                           <a:solidFill>
                             <a:srgbClr val="1F2937"/>
                           </a:solidFill>
@@ -5036,9 +5970,9 @@
                           <a:ea typeface="Arial" pitchFamily="34" charset="-122"/>
                           <a:cs typeface="Arial" pitchFamily="34" charset="-120"/>
                         </a:rPr>
-                        <a:t>Explains decisions</a:t>
+                        <a:t>India-specific priors</a:t>
                       </a:r>
-                      <a:endParaRPr lang="en-US" sz="750" dirty="0">
+                      <a:endParaRPr lang="en-US" sz="700" dirty="0">
                         <a:latin typeface="Arial" charset="0"/>
                         <a:ea typeface="Arial" charset="0"/>
                         <a:cs typeface="Arial" charset="0"/>
@@ -5096,7 +6030,7 @@
                         <a:buNone/>
                       </a:pPr>
                       <a:r>
-                        <a:rPr lang="en-US" sz="750" b="1" dirty="0">
+                        <a:rPr lang="en-US" sz="700" b="1" dirty="0">
                           <a:solidFill>
                             <a:srgbClr val="B91C1C"/>
                           </a:solidFill>
@@ -5106,7 +6040,7 @@
                         </a:rPr>
                         <a:t>✖</a:t>
                       </a:r>
-                      <a:endParaRPr lang="en-US" sz="750" dirty="0">
+                      <a:endParaRPr lang="en-US" sz="700" dirty="0">
                         <a:latin typeface="Arial" charset="0"/>
                         <a:ea typeface="Arial" charset="0"/>
                         <a:cs typeface="Arial" charset="0"/>
@@ -5164,7 +6098,7 @@
                         <a:buNone/>
                       </a:pPr>
                       <a:r>
-                        <a:rPr lang="en-US" sz="750" b="1" dirty="0">
+                        <a:rPr lang="en-US" sz="700" b="1" dirty="0">
                           <a:solidFill>
                             <a:srgbClr val="B91C1C"/>
                           </a:solidFill>
@@ -5174,7 +6108,7 @@
                         </a:rPr>
                         <a:t>✖</a:t>
                       </a:r>
-                      <a:endParaRPr lang="en-US" sz="750" dirty="0">
+                      <a:endParaRPr lang="en-US" sz="700" dirty="0">
                         <a:latin typeface="Arial" charset="0"/>
                         <a:ea typeface="Arial" charset="0"/>
                         <a:cs typeface="Arial" charset="0"/>
@@ -5232,7 +6166,7 @@
                         <a:buNone/>
                       </a:pPr>
                       <a:r>
-                        <a:rPr lang="en-US" sz="750" b="1" dirty="0">
+                        <a:rPr lang="en-US" sz="700" b="1" dirty="0">
                           <a:solidFill>
                             <a:srgbClr val="15803D"/>
                           </a:solidFill>
@@ -5242,7 +6176,7 @@
                         </a:rPr>
                         <a:t>✔</a:t>
                       </a:r>
-                      <a:endParaRPr lang="en-US" sz="750" dirty="0">
+                      <a:endParaRPr lang="en-US" sz="700" dirty="0">
                         <a:latin typeface="Arial" charset="0"/>
                         <a:ea typeface="Arial" charset="0"/>
                         <a:cs typeface="Arial" charset="0"/>
@@ -5296,6 +6230,45 @@
           </a:graphicData>
         </a:graphic>
       </p:graphicFrame>
+      <p:sp>
+        <p:nvSpPr>
+          <p:cNvPr id="43" name="Text 39"/>
+          <p:cNvSpPr txBox="1"/>
+          <p:nvPr/>
+        </p:nvSpPr>
+        <p:spPr>
+          <a:xfrm>
+            <a:off x="5806440" y="4617720"/>
+            <a:ext cx="3108960" cy="164592"/>
+          </a:xfrm>
+          <a:prstGeom prst="rect">
+            <a:avLst/>
+          </a:prstGeom>
+          <a:noFill/>
+          <a:ln/>
+        </p:spPr>
+        <p:txBody>
+          <a:bodyPr wrap="square" lIns="0" tIns="0" rIns="0" bIns="0" rtlCol="0" anchor="t"/>
+          <a:lstStyle/>
+          <a:p>
+            <a:pPr algn="l" indent="0" marL="0">
+              <a:buNone/>
+            </a:pPr>
+            <a:r>
+              <a:rPr lang="en-US" sz="600" i="1" dirty="0">
+                <a:solidFill>
+                  <a:srgbClr val="6B7280"/>
+                </a:solidFill>
+                <a:latin typeface="Arial" pitchFamily="34" charset="0"/>
+                <a:ea typeface="Arial" pitchFamily="34" charset="-122"/>
+                <a:cs typeface="Arial" pitchFamily="34" charset="-120"/>
+              </a:rPr>
+              <a:t>GFW = Global Forest Watch Fires · EFFIS = Copernicus fire information system</a:t>
+            </a:r>
+            <a:endParaRPr lang="en-US" sz="600" dirty="0"/>
+          </a:p>
+        </p:txBody>
+      </p:sp>
     </p:spTree>
   </p:cSld>
   <p:clrMapOvr>
@@ -11472,7 +12445,7 @@
               <a:buNone/>
             </a:pPr>
             <a:r>
-              <a:rPr lang="en-US" sz="850" b="1" dirty="0">
+              <a:rPr lang="en-US" sz="800" b="1" dirty="0">
                 <a:solidFill>
                   <a:srgbClr val="E8590C"/>
                 </a:solidFill>
@@ -11486,7 +12459,7 @@
               <a:buNone/>
             </a:pPr>
             <a:r>
-              <a:rPr lang="en-US" sz="850" dirty="0">
+              <a:rPr lang="en-US" sz="800" dirty="0">
                 <a:solidFill>
                   <a:srgbClr val="1F2937"/>
                 </a:solidFill>
@@ -11494,9 +12467,9 @@
                 <a:ea typeface="Arial" pitchFamily="34" charset="-122"/>
                 <a:cs typeface="Arial" pitchFamily="34" charset="-120"/>
               </a:rPr>
-              <a:t>NASA FIRMS Area API (VIIRS 375 m, MODIS 1 km), OpenStreetMap Overpass, Copernicus Sentinel-2 / NASA Worldview</a:t>
-            </a:r>
-            <a:endParaRPr lang="en-US" sz="850" dirty="0"/>
+              <a:t>NASA FIRMS Area API (VIIRS SNPP / NOAA-20 / NOAA-21 375 m, MODIS 1 km) · OpenStreetMap Overpass · Copernicus Sentinel-2 SWIR · NASA Worldview</a:t>
+            </a:r>
+            <a:endParaRPr lang="en-US" sz="800" dirty="0"/>
           </a:p>
         </p:txBody>
       </p:sp>
@@ -11525,7 +12498,7 @@
               <a:buNone/>
             </a:pPr>
             <a:r>
-              <a:rPr lang="en-US" sz="850" b="1" dirty="0">
+              <a:rPr lang="en-US" sz="800" b="1" dirty="0">
                 <a:solidFill>
                   <a:srgbClr val="E8590C"/>
                 </a:solidFill>
@@ -11533,13 +12506,13 @@
                 <a:ea typeface="Arial" pitchFamily="34" charset="-122"/>
                 <a:cs typeface="Arial" pitchFamily="34" charset="-120"/>
               </a:rPr>
-              <a:t>Backend / ML: </a:t>
+              <a:t>AI / ML: </a:t>
             </a:r>
             <a:pPr indent="0" marL="0">
               <a:buNone/>
             </a:pPr>
             <a:r>
-              <a:rPr lang="en-US" sz="850" dirty="0">
+              <a:rPr lang="en-US" sz="800" dirty="0">
                 <a:solidFill>
                   <a:srgbClr val="1F2937"/>
                 </a:solidFill>
@@ -11547,9 +12520,9 @@
                 <a:ea typeface="Arial" pitchFamily="34" charset="-122"/>
                 <a:cs typeface="Arial" pitchFamily="34" charset="-120"/>
               </a:rPr>
-              <a:t>Python 3, FastAPI, pandas, NumPy, scikit-learn (DBSCAN, HistGradientBoosting), shapely</a:t>
-            </a:r>
-            <a:endParaRPr lang="en-US" sz="850" dirty="0"/>
+              <a:t>Python 3, scikit-learn — DBSCAN (haversine), HistGradientBoosting, group-aware validation; rule engine; NumPy / pandas / shapely (STRtree point-in-polygon)</a:t>
+            </a:r>
+            <a:endParaRPr lang="en-US" sz="800" dirty="0"/>
           </a:p>
         </p:txBody>
       </p:sp>
@@ -11578,7 +12551,7 @@
               <a:buNone/>
             </a:pPr>
             <a:r>
-              <a:rPr lang="en-US" sz="850" b="1" dirty="0">
+              <a:rPr lang="en-US" sz="800" b="1" dirty="0">
                 <a:solidFill>
                   <a:srgbClr val="E8590C"/>
                 </a:solidFill>
@@ -11586,13 +12559,13 @@
                 <a:ea typeface="Arial" pitchFamily="34" charset="-122"/>
                 <a:cs typeface="Arial" pitchFamily="34" charset="-120"/>
               </a:rPr>
-              <a:t>Storage / GIS: </a:t>
+              <a:t>Backend / GIS: </a:t>
             </a:r>
             <a:pPr indent="0" marL="0">
               <a:buNone/>
             </a:pPr>
             <a:r>
-              <a:rPr lang="en-US" sz="850" dirty="0">
+              <a:rPr lang="en-US" sz="800" dirty="0">
                 <a:solidFill>
                   <a:srgbClr val="1F2937"/>
                 </a:solidFill>
@@ -11600,9 +12573,9 @@
                 <a:ea typeface="Arial" pitchFamily="34" charset="-122"/>
                 <a:cs typeface="Arial" pitchFamily="34" charset="-120"/>
               </a:rPr>
-              <a:t>SQLite → PostGIS, GeoJSON API, QGIS / ArcGIS export</a:t>
-            </a:r>
-            <a:endParaRPr lang="en-US" sz="850" dirty="0"/>
+              <a:t>FastAPI REST (GeoJSON), SQLite → PostGIS; OGC-standard outputs for QGIS / ArcGIS / ISRO Bhuvan; Docker-ready</a:t>
+            </a:r>
+            <a:endParaRPr lang="en-US" sz="800" dirty="0"/>
           </a:p>
         </p:txBody>
       </p:sp>
@@ -11631,7 +12604,7 @@
               <a:buNone/>
             </a:pPr>
             <a:r>
-              <a:rPr lang="en-US" sz="850" b="1" dirty="0">
+              <a:rPr lang="en-US" sz="800" b="1" dirty="0">
                 <a:solidFill>
                   <a:srgbClr val="E8590C"/>
                 </a:solidFill>
@@ -11645,7 +12618,7 @@
               <a:buNone/>
             </a:pPr>
             <a:r>
-              <a:rPr lang="en-US" sz="850" dirty="0">
+              <a:rPr lang="en-US" sz="800" dirty="0">
                 <a:solidFill>
                   <a:srgbClr val="1F2937"/>
                 </a:solidFill>
@@ -11653,9 +12626,9 @@
                 <a:ea typeface="Arial" pitchFamily="34" charset="-122"/>
                 <a:cs typeface="Arial" pitchFamily="34" charset="-120"/>
               </a:rPr>
-              <a:t>React 18, Vite, Leaflet (canvas renderer); any Linux VM or GitHub Pages for the static demo</a:t>
-            </a:r>
-            <a:endParaRPr lang="en-US" sz="850" dirty="0"/>
+              <a:t>React 18 + Vite, Leaflet canvas renderer (40 k+ points); runs on a laptop, one Linux VM, NIC cloud or air-gapped server; static demo on GitHub Pages</a:t>
+            </a:r>
+            <a:endParaRPr lang="en-US" sz="800" dirty="0"/>
           </a:p>
         </p:txBody>
       </p:sp>
@@ -11667,7 +12640,7 @@
         </p:nvSpPr>
         <p:spPr>
           <a:xfrm>
-            <a:off x="274320" y="1965960"/>
+            <a:off x="274320" y="1947672"/>
             <a:ext cx="8595360" cy="256032"/>
           </a:xfrm>
           <a:prstGeom prst="rect">
@@ -11720,12 +12693,351 @@
         </p:nvSpPr>
         <p:spPr>
           <a:xfrm>
-            <a:off x="274320" y="2258568"/>
-            <a:ext cx="1325880" cy="786384"/>
+            <a:off x="274320" y="2212848"/>
+            <a:ext cx="896112" cy="384048"/>
           </a:xfrm>
           <a:prstGeom prst="roundRect">
             <a:avLst>
-              <a:gd name="adj" fmla="val 5814"/>
+              <a:gd name="adj" fmla="val 11905"/>
+            </a:avLst>
+          </a:prstGeom>
+          <a:solidFill>
+            <a:srgbClr val="F3F4F6"/>
+          </a:solidFill>
+          <a:ln w="9525">
+            <a:solidFill>
+              <a:srgbClr val="F3F4F6"/>
+            </a:solidFill>
+            <a:prstDash val="solid"/>
+          </a:ln>
+        </p:spPr>
+      </p:sp>
+      <p:sp>
+        <p:nvSpPr>
+          <p:cNvPr id="16" name="Text 13"/>
+          <p:cNvSpPr txBox="1"/>
+          <p:nvPr/>
+        </p:nvSpPr>
+        <p:spPr>
+          <a:xfrm>
+            <a:off x="301752" y="2231136"/>
+            <a:ext cx="841248" cy="182880"/>
+          </a:xfrm>
+          <a:prstGeom prst="rect">
+            <a:avLst/>
+          </a:prstGeom>
+          <a:noFill/>
+          <a:ln/>
+        </p:spPr>
+        <p:txBody>
+          <a:bodyPr wrap="square" lIns="0" tIns="0" rIns="0" bIns="0" rtlCol="0" anchor="t"/>
+          <a:lstStyle/>
+          <a:p>
+            <a:pPr algn="ctr" indent="0" marL="0">
+              <a:buNone/>
+            </a:pPr>
+            <a:r>
+              <a:rPr lang="en-US" sz="650" b="1" dirty="0">
+                <a:solidFill>
+                  <a:srgbClr val="0F172A"/>
+                </a:solidFill>
+                <a:latin typeface="Arial" pitchFamily="34" charset="0"/>
+                <a:ea typeface="Arial" pitchFamily="34" charset="-122"/>
+                <a:cs typeface="Arial" pitchFamily="34" charset="-120"/>
+              </a:rPr>
+              <a:t>NASA FIRMS</a:t>
+            </a:r>
+            <a:endParaRPr lang="en-US" sz="650" dirty="0"/>
+          </a:p>
+        </p:txBody>
+      </p:sp>
+      <p:sp>
+        <p:nvSpPr>
+          <p:cNvPr id="17" name="Text 14"/>
+          <p:cNvSpPr txBox="1"/>
+          <p:nvPr/>
+        </p:nvSpPr>
+        <p:spPr>
+          <a:xfrm>
+            <a:off x="301752" y="2395728"/>
+            <a:ext cx="841248" cy="182880"/>
+          </a:xfrm>
+          <a:prstGeom prst="rect">
+            <a:avLst/>
+          </a:prstGeom>
+          <a:noFill/>
+          <a:ln/>
+        </p:spPr>
+        <p:txBody>
+          <a:bodyPr wrap="square" lIns="0" tIns="0" rIns="0" bIns="0" rtlCol="0" anchor="t"/>
+          <a:lstStyle/>
+          <a:p>
+            <a:pPr algn="ctr" indent="0" marL="0">
+              <a:buNone/>
+            </a:pPr>
+            <a:r>
+              <a:rPr lang="en-US" sz="600" dirty="0">
+                <a:solidFill>
+                  <a:srgbClr val="6B7280"/>
+                </a:solidFill>
+                <a:latin typeface="Arial" pitchFamily="34" charset="0"/>
+                <a:ea typeface="Arial" pitchFamily="34" charset="-122"/>
+                <a:cs typeface="Arial" pitchFamily="34" charset="-120"/>
+              </a:rPr>
+              <a:t>thermal anomalies</a:t>
+            </a:r>
+            <a:endParaRPr lang="en-US" sz="600" dirty="0"/>
+          </a:p>
+        </p:txBody>
+      </p:sp>
+      <p:sp>
+        <p:nvSpPr>
+          <p:cNvPr id="18" name="Shape 15"/>
+          <p:cNvSpPr/>
+          <p:nvPr/>
+        </p:nvSpPr>
+        <p:spPr>
+          <a:xfrm>
+            <a:off x="1234440" y="2212848"/>
+            <a:ext cx="896112" cy="384048"/>
+          </a:xfrm>
+          <a:prstGeom prst="roundRect">
+            <a:avLst>
+              <a:gd name="adj" fmla="val 11905"/>
+            </a:avLst>
+          </a:prstGeom>
+          <a:solidFill>
+            <a:srgbClr val="F3F4F6"/>
+          </a:solidFill>
+          <a:ln w="9525">
+            <a:solidFill>
+              <a:srgbClr val="F3F4F6"/>
+            </a:solidFill>
+            <a:prstDash val="solid"/>
+          </a:ln>
+        </p:spPr>
+      </p:sp>
+      <p:sp>
+        <p:nvSpPr>
+          <p:cNvPr id="19" name="Text 16"/>
+          <p:cNvSpPr txBox="1"/>
+          <p:nvPr/>
+        </p:nvSpPr>
+        <p:spPr>
+          <a:xfrm>
+            <a:off x="1261872" y="2231136"/>
+            <a:ext cx="841248" cy="182880"/>
+          </a:xfrm>
+          <a:prstGeom prst="rect">
+            <a:avLst/>
+          </a:prstGeom>
+          <a:noFill/>
+          <a:ln/>
+        </p:spPr>
+        <p:txBody>
+          <a:bodyPr wrap="square" lIns="0" tIns="0" rIns="0" bIns="0" rtlCol="0" anchor="t"/>
+          <a:lstStyle/>
+          <a:p>
+            <a:pPr algn="ctr" indent="0" marL="0">
+              <a:buNone/>
+            </a:pPr>
+            <a:r>
+              <a:rPr lang="en-US" sz="650" b="1" dirty="0">
+                <a:solidFill>
+                  <a:srgbClr val="0F172A"/>
+                </a:solidFill>
+                <a:latin typeface="Arial" pitchFamily="34" charset="0"/>
+                <a:ea typeface="Arial" pitchFamily="34" charset="-122"/>
+                <a:cs typeface="Arial" pitchFamily="34" charset="-120"/>
+              </a:rPr>
+              <a:t>OpenStreetMap</a:t>
+            </a:r>
+            <a:endParaRPr lang="en-US" sz="650" dirty="0"/>
+          </a:p>
+        </p:txBody>
+      </p:sp>
+      <p:sp>
+        <p:nvSpPr>
+          <p:cNvPr id="20" name="Text 17"/>
+          <p:cNvSpPr txBox="1"/>
+          <p:nvPr/>
+        </p:nvSpPr>
+        <p:spPr>
+          <a:xfrm>
+            <a:off x="1261872" y="2395728"/>
+            <a:ext cx="841248" cy="182880"/>
+          </a:xfrm>
+          <a:prstGeom prst="rect">
+            <a:avLst/>
+          </a:prstGeom>
+          <a:noFill/>
+          <a:ln/>
+        </p:spPr>
+        <p:txBody>
+          <a:bodyPr wrap="square" lIns="0" tIns="0" rIns="0" bIns="0" rtlCol="0" anchor="t"/>
+          <a:lstStyle/>
+          <a:p>
+            <a:pPr algn="ctr" indent="0" marL="0">
+              <a:buNone/>
+            </a:pPr>
+            <a:r>
+              <a:rPr lang="en-US" sz="600" dirty="0">
+                <a:solidFill>
+                  <a:srgbClr val="6B7280"/>
+                </a:solidFill>
+                <a:latin typeface="Arial" pitchFamily="34" charset="0"/>
+                <a:ea typeface="Arial" pitchFamily="34" charset="-122"/>
+                <a:cs typeface="Arial" pitchFamily="34" charset="-120"/>
+              </a:rPr>
+              <a:t>facilities + land use</a:t>
+            </a:r>
+            <a:endParaRPr lang="en-US" sz="600" dirty="0"/>
+          </a:p>
+        </p:txBody>
+      </p:sp>
+      <p:sp>
+        <p:nvSpPr>
+          <p:cNvPr id="21" name="Shape 18"/>
+          <p:cNvSpPr/>
+          <p:nvPr/>
+        </p:nvSpPr>
+        <p:spPr>
+          <a:xfrm>
+            <a:off x="2194560" y="2212848"/>
+            <a:ext cx="896112" cy="384048"/>
+          </a:xfrm>
+          <a:prstGeom prst="roundRect">
+            <a:avLst>
+              <a:gd name="adj" fmla="val 11905"/>
+            </a:avLst>
+          </a:prstGeom>
+          <a:solidFill>
+            <a:srgbClr val="F3F4F6"/>
+          </a:solidFill>
+          <a:ln w="9525">
+            <a:solidFill>
+              <a:srgbClr val="F3F4F6"/>
+            </a:solidFill>
+            <a:prstDash val="solid"/>
+          </a:ln>
+        </p:spPr>
+      </p:sp>
+      <p:sp>
+        <p:nvSpPr>
+          <p:cNvPr id="22" name="Text 19"/>
+          <p:cNvSpPr txBox="1"/>
+          <p:nvPr/>
+        </p:nvSpPr>
+        <p:spPr>
+          <a:xfrm>
+            <a:off x="2221992" y="2231136"/>
+            <a:ext cx="841248" cy="182880"/>
+          </a:xfrm>
+          <a:prstGeom prst="rect">
+            <a:avLst/>
+          </a:prstGeom>
+          <a:noFill/>
+          <a:ln/>
+        </p:spPr>
+        <p:txBody>
+          <a:bodyPr wrap="square" lIns="0" tIns="0" rIns="0" bIns="0" rtlCol="0" anchor="t"/>
+          <a:lstStyle/>
+          <a:p>
+            <a:pPr algn="ctr" indent="0" marL="0">
+              <a:buNone/>
+            </a:pPr>
+            <a:r>
+              <a:rPr lang="en-US" sz="650" b="1" dirty="0">
+                <a:solidFill>
+                  <a:srgbClr val="0F172A"/>
+                </a:solidFill>
+                <a:latin typeface="Arial" pitchFamily="34" charset="0"/>
+                <a:ea typeface="Arial" pitchFamily="34" charset="-122"/>
+                <a:cs typeface="Arial" pitchFamily="34" charset="-120"/>
+              </a:rPr>
+              <a:t>Sentinel-2 · Worldview</a:t>
+            </a:r>
+            <a:endParaRPr lang="en-US" sz="650" dirty="0"/>
+          </a:p>
+        </p:txBody>
+      </p:sp>
+      <p:sp>
+        <p:nvSpPr>
+          <p:cNvPr id="23" name="Text 20"/>
+          <p:cNvSpPr txBox="1"/>
+          <p:nvPr/>
+        </p:nvSpPr>
+        <p:spPr>
+          <a:xfrm>
+            <a:off x="2221992" y="2395728"/>
+            <a:ext cx="841248" cy="182880"/>
+          </a:xfrm>
+          <a:prstGeom prst="rect">
+            <a:avLst/>
+          </a:prstGeom>
+          <a:noFill/>
+          <a:ln/>
+        </p:spPr>
+        <p:txBody>
+          <a:bodyPr wrap="square" lIns="0" tIns="0" rIns="0" bIns="0" rtlCol="0" anchor="t"/>
+          <a:lstStyle/>
+          <a:p>
+            <a:pPr algn="ctr" indent="0" marL="0">
+              <a:buNone/>
+            </a:pPr>
+            <a:r>
+              <a:rPr lang="en-US" sz="600" dirty="0">
+                <a:solidFill>
+                  <a:srgbClr val="6B7280"/>
+                </a:solidFill>
+                <a:latin typeface="Arial" pitchFamily="34" charset="0"/>
+                <a:ea typeface="Arial" pitchFamily="34" charset="-122"/>
+                <a:cs typeface="Arial" pitchFamily="34" charset="-120"/>
+              </a:rPr>
+              <a:t>visual verification</a:t>
+            </a:r>
+            <a:endParaRPr lang="en-US" sz="600" dirty="0"/>
+          </a:p>
+        </p:txBody>
+      </p:sp>
+      <p:sp>
+        <p:nvSpPr>
+          <p:cNvPr id="24" name="Shape 21"/>
+          <p:cNvSpPr/>
+          <p:nvPr/>
+        </p:nvSpPr>
+        <p:spPr>
+          <a:xfrm>
+            <a:off x="3154680" y="2404872"/>
+            <a:ext cx="182880" cy="0"/>
+          </a:xfrm>
+          <a:prstGeom prst="line">
+            <a:avLst/>
+          </a:prstGeom>
+          <a:noFill/>
+          <a:ln w="19050">
+            <a:solidFill>
+              <a:srgbClr val="9CA3AF"/>
+            </a:solidFill>
+            <a:prstDash val="solid"/>
+            <a:tailEnd type="triangle"/>
+          </a:ln>
+        </p:spPr>
+      </p:sp>
+      <p:sp>
+        <p:nvSpPr>
+          <p:cNvPr id="25" name="Shape 22"/>
+          <p:cNvSpPr/>
+          <p:nvPr/>
+        </p:nvSpPr>
+        <p:spPr>
+          <a:xfrm>
+            <a:off x="3383280" y="2176272"/>
+            <a:ext cx="1005840" cy="457200"/>
+          </a:xfrm>
+          <a:prstGeom prst="roundRect">
+            <a:avLst>
+              <a:gd name="adj" fmla="val 10000"/>
             </a:avLst>
           </a:prstGeom>
           <a:solidFill>
@@ -11741,14 +13053,14 @@
       </p:sp>
       <p:sp>
         <p:nvSpPr>
-          <p:cNvPr id="16" name="Shape 13"/>
+          <p:cNvPr id="26" name="Shape 23"/>
           <p:cNvSpPr/>
           <p:nvPr/>
         </p:nvSpPr>
         <p:spPr>
           <a:xfrm>
-            <a:off x="274320" y="2258568"/>
-            <a:ext cx="1325880" cy="228600"/>
+            <a:off x="3383280" y="2176272"/>
+            <a:ext cx="1005840" cy="155448"/>
           </a:xfrm>
           <a:prstGeom prst="rect">
             <a:avLst/>
@@ -11766,14 +13078,14 @@
       </p:sp>
       <p:sp>
         <p:nvSpPr>
-          <p:cNvPr id="17" name="Text 14"/>
+          <p:cNvPr id="27" name="Text 24"/>
           <p:cNvSpPr txBox="1"/>
           <p:nvPr/>
         </p:nvSpPr>
         <p:spPr>
           <a:xfrm>
-            <a:off x="320040" y="2258568"/>
-            <a:ext cx="1234440" cy="228600"/>
+            <a:off x="3419856" y="2176272"/>
+            <a:ext cx="932688" cy="155448"/>
           </a:xfrm>
           <a:prstGeom prst="rect">
             <a:avLst/>
@@ -11789,7 +13101,7 @@
               <a:buNone/>
             </a:pPr>
             <a:r>
-              <a:rPr lang="en-US" sz="850" b="1" dirty="0">
+              <a:rPr lang="en-US" sz="700" b="1" dirty="0">
                 <a:solidFill>
                   <a:srgbClr val="FFFFFF"/>
                 </a:solidFill>
@@ -11799,20 +13111,20 @@
               </a:rPr>
               <a:t>1  Ingest</a:t>
             </a:r>
-            <a:endParaRPr lang="en-US" sz="850" dirty="0"/>
+            <a:endParaRPr lang="en-US" sz="700" dirty="0"/>
           </a:p>
         </p:txBody>
       </p:sp>
       <p:sp>
         <p:nvSpPr>
-          <p:cNvPr id="18" name="Text 15"/>
+          <p:cNvPr id="28" name="Text 25"/>
           <p:cNvSpPr txBox="1"/>
           <p:nvPr/>
         </p:nvSpPr>
         <p:spPr>
           <a:xfrm>
-            <a:off x="338328" y="2514600"/>
-            <a:ext cx="1216152" cy="512064"/>
+            <a:off x="3429000" y="2340864"/>
+            <a:ext cx="914400" cy="292608"/>
           </a:xfrm>
           <a:prstGeom prst="rect">
             <a:avLst/>
@@ -11828,7 +13140,7 @@
               <a:buNone/>
             </a:pPr>
             <a:r>
-              <a:rPr lang="en-US" sz="700" dirty="0">
+              <a:rPr lang="en-US" sz="580" dirty="0">
                 <a:solidFill>
                   <a:srgbClr val="1F2937"/>
                 </a:solidFill>
@@ -11836,16 +13148,16 @@
                 <a:ea typeface="Arial" pitchFamily="34" charset="-122"/>
                 <a:cs typeface="Arial" pitchFamily="34" charset="-120"/>
               </a:rPr>
-              <a:t>FIRMS hotspots,</a:t>
-            </a:r>
-            <a:endParaRPr lang="en-US" sz="700" dirty="0"/>
+              <a:t>normalise VIIRS +</a:t>
+            </a:r>
+            <a:endParaRPr lang="en-US" sz="580" dirty="0"/>
           </a:p>
           <a:p>
             <a:pPr algn="l" indent="0" marL="0">
               <a:buNone/>
             </a:pPr>
             <a:r>
-              <a:rPr lang="en-US" sz="700" dirty="0">
+              <a:rPr lang="en-US" sz="580" dirty="0">
                 <a:solidFill>
                   <a:srgbClr val="1F2937"/>
                 </a:solidFill>
@@ -11853,39 +13165,22 @@
                 <a:ea typeface="Arial" pitchFamily="34" charset="-122"/>
                 <a:cs typeface="Arial" pitchFamily="34" charset="-120"/>
               </a:rPr>
-              <a:t>10-day chunks,</a:t>
-            </a:r>
-            <a:endParaRPr lang="en-US" sz="700" dirty="0"/>
-          </a:p>
-          <a:p>
-            <a:pPr algn="l" indent="0" marL="0">
-              <a:buNone/>
-            </a:pPr>
-            <a:r>
-              <a:rPr lang="en-US" sz="700" dirty="0">
-                <a:solidFill>
-                  <a:srgbClr val="1F2937"/>
-                </a:solidFill>
-                <a:latin typeface="Arial" pitchFamily="34" charset="0"/>
-                <a:ea typeface="Arial" pitchFamily="34" charset="-122"/>
-                <a:cs typeface="Arial" pitchFamily="34" charset="-120"/>
-              </a:rPr>
-              <a:t>normalise, de-dup</a:t>
-            </a:r>
-            <a:endParaRPr lang="en-US" sz="700" dirty="0"/>
+              <a:t>MODIS, de-dup passes</a:t>
+            </a:r>
+            <a:endParaRPr lang="en-US" sz="580" dirty="0"/>
           </a:p>
         </p:txBody>
       </p:sp>
       <p:sp>
         <p:nvSpPr>
-          <p:cNvPr id="19" name="Shape 16"/>
+          <p:cNvPr id="29" name="Shape 26"/>
           <p:cNvSpPr/>
           <p:nvPr/>
         </p:nvSpPr>
         <p:spPr>
           <a:xfrm>
-            <a:off x="1600200" y="2651760"/>
-            <a:ext cx="137160" cy="0"/>
+            <a:off x="4389120" y="2404872"/>
+            <a:ext cx="109728" cy="0"/>
           </a:xfrm>
           <a:prstGeom prst="line">
             <a:avLst/>
@@ -11902,18 +13197,18 @@
       </p:sp>
       <p:sp>
         <p:nvSpPr>
-          <p:cNvPr id="20" name="Shape 17"/>
+          <p:cNvPr id="30" name="Shape 27"/>
           <p:cNvSpPr/>
           <p:nvPr/>
         </p:nvSpPr>
         <p:spPr>
           <a:xfrm>
-            <a:off x="1737360" y="2258568"/>
-            <a:ext cx="1325880" cy="786384"/>
+            <a:off x="4498848" y="2176272"/>
+            <a:ext cx="1005840" cy="457200"/>
           </a:xfrm>
           <a:prstGeom prst="roundRect">
             <a:avLst>
-              <a:gd name="adj" fmla="val 5814"/>
+              <a:gd name="adj" fmla="val 10000"/>
             </a:avLst>
           </a:prstGeom>
           <a:solidFill>
@@ -11929,14 +13224,14 @@
       </p:sp>
       <p:sp>
         <p:nvSpPr>
-          <p:cNvPr id="21" name="Shape 18"/>
+          <p:cNvPr id="31" name="Shape 28"/>
           <p:cNvSpPr/>
           <p:nvPr/>
         </p:nvSpPr>
         <p:spPr>
           <a:xfrm>
-            <a:off x="1737360" y="2258568"/>
-            <a:ext cx="1325880" cy="228600"/>
+            <a:off x="4498848" y="2176272"/>
+            <a:ext cx="1005840" cy="155448"/>
           </a:xfrm>
           <a:prstGeom prst="rect">
             <a:avLst/>
@@ -11954,14 +13249,14 @@
       </p:sp>
       <p:sp>
         <p:nvSpPr>
-          <p:cNvPr id="22" name="Text 19"/>
+          <p:cNvPr id="32" name="Text 29"/>
           <p:cNvSpPr txBox="1"/>
           <p:nvPr/>
         </p:nvSpPr>
         <p:spPr>
           <a:xfrm>
-            <a:off x="1783080" y="2258568"/>
-            <a:ext cx="1234440" cy="228600"/>
+            <a:off x="4535424" y="2176272"/>
+            <a:ext cx="932688" cy="155448"/>
           </a:xfrm>
           <a:prstGeom prst="rect">
             <a:avLst/>
@@ -11977,7 +13272,7 @@
               <a:buNone/>
             </a:pPr>
             <a:r>
-              <a:rPr lang="en-US" sz="850" b="1" dirty="0">
+              <a:rPr lang="en-US" sz="700" b="1" dirty="0">
                 <a:solidFill>
                   <a:srgbClr val="FFFFFF"/>
                 </a:solidFill>
@@ -11987,20 +13282,20 @@
               </a:rPr>
               <a:t>2  Cluster</a:t>
             </a:r>
-            <a:endParaRPr lang="en-US" sz="850" dirty="0"/>
+            <a:endParaRPr lang="en-US" sz="700" dirty="0"/>
           </a:p>
         </p:txBody>
       </p:sp>
       <p:sp>
         <p:nvSpPr>
-          <p:cNvPr id="23" name="Text 20"/>
+          <p:cNvPr id="33" name="Text 30"/>
           <p:cNvSpPr txBox="1"/>
           <p:nvPr/>
         </p:nvSpPr>
         <p:spPr>
           <a:xfrm>
-            <a:off x="1801368" y="2514600"/>
-            <a:ext cx="1216152" cy="512064"/>
+            <a:off x="4544568" y="2340864"/>
+            <a:ext cx="914400" cy="292608"/>
           </a:xfrm>
           <a:prstGeom prst="rect">
             <a:avLst/>
@@ -12016,7 +13311,7 @@
               <a:buNone/>
             </a:pPr>
             <a:r>
-              <a:rPr lang="en-US" sz="700" dirty="0">
+              <a:rPr lang="en-US" sz="580" dirty="0">
                 <a:solidFill>
                   <a:srgbClr val="1F2937"/>
                 </a:solidFill>
@@ -12024,16 +13319,16 @@
                 <a:ea typeface="Arial" pitchFamily="34" charset="-122"/>
                 <a:cs typeface="Arial" pitchFamily="34" charset="-120"/>
               </a:rPr>
-              <a:t>Haversine DBSCAN</a:t>
-            </a:r>
-            <a:endParaRPr lang="en-US" sz="700" dirty="0"/>
+              <a:t>DBSCAN 750 m →</a:t>
+            </a:r>
+            <a:endParaRPr lang="en-US" sz="580" dirty="0"/>
           </a:p>
           <a:p>
             <a:pPr algn="l" indent="0" marL="0">
               <a:buNone/>
             </a:pPr>
             <a:r>
-              <a:rPr lang="en-US" sz="700" dirty="0">
+              <a:rPr lang="en-US" sz="580" dirty="0">
                 <a:solidFill>
                   <a:srgbClr val="1F2937"/>
                 </a:solidFill>
@@ -12041,39 +13336,22 @@
                 <a:ea typeface="Arial" pitchFamily="34" charset="-122"/>
                 <a:cs typeface="Arial" pitchFamily="34" charset="-120"/>
               </a:rPr>
-              <a:t>750 m → thermal</a:t>
-            </a:r>
-            <a:endParaRPr lang="en-US" sz="700" dirty="0"/>
-          </a:p>
-          <a:p>
-            <a:pPr algn="l" indent="0" marL="0">
-              <a:buNone/>
-            </a:pPr>
-            <a:r>
-              <a:rPr lang="en-US" sz="700" dirty="0">
-                <a:solidFill>
-                  <a:srgbClr val="1F2937"/>
-                </a:solidFill>
-                <a:latin typeface="Arial" pitchFamily="34" charset="0"/>
-                <a:ea typeface="Arial" pitchFamily="34" charset="-122"/>
-                <a:cs typeface="Arial" pitchFamily="34" charset="-120"/>
-              </a:rPr>
-              <a:t>sources</a:t>
-            </a:r>
-            <a:endParaRPr lang="en-US" sz="700" dirty="0"/>
+              <a:t>thermal sources</a:t>
+            </a:r>
+            <a:endParaRPr lang="en-US" sz="580" dirty="0"/>
           </a:p>
         </p:txBody>
       </p:sp>
       <p:sp>
         <p:nvSpPr>
-          <p:cNvPr id="24" name="Shape 21"/>
+          <p:cNvPr id="34" name="Shape 31"/>
           <p:cNvSpPr/>
           <p:nvPr/>
         </p:nvSpPr>
         <p:spPr>
           <a:xfrm>
-            <a:off x="3063240" y="2651760"/>
-            <a:ext cx="137160" cy="0"/>
+            <a:off x="5504688" y="2404872"/>
+            <a:ext cx="109728" cy="0"/>
           </a:xfrm>
           <a:prstGeom prst="line">
             <a:avLst/>
@@ -12090,18 +13368,18 @@
       </p:sp>
       <p:sp>
         <p:nvSpPr>
-          <p:cNvPr id="25" name="Shape 22"/>
+          <p:cNvPr id="35" name="Shape 32"/>
           <p:cNvSpPr/>
           <p:nvPr/>
         </p:nvSpPr>
         <p:spPr>
           <a:xfrm>
-            <a:off x="3200400" y="2258568"/>
-            <a:ext cx="1325880" cy="786384"/>
+            <a:off x="5614416" y="2176272"/>
+            <a:ext cx="1005840" cy="457200"/>
           </a:xfrm>
           <a:prstGeom prst="roundRect">
             <a:avLst>
-              <a:gd name="adj" fmla="val 5814"/>
+              <a:gd name="adj" fmla="val 10000"/>
             </a:avLst>
           </a:prstGeom>
           <a:solidFill>
@@ -12117,14 +13395,14 @@
       </p:sp>
       <p:sp>
         <p:nvSpPr>
-          <p:cNvPr id="26" name="Shape 23"/>
+          <p:cNvPr id="36" name="Shape 33"/>
           <p:cNvSpPr/>
           <p:nvPr/>
         </p:nvSpPr>
         <p:spPr>
           <a:xfrm>
-            <a:off x="3200400" y="2258568"/>
-            <a:ext cx="1325880" cy="228600"/>
+            <a:off x="5614416" y="2176272"/>
+            <a:ext cx="1005840" cy="155448"/>
           </a:xfrm>
           <a:prstGeom prst="rect">
             <a:avLst/>
@@ -12142,14 +13420,14 @@
       </p:sp>
       <p:sp>
         <p:nvSpPr>
-          <p:cNvPr id="27" name="Text 24"/>
+          <p:cNvPr id="37" name="Text 34"/>
           <p:cNvSpPr txBox="1"/>
           <p:nvPr/>
         </p:nvSpPr>
         <p:spPr>
           <a:xfrm>
-            <a:off x="3246120" y="2258568"/>
-            <a:ext cx="1234440" cy="228600"/>
+            <a:off x="5650992" y="2176272"/>
+            <a:ext cx="932688" cy="155448"/>
           </a:xfrm>
           <a:prstGeom prst="rect">
             <a:avLst/>
@@ -12165,7 +13443,7 @@
               <a:buNone/>
             </a:pPr>
             <a:r>
-              <a:rPr lang="en-US" sz="850" b="1" dirty="0">
+              <a:rPr lang="en-US" sz="700" b="1" dirty="0">
                 <a:solidFill>
                   <a:srgbClr val="FFFFFF"/>
                 </a:solidFill>
@@ -12175,20 +13453,20 @@
               </a:rPr>
               <a:t>3  Persistence</a:t>
             </a:r>
-            <a:endParaRPr lang="en-US" sz="850" dirty="0"/>
+            <a:endParaRPr lang="en-US" sz="700" dirty="0"/>
           </a:p>
         </p:txBody>
       </p:sp>
       <p:sp>
         <p:nvSpPr>
-          <p:cNvPr id="28" name="Text 25"/>
+          <p:cNvPr id="38" name="Text 35"/>
           <p:cNvSpPr txBox="1"/>
           <p:nvPr/>
         </p:nvSpPr>
         <p:spPr>
           <a:xfrm>
-            <a:off x="3264408" y="2514600"/>
-            <a:ext cx="1216152" cy="512064"/>
+            <a:off x="5660136" y="2340864"/>
+            <a:ext cx="914400" cy="292608"/>
           </a:xfrm>
           <a:prstGeom prst="rect">
             <a:avLst/>
@@ -12204,7 +13482,7 @@
               <a:buNone/>
             </a:pPr>
             <a:r>
-              <a:rPr lang="en-US" sz="700" dirty="0">
+              <a:rPr lang="en-US" sz="580" dirty="0">
                 <a:solidFill>
                   <a:srgbClr val="1F2937"/>
                 </a:solidFill>
@@ -12212,16 +13490,16 @@
                 <a:ea typeface="Arial" pitchFamily="34" charset="-122"/>
                 <a:cs typeface="Arial" pitchFamily="34" charset="-120"/>
               </a:rPr>
-              <a:t>active days, span,</a:t>
-            </a:r>
-            <a:endParaRPr lang="en-US" sz="700" dirty="0"/>
+              <a:t>days, span, night %,</a:t>
+            </a:r>
+            <a:endParaRPr lang="en-US" sz="580" dirty="0"/>
           </a:p>
           <a:p>
             <a:pPr algn="l" indent="0" marL="0">
               <a:buNone/>
             </a:pPr>
             <a:r>
-              <a:rPr lang="en-US" sz="700" dirty="0">
+              <a:rPr lang="en-US" sz="580" dirty="0">
                 <a:solidFill>
                   <a:srgbClr val="1F2937"/>
                 </a:solidFill>
@@ -12229,39 +13507,22 @@
                 <a:ea typeface="Arial" pitchFamily="34" charset="-122"/>
                 <a:cs typeface="Arial" pitchFamily="34" charset="-120"/>
               </a:rPr>
-              <a:t>night %, FRP mean</a:t>
-            </a:r>
-            <a:endParaRPr lang="en-US" sz="700" dirty="0"/>
-          </a:p>
-          <a:p>
-            <a:pPr algn="l" indent="0" marL="0">
-              <a:buNone/>
-            </a:pPr>
-            <a:r>
-              <a:rPr lang="en-US" sz="700" dirty="0">
-                <a:solidFill>
-                  <a:srgbClr val="1F2937"/>
-                </a:solidFill>
-                <a:latin typeface="Arial" pitchFamily="34" charset="0"/>
-                <a:ea typeface="Arial" pitchFamily="34" charset="-122"/>
-                <a:cs typeface="Arial" pitchFamily="34" charset="-120"/>
-              </a:rPr>
-              <a:t>/ CV / z-score</a:t>
-            </a:r>
-            <a:endParaRPr lang="en-US" sz="700" dirty="0"/>
+              <a:t>FRP μ / σ / z</a:t>
+            </a:r>
+            <a:endParaRPr lang="en-US" sz="580" dirty="0"/>
           </a:p>
         </p:txBody>
       </p:sp>
       <p:sp>
         <p:nvSpPr>
-          <p:cNvPr id="29" name="Shape 26"/>
+          <p:cNvPr id="39" name="Shape 36"/>
           <p:cNvSpPr/>
           <p:nvPr/>
         </p:nvSpPr>
         <p:spPr>
           <a:xfrm>
-            <a:off x="4526280" y="2651760"/>
-            <a:ext cx="137160" cy="0"/>
+            <a:off x="6620256" y="2404872"/>
+            <a:ext cx="109728" cy="0"/>
           </a:xfrm>
           <a:prstGeom prst="line">
             <a:avLst/>
@@ -12278,18 +13539,18 @@
       </p:sp>
       <p:sp>
         <p:nvSpPr>
-          <p:cNvPr id="30" name="Shape 27"/>
+          <p:cNvPr id="40" name="Shape 37"/>
           <p:cNvSpPr/>
           <p:nvPr/>
         </p:nvSpPr>
         <p:spPr>
           <a:xfrm>
-            <a:off x="4663440" y="2258568"/>
-            <a:ext cx="1325880" cy="786384"/>
+            <a:off x="6729984" y="2176272"/>
+            <a:ext cx="1005840" cy="457200"/>
           </a:xfrm>
           <a:prstGeom prst="roundRect">
             <a:avLst>
-              <a:gd name="adj" fmla="val 5814"/>
+              <a:gd name="adj" fmla="val 10000"/>
             </a:avLst>
           </a:prstGeom>
           <a:solidFill>
@@ -12305,14 +13566,14 @@
       </p:sp>
       <p:sp>
         <p:nvSpPr>
-          <p:cNvPr id="31" name="Shape 28"/>
+          <p:cNvPr id="41" name="Shape 38"/>
           <p:cNvSpPr/>
           <p:nvPr/>
         </p:nvSpPr>
         <p:spPr>
           <a:xfrm>
-            <a:off x="4663440" y="2258568"/>
-            <a:ext cx="1325880" cy="228600"/>
+            <a:off x="6729984" y="2176272"/>
+            <a:ext cx="1005840" cy="155448"/>
           </a:xfrm>
           <a:prstGeom prst="rect">
             <a:avLst/>
@@ -12330,14 +13591,14 @@
       </p:sp>
       <p:sp>
         <p:nvSpPr>
-          <p:cNvPr id="32" name="Text 29"/>
+          <p:cNvPr id="42" name="Text 39"/>
           <p:cNvSpPr txBox="1"/>
           <p:nvPr/>
         </p:nvSpPr>
         <p:spPr>
           <a:xfrm>
-            <a:off x="4709160" y="2258568"/>
-            <a:ext cx="1234440" cy="228600"/>
+            <a:off x="6766560" y="2176272"/>
+            <a:ext cx="932688" cy="155448"/>
           </a:xfrm>
           <a:prstGeom prst="rect">
             <a:avLst/>
@@ -12353,7 +13614,7 @@
               <a:buNone/>
             </a:pPr>
             <a:r>
-              <a:rPr lang="en-US" sz="850" b="1" dirty="0">
+              <a:rPr lang="en-US" sz="700" b="1" dirty="0">
                 <a:solidFill>
                   <a:srgbClr val="FFFFFF"/>
                 </a:solidFill>
@@ -12361,22 +13622,22 @@
                 <a:ea typeface="Arial" pitchFamily="34" charset="-122"/>
                 <a:cs typeface="Arial" pitchFamily="34" charset="-120"/>
               </a:rPr>
-              <a:t>4  OSM context</a:t>
-            </a:r>
-            <a:endParaRPr lang="en-US" sz="850" dirty="0"/>
+              <a:t>4  Context</a:t>
+            </a:r>
+            <a:endParaRPr lang="en-US" sz="700" dirty="0"/>
           </a:p>
         </p:txBody>
       </p:sp>
       <p:sp>
         <p:nvSpPr>
-          <p:cNvPr id="33" name="Text 30"/>
+          <p:cNvPr id="43" name="Text 40"/>
           <p:cNvSpPr txBox="1"/>
           <p:nvPr/>
         </p:nvSpPr>
         <p:spPr>
           <a:xfrm>
-            <a:off x="4727448" y="2514600"/>
-            <a:ext cx="1216152" cy="512064"/>
+            <a:off x="6775704" y="2340864"/>
+            <a:ext cx="914400" cy="292608"/>
           </a:xfrm>
           <a:prstGeom prst="rect">
             <a:avLst/>
@@ -12392,7 +13653,7 @@
               <a:buNone/>
             </a:pPr>
             <a:r>
-              <a:rPr lang="en-US" sz="700" dirty="0">
+              <a:rPr lang="en-US" sz="580" dirty="0">
                 <a:solidFill>
                   <a:srgbClr val="1F2937"/>
                 </a:solidFill>
@@ -12400,16 +13661,16 @@
                 <a:ea typeface="Arial" pitchFamily="34" charset="-122"/>
                 <a:cs typeface="Arial" pitchFamily="34" charset="-120"/>
               </a:rPr>
-              <a:t>nearest facility</a:t>
-            </a:r>
-            <a:endParaRPr lang="en-US" sz="700" dirty="0"/>
+              <a:t>nearest facility,</a:t>
+            </a:r>
+            <a:endParaRPr lang="en-US" sz="580" dirty="0"/>
           </a:p>
           <a:p>
             <a:pPr algn="l" indent="0" marL="0">
               <a:buNone/>
             </a:pPr>
             <a:r>
-              <a:rPr lang="en-US" sz="700" dirty="0">
+              <a:rPr lang="en-US" sz="580" dirty="0">
                 <a:solidFill>
                   <a:srgbClr val="1F2937"/>
                 </a:solidFill>
@@ -12417,39 +13678,22 @@
                 <a:ea typeface="Arial" pitchFamily="34" charset="-122"/>
                 <a:cs typeface="Arial" pitchFamily="34" charset="-120"/>
               </a:rPr>
-              <a:t>type + distance,</a:t>
-            </a:r>
-            <a:endParaRPr lang="en-US" sz="700" dirty="0"/>
-          </a:p>
-          <a:p>
-            <a:pPr algn="l" indent="0" marL="0">
-              <a:buNone/>
-            </a:pPr>
-            <a:r>
-              <a:rPr lang="en-US" sz="700" dirty="0">
-                <a:solidFill>
-                  <a:srgbClr val="1F2937"/>
-                </a:solidFill>
-                <a:latin typeface="Arial" pitchFamily="34" charset="0"/>
-                <a:ea typeface="Arial" pitchFamily="34" charset="-122"/>
-                <a:cs typeface="Arial" pitchFamily="34" charset="-120"/>
-              </a:rPr>
               <a:t>land cover</a:t>
             </a:r>
-            <a:endParaRPr lang="en-US" sz="700" dirty="0"/>
+            <a:endParaRPr lang="en-US" sz="580" dirty="0"/>
           </a:p>
         </p:txBody>
       </p:sp>
       <p:sp>
         <p:nvSpPr>
-          <p:cNvPr id="34" name="Shape 31"/>
+          <p:cNvPr id="44" name="Shape 41"/>
           <p:cNvSpPr/>
           <p:nvPr/>
         </p:nvSpPr>
         <p:spPr>
           <a:xfrm>
-            <a:off x="5989320" y="2651760"/>
-            <a:ext cx="137160" cy="0"/>
+            <a:off x="7735824" y="2404872"/>
+            <a:ext cx="109728" cy="0"/>
           </a:xfrm>
           <a:prstGeom prst="line">
             <a:avLst/>
@@ -12466,18 +13710,18 @@
       </p:sp>
       <p:sp>
         <p:nvSpPr>
-          <p:cNvPr id="35" name="Shape 32"/>
+          <p:cNvPr id="45" name="Shape 42"/>
           <p:cNvSpPr/>
           <p:nvPr/>
         </p:nvSpPr>
         <p:spPr>
           <a:xfrm>
-            <a:off x="6126480" y="2258568"/>
-            <a:ext cx="1325880" cy="786384"/>
+            <a:off x="7845552" y="2176272"/>
+            <a:ext cx="1005840" cy="457200"/>
           </a:xfrm>
           <a:prstGeom prst="roundRect">
             <a:avLst>
-              <a:gd name="adj" fmla="val 5814"/>
+              <a:gd name="adj" fmla="val 10000"/>
             </a:avLst>
           </a:prstGeom>
           <a:solidFill>
@@ -12493,14 +13737,14 @@
       </p:sp>
       <p:sp>
         <p:nvSpPr>
-          <p:cNvPr id="36" name="Shape 33"/>
+          <p:cNvPr id="46" name="Shape 43"/>
           <p:cNvSpPr/>
           <p:nvPr/>
         </p:nvSpPr>
         <p:spPr>
           <a:xfrm>
-            <a:off x="6126480" y="2258568"/>
-            <a:ext cx="1325880" cy="228600"/>
+            <a:off x="7845552" y="2176272"/>
+            <a:ext cx="1005840" cy="155448"/>
           </a:xfrm>
           <a:prstGeom prst="rect">
             <a:avLst/>
@@ -12518,14 +13762,14 @@
       </p:sp>
       <p:sp>
         <p:nvSpPr>
-          <p:cNvPr id="37" name="Text 34"/>
+          <p:cNvPr id="47" name="Text 44"/>
           <p:cNvSpPr txBox="1"/>
           <p:nvPr/>
         </p:nvSpPr>
         <p:spPr>
           <a:xfrm>
-            <a:off x="6172200" y="2258568"/>
-            <a:ext cx="1234440" cy="228600"/>
+            <a:off x="7882128" y="2176272"/>
+            <a:ext cx="932688" cy="155448"/>
           </a:xfrm>
           <a:prstGeom prst="rect">
             <a:avLst/>
@@ -12541,7 +13785,7 @@
               <a:buNone/>
             </a:pPr>
             <a:r>
-              <a:rPr lang="en-US" sz="850" b="1" dirty="0">
+              <a:rPr lang="en-US" sz="700" b="1" dirty="0">
                 <a:solidFill>
                   <a:srgbClr val="FFFFFF"/>
                 </a:solidFill>
@@ -12551,20 +13795,20 @@
               </a:rPr>
               <a:t>5  Classify</a:t>
             </a:r>
-            <a:endParaRPr lang="en-US" sz="850" dirty="0"/>
+            <a:endParaRPr lang="en-US" sz="700" dirty="0"/>
           </a:p>
         </p:txBody>
       </p:sp>
       <p:sp>
         <p:nvSpPr>
-          <p:cNvPr id="38" name="Text 35"/>
+          <p:cNvPr id="48" name="Text 45"/>
           <p:cNvSpPr txBox="1"/>
           <p:nvPr/>
         </p:nvSpPr>
         <p:spPr>
           <a:xfrm>
-            <a:off x="6190488" y="2514600"/>
-            <a:ext cx="1216152" cy="512064"/>
+            <a:off x="7891272" y="2340864"/>
+            <a:ext cx="914400" cy="292608"/>
           </a:xfrm>
           <a:prstGeom prst="rect">
             <a:avLst/>
@@ -12580,7 +13824,7 @@
               <a:buNone/>
             </a:pPr>
             <a:r>
-              <a:rPr lang="en-US" sz="700" dirty="0">
+              <a:rPr lang="en-US" sz="580" dirty="0">
                 <a:solidFill>
                   <a:srgbClr val="1F2937"/>
                 </a:solidFill>
@@ -12588,16 +13832,16 @@
                 <a:ea typeface="Arial" pitchFamily="34" charset="-122"/>
                 <a:cs typeface="Arial" pitchFamily="34" charset="-120"/>
               </a:rPr>
-              <a:t>rules + GBM vote</a:t>
-            </a:r>
-            <a:endParaRPr lang="en-US" sz="700" dirty="0"/>
+              <a:t>rules + GBM →</a:t>
+            </a:r>
+            <a:endParaRPr lang="en-US" sz="580" dirty="0"/>
           </a:p>
           <a:p>
             <a:pPr algn="l" indent="0" marL="0">
               <a:buNone/>
             </a:pPr>
             <a:r>
-              <a:rPr lang="en-US" sz="700" dirty="0">
+              <a:rPr lang="en-US" sz="580" dirty="0">
                 <a:solidFill>
                   <a:srgbClr val="1F2937"/>
                 </a:solidFill>
@@ -12605,45 +13849,28 @@
                 <a:ea typeface="Arial" pitchFamily="34" charset="-122"/>
                 <a:cs typeface="Arial" pitchFamily="34" charset="-120"/>
               </a:rPr>
-              <a:t>→ 6 classes,</a:t>
-            </a:r>
-            <a:endParaRPr lang="en-US" sz="700" dirty="0"/>
-          </a:p>
-          <a:p>
-            <a:pPr algn="l" indent="0" marL="0">
-              <a:buNone/>
-            </a:pPr>
-            <a:r>
-              <a:rPr lang="en-US" sz="700" dirty="0">
-                <a:solidFill>
-                  <a:srgbClr val="1F2937"/>
-                </a:solidFill>
-                <a:latin typeface="Arial" pitchFamily="34" charset="0"/>
-                <a:ea typeface="Arial" pitchFamily="34" charset="-122"/>
-                <a:cs typeface="Arial" pitchFamily="34" charset="-120"/>
-              </a:rPr>
-              <a:t>confidence, reasons</a:t>
-            </a:r>
-            <a:endParaRPr lang="en-US" sz="700" dirty="0"/>
+              <a:t>class, conf., reasons</a:t>
+            </a:r>
+            <a:endParaRPr lang="en-US" sz="580" dirty="0"/>
           </a:p>
         </p:txBody>
       </p:sp>
       <p:sp>
         <p:nvSpPr>
-          <p:cNvPr id="39" name="Shape 36"/>
+          <p:cNvPr id="49" name="Shape 46"/>
           <p:cNvSpPr/>
           <p:nvPr/>
         </p:nvSpPr>
         <p:spPr>
           <a:xfrm>
-            <a:off x="7452360" y="2651760"/>
-            <a:ext cx="137160" cy="0"/>
+            <a:off x="1645920" y="2651760"/>
+            <a:ext cx="0" cy="109728"/>
           </a:xfrm>
           <a:prstGeom prst="line">
             <a:avLst/>
           </a:prstGeom>
           <a:noFill/>
-          <a:ln w="19050">
+          <a:ln w="15240">
             <a:solidFill>
               <a:srgbClr val="9CA3AF"/>
             </a:solidFill>
@@ -12654,26 +13881,26 @@
       </p:sp>
       <p:sp>
         <p:nvSpPr>
-          <p:cNvPr id="40" name="Shape 37"/>
+          <p:cNvPr id="50" name="Shape 47"/>
           <p:cNvSpPr/>
           <p:nvPr/>
         </p:nvSpPr>
         <p:spPr>
           <a:xfrm>
-            <a:off x="7589520" y="2258568"/>
-            <a:ext cx="1325880" cy="786384"/>
+            <a:off x="274320" y="2761488"/>
+            <a:ext cx="2788920" cy="384048"/>
           </a:xfrm>
           <a:prstGeom prst="roundRect">
             <a:avLst>
-              <a:gd name="adj" fmla="val 5814"/>
+              <a:gd name="adj" fmla="val 11905"/>
             </a:avLst>
           </a:prstGeom>
           <a:solidFill>
-            <a:srgbClr val="FFFFFF"/>
+            <a:srgbClr val="F3F4F6"/>
           </a:solidFill>
           <a:ln w="9525">
             <a:solidFill>
-              <a:srgbClr val="0F172A"/>
+              <a:srgbClr val="F3F4F6"/>
             </a:solidFill>
             <a:prstDash val="solid"/>
           </a:ln>
@@ -12681,39 +13908,14 @@
       </p:sp>
       <p:sp>
         <p:nvSpPr>
-          <p:cNvPr id="41" name="Shape 38"/>
-          <p:cNvSpPr/>
-          <p:nvPr/>
-        </p:nvSpPr>
-        <p:spPr>
-          <a:xfrm>
-            <a:off x="7589520" y="2258568"/>
-            <a:ext cx="1325880" cy="228600"/>
-          </a:xfrm>
-          <a:prstGeom prst="rect">
-            <a:avLst/>
-          </a:prstGeom>
-          <a:solidFill>
-            <a:srgbClr val="0F172A"/>
-          </a:solidFill>
-          <a:ln w="12700">
-            <a:solidFill>
-              <a:srgbClr val="0F172A"/>
-            </a:solidFill>
-            <a:prstDash val="solid"/>
-          </a:ln>
-        </p:spPr>
-      </p:sp>
-      <p:sp>
-        <p:nvSpPr>
-          <p:cNvPr id="42" name="Text 39"/>
+          <p:cNvPr id="51" name="Text 48"/>
           <p:cNvSpPr txBox="1"/>
           <p:nvPr/>
         </p:nvSpPr>
         <p:spPr>
           <a:xfrm>
-            <a:off x="7635240" y="2258568"/>
-            <a:ext cx="1234440" cy="228600"/>
+            <a:off x="347472" y="2761488"/>
+            <a:ext cx="2651760" cy="384048"/>
           </a:xfrm>
           <a:prstGeom prst="rect">
             <a:avLst/>
@@ -12725,46 +13927,21 @@
           <a:bodyPr wrap="square" lIns="0" tIns="0" rIns="0" bIns="0" rtlCol="0" anchor="ctr"/>
           <a:lstStyle/>
           <a:p>
-            <a:pPr algn="l" indent="0" marL="0">
+            <a:pPr indent="0" marL="0">
               <a:buNone/>
             </a:pPr>
             <a:r>
-              <a:rPr lang="en-US" sz="850" b="1" dirty="0">
-                <a:solidFill>
-                  <a:srgbClr val="FFFFFF"/>
+              <a:rPr lang="en-US" sz="700" b="1" dirty="0">
+                <a:solidFill>
+                  <a:srgbClr val="1D4ED8"/>
                 </a:solidFill>
                 <a:latin typeface="Arial" pitchFamily="34" charset="0"/>
                 <a:ea typeface="Arial" pitchFamily="34" charset="-122"/>
                 <a:cs typeface="Arial" pitchFamily="34" charset="-120"/>
               </a:rPr>
-              <a:t>6  Serve</a:t>
-            </a:r>
-            <a:endParaRPr lang="en-US" sz="850" dirty="0"/>
-          </a:p>
-        </p:txBody>
-      </p:sp>
-      <p:sp>
-        <p:nvSpPr>
-          <p:cNvPr id="43" name="Text 40"/>
-          <p:cNvSpPr txBox="1"/>
-          <p:nvPr/>
-        </p:nvSpPr>
-        <p:spPr>
-          <a:xfrm>
-            <a:off x="7653528" y="2514600"/>
-            <a:ext cx="1216152" cy="512064"/>
-          </a:xfrm>
-          <a:prstGeom prst="rect">
-            <a:avLst/>
-          </a:prstGeom>
-          <a:noFill/>
-          <a:ln/>
-        </p:spPr>
-        <p:txBody>
-          <a:bodyPr wrap="square" lIns="0" tIns="0" rIns="0" bIns="0" rtlCol="0" anchor="t"/>
-          <a:lstStyle/>
-          <a:p>
-            <a:pPr algn="l" indent="0" marL="0">
+              <a:t>GIS layers: </a:t>
+            </a:r>
+            <a:pPr indent="0" marL="0">
               <a:buNone/>
             </a:pPr>
             <a:r>
@@ -12776,41 +13953,7 @@
                 <a:ea typeface="Arial" pitchFamily="34" charset="-122"/>
                 <a:cs typeface="Arial" pitchFamily="34" charset="-120"/>
               </a:rPr>
-              <a:t>SQLite → GeoJSON</a:t>
-            </a:r>
-            <a:endParaRPr lang="en-US" sz="700" dirty="0"/>
-          </a:p>
-          <a:p>
-            <a:pPr algn="l" indent="0" marL="0">
-              <a:buNone/>
-            </a:pPr>
-            <a:r>
-              <a:rPr lang="en-US" sz="700" dirty="0">
-                <a:solidFill>
-                  <a:srgbClr val="1F2937"/>
-                </a:solidFill>
-                <a:latin typeface="Arial" pitchFamily="34" charset="0"/>
-                <a:ea typeface="Arial" pitchFamily="34" charset="-122"/>
-                <a:cs typeface="Arial" pitchFamily="34" charset="-120"/>
-              </a:rPr>
-              <a:t>API → Leaflet GIS</a:t>
-            </a:r>
-            <a:endParaRPr lang="en-US" sz="700" dirty="0"/>
-          </a:p>
-          <a:p>
-            <a:pPr algn="l" indent="0" marL="0">
-              <a:buNone/>
-            </a:pPr>
-            <a:r>
-              <a:rPr lang="en-US" sz="700" dirty="0">
-                <a:solidFill>
-                  <a:srgbClr val="1F2937"/>
-                </a:solidFill>
-                <a:latin typeface="Arial" pitchFamily="34" charset="0"/>
-                <a:ea typeface="Arial" pitchFamily="34" charset="-122"/>
-                <a:cs typeface="Arial" pitchFamily="34" charset="-120"/>
-              </a:rPr>
-              <a:t>dashboard, export</a:t>
+              <a:t>classified detections, persistent-source registry, GeoJSON API</a:t>
             </a:r>
             <a:endParaRPr lang="en-US" sz="700" dirty="0"/>
           </a:p>
@@ -12818,22 +13961,22 @@
       </p:sp>
       <p:sp>
         <p:nvSpPr>
-          <p:cNvPr id="44" name="Shape 41"/>
+          <p:cNvPr id="52" name="Shape 49"/>
           <p:cNvSpPr/>
           <p:nvPr/>
         </p:nvSpPr>
         <p:spPr>
           <a:xfrm>
-            <a:off x="6784848" y="3044952"/>
-            <a:ext cx="0" cy="137160"/>
+            <a:off x="4526280" y="2651760"/>
+            <a:ext cx="0" cy="109728"/>
           </a:xfrm>
           <a:prstGeom prst="line">
             <a:avLst/>
           </a:prstGeom>
           <a:noFill/>
-          <a:ln w="19050">
+          <a:ln w="15240">
             <a:solidFill>
-              <a:srgbClr val="B91C1C"/>
+              <a:srgbClr val="9CA3AF"/>
             </a:solidFill>
             <a:prstDash val="solid"/>
             <a:tailEnd type="triangle"/>
@@ -12842,18 +13985,18 @@
       </p:sp>
       <p:sp>
         <p:nvSpPr>
-          <p:cNvPr id="45" name="Shape 42"/>
+          <p:cNvPr id="53" name="Shape 50"/>
           <p:cNvSpPr/>
           <p:nvPr/>
         </p:nvSpPr>
         <p:spPr>
           <a:xfrm>
-            <a:off x="5623560" y="3182112"/>
-            <a:ext cx="2331720" cy="310896"/>
+            <a:off x="3154680" y="2761488"/>
+            <a:ext cx="2788920" cy="384048"/>
           </a:xfrm>
           <a:prstGeom prst="roundRect">
             <a:avLst>
-              <a:gd name="adj" fmla="val 14706"/>
+              <a:gd name="adj" fmla="val 11905"/>
             </a:avLst>
           </a:prstGeom>
           <a:solidFill>
@@ -12869,14 +14012,14 @@
       </p:sp>
       <p:sp>
         <p:nvSpPr>
-          <p:cNvPr id="46" name="Text 43"/>
+          <p:cNvPr id="54" name="Text 51"/>
           <p:cNvSpPr txBox="1"/>
           <p:nvPr/>
         </p:nvSpPr>
         <p:spPr>
           <a:xfrm>
-            <a:off x="5687568" y="3182112"/>
-            <a:ext cx="2240280" cy="310896"/>
+            <a:off x="3227832" y="2761488"/>
+            <a:ext cx="2651760" cy="384048"/>
           </a:xfrm>
           <a:prstGeom prst="rect">
             <a:avLst/>
@@ -12888,7 +14031,7 @@
           <a:bodyPr wrap="square" lIns="0" tIns="0" rIns="0" bIns="0" rtlCol="0" anchor="ctr"/>
           <a:lstStyle/>
           <a:p>
-            <a:pPr algn="l" indent="0" marL="0">
+            <a:pPr indent="0" marL="0">
               <a:buNone/>
             </a:pPr>
             <a:r>
@@ -12900,7 +14043,21 @@
                 <a:ea typeface="Arial" pitchFamily="34" charset="-122"/>
                 <a:cs typeface="Arial" pitchFamily="34" charset="-120"/>
               </a:rPr>
-              <a:t>⚠ Anomaly: FRP ≥ 2.5× source baseline &amp; z ≥ 3 → incident alert</a:t>
+              <a:t>⚠ Incident alerts: </a:t>
+            </a:r>
+            <a:pPr indent="0" marL="0">
+              <a:buNone/>
+            </a:pPr>
+            <a:r>
+              <a:rPr lang="en-US" sz="700" dirty="0">
+                <a:solidFill>
+                  <a:srgbClr val="1F2937"/>
+                </a:solidFill>
+                <a:latin typeface="Arial" pitchFamily="34" charset="0"/>
+                <a:ea typeface="Arial" pitchFamily="34" charset="-122"/>
+                <a:cs typeface="Arial" pitchFamily="34" charset="-120"/>
+              </a:rPr>
+              <a:t>FRP ≥ 2.5 μ &amp; z ≥ 3 at a known source → webhook / SMS / e-mail</a:t>
             </a:r>
             <a:endParaRPr lang="en-US" sz="700" dirty="0"/>
           </a:p>
@@ -12908,14 +14065,198 @@
       </p:sp>
       <p:sp>
         <p:nvSpPr>
-          <p:cNvPr id="47" name="Text 44"/>
+          <p:cNvPr id="55" name="Shape 52"/>
+          <p:cNvSpPr/>
+          <p:nvPr/>
+        </p:nvSpPr>
+        <p:spPr>
+          <a:xfrm>
+            <a:off x="7406640" y="2651760"/>
+            <a:ext cx="0" cy="109728"/>
+          </a:xfrm>
+          <a:prstGeom prst="line">
+            <a:avLst/>
+          </a:prstGeom>
+          <a:noFill/>
+          <a:ln w="15240">
+            <a:solidFill>
+              <a:srgbClr val="9CA3AF"/>
+            </a:solidFill>
+            <a:prstDash val="solid"/>
+            <a:tailEnd type="triangle"/>
+          </a:ln>
+        </p:spPr>
+      </p:sp>
+      <p:sp>
+        <p:nvSpPr>
+          <p:cNvPr id="56" name="Shape 53"/>
+          <p:cNvSpPr/>
+          <p:nvPr/>
+        </p:nvSpPr>
+        <p:spPr>
+          <a:xfrm>
+            <a:off x="6035040" y="2761488"/>
+            <a:ext cx="2788920" cy="384048"/>
+          </a:xfrm>
+          <a:prstGeom prst="roundRect">
+            <a:avLst>
+              <a:gd name="adj" fmla="val 11905"/>
+            </a:avLst>
+          </a:prstGeom>
+          <a:solidFill>
+            <a:srgbClr val="F3F4F6"/>
+          </a:solidFill>
+          <a:ln w="9525">
+            <a:solidFill>
+              <a:srgbClr val="F3F4F6"/>
+            </a:solidFill>
+            <a:prstDash val="solid"/>
+          </a:ln>
+        </p:spPr>
+      </p:sp>
+      <p:sp>
+        <p:nvSpPr>
+          <p:cNvPr id="57" name="Text 54"/>
           <p:cNvSpPr txBox="1"/>
           <p:nvPr/>
         </p:nvSpPr>
         <p:spPr>
           <a:xfrm>
-            <a:off x="274320" y="3108960"/>
-            <a:ext cx="5303520" cy="201168"/>
+            <a:off x="6108192" y="2761488"/>
+            <a:ext cx="2651760" cy="384048"/>
+          </a:xfrm>
+          <a:prstGeom prst="rect">
+            <a:avLst/>
+          </a:prstGeom>
+          <a:noFill/>
+          <a:ln/>
+        </p:spPr>
+        <p:txBody>
+          <a:bodyPr wrap="square" lIns="0" tIns="0" rIns="0" bIns="0" rtlCol="0" anchor="ctr"/>
+          <a:lstStyle/>
+          <a:p>
+            <a:pPr indent="0" marL="0">
+              <a:buNone/>
+            </a:pPr>
+            <a:r>
+              <a:rPr lang="en-US" sz="700" b="1" dirty="0">
+                <a:solidFill>
+                  <a:srgbClr val="15803D"/>
+                </a:solidFill>
+                <a:latin typeface="Arial" pitchFamily="34" charset="0"/>
+                <a:ea typeface="Arial" pitchFamily="34" charset="-122"/>
+                <a:cs typeface="Arial" pitchFamily="34" charset="-120"/>
+              </a:rPr>
+              <a:t>Analyst loop: </a:t>
+            </a:r>
+            <a:pPr indent="0" marL="0">
+              <a:buNone/>
+            </a:pPr>
+            <a:r>
+              <a:rPr lang="en-US" sz="700" dirty="0">
+                <a:solidFill>
+                  <a:srgbClr val="1F2937"/>
+                </a:solidFill>
+                <a:latin typeface="Arial" pitchFamily="34" charset="0"/>
+                <a:ea typeface="Arial" pitchFamily="34" charset="-122"/>
+                <a:cs typeface="Arial" pitchFamily="34" charset="-120"/>
+              </a:rPr>
+              <a:t>reasons shown → confirm / override → labels retrain the model</a:t>
+            </a:r>
+            <a:endParaRPr lang="en-US" sz="700" dirty="0"/>
+          </a:p>
+        </p:txBody>
+      </p:sp>
+      <p:sp>
+        <p:nvSpPr>
+          <p:cNvPr id="58" name="Shape 55"/>
+          <p:cNvSpPr/>
+          <p:nvPr/>
+        </p:nvSpPr>
+        <p:spPr>
+          <a:xfrm>
+            <a:off x="274320" y="3218688"/>
+            <a:ext cx="8595360" cy="329184"/>
+          </a:xfrm>
+          <a:prstGeom prst="roundRect">
+            <a:avLst>
+              <a:gd name="adj" fmla="val 13889"/>
+            </a:avLst>
+          </a:prstGeom>
+          <a:solidFill>
+            <a:srgbClr val="EFF6FF"/>
+          </a:solidFill>
+          <a:ln w="9525">
+            <a:solidFill>
+              <a:srgbClr val="BFDBFE"/>
+            </a:solidFill>
+            <a:prstDash val="solid"/>
+          </a:ln>
+        </p:spPr>
+      </p:sp>
+      <p:sp>
+        <p:nvSpPr>
+          <p:cNvPr id="59" name="Text 56"/>
+          <p:cNvSpPr txBox="1"/>
+          <p:nvPr/>
+        </p:nvSpPr>
+        <p:spPr>
+          <a:xfrm>
+            <a:off x="384048" y="3218688"/>
+            <a:ext cx="8412480" cy="329184"/>
+          </a:xfrm>
+          <a:prstGeom prst="rect">
+            <a:avLst/>
+          </a:prstGeom>
+          <a:noFill/>
+          <a:ln/>
+        </p:spPr>
+        <p:txBody>
+          <a:bodyPr wrap="square" lIns="0" tIns="0" rIns="0" bIns="0" rtlCol="0" anchor="ctr"/>
+          <a:lstStyle/>
+          <a:p>
+            <a:pPr indent="0" marL="0">
+              <a:buNone/>
+            </a:pPr>
+            <a:r>
+              <a:rPr lang="en-US" sz="700" b="1" dirty="0">
+                <a:solidFill>
+                  <a:srgbClr val="1D4ED8"/>
+                </a:solidFill>
+                <a:latin typeface="Arial" pitchFamily="34" charset="0"/>
+                <a:ea typeface="Arial" pitchFamily="34" charset="-122"/>
+                <a:cs typeface="Arial" pitchFamily="34" charset="-120"/>
+              </a:rPr>
+              <a:t>AI core:  </a:t>
+            </a:r>
+            <a:pPr indent="0" marL="0">
+              <a:buNone/>
+            </a:pPr>
+            <a:r>
+              <a:rPr lang="en-US" sz="700" dirty="0">
+                <a:solidFill>
+                  <a:srgbClr val="1F2937"/>
+                </a:solidFill>
+                <a:latin typeface="Arial" pitchFamily="34" charset="0"/>
+                <a:ea typeface="Arial" pitchFamily="34" charset="-122"/>
+                <a:cs typeface="Arial" pitchFamily="34" charset="-120"/>
+              </a:rPr>
+              <a:t>34 features (radiometry · persistence · OSM context · land cover · calendar priors: Oct–Nov &amp; Apr–May residue burning)  ·  rules give auditable priors, GBM resolves ambiguous cases, agreement raises confidence  ·  trained/tested with a group-aware split so no source leaks between train and test.</a:t>
+            </a:r>
+            <a:endParaRPr lang="en-US" sz="700" dirty="0"/>
+          </a:p>
+        </p:txBody>
+      </p:sp>
+      <p:sp>
+        <p:nvSpPr>
+          <p:cNvPr id="60" name="Text 57"/>
+          <p:cNvSpPr txBox="1"/>
+          <p:nvPr/>
+        </p:nvSpPr>
+        <p:spPr>
+          <a:xfrm>
+            <a:off x="274320" y="3611880"/>
+            <a:ext cx="3657600" cy="201168"/>
           </a:xfrm>
           <a:prstGeom prst="rect">
             <a:avLst/>
@@ -12931,53 +14272,14 @@
               <a:buNone/>
             </a:pPr>
             <a:r>
-              <a:rPr lang="en-US" sz="750" i="1" dirty="0">
-                <a:solidFill>
-                  <a:srgbClr val="6B7280"/>
+              <a:rPr lang="en-US" sz="900" b="1" dirty="0">
+                <a:solidFill>
+                  <a:srgbClr val="1F2937"/>
                 </a:solidFill>
                 <a:latin typeface="Arial" pitchFamily="34" charset="0"/>
                 <a:ea typeface="Arial" pitchFamily="34" charset="-122"/>
                 <a:cs typeface="Arial" pitchFamily="34" charset="-120"/>
               </a:rPr>
-              <a:t>Inputs: NASA FIRMS (thermal anomalies) · OSM (infrastructure &amp; land use) · Sentinel-2 / Worldview (visual verification)</a:t>
-            </a:r>
-            <a:endParaRPr lang="en-US" sz="750" dirty="0"/>
-          </a:p>
-        </p:txBody>
-      </p:sp>
-      <p:sp>
-        <p:nvSpPr>
-          <p:cNvPr id="48" name="Text 45"/>
-          <p:cNvSpPr txBox="1"/>
-          <p:nvPr/>
-        </p:nvSpPr>
-        <p:spPr>
-          <a:xfrm>
-            <a:off x="274320" y="3566160"/>
-            <a:ext cx="3657600" cy="201168"/>
-          </a:xfrm>
-          <a:prstGeom prst="rect">
-            <a:avLst/>
-          </a:prstGeom>
-          <a:noFill/>
-          <a:ln/>
-        </p:spPr>
-        <p:txBody>
-          <a:bodyPr wrap="square" lIns="0" tIns="0" rIns="0" bIns="0" rtlCol="0" anchor="t"/>
-          <a:lstStyle/>
-          <a:p>
-            <a:pPr algn="l" indent="0" marL="0">
-              <a:buNone/>
-            </a:pPr>
-            <a:r>
-              <a:rPr lang="en-US" sz="900" b="1" dirty="0">
-                <a:solidFill>
-                  <a:srgbClr val="1F2937"/>
-                </a:solidFill>
-                <a:latin typeface="Arial" pitchFamily="34" charset="0"/>
-                <a:ea typeface="Arial" pitchFamily="34" charset="-122"/>
-                <a:cs typeface="Arial" pitchFamily="34" charset="-120"/>
-              </a:rPr>
               <a:t>Working prototype (real screenshots)</a:t>
             </a:r>
             <a:endParaRPr lang="en-US" sz="900" dirty="0"/>
@@ -12986,7 +14288,7 @@
       </p:sp>
       <p:pic>
         <p:nvPicPr>
-          <p:cNvPr id="49" name="Image 1" descr="preencoded.png">    </p:cNvPr>
+          <p:cNvPr id="61" name="Image 1" descr="preencoded.png">    </p:cNvPr>
           <p:cNvPicPr>
             <a:picLocks noChangeAspect="1"/>
           </p:cNvPicPr>
@@ -13000,8 +14302,8 @@
         </p:blipFill>
         <p:spPr>
           <a:xfrm>
-            <a:off x="274320" y="3776472"/>
-            <a:ext cx="1828800" cy="1024128"/>
+            <a:off x="274320" y="3813048"/>
+            <a:ext cx="1783080" cy="1005840"/>
           </a:xfrm>
           <a:prstGeom prst="rect">
             <a:avLst/>
@@ -13010,7 +14312,7 @@
       </p:pic>
       <p:pic>
         <p:nvPicPr>
-          <p:cNvPr id="50" name="Image 2" descr="preencoded.png">    </p:cNvPr>
+          <p:cNvPr id="62" name="Image 2" descr="preencoded.png">    </p:cNvPr>
           <p:cNvPicPr>
             <a:picLocks noChangeAspect="1"/>
           </p:cNvPicPr>
@@ -13018,13 +14320,13 @@
         </p:nvPicPr>
         <p:blipFill>
           <a:blip r:embed="rId3"/>
-          <a:srcRect l="56250" r="7500" t="7111" b="43111"/>
+          <a:srcRect l="56410" r="7692" t="7273" b="42727"/>
           <a:stretch/>
         </p:blipFill>
         <p:spPr>
           <a:xfrm>
-            <a:off x="2194560" y="3776472"/>
-            <a:ext cx="1325880" cy="1024128"/>
+            <a:off x="2148840" y="3813048"/>
+            <a:ext cx="1280160" cy="1005840"/>
           </a:xfrm>
           <a:prstGeom prst="rect">
             <a:avLst/>
@@ -13033,14 +14335,14 @@
       </p:pic>
       <p:sp>
         <p:nvSpPr>
-          <p:cNvPr id="51" name="Text 46"/>
+          <p:cNvPr id="63" name="Text 58"/>
           <p:cNvSpPr txBox="1"/>
           <p:nvPr/>
         </p:nvSpPr>
         <p:spPr>
           <a:xfrm>
-            <a:off x="3657600" y="3749040"/>
-            <a:ext cx="5212080" cy="1051560"/>
+            <a:off x="3566160" y="3794760"/>
+            <a:ext cx="5303520" cy="1051560"/>
           </a:xfrm>
           <a:prstGeom prst="rect">
             <a:avLst/>
@@ -13054,13 +14356,13 @@
           <a:p>
             <a:pPr marL="127000" indent="-127000">
               <a:spcAft>
-                <a:spcPts val="200"/>
+                <a:spcPts val="150"/>
               </a:spcAft>
               <a:buSzPct val="100000"/>
               <a:buChar char="•"/>
             </a:pPr>
             <a:r>
-              <a:rPr lang="en-US" sz="800" dirty="0">
+              <a:rPr lang="en-US" sz="750" dirty="0">
                 <a:solidFill>
                   <a:srgbClr val="1F2937"/>
                 </a:solidFill>
@@ -13068,20 +14370,20 @@
                 <a:ea typeface="Arial" pitchFamily="34" charset="-122"/>
                 <a:cs typeface="Arial" pitchFamily="34" charset="-120"/>
               </a:rPr>
-              <a:t>22,179 FIRMS detections classified in ~7 s · 114 persistent sources · 138 incident candidates</a:t>
-            </a:r>
-            <a:endParaRPr lang="en-US" sz="800" dirty="0"/>
+              <a:t>22,179 FIRMS detections classified in ~7 s · 114 persistent sources · 138 incident candidates (0.6 %)</a:t>
+            </a:r>
+            <a:endParaRPr lang="en-US" sz="750" dirty="0"/>
           </a:p>
           <a:p>
             <a:pPr marL="127000" indent="-127000">
               <a:spcAft>
-                <a:spcPts val="200"/>
+                <a:spcPts val="150"/>
               </a:spcAft>
               <a:buSzPct val="100000"/>
               <a:buChar char="•"/>
             </a:pPr>
             <a:r>
-              <a:rPr lang="en-US" sz="800" dirty="0">
+              <a:rPr lang="en-US" sz="750" dirty="0">
                 <a:solidFill>
                   <a:srgbClr val="1F2937"/>
                 </a:solidFill>
@@ -13089,20 +14391,20 @@
                 <a:ea typeface="Arial" pitchFamily="34" charset="-122"/>
                 <a:cs typeface="Arial" pitchFamily="34" charset="-120"/>
               </a:rPr>
-              <a:t>Hybrid accuracy 99.9 % on labelled archive (group-aware split); rules-only 98.4 %</a:t>
-            </a:r>
-            <a:endParaRPr lang="en-US" sz="800" dirty="0"/>
+              <a:t>Hybrid accuracy 99.9 % vs rules-only 98.4 % on the labelled archive (group-aware split)</a:t>
+            </a:r>
+            <a:endParaRPr lang="en-US" sz="750" dirty="0"/>
           </a:p>
           <a:p>
             <a:pPr marL="127000" indent="-127000">
               <a:spcAft>
-                <a:spcPts val="200"/>
+                <a:spcPts val="150"/>
               </a:spcAft>
               <a:buSzPct val="100000"/>
               <a:buChar char="•"/>
             </a:pPr>
             <a:r>
-              <a:rPr lang="en-US" sz="800" dirty="0">
+              <a:rPr lang="en-US" sz="750" dirty="0">
                 <a:solidFill>
                   <a:srgbClr val="1F2937"/>
                 </a:solidFill>
@@ -13110,9 +14412,30 @@
                 <a:ea typeface="Arial" pitchFamily="34" charset="-122"/>
                 <a:cs typeface="Arial" pitchFamily="34" charset="-120"/>
               </a:rPr>
+              <a:t>Scales: India ≈ 5–15 k detections / day → seconds of compute; OSM queried only around hotspot cells</a:t>
+            </a:r>
+            <a:endParaRPr lang="en-US" sz="750" dirty="0"/>
+          </a:p>
+          <a:p>
+            <a:pPr marL="127000" indent="-127000">
+              <a:spcAft>
+                <a:spcPts val="150"/>
+              </a:spcAft>
+              <a:buSzPct val="100000"/>
+              <a:buChar char="•"/>
+            </a:pPr>
+            <a:r>
+              <a:rPr lang="en-US" sz="750" dirty="0">
+                <a:solidFill>
+                  <a:srgbClr val="1F2937"/>
+                </a:solidFill>
+                <a:latin typeface="Arial" pitchFamily="34" charset="0"/>
+                <a:ea typeface="Arial" pitchFamily="34" charset="-122"/>
+                <a:cs typeface="Arial" pitchFamily="34" charset="-120"/>
+              </a:rPr>
               <a:t>Live demo: rahulskandagal.github.io/thermal-sentinel  ·  Code: github.com/rahulskandagal/thermal-sentinel</a:t>
             </a:r>
-            <a:endParaRPr lang="en-US" sz="800" dirty="0"/>
+            <a:endParaRPr lang="en-US" sz="750" dirty="0"/>
           </a:p>
         </p:txBody>
       </p:sp>
@@ -14157,11 +15480,11 @@
         <p:spPr>
           <a:xfrm>
             <a:off x="274320" y="1170432"/>
-            <a:ext cx="2788920" cy="2788920"/>
+            <a:ext cx="2788920" cy="2487168"/>
           </a:xfrm>
           <a:prstGeom prst="roundRect">
             <a:avLst>
-              <a:gd name="adj" fmla="val 1639"/>
+              <a:gd name="adj" fmla="val 1838"/>
             </a:avLst>
           </a:prstGeom>
           <a:solidFill>
@@ -14183,8 +15506,8 @@
         </p:nvSpPr>
         <p:spPr>
           <a:xfrm>
-            <a:off x="365760" y="1243584"/>
-            <a:ext cx="2633472" cy="2670048"/>
+            <a:off x="365760" y="1234440"/>
+            <a:ext cx="2633472" cy="2377440"/>
           </a:xfrm>
           <a:prstGeom prst="rect">
             <a:avLst/>
@@ -14204,7 +15527,7 @@
               <a:buChar char="•"/>
             </a:pPr>
             <a:r>
-              <a:rPr lang="en-US" sz="850" dirty="0">
+              <a:rPr lang="en-US" sz="800" dirty="0">
                 <a:solidFill>
                   <a:srgbClr val="1F2937"/>
                 </a:solidFill>
@@ -14212,9 +15535,9 @@
                 <a:ea typeface="Arial" pitchFamily="34" charset="-122"/>
                 <a:cs typeface="Arial" pitchFamily="34" charset="-120"/>
               </a:rPr>
-              <a:t>All inputs are free &amp; open: FIRMS MAP_KEY (instant), OSM Overpass, Copernicus Sentinel-2, NASA Worldview.</a:t>
-            </a:r>
-            <a:endParaRPr lang="en-US" sz="850" dirty="0"/>
+              <a:t>Technical: end-to-end prototype already runs — 22 k detections → classified in 7 s on a laptop; model trains in seconds; deployed static demo online.</a:t>
+            </a:r>
+            <a:endParaRPr lang="en-US" sz="800" dirty="0"/>
           </a:p>
           <a:p>
             <a:pPr marL="127000" indent="-127000">
@@ -14225,7 +15548,7 @@
               <a:buChar char="•"/>
             </a:pPr>
             <a:r>
-              <a:rPr lang="en-US" sz="850" dirty="0">
+              <a:rPr lang="en-US" sz="800" dirty="0">
                 <a:solidFill>
                   <a:srgbClr val="1F2937"/>
                 </a:solidFill>
@@ -14233,9 +15556,9 @@
                 <a:ea typeface="Arial" pitchFamily="34" charset="-122"/>
                 <a:cs typeface="Arial" pitchFamily="34" charset="-120"/>
               </a:rPr>
-              <a:t>Working end-to-end prototype exists: 22 k detections classified in 7 s on a laptop; model trains in seconds.</a:t>
-            </a:r>
-            <a:endParaRPr lang="en-US" sz="850" dirty="0"/>
+              <a:t>Data: every input is free, open and API-accessible (FIRMS key issued instantly; OSM Overpass; Copernicus). No procurement, no licence.</a:t>
+            </a:r>
+            <a:endParaRPr lang="en-US" sz="800" dirty="0"/>
           </a:p>
           <a:p>
             <a:pPr marL="127000" indent="-127000">
@@ -14246,7 +15569,7 @@
               <a:buChar char="•"/>
             </a:pPr>
             <a:r>
-              <a:rPr lang="en-US" sz="850" dirty="0">
+              <a:rPr lang="en-US" sz="800" dirty="0">
                 <a:solidFill>
                   <a:srgbClr val="1F2937"/>
                 </a:solidFill>
@@ -14254,9 +15577,9 @@
                 <a:ea typeface="Arial" pitchFamily="34" charset="-122"/>
                 <a:cs typeface="Arial" pitchFamily="34" charset="-120"/>
               </a:rPr>
-              <a:t>Same pipeline switches to live FIRMS with one env variable; Overpass queried only around hotspot cells → India-wide in minutes.</a:t>
-            </a:r>
-            <a:endParaRPr lang="en-US" sz="850" dirty="0"/>
+              <a:t>Operational: one env variable switches offline archive → live FIRMS; Overpass queried only around hotspot cells → India-wide refresh in minutes.</a:t>
+            </a:r>
+            <a:endParaRPr lang="en-US" sz="800" dirty="0"/>
           </a:p>
           <a:p>
             <a:pPr marL="127000" indent="-127000">
@@ -14267,7 +15590,7 @@
               <a:buChar char="•"/>
             </a:pPr>
             <a:r>
-              <a:rPr lang="en-US" sz="850" dirty="0">
+              <a:rPr lang="en-US" sz="800" dirty="0">
                 <a:solidFill>
                   <a:srgbClr val="1F2937"/>
                 </a:solidFill>
@@ -14275,9 +15598,9 @@
                 <a:ea typeface="Arial" pitchFamily="34" charset="-122"/>
                 <a:cs typeface="Arial" pitchFamily="34" charset="-120"/>
               </a:rPr>
-              <a:t>Lightweight stack (SQLite / FastAPI / React) → one VM, NIC cloud or an air-gapped NTRO server.</a:t>
-            </a:r>
-            <a:endParaRPr lang="en-US" sz="850" dirty="0"/>
+              <a:t>Deployment: SQLite / FastAPI / React on one VM, NIC cloud or an air-gapped NTRO server; GeoJSON fits existing GIS (QGIS, ArcGIS, Bhuvan).</a:t>
+            </a:r>
+            <a:endParaRPr lang="en-US" sz="800" dirty="0"/>
           </a:p>
           <a:p>
             <a:pPr marL="127000" indent="-127000">
@@ -14288,7 +15611,7 @@
               <a:buChar char="•"/>
             </a:pPr>
             <a:r>
-              <a:rPr lang="en-US" sz="850" dirty="0">
+              <a:rPr lang="en-US" sz="800" dirty="0">
                 <a:solidFill>
                   <a:srgbClr val="1F2937"/>
                 </a:solidFill>
@@ -14296,30 +15619,9 @@
                 <a:ea typeface="Arial" pitchFamily="34" charset="-122"/>
                 <a:cs typeface="Arial" pitchFamily="34" charset="-120"/>
               </a:rPr>
-              <a:t>Explainable rules let analysts audit and tune; ML improves as labelled incidents accumulate.</a:t>
-            </a:r>
-            <a:endParaRPr lang="en-US" sz="850" dirty="0"/>
-          </a:p>
-          <a:p>
-            <a:pPr marL="127000" indent="-127000">
-              <a:spcAft>
-                <a:spcPts val="200"/>
-              </a:spcAft>
-              <a:buSzPct val="100000"/>
-              <a:buChar char="•"/>
-            </a:pPr>
-            <a:r>
-              <a:rPr lang="en-US" sz="850" dirty="0">
-                <a:solidFill>
-                  <a:srgbClr val="1F2937"/>
-                </a:solidFill>
-                <a:latin typeface="Arial" pitchFamily="34" charset="0"/>
-                <a:ea typeface="Arial" pitchFamily="34" charset="-122"/>
-                <a:cs typeface="Arial" pitchFamily="34" charset="-120"/>
-              </a:rPr>
-              <a:t>Static demo already live on GitHub Pages.</a:t>
-            </a:r>
-            <a:endParaRPr lang="en-US" sz="850" dirty="0"/>
+              <a:t>Team &amp; timeline: 4-week pilot plan (live ingest → validation → alerting) is realistic with the current code base.</a:t>
+            </a:r>
+            <a:endParaRPr lang="en-US" sz="800" dirty="0"/>
           </a:p>
         </p:txBody>
       </p:sp>
@@ -14385,11 +15687,11 @@
         <p:spPr>
           <a:xfrm>
             <a:off x="3154680" y="1170432"/>
-            <a:ext cx="2788920" cy="2788920"/>
+            <a:ext cx="2788920" cy="2487168"/>
           </a:xfrm>
           <a:prstGeom prst="roundRect">
             <a:avLst>
-              <a:gd name="adj" fmla="val 1639"/>
+              <a:gd name="adj" fmla="val 1838"/>
             </a:avLst>
           </a:prstGeom>
           <a:solidFill>
@@ -14411,8 +15713,8 @@
         </p:nvSpPr>
         <p:spPr>
           <a:xfrm>
-            <a:off x="3246120" y="1243584"/>
-            <a:ext cx="2633472" cy="2670048"/>
+            <a:off x="3246120" y="1234440"/>
+            <a:ext cx="2633472" cy="2377440"/>
           </a:xfrm>
           <a:prstGeom prst="rect">
             <a:avLst/>
@@ -14432,7 +15734,7 @@
               <a:buChar char="•"/>
             </a:pPr>
             <a:r>
-              <a:rPr lang="en-US" sz="850" dirty="0">
+              <a:rPr lang="en-US" sz="800" dirty="0">
                 <a:solidFill>
                   <a:srgbClr val="1F2937"/>
                 </a:solidFill>
@@ -14440,9 +15742,9 @@
                 <a:ea typeface="Arial" pitchFamily="34" charset="-122"/>
                 <a:cs typeface="Arial" pitchFamily="34" charset="-120"/>
               </a:rPr>
-              <a:t>Incomplete OSM coverage of Indian industry (small kilns, sponge-iron units).</a:t>
-            </a:r>
-            <a:endParaRPr lang="en-US" sz="850" dirty="0"/>
+              <a:t>OSM under-maps Indian industry (small kilns, sponge-iron units) → missed context.</a:t>
+            </a:r>
+            <a:endParaRPr lang="en-US" sz="800" dirty="0"/>
           </a:p>
           <a:p>
             <a:pPr marL="127000" indent="-127000">
@@ -14453,7 +15755,7 @@
               <a:buChar char="•"/>
             </a:pPr>
             <a:r>
-              <a:rPr lang="en-US" sz="850" dirty="0">
+              <a:rPr lang="en-US" sz="800" dirty="0">
                 <a:solidFill>
                   <a:srgbClr val="1F2937"/>
                 </a:solidFill>
@@ -14461,9 +15763,9 @@
                 <a:ea typeface="Arial" pitchFamily="34" charset="-122"/>
                 <a:cs typeface="Arial" pitchFamily="34" charset="-120"/>
               </a:rPr>
-              <a:t>Cloud cover &amp; 375 m pixel offsets between passes.</a:t>
-            </a:r>
-            <a:endParaRPr lang="en-US" sz="850" dirty="0"/>
+              <a:t>Cloud cover &amp; 375 m pixel offsets between passes → gaps / jitter.</a:t>
+            </a:r>
+            <a:endParaRPr lang="en-US" sz="800" dirty="0"/>
           </a:p>
           <a:p>
             <a:pPr marL="127000" indent="-127000">
@@ -14474,7 +15776,7 @@
               <a:buChar char="•"/>
             </a:pPr>
             <a:r>
-              <a:rPr lang="en-US" sz="850" dirty="0">
+              <a:rPr lang="en-US" sz="800" dirty="0">
                 <a:solidFill>
                   <a:srgbClr val="1F2937"/>
                 </a:solidFill>
@@ -14482,9 +15784,9 @@
                 <a:ea typeface="Arial" pitchFamily="34" charset="-122"/>
                 <a:cs typeface="Arial" pitchFamily="34" charset="-120"/>
               </a:rPr>
-              <a:t>Few labelled real incidents for supervised ML; synthetic archive is cleaner than reality.</a:t>
-            </a:r>
-            <a:endParaRPr lang="en-US" sz="850" dirty="0"/>
+              <a:t>Few labelled real incidents; our archive is physically simulated → optimistic accuracy.</a:t>
+            </a:r>
+            <a:endParaRPr lang="en-US" sz="800" dirty="0"/>
           </a:p>
           <a:p>
             <a:pPr marL="127000" indent="-127000">
@@ -14495,7 +15797,7 @@
               <a:buChar char="•"/>
             </a:pPr>
             <a:r>
-              <a:rPr lang="en-US" sz="850" dirty="0">
+              <a:rPr lang="en-US" sz="800" dirty="0">
                 <a:solidFill>
                   <a:srgbClr val="1F2937"/>
                 </a:solidFill>
@@ -14503,9 +15805,9 @@
                 <a:ea typeface="Arial" pitchFamily="34" charset="-122"/>
                 <a:cs typeface="Arial" pitchFamily="34" charset="-120"/>
               </a:rPr>
-              <a:t>Overpass rate limits when scaling to national, multi-year archives.</a:t>
-            </a:r>
-            <a:endParaRPr lang="en-US" sz="850" dirty="0"/>
+              <a:t>False alarms from legitimate process changes (furnace restart, maintenance flaring).</a:t>
+            </a:r>
+            <a:endParaRPr lang="en-US" sz="800" dirty="0"/>
           </a:p>
           <a:p>
             <a:pPr marL="127000" indent="-127000">
@@ -14516,7 +15818,7 @@
               <a:buChar char="•"/>
             </a:pPr>
             <a:r>
-              <a:rPr lang="en-US" sz="850" dirty="0">
+              <a:rPr lang="en-US" sz="800" dirty="0">
                 <a:solidFill>
                   <a:srgbClr val="1F2937"/>
                 </a:solidFill>
@@ -14524,9 +15826,9 @@
                 <a:ea typeface="Arial" pitchFamily="34" charset="-122"/>
                 <a:cs typeface="Arial" pitchFamily="34" charset="-120"/>
               </a:rPr>
-              <a:t>False alarms from legitimate process changes (furnace restart, maintenance flaring).</a:t>
-            </a:r>
-            <a:endParaRPr lang="en-US" sz="850" dirty="0"/>
+              <a:t>Sub-pixel sources (small flares) below VIIRS threshold; Overpass rate limits at national, multi-year scale.</a:t>
+            </a:r>
+            <a:endParaRPr lang="en-US" sz="800" dirty="0"/>
           </a:p>
           <a:p>
             <a:pPr marL="127000" indent="-127000">
@@ -14537,7 +15839,7 @@
               <a:buChar char="•"/>
             </a:pPr>
             <a:r>
-              <a:rPr lang="en-US" sz="850" dirty="0">
+              <a:rPr lang="en-US" sz="800" dirty="0">
                 <a:solidFill>
                   <a:srgbClr val="1F2937"/>
                 </a:solidFill>
@@ -14545,9 +15847,9 @@
                 <a:ea typeface="Arial" pitchFamily="34" charset="-122"/>
                 <a:cs typeface="Arial" pitchFamily="34" charset="-120"/>
               </a:rPr>
-              <a:t>Sub-pixel sources (small flares) below VIIRS detection threshold.</a:t>
-            </a:r>
-            <a:endParaRPr lang="en-US" sz="850" dirty="0"/>
+              <a:t>Adoption: agencies need trust in an AI label before acting on it.</a:t>
+            </a:r>
+            <a:endParaRPr lang="en-US" sz="800" dirty="0"/>
           </a:p>
         </p:txBody>
       </p:sp>
@@ -14613,11 +15915,11 @@
         <p:spPr>
           <a:xfrm>
             <a:off x="6035040" y="1170432"/>
-            <a:ext cx="2788920" cy="2788920"/>
+            <a:ext cx="2788920" cy="2487168"/>
           </a:xfrm>
           <a:prstGeom prst="roundRect">
             <a:avLst>
-              <a:gd name="adj" fmla="val 1639"/>
+              <a:gd name="adj" fmla="val 1838"/>
             </a:avLst>
           </a:prstGeom>
           <a:solidFill>
@@ -14639,8 +15941,8 @@
         </p:nvSpPr>
         <p:spPr>
           <a:xfrm>
-            <a:off x="6126480" y="1243584"/>
-            <a:ext cx="2633472" cy="2670048"/>
+            <a:off x="6126480" y="1234440"/>
+            <a:ext cx="2633472" cy="2377440"/>
           </a:xfrm>
           <a:prstGeom prst="rect">
             <a:avLst/>
@@ -14660,7 +15962,7 @@
               <a:buChar char="•"/>
             </a:pPr>
             <a:r>
-              <a:rPr lang="en-US" sz="850" dirty="0">
+              <a:rPr lang="en-US" sz="800" dirty="0">
                 <a:solidFill>
                   <a:srgbClr val="1F2937"/>
                 </a:solidFill>
@@ -14668,9 +15970,9 @@
                 <a:ea typeface="Arial" pitchFamily="34" charset="-122"/>
                 <a:cs typeface="Arial" pitchFamily="34" charset="-120"/>
               </a:rPr>
-              <a:t>Persistence signature detects unregistered sources even without an OSM facility; curated facility list merged with OSM; Sentinel-2 chip verification.</a:t>
-            </a:r>
-            <a:endParaRPr lang="en-US" sz="850" dirty="0"/>
+              <a:t>Persistence fingerprint flags unregistered sources even with no OSM facility; curated facility list; Sentinel-2 chip verification.</a:t>
+            </a:r>
+            <a:endParaRPr lang="en-US" sz="800" dirty="0"/>
           </a:p>
           <a:p>
             <a:pPr marL="127000" indent="-127000">
@@ -14681,7 +15983,7 @@
               <a:buChar char="•"/>
             </a:pPr>
             <a:r>
-              <a:rPr lang="en-US" sz="850" dirty="0">
+              <a:rPr lang="en-US" sz="800" dirty="0">
                 <a:solidFill>
                   <a:srgbClr val="1F2937"/>
                 </a:solidFill>
@@ -14689,9 +15991,9 @@
                 <a:ea typeface="Arial" pitchFamily="34" charset="-122"/>
                 <a:cs typeface="Arial" pitchFamily="34" charset="-120"/>
               </a:rPr>
-              <a:t>90-day window + 4 passes/day from 3 VIIRS satellites; DBSCAN grouping absorbs pixel jitter.</a:t>
-            </a:r>
-            <a:endParaRPr lang="en-US" sz="850" dirty="0"/>
+              <a:t>90-day window, 4 passes/day from 3 VIIRS satellites; DBSCAN absorbs jitter; anomalies require an established baseline.</a:t>
+            </a:r>
+            <a:endParaRPr lang="en-US" sz="800" dirty="0"/>
           </a:p>
           <a:p>
             <a:pPr marL="127000" indent="-127000">
@@ -14702,7 +16004,7 @@
               <a:buChar char="•"/>
             </a:pPr>
             <a:r>
-              <a:rPr lang="en-US" sz="850" dirty="0">
+              <a:rPr lang="en-US" sz="800" dirty="0">
                 <a:solidFill>
                   <a:srgbClr val="1F2937"/>
                 </a:solidFill>
@@ -14710,9 +16012,9 @@
                 <a:ea typeface="Arial" pitchFamily="34" charset="-122"/>
                 <a:cs typeface="Arial" pitchFamily="34" charset="-120"/>
               </a:rPr>
-              <a:t>Rules as strong prior; validate on documented incidents (news / PESO / CPCB); analyst feedback loop → retrain.</a:t>
-            </a:r>
-            <a:endParaRPr lang="en-US" sz="850" dirty="0"/>
+              <a:t>Validate on documented incidents (PESO / CPCB / news); analyst confirm-or-override → labels retrain the model.</a:t>
+            </a:r>
+            <a:endParaRPr lang="en-US" sz="800" dirty="0"/>
           </a:p>
           <a:p>
             <a:pPr marL="127000" indent="-127000">
@@ -14723,7 +16025,7 @@
               <a:buChar char="•"/>
             </a:pPr>
             <a:r>
-              <a:rPr lang="en-US" sz="850" dirty="0">
+              <a:rPr lang="en-US" sz="800" dirty="0">
                 <a:solidFill>
                   <a:srgbClr val="1F2937"/>
                 </a:solidFill>
@@ -14731,9 +16033,9 @@
                 <a:ea typeface="Arial" pitchFamily="34" charset="-122"/>
                 <a:cs typeface="Arial" pitchFamily="34" charset="-120"/>
               </a:rPr>
-              <a:t>Around-cell queries + disk cache; self-hosted Overpass or ESA WorldCover raster for scale.</a:t>
-            </a:r>
-            <a:endParaRPr lang="en-US" sz="850" dirty="0"/>
+              <a:t>Baseline-relative thresholds + confidence on every alert; tunable per site class.</a:t>
+            </a:r>
+            <a:endParaRPr lang="en-US" sz="800" dirty="0"/>
           </a:p>
           <a:p>
             <a:pPr marL="127000" indent="-127000">
@@ -14744,7 +16046,7 @@
               <a:buChar char="•"/>
             </a:pPr>
             <a:r>
-              <a:rPr lang="en-US" sz="850" dirty="0">
+              <a:rPr lang="en-US" sz="800" dirty="0">
                 <a:solidFill>
                   <a:srgbClr val="1F2937"/>
                 </a:solidFill>
@@ -14752,9 +16054,9 @@
                 <a:ea typeface="Arial" pitchFamily="34" charset="-122"/>
                 <a:cs typeface="Arial" pitchFamily="34" charset="-120"/>
               </a:rPr>
-              <a:t>Baseline-relative thresholds + analyst override; confidence shown on every alert.</a:t>
-            </a:r>
-            <a:endParaRPr lang="en-US" sz="850" dirty="0"/>
+              <a:t>Add VIIRS Nightfire &amp; Landsat TIRS; self-hosted Overpass or ESA WorldCover raster for scale.</a:t>
+            </a:r>
+            <a:endParaRPr lang="en-US" sz="800" dirty="0"/>
           </a:p>
           <a:p>
             <a:pPr marL="127000" indent="-127000">
@@ -14765,7 +16067,7 @@
               <a:buChar char="•"/>
             </a:pPr>
             <a:r>
-              <a:rPr lang="en-US" sz="850" dirty="0">
+              <a:rPr lang="en-US" sz="800" dirty="0">
                 <a:solidFill>
                   <a:srgbClr val="1F2937"/>
                 </a:solidFill>
@@ -14773,9 +16075,9 @@
                 <a:ea typeface="Arial" pitchFamily="34" charset="-122"/>
                 <a:cs typeface="Arial" pitchFamily="34" charset="-120"/>
               </a:rPr>
-              <a:t>Add VIIRS Nightfire (VNF) for flare temperature; Landsat TIRS for small sources.</a:t>
-            </a:r>
-            <a:endParaRPr lang="en-US" sz="850" dirty="0"/>
+              <a:t>Explainability first: every decision shows its reasons — auditable, not a black box.</a:t>
+            </a:r>
+            <a:endParaRPr lang="en-US" sz="800" dirty="0"/>
           </a:p>
         </p:txBody>
       </p:sp>
@@ -14787,12 +16089,12 @@
         </p:nvSpPr>
         <p:spPr>
           <a:xfrm>
-            <a:off x="274320" y="4041648"/>
-            <a:ext cx="8595360" cy="731520"/>
+            <a:off x="274320" y="3749040"/>
+            <a:ext cx="8595360" cy="1024128"/>
           </a:xfrm>
           <a:prstGeom prst="roundRect">
             <a:avLst>
-              <a:gd name="adj" fmla="val 6250"/>
+              <a:gd name="adj" fmla="val 4464"/>
             </a:avLst>
           </a:prstGeom>
           <a:solidFill>
@@ -14814,8 +16116,8 @@
         </p:nvSpPr>
         <p:spPr>
           <a:xfrm>
-            <a:off x="411480" y="4078224"/>
-            <a:ext cx="1828800" cy="182880"/>
+            <a:off x="411480" y="3785616"/>
+            <a:ext cx="2743200" cy="182880"/>
           </a:xfrm>
           <a:prstGeom prst="rect">
             <a:avLst/>
@@ -14839,7 +16141,7 @@
                 <a:ea typeface="Arial" pitchFamily="34" charset="-122"/>
                 <a:cs typeface="Arial" pitchFamily="34" charset="-120"/>
               </a:rPr>
-              <a:t>VIABILITY</a:t>
+              <a:t>ROADMAP &amp; VIABILITY</a:t>
             </a:r>
             <a:endParaRPr lang="en-US" sz="850" dirty="0"/>
           </a:p>
@@ -14847,14 +16149,62 @@
       </p:sp>
       <p:sp>
         <p:nvSpPr>
-          <p:cNvPr id="20" name="Text 17"/>
+          <p:cNvPr id="20" name="Shape 17"/>
+          <p:cNvSpPr/>
+          <p:nvPr/>
+        </p:nvSpPr>
+        <p:spPr>
+          <a:xfrm>
+            <a:off x="411480" y="4041648"/>
+            <a:ext cx="146304" cy="146304"/>
+          </a:xfrm>
+          <a:prstGeom prst="ellipse">
+            <a:avLst/>
+          </a:prstGeom>
+          <a:solidFill>
+            <a:srgbClr val="2BB673"/>
+          </a:solidFill>
+          <a:ln w="12700">
+            <a:solidFill>
+              <a:srgbClr val="2BB673"/>
+            </a:solidFill>
+            <a:prstDash val="solid"/>
+          </a:ln>
+        </p:spPr>
+      </p:sp>
+      <p:sp>
+        <p:nvSpPr>
+          <p:cNvPr id="21" name="Shape 18"/>
+          <p:cNvSpPr/>
+          <p:nvPr/>
+        </p:nvSpPr>
+        <p:spPr>
+          <a:xfrm>
+            <a:off x="557784" y="4114800"/>
+            <a:ext cx="1984248" cy="0"/>
+          </a:xfrm>
+          <a:prstGeom prst="line">
+            <a:avLst/>
+          </a:prstGeom>
+          <a:noFill/>
+          <a:ln w="12700">
+            <a:solidFill>
+              <a:srgbClr val="475569"/>
+            </a:solidFill>
+            <a:prstDash val="solid"/>
+          </a:ln>
+        </p:spPr>
+      </p:sp>
+      <p:sp>
+        <p:nvSpPr>
+          <p:cNvPr id="22" name="Text 19"/>
           <p:cNvSpPr txBox="1"/>
           <p:nvPr/>
         </p:nvSpPr>
         <p:spPr>
           <a:xfrm>
-            <a:off x="411480" y="4261104"/>
-            <a:ext cx="1645920" cy="256032"/>
+            <a:off x="612648" y="3986784"/>
+            <a:ext cx="1828800" cy="164592"/>
           </a:xfrm>
           <a:prstGeom prst="rect">
             <a:avLst/>
@@ -14870,30 +16220,30 @@
               <a:buNone/>
             </a:pPr>
             <a:r>
-              <a:rPr lang="en-US" sz="1400" b="1" dirty="0">
-                <a:solidFill>
-                  <a:srgbClr val="FB923C"/>
+              <a:rPr lang="en-US" sz="700" b="1" dirty="0">
+                <a:solidFill>
+                  <a:srgbClr val="2BB673"/>
                 </a:solidFill>
                 <a:latin typeface="Arial" pitchFamily="34" charset="0"/>
                 <a:ea typeface="Arial" pitchFamily="34" charset="-122"/>
                 <a:cs typeface="Arial" pitchFamily="34" charset="-120"/>
               </a:rPr>
-              <a:t>₹ 0</a:t>
-            </a:r>
-            <a:endParaRPr lang="en-US" sz="1400" dirty="0"/>
+              <a:t>✔ Done</a:t>
+            </a:r>
+            <a:endParaRPr lang="en-US" sz="700" dirty="0"/>
           </a:p>
         </p:txBody>
       </p:sp>
       <p:sp>
         <p:nvSpPr>
-          <p:cNvPr id="21" name="Text 18"/>
+          <p:cNvPr id="23" name="Text 20"/>
           <p:cNvSpPr txBox="1"/>
           <p:nvPr/>
         </p:nvSpPr>
         <p:spPr>
           <a:xfrm>
-            <a:off x="411480" y="4517136"/>
-            <a:ext cx="1600200" cy="237744"/>
+            <a:off x="411480" y="4224528"/>
+            <a:ext cx="2011680" cy="164592"/>
           </a:xfrm>
           <a:prstGeom prst="rect">
             <a:avLst/>
@@ -14909,30 +16259,30 @@
               <a:buNone/>
             </a:pPr>
             <a:r>
-              <a:rPr lang="en-US" sz="700" dirty="0">
-                <a:solidFill>
-                  <a:srgbClr val="E5E7EB"/>
+              <a:rPr lang="en-US" sz="800" b="1" dirty="0">
+                <a:solidFill>
+                  <a:srgbClr val="FFFFFF"/>
                 </a:solidFill>
                 <a:latin typeface="Arial" pitchFamily="34" charset="0"/>
                 <a:ea typeface="Arial" pitchFamily="34" charset="-122"/>
                 <a:cs typeface="Arial" pitchFamily="34" charset="-120"/>
               </a:rPr>
-              <a:t>data licensing — all open sources</a:t>
-            </a:r>
-            <a:endParaRPr lang="en-US" sz="700" dirty="0"/>
+              <a:t>Idea + working prototype</a:t>
+            </a:r>
+            <a:endParaRPr lang="en-US" sz="800" dirty="0"/>
           </a:p>
         </p:txBody>
       </p:sp>
       <p:sp>
         <p:nvSpPr>
-          <p:cNvPr id="22" name="Text 19"/>
+          <p:cNvPr id="24" name="Text 21"/>
           <p:cNvSpPr txBox="1"/>
           <p:nvPr/>
         </p:nvSpPr>
         <p:spPr>
           <a:xfrm>
-            <a:off x="2112264" y="4261104"/>
-            <a:ext cx="1645920" cy="256032"/>
+            <a:off x="411480" y="4389120"/>
+            <a:ext cx="2011680" cy="365760"/>
           </a:xfrm>
           <a:prstGeom prst="rect">
             <a:avLst/>
@@ -14948,30 +16298,78 @@
               <a:buNone/>
             </a:pPr>
             <a:r>
-              <a:rPr lang="en-US" sz="1400" b="1" dirty="0">
-                <a:solidFill>
-                  <a:srgbClr val="FB923C"/>
+              <a:rPr lang="en-US" sz="650" dirty="0">
+                <a:solidFill>
+                  <a:srgbClr val="CBD5E1"/>
                 </a:solidFill>
                 <a:latin typeface="Arial" pitchFamily="34" charset="0"/>
                 <a:ea typeface="Arial" pitchFamily="34" charset="-122"/>
                 <a:cs typeface="Arial" pitchFamily="34" charset="-120"/>
               </a:rPr>
-              <a:t>1 VM</a:t>
-            </a:r>
-            <a:endParaRPr lang="en-US" sz="1400" dirty="0"/>
+              <a:t>pipeline, 6-class AI, alerts, GIS dashboard, public demo</a:t>
+            </a:r>
+            <a:endParaRPr lang="en-US" sz="650" dirty="0"/>
           </a:p>
         </p:txBody>
       </p:sp>
       <p:sp>
         <p:nvSpPr>
-          <p:cNvPr id="23" name="Text 20"/>
+          <p:cNvPr id="25" name="Shape 22"/>
+          <p:cNvSpPr/>
+          <p:nvPr/>
+        </p:nvSpPr>
+        <p:spPr>
+          <a:xfrm>
+            <a:off x="2542032" y="4041648"/>
+            <a:ext cx="146304" cy="146304"/>
+          </a:xfrm>
+          <a:prstGeom prst="ellipse">
+            <a:avLst/>
+          </a:prstGeom>
+          <a:solidFill>
+            <a:srgbClr val="FB923C"/>
+          </a:solidFill>
+          <a:ln w="12700">
+            <a:solidFill>
+              <a:srgbClr val="FB923C"/>
+            </a:solidFill>
+            <a:prstDash val="solid"/>
+          </a:ln>
+        </p:spPr>
+      </p:sp>
+      <p:sp>
+        <p:nvSpPr>
+          <p:cNvPr id="26" name="Shape 23"/>
+          <p:cNvSpPr/>
+          <p:nvPr/>
+        </p:nvSpPr>
+        <p:spPr>
+          <a:xfrm>
+            <a:off x="2688336" y="4114800"/>
+            <a:ext cx="1984248" cy="0"/>
+          </a:xfrm>
+          <a:prstGeom prst="line">
+            <a:avLst/>
+          </a:prstGeom>
+          <a:noFill/>
+          <a:ln w="12700">
+            <a:solidFill>
+              <a:srgbClr val="475569"/>
+            </a:solidFill>
+            <a:prstDash val="solid"/>
+          </a:ln>
+        </p:spPr>
+      </p:sp>
+      <p:sp>
+        <p:nvSpPr>
+          <p:cNvPr id="27" name="Text 24"/>
           <p:cNvSpPr txBox="1"/>
           <p:nvPr/>
         </p:nvSpPr>
         <p:spPr>
           <a:xfrm>
-            <a:off x="2112264" y="4517136"/>
-            <a:ext cx="1600200" cy="237744"/>
+            <a:off x="2743200" y="3986784"/>
+            <a:ext cx="1828800" cy="164592"/>
           </a:xfrm>
           <a:prstGeom prst="rect">
             <a:avLst/>
@@ -14987,15 +16385,15 @@
               <a:buNone/>
             </a:pPr>
             <a:r>
-              <a:rPr lang="en-US" sz="700" dirty="0">
-                <a:solidFill>
-                  <a:srgbClr val="E5E7EB"/>
+              <a:rPr lang="en-US" sz="700" b="1" dirty="0">
+                <a:solidFill>
+                  <a:srgbClr val="FB923C"/>
                 </a:solidFill>
                 <a:latin typeface="Arial" pitchFamily="34" charset="0"/>
                 <a:ea typeface="Arial" pitchFamily="34" charset="-122"/>
                 <a:cs typeface="Arial" pitchFamily="34" charset="-120"/>
               </a:rPr>
-              <a:t>or air-gapped server; SQLite → PostGIS to scale</a:t>
+              <a:t>Next 4 weeks</a:t>
             </a:r>
             <a:endParaRPr lang="en-US" sz="700" dirty="0"/>
           </a:p>
@@ -15003,14 +16401,14 @@
       </p:sp>
       <p:sp>
         <p:nvSpPr>
-          <p:cNvPr id="24" name="Text 21"/>
+          <p:cNvPr id="28" name="Text 25"/>
           <p:cNvSpPr txBox="1"/>
           <p:nvPr/>
         </p:nvSpPr>
         <p:spPr>
           <a:xfrm>
-            <a:off x="3813048" y="4261104"/>
-            <a:ext cx="1645920" cy="256032"/>
+            <a:off x="2542032" y="4224528"/>
+            <a:ext cx="2011680" cy="164592"/>
           </a:xfrm>
           <a:prstGeom prst="rect">
             <a:avLst/>
@@ -15026,30 +16424,30 @@
               <a:buNone/>
             </a:pPr>
             <a:r>
-              <a:rPr lang="en-US" sz="1400" b="1" dirty="0">
-                <a:solidFill>
-                  <a:srgbClr val="FB923C"/>
+              <a:rPr lang="en-US" sz="800" b="1" dirty="0">
+                <a:solidFill>
+                  <a:srgbClr val="FFFFFF"/>
                 </a:solidFill>
                 <a:latin typeface="Arial" pitchFamily="34" charset="0"/>
                 <a:ea typeface="Arial" pitchFamily="34" charset="-122"/>
                 <a:cs typeface="Arial" pitchFamily="34" charset="-120"/>
               </a:rPr>
-              <a:t>~7 s</a:t>
-            </a:r>
-            <a:endParaRPr lang="en-US" sz="1400" dirty="0"/>
+              <a:t>Pilot with live FIRMS</a:t>
+            </a:r>
+            <a:endParaRPr lang="en-US" sz="800" dirty="0"/>
           </a:p>
         </p:txBody>
       </p:sp>
       <p:sp>
         <p:nvSpPr>
-          <p:cNvPr id="25" name="Text 22"/>
+          <p:cNvPr id="29" name="Text 26"/>
           <p:cNvSpPr txBox="1"/>
           <p:nvPr/>
         </p:nvSpPr>
         <p:spPr>
           <a:xfrm>
-            <a:off x="3813048" y="4517136"/>
-            <a:ext cx="1600200" cy="237744"/>
+            <a:off x="2542032" y="4389120"/>
+            <a:ext cx="2011680" cy="365760"/>
           </a:xfrm>
           <a:prstGeom prst="rect">
             <a:avLst/>
@@ -15065,30 +16463,78 @@
               <a:buNone/>
             </a:pPr>
             <a:r>
-              <a:rPr lang="en-US" sz="700" dirty="0">
-                <a:solidFill>
-                  <a:srgbClr val="E5E7EB"/>
+              <a:rPr lang="en-US" sz="650" dirty="0">
+                <a:solidFill>
+                  <a:srgbClr val="CBD5E1"/>
                 </a:solidFill>
                 <a:latin typeface="Arial" pitchFamily="34" charset="0"/>
                 <a:ea typeface="Arial" pitchFamily="34" charset="-122"/>
                 <a:cs typeface="Arial" pitchFamily="34" charset="-120"/>
               </a:rPr>
-              <a:t>to classify a 90-day national archive</a:t>
-            </a:r>
-            <a:endParaRPr lang="en-US" sz="700" dirty="0"/>
+              <a:t>India-wide ingest, validation against real incidents, analyst loop</a:t>
+            </a:r>
+            <a:endParaRPr lang="en-US" sz="650" dirty="0"/>
           </a:p>
         </p:txBody>
       </p:sp>
       <p:sp>
         <p:nvSpPr>
-          <p:cNvPr id="26" name="Text 23"/>
+          <p:cNvPr id="30" name="Shape 27"/>
+          <p:cNvSpPr/>
+          <p:nvPr/>
+        </p:nvSpPr>
+        <p:spPr>
+          <a:xfrm>
+            <a:off x="4672584" y="4041648"/>
+            <a:ext cx="146304" cy="146304"/>
+          </a:xfrm>
+          <a:prstGeom prst="ellipse">
+            <a:avLst/>
+          </a:prstGeom>
+          <a:solidFill>
+            <a:srgbClr val="38BDF8"/>
+          </a:solidFill>
+          <a:ln w="12700">
+            <a:solidFill>
+              <a:srgbClr val="38BDF8"/>
+            </a:solidFill>
+            <a:prstDash val="solid"/>
+          </a:ln>
+        </p:spPr>
+      </p:sp>
+      <p:sp>
+        <p:nvSpPr>
+          <p:cNvPr id="31" name="Shape 28"/>
+          <p:cNvSpPr/>
+          <p:nvPr/>
+        </p:nvSpPr>
+        <p:spPr>
+          <a:xfrm>
+            <a:off x="4818888" y="4114800"/>
+            <a:ext cx="1984248" cy="0"/>
+          </a:xfrm>
+          <a:prstGeom prst="line">
+            <a:avLst/>
+          </a:prstGeom>
+          <a:noFill/>
+          <a:ln w="12700">
+            <a:solidFill>
+              <a:srgbClr val="475569"/>
+            </a:solidFill>
+            <a:prstDash val="solid"/>
+          </a:ln>
+        </p:spPr>
+      </p:sp>
+      <p:sp>
+        <p:nvSpPr>
+          <p:cNvPr id="32" name="Text 29"/>
           <p:cNvSpPr txBox="1"/>
           <p:nvPr/>
         </p:nvSpPr>
         <p:spPr>
           <a:xfrm>
-            <a:off x="5513832" y="4261104"/>
-            <a:ext cx="1645920" cy="256032"/>
+            <a:off x="4873752" y="3986784"/>
+            <a:ext cx="1828800" cy="164592"/>
           </a:xfrm>
           <a:prstGeom prst="rect">
             <a:avLst/>
@@ -15104,30 +16550,30 @@
               <a:buNone/>
             </a:pPr>
             <a:r>
-              <a:rPr lang="en-US" sz="1400" b="1" dirty="0">
-                <a:solidFill>
-                  <a:srgbClr val="FB923C"/>
+              <a:rPr lang="en-US" sz="700" b="1" dirty="0">
+                <a:solidFill>
+                  <a:srgbClr val="38BDF8"/>
                 </a:solidFill>
                 <a:latin typeface="Arial" pitchFamily="34" charset="0"/>
                 <a:ea typeface="Arial" pitchFamily="34" charset="-122"/>
                 <a:cs typeface="Arial" pitchFamily="34" charset="-120"/>
               </a:rPr>
-              <a:t>1 env var</a:t>
-            </a:r>
-            <a:endParaRPr lang="en-US" sz="1400" dirty="0"/>
+              <a:t>Grand finale</a:t>
+            </a:r>
+            <a:endParaRPr lang="en-US" sz="700" dirty="0"/>
           </a:p>
         </p:txBody>
       </p:sp>
       <p:sp>
         <p:nvSpPr>
-          <p:cNvPr id="27" name="Text 24"/>
+          <p:cNvPr id="33" name="Text 30"/>
           <p:cNvSpPr txBox="1"/>
           <p:nvPr/>
         </p:nvSpPr>
         <p:spPr>
           <a:xfrm>
-            <a:off x="5513832" y="4517136"/>
-            <a:ext cx="1600200" cy="237744"/>
+            <a:off x="4672584" y="4224528"/>
+            <a:ext cx="2011680" cy="164592"/>
           </a:xfrm>
           <a:prstGeom prst="rect">
             <a:avLst/>
@@ -15143,30 +16589,30 @@
               <a:buNone/>
             </a:pPr>
             <a:r>
-              <a:rPr lang="en-US" sz="700" dirty="0">
-                <a:solidFill>
-                  <a:srgbClr val="E5E7EB"/>
+              <a:rPr lang="en-US" sz="800" b="1" dirty="0">
+                <a:solidFill>
+                  <a:srgbClr val="FFFFFF"/>
                 </a:solidFill>
                 <a:latin typeface="Arial" pitchFamily="34" charset="0"/>
                 <a:ea typeface="Arial" pitchFamily="34" charset="-122"/>
                 <a:cs typeface="Arial" pitchFamily="34" charset="-120"/>
               </a:rPr>
-              <a:t>switches offline archive → live NASA FIRMS</a:t>
-            </a:r>
-            <a:endParaRPr lang="en-US" sz="700" dirty="0"/>
+              <a:t>Scale &amp; harden</a:t>
+            </a:r>
+            <a:endParaRPr lang="en-US" sz="800" dirty="0"/>
           </a:p>
         </p:txBody>
       </p:sp>
       <p:sp>
         <p:nvSpPr>
-          <p:cNvPr id="28" name="Text 25"/>
+          <p:cNvPr id="34" name="Text 31"/>
           <p:cNvSpPr txBox="1"/>
           <p:nvPr/>
         </p:nvSpPr>
         <p:spPr>
           <a:xfrm>
-            <a:off x="7214616" y="4261104"/>
-            <a:ext cx="1645920" cy="256032"/>
+            <a:off x="4672584" y="4389120"/>
+            <a:ext cx="2011680" cy="365760"/>
           </a:xfrm>
           <a:prstGeom prst="rect">
             <a:avLst/>
@@ -15182,30 +16628,55 @@
               <a:buNone/>
             </a:pPr>
             <a:r>
-              <a:rPr lang="en-US" sz="1400" b="1" dirty="0">
-                <a:solidFill>
-                  <a:srgbClr val="FB923C"/>
+              <a:rPr lang="en-US" sz="650" dirty="0">
+                <a:solidFill>
+                  <a:srgbClr val="CBD5E1"/>
                 </a:solidFill>
                 <a:latin typeface="Arial" pitchFamily="34" charset="0"/>
                 <a:ea typeface="Arial" pitchFamily="34" charset="-122"/>
                 <a:cs typeface="Arial" pitchFamily="34" charset="-120"/>
               </a:rPr>
-              <a:t>Open</a:t>
-            </a:r>
-            <a:endParaRPr lang="en-US" sz="1400" dirty="0"/>
+              <a:t>PostGIS + tiles, SMS / webhook alerts, Sentinel-2 chip CNN, WorldCover</a:t>
+            </a:r>
+            <a:endParaRPr lang="en-US" sz="650" dirty="0"/>
           </a:p>
         </p:txBody>
       </p:sp>
       <p:sp>
         <p:nvSpPr>
-          <p:cNvPr id="29" name="Text 26"/>
+          <p:cNvPr id="35" name="Shape 32"/>
+          <p:cNvSpPr/>
+          <p:nvPr/>
+        </p:nvSpPr>
+        <p:spPr>
+          <a:xfrm>
+            <a:off x="6803136" y="4041648"/>
+            <a:ext cx="146304" cy="146304"/>
+          </a:xfrm>
+          <a:prstGeom prst="ellipse">
+            <a:avLst/>
+          </a:prstGeom>
+          <a:solidFill>
+            <a:srgbClr val="C4B5FD"/>
+          </a:solidFill>
+          <a:ln w="12700">
+            <a:solidFill>
+              <a:srgbClr val="C4B5FD"/>
+            </a:solidFill>
+            <a:prstDash val="solid"/>
+          </a:ln>
+        </p:spPr>
+      </p:sp>
+      <p:sp>
+        <p:nvSpPr>
+          <p:cNvPr id="36" name="Text 33"/>
           <p:cNvSpPr txBox="1"/>
           <p:nvPr/>
         </p:nvSpPr>
         <p:spPr>
           <a:xfrm>
-            <a:off x="7214616" y="4517136"/>
-            <a:ext cx="1600200" cy="237744"/>
+            <a:off x="7004304" y="3986784"/>
+            <a:ext cx="1828800" cy="164592"/>
           </a:xfrm>
           <a:prstGeom prst="rect">
             <a:avLst/>
@@ -15221,17 +16692,134 @@
               <a:buNone/>
             </a:pPr>
             <a:r>
-              <a:rPr lang="en-US" sz="700" dirty="0">
-                <a:solidFill>
-                  <a:srgbClr val="E5E7EB"/>
+              <a:rPr lang="en-US" sz="700" b="1" dirty="0">
+                <a:solidFill>
+                  <a:srgbClr val="C4B5FD"/>
                 </a:solidFill>
                 <a:latin typeface="Arial" pitchFamily="34" charset="0"/>
                 <a:ea typeface="Arial" pitchFamily="34" charset="-122"/>
                 <a:cs typeface="Arial" pitchFamily="34" charset="-120"/>
               </a:rPr>
-              <a:t>GeoJSON / API — plugs into any GIS NTRO runs</a:t>
+              <a:t>Deployment</a:t>
             </a:r>
             <a:endParaRPr lang="en-US" sz="700" dirty="0"/>
+          </a:p>
+        </p:txBody>
+      </p:sp>
+      <p:sp>
+        <p:nvSpPr>
+          <p:cNvPr id="37" name="Text 34"/>
+          <p:cNvSpPr txBox="1"/>
+          <p:nvPr/>
+        </p:nvSpPr>
+        <p:spPr>
+          <a:xfrm>
+            <a:off x="6803136" y="4224528"/>
+            <a:ext cx="2011680" cy="164592"/>
+          </a:xfrm>
+          <a:prstGeom prst="rect">
+            <a:avLst/>
+          </a:prstGeom>
+          <a:noFill/>
+          <a:ln/>
+        </p:spPr>
+        <p:txBody>
+          <a:bodyPr wrap="square" lIns="0" tIns="0" rIns="0" bIns="0" rtlCol="0" anchor="t"/>
+          <a:lstStyle/>
+          <a:p>
+            <a:pPr algn="l" indent="0" marL="0">
+              <a:buNone/>
+            </a:pPr>
+            <a:r>
+              <a:rPr lang="en-US" sz="800" b="1" dirty="0">
+                <a:solidFill>
+                  <a:srgbClr val="FFFFFF"/>
+                </a:solidFill>
+                <a:latin typeface="Arial" pitchFamily="34" charset="0"/>
+                <a:ea typeface="Arial" pitchFamily="34" charset="-122"/>
+                <a:cs typeface="Arial" pitchFamily="34" charset="-120"/>
+              </a:rPr>
+              <a:t>Agency integration</a:t>
+            </a:r>
+            <a:endParaRPr lang="en-US" sz="800" dirty="0"/>
+          </a:p>
+        </p:txBody>
+      </p:sp>
+      <p:sp>
+        <p:nvSpPr>
+          <p:cNvPr id="38" name="Text 35"/>
+          <p:cNvSpPr txBox="1"/>
+          <p:nvPr/>
+        </p:nvSpPr>
+        <p:spPr>
+          <a:xfrm>
+            <a:off x="6803136" y="4389120"/>
+            <a:ext cx="2011680" cy="365760"/>
+          </a:xfrm>
+          <a:prstGeom prst="rect">
+            <a:avLst/>
+          </a:prstGeom>
+          <a:noFill/>
+          <a:ln/>
+        </p:spPr>
+        <p:txBody>
+          <a:bodyPr wrap="square" lIns="0" tIns="0" rIns="0" bIns="0" rtlCol="0" anchor="t"/>
+          <a:lstStyle/>
+          <a:p>
+            <a:pPr algn="l" indent="0" marL="0">
+              <a:buNone/>
+            </a:pPr>
+            <a:r>
+              <a:rPr lang="en-US" sz="650" dirty="0">
+                <a:solidFill>
+                  <a:srgbClr val="CBD5E1"/>
+                </a:solidFill>
+                <a:latin typeface="Arial" pitchFamily="34" charset="0"/>
+                <a:ea typeface="Arial" pitchFamily="34" charset="-122"/>
+                <a:cs typeface="Arial" pitchFamily="34" charset="-120"/>
+              </a:rPr>
+              <a:t>Bhuvan / NDEM layers, SDMA control-room pilot, SOP for alerts</a:t>
+            </a:r>
+            <a:endParaRPr lang="en-US" sz="650" dirty="0"/>
+          </a:p>
+        </p:txBody>
+      </p:sp>
+      <p:sp>
+        <p:nvSpPr>
+          <p:cNvPr id="39" name="Text 36"/>
+          <p:cNvSpPr txBox="1"/>
+          <p:nvPr/>
+        </p:nvSpPr>
+        <p:spPr>
+          <a:xfrm>
+            <a:off x="411480" y="4626864"/>
+            <a:ext cx="8321040" cy="146304"/>
+          </a:xfrm>
+          <a:prstGeom prst="rect">
+            <a:avLst/>
+          </a:prstGeom>
+          <a:noFill/>
+          <a:ln/>
+        </p:spPr>
+        <p:txBody>
+          <a:bodyPr wrap="square" lIns="0" tIns="0" rIns="0" bIns="0" rtlCol="0" anchor="t"/>
+          <a:lstStyle/>
+          <a:p>
+            <a:pPr algn="l" indent="0" marL="0">
+              <a:buNone/>
+            </a:pPr>
+            <a:r>
+              <a:rPr lang="en-US" sz="650" i="1" dirty="0">
+                <a:solidFill>
+                  <a:srgbClr val="FBBF24"/>
+                </a:solidFill>
+                <a:latin typeface="Arial" pitchFamily="34" charset="0"/>
+                <a:ea typeface="Arial" pitchFamily="34" charset="-122"/>
+                <a:cs typeface="Arial" pitchFamily="34" charset="-120"/>
+              </a:rPr>
+              <a:t>Cost to run: ₹0 data · one VM (≈ ₹3–5 k / month) · open-source stack — sustainable for any state or central agency.</a:t>
+            </a:r>
+            <a:endParaRPr lang="en-US" sz="650" dirty="0"/>
           </a:p>
         </p:txBody>
       </p:sp>
@@ -15506,7 +17094,7 @@
         <p:spPr>
           <a:xfrm>
             <a:off x="274320" y="896112"/>
-            <a:ext cx="4206240" cy="256032"/>
+            <a:ext cx="4937760" cy="256032"/>
           </a:xfrm>
           <a:prstGeom prst="rect">
             <a:avLst/>
@@ -15550,149 +17138,1077 @@
           </a:p>
         </p:txBody>
       </p:sp>
-      <p:sp>
-        <p:nvSpPr>
-          <p:cNvPr id="10" name="Shape 7"/>
-          <p:cNvSpPr/>
-          <p:nvPr/>
-        </p:nvSpPr>
-        <p:spPr>
-          <a:xfrm>
-            <a:off x="274320" y="1170432"/>
-            <a:ext cx="4206240" cy="1737360"/>
-          </a:xfrm>
-          <a:prstGeom prst="roundRect">
-            <a:avLst>
-              <a:gd name="adj" fmla="val 2632"/>
-            </a:avLst>
-          </a:prstGeom>
-          <a:solidFill>
-            <a:srgbClr val="FFFFFF"/>
-          </a:solidFill>
-          <a:ln w="9525">
-            <a:solidFill>
-              <a:srgbClr val="D1D5DB"/>
-            </a:solidFill>
-            <a:prstDash val="solid"/>
-          </a:ln>
-        </p:spPr>
-      </p:sp>
-      <p:sp>
-        <p:nvSpPr>
-          <p:cNvPr id="11" name="Text 8"/>
+      <p:graphicFrame>
+        <p:nvGraphicFramePr>
+          <p:cNvPr id="8" name="Table 0"/>
+          <p:cNvGraphicFramePr>
+            <a:graphicFrameLocks noGrp="1"/>
+          </p:cNvGraphicFramePr>
+          <p:nvPr>
+            <p:extLst>
+              <p:ext uri="{D42A27DB-BD31-4B8C-83A1-F6EECF244321}">
+                <p14:modId xmlns:p14="http://schemas.microsoft.com/office/powerpoint/2010/main" val="1579011935"/>
+              </p:ext>
+            </p:extLst>
+          </p:nvPr>
+        </p:nvGraphicFramePr>
+        <p:xfrm>
+          <a:off x="274320" y="1170432"/>
+          <a:ext cx="4937760" cy="914400"/>
+        </p:xfrm>
+        <a:graphic>
+          <a:graphicData uri="http://schemas.openxmlformats.org/drawingml/2006/table">
+            <a:tbl>
+              <a:tblPr/>
+              <a:tblGrid>
+                <a:gridCol w="1234440"/>
+                <a:gridCol w="1965960"/>
+                <a:gridCol w="1737360"/>
+              </a:tblGrid>
+              <a:tr h="329184">
+                <a:tc>
+                  <a:txBody>
+                    <a:bodyPr/>
+                    <a:lstStyle/>
+                    <a:p>
+                      <a:pPr indent="0" marL="0">
+                        <a:buNone/>
+                      </a:pPr>
+                      <a:r>
+                        <a:rPr lang="en-US" sz="750" b="1" dirty="0">
+                          <a:solidFill>
+                            <a:srgbClr val="FFFFFF"/>
+                          </a:solidFill>
+                          <a:latin typeface="Arial" pitchFamily="34" charset="0"/>
+                          <a:ea typeface="Arial" pitchFamily="34" charset="-122"/>
+                          <a:cs typeface="Arial" pitchFamily="34" charset="-120"/>
+                        </a:rPr>
+                        <a:t>Who</a:t>
+                      </a:r>
+                      <a:endParaRPr lang="en-US" sz="750" dirty="0">
+                        <a:latin typeface="Arial" charset="0"/>
+                        <a:ea typeface="Arial" charset="0"/>
+                        <a:cs typeface="Arial" charset="0"/>
+                      </a:endParaRPr>
+                    </a:p>
+                  </a:txBody>
+                  <a:tcPr marL="27432" marR="27432" marT="27432" marB="27432">
+                    <a:lnL w="6350" cap="flat" cmpd="sng" algn="ctr">
+                      <a:solidFill>
+                        <a:srgbClr val="D1D5DB"/>
+                      </a:solidFill>
+                      <a:prstDash val="solid"/>
+                      <a:round/>
+                      <a:headEnd type="none" w="med" len="med"/>
+                      <a:tailEnd type="none" w="med" len="med"/>
+                    </a:lnL>
+                    <a:lnR w="6350" cap="flat" cmpd="sng" algn="ctr">
+                      <a:solidFill>
+                        <a:srgbClr val="D1D5DB"/>
+                      </a:solidFill>
+                      <a:prstDash val="solid"/>
+                      <a:round/>
+                      <a:headEnd type="none" w="med" len="med"/>
+                      <a:tailEnd type="none" w="med" len="med"/>
+                    </a:lnR>
+                    <a:lnT w="6350" cap="flat" cmpd="sng" algn="ctr">
+                      <a:solidFill>
+                        <a:srgbClr val="D1D5DB"/>
+                      </a:solidFill>
+                      <a:prstDash val="solid"/>
+                      <a:round/>
+                      <a:headEnd type="none" w="med" len="med"/>
+                      <a:tailEnd type="none" w="med" len="med"/>
+                    </a:lnT>
+                    <a:lnB w="6350" cap="flat" cmpd="sng" algn="ctr">
+                      <a:solidFill>
+                        <a:srgbClr val="D1D5DB"/>
+                      </a:solidFill>
+                      <a:prstDash val="solid"/>
+                      <a:round/>
+                      <a:headEnd type="none" w="med" len="med"/>
+                      <a:tailEnd type="none" w="med" len="med"/>
+                    </a:lnB>
+                    <a:solidFill>
+                      <a:srgbClr val="0F172A"/>
+                    </a:solidFill>
+                  </a:tcPr>
+                </a:tc>
+                <a:tc>
+                  <a:txBody>
+                    <a:bodyPr/>
+                    <a:lstStyle/>
+                    <a:p>
+                      <a:pPr indent="0" marL="0">
+                        <a:buNone/>
+                      </a:pPr>
+                      <a:r>
+                        <a:rPr lang="en-US" sz="750" b="1" dirty="0">
+                          <a:solidFill>
+                            <a:srgbClr val="FFFFFF"/>
+                          </a:solidFill>
+                          <a:latin typeface="Arial" pitchFamily="34" charset="0"/>
+                          <a:ea typeface="Arial" pitchFamily="34" charset="-122"/>
+                          <a:cs typeface="Arial" pitchFamily="34" charset="-120"/>
+                        </a:rPr>
+                        <a:t>What they get</a:t>
+                      </a:r>
+                      <a:endParaRPr lang="en-US" sz="750" dirty="0">
+                        <a:latin typeface="Arial" charset="0"/>
+                        <a:ea typeface="Arial" charset="0"/>
+                        <a:cs typeface="Arial" charset="0"/>
+                      </a:endParaRPr>
+                    </a:p>
+                  </a:txBody>
+                  <a:tcPr marL="27432" marR="27432" marT="27432" marB="27432">
+                    <a:lnL w="6350" cap="flat" cmpd="sng" algn="ctr">
+                      <a:solidFill>
+                        <a:srgbClr val="D1D5DB"/>
+                      </a:solidFill>
+                      <a:prstDash val="solid"/>
+                      <a:round/>
+                      <a:headEnd type="none" w="med" len="med"/>
+                      <a:tailEnd type="none" w="med" len="med"/>
+                    </a:lnL>
+                    <a:lnR w="6350" cap="flat" cmpd="sng" algn="ctr">
+                      <a:solidFill>
+                        <a:srgbClr val="D1D5DB"/>
+                      </a:solidFill>
+                      <a:prstDash val="solid"/>
+                      <a:round/>
+                      <a:headEnd type="none" w="med" len="med"/>
+                      <a:tailEnd type="none" w="med" len="med"/>
+                    </a:lnR>
+                    <a:lnT w="6350" cap="flat" cmpd="sng" algn="ctr">
+                      <a:solidFill>
+                        <a:srgbClr val="D1D5DB"/>
+                      </a:solidFill>
+                      <a:prstDash val="solid"/>
+                      <a:round/>
+                      <a:headEnd type="none" w="med" len="med"/>
+                      <a:tailEnd type="none" w="med" len="med"/>
+                    </a:lnT>
+                    <a:lnB w="6350" cap="flat" cmpd="sng" algn="ctr">
+                      <a:solidFill>
+                        <a:srgbClr val="D1D5DB"/>
+                      </a:solidFill>
+                      <a:prstDash val="solid"/>
+                      <a:round/>
+                      <a:headEnd type="none" w="med" len="med"/>
+                      <a:tailEnd type="none" w="med" len="med"/>
+                    </a:lnB>
+                    <a:solidFill>
+                      <a:srgbClr val="0F172A"/>
+                    </a:solidFill>
+                  </a:tcPr>
+                </a:tc>
+                <a:tc>
+                  <a:txBody>
+                    <a:bodyPr/>
+                    <a:lstStyle/>
+                    <a:p>
+                      <a:pPr indent="0" marL="0">
+                        <a:buNone/>
+                      </a:pPr>
+                      <a:r>
+                        <a:rPr lang="en-US" sz="750" b="1" dirty="0">
+                          <a:solidFill>
+                            <a:srgbClr val="FFFFFF"/>
+                          </a:solidFill>
+                          <a:latin typeface="Arial" pitchFamily="34" charset="0"/>
+                          <a:ea typeface="Arial" pitchFamily="34" charset="-122"/>
+                          <a:cs typeface="Arial" pitchFamily="34" charset="-120"/>
+                        </a:rPr>
+                        <a:t>Measurable outcome</a:t>
+                      </a:r>
+                      <a:endParaRPr lang="en-US" sz="750" dirty="0">
+                        <a:latin typeface="Arial" charset="0"/>
+                        <a:ea typeface="Arial" charset="0"/>
+                        <a:cs typeface="Arial" charset="0"/>
+                      </a:endParaRPr>
+                    </a:p>
+                  </a:txBody>
+                  <a:tcPr marL="27432" marR="27432" marT="27432" marB="27432">
+                    <a:lnL w="6350" cap="flat" cmpd="sng" algn="ctr">
+                      <a:solidFill>
+                        <a:srgbClr val="D1D5DB"/>
+                      </a:solidFill>
+                      <a:prstDash val="solid"/>
+                      <a:round/>
+                      <a:headEnd type="none" w="med" len="med"/>
+                      <a:tailEnd type="none" w="med" len="med"/>
+                    </a:lnL>
+                    <a:lnR w="6350" cap="flat" cmpd="sng" algn="ctr">
+                      <a:solidFill>
+                        <a:srgbClr val="D1D5DB"/>
+                      </a:solidFill>
+                      <a:prstDash val="solid"/>
+                      <a:round/>
+                      <a:headEnd type="none" w="med" len="med"/>
+                      <a:tailEnd type="none" w="med" len="med"/>
+                    </a:lnR>
+                    <a:lnT w="6350" cap="flat" cmpd="sng" algn="ctr">
+                      <a:solidFill>
+                        <a:srgbClr val="D1D5DB"/>
+                      </a:solidFill>
+                      <a:prstDash val="solid"/>
+                      <a:round/>
+                      <a:headEnd type="none" w="med" len="med"/>
+                      <a:tailEnd type="none" w="med" len="med"/>
+                    </a:lnT>
+                    <a:lnB w="6350" cap="flat" cmpd="sng" algn="ctr">
+                      <a:solidFill>
+                        <a:srgbClr val="D1D5DB"/>
+                      </a:solidFill>
+                      <a:prstDash val="solid"/>
+                      <a:round/>
+                      <a:headEnd type="none" w="med" len="med"/>
+                      <a:tailEnd type="none" w="med" len="med"/>
+                    </a:lnB>
+                    <a:solidFill>
+                      <a:srgbClr val="0F172A"/>
+                    </a:solidFill>
+                  </a:tcPr>
+                </a:tc>
+              </a:tr>
+              <a:tr h="329184">
+                <a:tc>
+                  <a:txBody>
+                    <a:bodyPr/>
+                    <a:lstStyle/>
+                    <a:p>
+                      <a:pPr indent="0" marL="0">
+                        <a:buNone/>
+                      </a:pPr>
+                      <a:r>
+                        <a:rPr lang="en-US" sz="700" dirty="0">
+                          <a:solidFill>
+                            <a:srgbClr val="1F2937"/>
+                          </a:solidFill>
+                          <a:latin typeface="Arial" pitchFamily="34" charset="0"/>
+                          <a:ea typeface="Arial" pitchFamily="34" charset="-122"/>
+                          <a:cs typeface="Arial" pitchFamily="34" charset="-120"/>
+                        </a:rPr>
+                        <a:t>NDMA / SDMAs · fire services</a:t>
+                      </a:r>
+                      <a:endParaRPr lang="en-US" sz="700" dirty="0">
+                        <a:latin typeface="Arial" charset="0"/>
+                        <a:ea typeface="Arial" charset="0"/>
+                        <a:cs typeface="Arial" charset="0"/>
+                      </a:endParaRPr>
+                    </a:p>
+                  </a:txBody>
+                  <a:tcPr marL="27432" marR="27432" marT="27432" marB="27432">
+                    <a:lnL w="6350" cap="flat" cmpd="sng" algn="ctr">
+                      <a:solidFill>
+                        <a:srgbClr val="D1D5DB"/>
+                      </a:solidFill>
+                      <a:prstDash val="solid"/>
+                      <a:round/>
+                      <a:headEnd type="none" w="med" len="med"/>
+                      <a:tailEnd type="none" w="med" len="med"/>
+                    </a:lnL>
+                    <a:lnR w="6350" cap="flat" cmpd="sng" algn="ctr">
+                      <a:solidFill>
+                        <a:srgbClr val="D1D5DB"/>
+                      </a:solidFill>
+                      <a:prstDash val="solid"/>
+                      <a:round/>
+                      <a:headEnd type="none" w="med" len="med"/>
+                      <a:tailEnd type="none" w="med" len="med"/>
+                    </a:lnR>
+                    <a:lnT w="6350" cap="flat" cmpd="sng" algn="ctr">
+                      <a:solidFill>
+                        <a:srgbClr val="D1D5DB"/>
+                      </a:solidFill>
+                      <a:prstDash val="solid"/>
+                      <a:round/>
+                      <a:headEnd type="none" w="med" len="med"/>
+                      <a:tailEnd type="none" w="med" len="med"/>
+                    </a:lnT>
+                    <a:lnB w="6350" cap="flat" cmpd="sng" algn="ctr">
+                      <a:solidFill>
+                        <a:srgbClr val="D1D5DB"/>
+                      </a:solidFill>
+                      <a:prstDash val="solid"/>
+                      <a:round/>
+                      <a:headEnd type="none" w="med" len="med"/>
+                      <a:tailEnd type="none" w="med" len="med"/>
+                    </a:lnB>
+                    <a:solidFill>
+                      <a:srgbClr val="F3F4F6"/>
+                    </a:solidFill>
+                  </a:tcPr>
+                </a:tc>
+                <a:tc>
+                  <a:txBody>
+                    <a:bodyPr/>
+                    <a:lstStyle/>
+                    <a:p>
+                      <a:pPr indent="0" marL="0">
+                        <a:buNone/>
+                      </a:pPr>
+                      <a:r>
+                        <a:rPr lang="en-US" sz="700" dirty="0">
+                          <a:solidFill>
+                            <a:srgbClr val="1F2937"/>
+                          </a:solidFill>
+                          <a:latin typeface="Arial" pitchFamily="34" charset="0"/>
+                          <a:ea typeface="Arial" pitchFamily="34" charset="-122"/>
+                          <a:cs typeface="Arial" pitchFamily="34" charset="-120"/>
+                        </a:rPr>
+                        <a:t>Alerts only on abnormal industrial heat, with location, facility name and reasons</a:t>
+                      </a:r>
+                      <a:endParaRPr lang="en-US" sz="700" dirty="0">
+                        <a:latin typeface="Arial" charset="0"/>
+                        <a:ea typeface="Arial" charset="0"/>
+                        <a:cs typeface="Arial" charset="0"/>
+                      </a:endParaRPr>
+                    </a:p>
+                  </a:txBody>
+                  <a:tcPr marL="27432" marR="27432" marT="27432" marB="27432">
+                    <a:lnL w="6350" cap="flat" cmpd="sng" algn="ctr">
+                      <a:solidFill>
+                        <a:srgbClr val="D1D5DB"/>
+                      </a:solidFill>
+                      <a:prstDash val="solid"/>
+                      <a:round/>
+                      <a:headEnd type="none" w="med" len="med"/>
+                      <a:tailEnd type="none" w="med" len="med"/>
+                    </a:lnL>
+                    <a:lnR w="6350" cap="flat" cmpd="sng" algn="ctr">
+                      <a:solidFill>
+                        <a:srgbClr val="D1D5DB"/>
+                      </a:solidFill>
+                      <a:prstDash val="solid"/>
+                      <a:round/>
+                      <a:headEnd type="none" w="med" len="med"/>
+                      <a:tailEnd type="none" w="med" len="med"/>
+                    </a:lnR>
+                    <a:lnT w="6350" cap="flat" cmpd="sng" algn="ctr">
+                      <a:solidFill>
+                        <a:srgbClr val="D1D5DB"/>
+                      </a:solidFill>
+                      <a:prstDash val="solid"/>
+                      <a:round/>
+                      <a:headEnd type="none" w="med" len="med"/>
+                      <a:tailEnd type="none" w="med" len="med"/>
+                    </a:lnT>
+                    <a:lnB w="6350" cap="flat" cmpd="sng" algn="ctr">
+                      <a:solidFill>
+                        <a:srgbClr val="D1D5DB"/>
+                      </a:solidFill>
+                      <a:prstDash val="solid"/>
+                      <a:round/>
+                      <a:headEnd type="none" w="med" len="med"/>
+                      <a:tailEnd type="none" w="med" len="med"/>
+                    </a:lnB>
+                    <a:solidFill>
+                      <a:srgbClr val="F3F4F6"/>
+                    </a:solidFill>
+                  </a:tcPr>
+                </a:tc>
+                <a:tc>
+                  <a:txBody>
+                    <a:bodyPr/>
+                    <a:lstStyle/>
+                    <a:p>
+                      <a:pPr indent="0" marL="0">
+                        <a:buNone/>
+                      </a:pPr>
+                      <a:r>
+                        <a:rPr lang="en-US" sz="700" dirty="0">
+                          <a:solidFill>
+                            <a:srgbClr val="1F2937"/>
+                          </a:solidFill>
+                          <a:latin typeface="Arial" pitchFamily="34" charset="0"/>
+                          <a:ea typeface="Arial" pitchFamily="34" charset="-122"/>
+                          <a:cs typeface="Arial" pitchFamily="34" charset="-120"/>
+                        </a:rPr>
+                        <a:t>99 % fewer hotspots to triage; response targeted to the right plant, faster</a:t>
+                      </a:r>
+                      <a:endParaRPr lang="en-US" sz="700" dirty="0">
+                        <a:latin typeface="Arial" charset="0"/>
+                        <a:ea typeface="Arial" charset="0"/>
+                        <a:cs typeface="Arial" charset="0"/>
+                      </a:endParaRPr>
+                    </a:p>
+                  </a:txBody>
+                  <a:tcPr marL="27432" marR="27432" marT="27432" marB="27432">
+                    <a:lnL w="6350" cap="flat" cmpd="sng" algn="ctr">
+                      <a:solidFill>
+                        <a:srgbClr val="D1D5DB"/>
+                      </a:solidFill>
+                      <a:prstDash val="solid"/>
+                      <a:round/>
+                      <a:headEnd type="none" w="med" len="med"/>
+                      <a:tailEnd type="none" w="med" len="med"/>
+                    </a:lnL>
+                    <a:lnR w="6350" cap="flat" cmpd="sng" algn="ctr">
+                      <a:solidFill>
+                        <a:srgbClr val="D1D5DB"/>
+                      </a:solidFill>
+                      <a:prstDash val="solid"/>
+                      <a:round/>
+                      <a:headEnd type="none" w="med" len="med"/>
+                      <a:tailEnd type="none" w="med" len="med"/>
+                    </a:lnR>
+                    <a:lnT w="6350" cap="flat" cmpd="sng" algn="ctr">
+                      <a:solidFill>
+                        <a:srgbClr val="D1D5DB"/>
+                      </a:solidFill>
+                      <a:prstDash val="solid"/>
+                      <a:round/>
+                      <a:headEnd type="none" w="med" len="med"/>
+                      <a:tailEnd type="none" w="med" len="med"/>
+                    </a:lnT>
+                    <a:lnB w="6350" cap="flat" cmpd="sng" algn="ctr">
+                      <a:solidFill>
+                        <a:srgbClr val="D1D5DB"/>
+                      </a:solidFill>
+                      <a:prstDash val="solid"/>
+                      <a:round/>
+                      <a:headEnd type="none" w="med" len="med"/>
+                      <a:tailEnd type="none" w="med" len="med"/>
+                    </a:lnB>
+                    <a:solidFill>
+                      <a:srgbClr val="F3F4F6"/>
+                    </a:solidFill>
+                  </a:tcPr>
+                </a:tc>
+              </a:tr>
+              <a:tr h="329184">
+                <a:tc>
+                  <a:txBody>
+                    <a:bodyPr/>
+                    <a:lstStyle/>
+                    <a:p>
+                      <a:pPr indent="0" marL="0">
+                        <a:buNone/>
+                      </a:pPr>
+                      <a:r>
+                        <a:rPr lang="en-US" sz="700" dirty="0">
+                          <a:solidFill>
+                            <a:srgbClr val="1F2937"/>
+                          </a:solidFill>
+                          <a:latin typeface="Arial" pitchFamily="34" charset="0"/>
+                          <a:ea typeface="Arial" pitchFamily="34" charset="-122"/>
+                          <a:cs typeface="Arial" pitchFamily="34" charset="-120"/>
+                        </a:rPr>
+                        <a:t>NTRO &amp; security agencies</a:t>
+                      </a:r>
+                      <a:endParaRPr lang="en-US" sz="700" dirty="0">
+                        <a:latin typeface="Arial" charset="0"/>
+                        <a:ea typeface="Arial" charset="0"/>
+                        <a:cs typeface="Arial" charset="0"/>
+                      </a:endParaRPr>
+                    </a:p>
+                  </a:txBody>
+                  <a:tcPr marL="27432" marR="27432" marT="27432" marB="27432">
+                    <a:lnL w="6350" cap="flat" cmpd="sng" algn="ctr">
+                      <a:solidFill>
+                        <a:srgbClr val="D1D5DB"/>
+                      </a:solidFill>
+                      <a:prstDash val="solid"/>
+                      <a:round/>
+                      <a:headEnd type="none" w="med" len="med"/>
+                      <a:tailEnd type="none" w="med" len="med"/>
+                    </a:lnL>
+                    <a:lnR w="6350" cap="flat" cmpd="sng" algn="ctr">
+                      <a:solidFill>
+                        <a:srgbClr val="D1D5DB"/>
+                      </a:solidFill>
+                      <a:prstDash val="solid"/>
+                      <a:round/>
+                      <a:headEnd type="none" w="med" len="med"/>
+                      <a:tailEnd type="none" w="med" len="med"/>
+                    </a:lnR>
+                    <a:lnT w="6350" cap="flat" cmpd="sng" algn="ctr">
+                      <a:solidFill>
+                        <a:srgbClr val="D1D5DB"/>
+                      </a:solidFill>
+                      <a:prstDash val="solid"/>
+                      <a:round/>
+                      <a:headEnd type="none" w="med" len="med"/>
+                      <a:tailEnd type="none" w="med" len="med"/>
+                    </a:lnT>
+                    <a:lnB w="6350" cap="flat" cmpd="sng" algn="ctr">
+                      <a:solidFill>
+                        <a:srgbClr val="D1D5DB"/>
+                      </a:solidFill>
+                      <a:prstDash val="solid"/>
+                      <a:round/>
+                      <a:headEnd type="none" w="med" len="med"/>
+                      <a:tailEnd type="none" w="med" len="med"/>
+                    </a:lnB>
+                    <a:solidFill>
+                      <a:srgbClr val="FFFFFF"/>
+                    </a:solidFill>
+                  </a:tcPr>
+                </a:tc>
+                <a:tc>
+                  <a:txBody>
+                    <a:bodyPr/>
+                    <a:lstStyle/>
+                    <a:p>
+                      <a:pPr indent="0" marL="0">
+                        <a:buNone/>
+                      </a:pPr>
+                      <a:r>
+                        <a:rPr lang="en-US" sz="700" dirty="0">
+                          <a:solidFill>
+                            <a:srgbClr val="1F2937"/>
+                          </a:solidFill>
+                          <a:latin typeface="Arial" pitchFamily="34" charset="0"/>
+                          <a:ea typeface="Arial" pitchFamily="34" charset="-122"/>
+                          <a:cs typeface="Arial" pitchFamily="34" charset="-120"/>
+                        </a:rPr>
+                        <a:t>National registry of persistent thermal sources with 90-day activity history</a:t>
+                      </a:r>
+                      <a:endParaRPr lang="en-US" sz="700" dirty="0">
+                        <a:latin typeface="Arial" charset="0"/>
+                        <a:ea typeface="Arial" charset="0"/>
+                        <a:cs typeface="Arial" charset="0"/>
+                      </a:endParaRPr>
+                    </a:p>
+                  </a:txBody>
+                  <a:tcPr marL="27432" marR="27432" marT="27432" marB="27432">
+                    <a:lnL w="6350" cap="flat" cmpd="sng" algn="ctr">
+                      <a:solidFill>
+                        <a:srgbClr val="D1D5DB"/>
+                      </a:solidFill>
+                      <a:prstDash val="solid"/>
+                      <a:round/>
+                      <a:headEnd type="none" w="med" len="med"/>
+                      <a:tailEnd type="none" w="med" len="med"/>
+                    </a:lnL>
+                    <a:lnR w="6350" cap="flat" cmpd="sng" algn="ctr">
+                      <a:solidFill>
+                        <a:srgbClr val="D1D5DB"/>
+                      </a:solidFill>
+                      <a:prstDash val="solid"/>
+                      <a:round/>
+                      <a:headEnd type="none" w="med" len="med"/>
+                      <a:tailEnd type="none" w="med" len="med"/>
+                    </a:lnR>
+                    <a:lnT w="6350" cap="flat" cmpd="sng" algn="ctr">
+                      <a:solidFill>
+                        <a:srgbClr val="D1D5DB"/>
+                      </a:solidFill>
+                      <a:prstDash val="solid"/>
+                      <a:round/>
+                      <a:headEnd type="none" w="med" len="med"/>
+                      <a:tailEnd type="none" w="med" len="med"/>
+                    </a:lnT>
+                    <a:lnB w="6350" cap="flat" cmpd="sng" algn="ctr">
+                      <a:solidFill>
+                        <a:srgbClr val="D1D5DB"/>
+                      </a:solidFill>
+                      <a:prstDash val="solid"/>
+                      <a:round/>
+                      <a:headEnd type="none" w="med" len="med"/>
+                      <a:tailEnd type="none" w="med" len="med"/>
+                    </a:lnB>
+                    <a:solidFill>
+                      <a:srgbClr val="FFFFFF"/>
+                    </a:solidFill>
+                  </a:tcPr>
+                </a:tc>
+                <a:tc>
+                  <a:txBody>
+                    <a:bodyPr/>
+                    <a:lstStyle/>
+                    <a:p>
+                      <a:pPr indent="0" marL="0">
+                        <a:buNone/>
+                      </a:pPr>
+                      <a:r>
+                        <a:rPr lang="en-US" sz="700" dirty="0">
+                          <a:solidFill>
+                            <a:srgbClr val="1F2937"/>
+                          </a:solidFill>
+                          <a:latin typeface="Arial" pitchFamily="34" charset="0"/>
+                          <a:ea typeface="Arial" pitchFamily="34" charset="-122"/>
+                          <a:cs typeface="Arial" pitchFamily="34" charset="-120"/>
+                        </a:rPr>
+                        <a:t>Undeclared / unregistered activity surfaced; shutdowns, restarts and surges detected</a:t>
+                      </a:r>
+                      <a:endParaRPr lang="en-US" sz="700" dirty="0">
+                        <a:latin typeface="Arial" charset="0"/>
+                        <a:ea typeface="Arial" charset="0"/>
+                        <a:cs typeface="Arial" charset="0"/>
+                      </a:endParaRPr>
+                    </a:p>
+                  </a:txBody>
+                  <a:tcPr marL="27432" marR="27432" marT="27432" marB="27432">
+                    <a:lnL w="6350" cap="flat" cmpd="sng" algn="ctr">
+                      <a:solidFill>
+                        <a:srgbClr val="D1D5DB"/>
+                      </a:solidFill>
+                      <a:prstDash val="solid"/>
+                      <a:round/>
+                      <a:headEnd type="none" w="med" len="med"/>
+                      <a:tailEnd type="none" w="med" len="med"/>
+                    </a:lnL>
+                    <a:lnR w="6350" cap="flat" cmpd="sng" algn="ctr">
+                      <a:solidFill>
+                        <a:srgbClr val="D1D5DB"/>
+                      </a:solidFill>
+                      <a:prstDash val="solid"/>
+                      <a:round/>
+                      <a:headEnd type="none" w="med" len="med"/>
+                      <a:tailEnd type="none" w="med" len="med"/>
+                    </a:lnR>
+                    <a:lnT w="6350" cap="flat" cmpd="sng" algn="ctr">
+                      <a:solidFill>
+                        <a:srgbClr val="D1D5DB"/>
+                      </a:solidFill>
+                      <a:prstDash val="solid"/>
+                      <a:round/>
+                      <a:headEnd type="none" w="med" len="med"/>
+                      <a:tailEnd type="none" w="med" len="med"/>
+                    </a:lnT>
+                    <a:lnB w="6350" cap="flat" cmpd="sng" algn="ctr">
+                      <a:solidFill>
+                        <a:srgbClr val="D1D5DB"/>
+                      </a:solidFill>
+                      <a:prstDash val="solid"/>
+                      <a:round/>
+                      <a:headEnd type="none" w="med" len="med"/>
+                      <a:tailEnd type="none" w="med" len="med"/>
+                    </a:lnB>
+                    <a:solidFill>
+                      <a:srgbClr val="FFFFFF"/>
+                    </a:solidFill>
+                  </a:tcPr>
+                </a:tc>
+              </a:tr>
+              <a:tr h="329184">
+                <a:tc>
+                  <a:txBody>
+                    <a:bodyPr/>
+                    <a:lstStyle/>
+                    <a:p>
+                      <a:pPr indent="0" marL="0">
+                        <a:buNone/>
+                      </a:pPr>
+                      <a:r>
+                        <a:rPr lang="en-US" sz="700" dirty="0">
+                          <a:solidFill>
+                            <a:srgbClr val="1F2937"/>
+                          </a:solidFill>
+                          <a:latin typeface="Arial" pitchFamily="34" charset="0"/>
+                          <a:ea typeface="Arial" pitchFamily="34" charset="-122"/>
+                          <a:cs typeface="Arial" pitchFamily="34" charset="-120"/>
+                        </a:rPr>
+                        <a:t>CPCB / MoEFCC / state boards</a:t>
+                      </a:r>
+                      <a:endParaRPr lang="en-US" sz="700" dirty="0">
+                        <a:latin typeface="Arial" charset="0"/>
+                        <a:ea typeface="Arial" charset="0"/>
+                        <a:cs typeface="Arial" charset="0"/>
+                      </a:endParaRPr>
+                    </a:p>
+                  </a:txBody>
+                  <a:tcPr marL="27432" marR="27432" marT="27432" marB="27432">
+                    <a:lnL w="6350" cap="flat" cmpd="sng" algn="ctr">
+                      <a:solidFill>
+                        <a:srgbClr val="D1D5DB"/>
+                      </a:solidFill>
+                      <a:prstDash val="solid"/>
+                      <a:round/>
+                      <a:headEnd type="none" w="med" len="med"/>
+                      <a:tailEnd type="none" w="med" len="med"/>
+                    </a:lnL>
+                    <a:lnR w="6350" cap="flat" cmpd="sng" algn="ctr">
+                      <a:solidFill>
+                        <a:srgbClr val="D1D5DB"/>
+                      </a:solidFill>
+                      <a:prstDash val="solid"/>
+                      <a:round/>
+                      <a:headEnd type="none" w="med" len="med"/>
+                      <a:tailEnd type="none" w="med" len="med"/>
+                    </a:lnR>
+                    <a:lnT w="6350" cap="flat" cmpd="sng" algn="ctr">
+                      <a:solidFill>
+                        <a:srgbClr val="D1D5DB"/>
+                      </a:solidFill>
+                      <a:prstDash val="solid"/>
+                      <a:round/>
+                      <a:headEnd type="none" w="med" len="med"/>
+                      <a:tailEnd type="none" w="med" len="med"/>
+                    </a:lnT>
+                    <a:lnB w="6350" cap="flat" cmpd="sng" algn="ctr">
+                      <a:solidFill>
+                        <a:srgbClr val="D1D5DB"/>
+                      </a:solidFill>
+                      <a:prstDash val="solid"/>
+                      <a:round/>
+                      <a:headEnd type="none" w="med" len="med"/>
+                      <a:tailEnd type="none" w="med" len="med"/>
+                    </a:lnB>
+                    <a:solidFill>
+                      <a:srgbClr val="F3F4F6"/>
+                    </a:solidFill>
+                  </a:tcPr>
+                </a:tc>
+                <a:tc>
+                  <a:txBody>
+                    <a:bodyPr/>
+                    <a:lstStyle/>
+                    <a:p>
+                      <a:pPr indent="0" marL="0">
+                        <a:buNone/>
+                      </a:pPr>
+                      <a:r>
+                        <a:rPr lang="en-US" sz="700" dirty="0">
+                          <a:solidFill>
+                            <a:srgbClr val="1F2937"/>
+                          </a:solidFill>
+                          <a:latin typeface="Arial" pitchFamily="34" charset="0"/>
+                          <a:ea typeface="Arial" pitchFamily="34" charset="-122"/>
+                          <a:cs typeface="Arial" pitchFamily="34" charset="-120"/>
+                        </a:rPr>
+                        <a:t>Fire attribution: stubble burning vs industry vs flaring, per district</a:t>
+                      </a:r>
+                      <a:endParaRPr lang="en-US" sz="700" dirty="0">
+                        <a:latin typeface="Arial" charset="0"/>
+                        <a:ea typeface="Arial" charset="0"/>
+                        <a:cs typeface="Arial" charset="0"/>
+                      </a:endParaRPr>
+                    </a:p>
+                  </a:txBody>
+                  <a:tcPr marL="27432" marR="27432" marT="27432" marB="27432">
+                    <a:lnL w="6350" cap="flat" cmpd="sng" algn="ctr">
+                      <a:solidFill>
+                        <a:srgbClr val="D1D5DB"/>
+                      </a:solidFill>
+                      <a:prstDash val="solid"/>
+                      <a:round/>
+                      <a:headEnd type="none" w="med" len="med"/>
+                      <a:tailEnd type="none" w="med" len="med"/>
+                    </a:lnL>
+                    <a:lnR w="6350" cap="flat" cmpd="sng" algn="ctr">
+                      <a:solidFill>
+                        <a:srgbClr val="D1D5DB"/>
+                      </a:solidFill>
+                      <a:prstDash val="solid"/>
+                      <a:round/>
+                      <a:headEnd type="none" w="med" len="med"/>
+                      <a:tailEnd type="none" w="med" len="med"/>
+                    </a:lnR>
+                    <a:lnT w="6350" cap="flat" cmpd="sng" algn="ctr">
+                      <a:solidFill>
+                        <a:srgbClr val="D1D5DB"/>
+                      </a:solidFill>
+                      <a:prstDash val="solid"/>
+                      <a:round/>
+                      <a:headEnd type="none" w="med" len="med"/>
+                      <a:tailEnd type="none" w="med" len="med"/>
+                    </a:lnT>
+                    <a:lnB w="6350" cap="flat" cmpd="sng" algn="ctr">
+                      <a:solidFill>
+                        <a:srgbClr val="D1D5DB"/>
+                      </a:solidFill>
+                      <a:prstDash val="solid"/>
+                      <a:round/>
+                      <a:headEnd type="none" w="med" len="med"/>
+                      <a:tailEnd type="none" w="med" len="med"/>
+                    </a:lnB>
+                    <a:solidFill>
+                      <a:srgbClr val="F3F4F6"/>
+                    </a:solidFill>
+                  </a:tcPr>
+                </a:tc>
+                <a:tc>
+                  <a:txBody>
+                    <a:bodyPr/>
+                    <a:lstStyle/>
+                    <a:p>
+                      <a:pPr indent="0" marL="0">
+                        <a:buNone/>
+                      </a:pPr>
+                      <a:r>
+                        <a:rPr lang="en-US" sz="700" dirty="0">
+                          <a:solidFill>
+                            <a:srgbClr val="1F2937"/>
+                          </a:solidFill>
+                          <a:latin typeface="Arial" pitchFamily="34" charset="0"/>
+                          <a:ea typeface="Arial" pitchFamily="34" charset="-122"/>
+                          <a:cs typeface="Arial" pitchFamily="34" charset="-120"/>
+                        </a:rPr>
+                        <a:t>Evidence-grade inventories for air-quality and emissions action</a:t>
+                      </a:r>
+                      <a:endParaRPr lang="en-US" sz="700" dirty="0">
+                        <a:latin typeface="Arial" charset="0"/>
+                        <a:ea typeface="Arial" charset="0"/>
+                        <a:cs typeface="Arial" charset="0"/>
+                      </a:endParaRPr>
+                    </a:p>
+                  </a:txBody>
+                  <a:tcPr marL="27432" marR="27432" marT="27432" marB="27432">
+                    <a:lnL w="6350" cap="flat" cmpd="sng" algn="ctr">
+                      <a:solidFill>
+                        <a:srgbClr val="D1D5DB"/>
+                      </a:solidFill>
+                      <a:prstDash val="solid"/>
+                      <a:round/>
+                      <a:headEnd type="none" w="med" len="med"/>
+                      <a:tailEnd type="none" w="med" len="med"/>
+                    </a:lnL>
+                    <a:lnR w="6350" cap="flat" cmpd="sng" algn="ctr">
+                      <a:solidFill>
+                        <a:srgbClr val="D1D5DB"/>
+                      </a:solidFill>
+                      <a:prstDash val="solid"/>
+                      <a:round/>
+                      <a:headEnd type="none" w="med" len="med"/>
+                      <a:tailEnd type="none" w="med" len="med"/>
+                    </a:lnR>
+                    <a:lnT w="6350" cap="flat" cmpd="sng" algn="ctr">
+                      <a:solidFill>
+                        <a:srgbClr val="D1D5DB"/>
+                      </a:solidFill>
+                      <a:prstDash val="solid"/>
+                      <a:round/>
+                      <a:headEnd type="none" w="med" len="med"/>
+                      <a:tailEnd type="none" w="med" len="med"/>
+                    </a:lnT>
+                    <a:lnB w="6350" cap="flat" cmpd="sng" algn="ctr">
+                      <a:solidFill>
+                        <a:srgbClr val="D1D5DB"/>
+                      </a:solidFill>
+                      <a:prstDash val="solid"/>
+                      <a:round/>
+                      <a:headEnd type="none" w="med" len="med"/>
+                      <a:tailEnd type="none" w="med" len="med"/>
+                    </a:lnB>
+                    <a:solidFill>
+                      <a:srgbClr val="F3F4F6"/>
+                    </a:solidFill>
+                  </a:tcPr>
+                </a:tc>
+              </a:tr>
+              <a:tr h="329184">
+                <a:tc>
+                  <a:txBody>
+                    <a:bodyPr/>
+                    <a:lstStyle/>
+                    <a:p>
+                      <a:pPr indent="0" marL="0">
+                        <a:buNone/>
+                      </a:pPr>
+                      <a:r>
+                        <a:rPr lang="en-US" sz="700" dirty="0">
+                          <a:solidFill>
+                            <a:srgbClr val="1F2937"/>
+                          </a:solidFill>
+                          <a:latin typeface="Arial" pitchFamily="34" charset="0"/>
+                          <a:ea typeface="Arial" pitchFamily="34" charset="-122"/>
+                          <a:cs typeface="Arial" pitchFamily="34" charset="-120"/>
+                        </a:rPr>
+                        <a:t>Industry &amp; insurers</a:t>
+                      </a:r>
+                      <a:endParaRPr lang="en-US" sz="700" dirty="0">
+                        <a:latin typeface="Arial" charset="0"/>
+                        <a:ea typeface="Arial" charset="0"/>
+                        <a:cs typeface="Arial" charset="0"/>
+                      </a:endParaRPr>
+                    </a:p>
+                  </a:txBody>
+                  <a:tcPr marL="27432" marR="27432" marT="27432" marB="27432">
+                    <a:lnL w="6350" cap="flat" cmpd="sng" algn="ctr">
+                      <a:solidFill>
+                        <a:srgbClr val="D1D5DB"/>
+                      </a:solidFill>
+                      <a:prstDash val="solid"/>
+                      <a:round/>
+                      <a:headEnd type="none" w="med" len="med"/>
+                      <a:tailEnd type="none" w="med" len="med"/>
+                    </a:lnL>
+                    <a:lnR w="6350" cap="flat" cmpd="sng" algn="ctr">
+                      <a:solidFill>
+                        <a:srgbClr val="D1D5DB"/>
+                      </a:solidFill>
+                      <a:prstDash val="solid"/>
+                      <a:round/>
+                      <a:headEnd type="none" w="med" len="med"/>
+                      <a:tailEnd type="none" w="med" len="med"/>
+                    </a:lnR>
+                    <a:lnT w="6350" cap="flat" cmpd="sng" algn="ctr">
+                      <a:solidFill>
+                        <a:srgbClr val="D1D5DB"/>
+                      </a:solidFill>
+                      <a:prstDash val="solid"/>
+                      <a:round/>
+                      <a:headEnd type="none" w="med" len="med"/>
+                      <a:tailEnd type="none" w="med" len="med"/>
+                    </a:lnT>
+                    <a:lnB w="6350" cap="flat" cmpd="sng" algn="ctr">
+                      <a:solidFill>
+                        <a:srgbClr val="D1D5DB"/>
+                      </a:solidFill>
+                      <a:prstDash val="solid"/>
+                      <a:round/>
+                      <a:headEnd type="none" w="med" len="med"/>
+                      <a:tailEnd type="none" w="med" len="med"/>
+                    </a:lnB>
+                    <a:solidFill>
+                      <a:srgbClr val="FFFFFF"/>
+                    </a:solidFill>
+                  </a:tcPr>
+                </a:tc>
+                <a:tc>
+                  <a:txBody>
+                    <a:bodyPr/>
+                    <a:lstStyle/>
+                    <a:p>
+                      <a:pPr indent="0" marL="0">
+                        <a:buNone/>
+                      </a:pPr>
+                      <a:r>
+                        <a:rPr lang="en-US" sz="700" dirty="0">
+                          <a:solidFill>
+                            <a:srgbClr val="1F2937"/>
+                          </a:solidFill>
+                          <a:latin typeface="Arial" pitchFamily="34" charset="0"/>
+                          <a:ea typeface="Arial" pitchFamily="34" charset="-122"/>
+                          <a:cs typeface="Arial" pitchFamily="34" charset="-120"/>
+                        </a:rPr>
+                        <a:t>Verified incident timeline for any site, with imagery links</a:t>
+                      </a:r>
+                      <a:endParaRPr lang="en-US" sz="700" dirty="0">
+                        <a:latin typeface="Arial" charset="0"/>
+                        <a:ea typeface="Arial" charset="0"/>
+                        <a:cs typeface="Arial" charset="0"/>
+                      </a:endParaRPr>
+                    </a:p>
+                  </a:txBody>
+                  <a:tcPr marL="27432" marR="27432" marT="27432" marB="27432">
+                    <a:lnL w="6350" cap="flat" cmpd="sng" algn="ctr">
+                      <a:solidFill>
+                        <a:srgbClr val="D1D5DB"/>
+                      </a:solidFill>
+                      <a:prstDash val="solid"/>
+                      <a:round/>
+                      <a:headEnd type="none" w="med" len="med"/>
+                      <a:tailEnd type="none" w="med" len="med"/>
+                    </a:lnL>
+                    <a:lnR w="6350" cap="flat" cmpd="sng" algn="ctr">
+                      <a:solidFill>
+                        <a:srgbClr val="D1D5DB"/>
+                      </a:solidFill>
+                      <a:prstDash val="solid"/>
+                      <a:round/>
+                      <a:headEnd type="none" w="med" len="med"/>
+                      <a:tailEnd type="none" w="med" len="med"/>
+                    </a:lnR>
+                    <a:lnT w="6350" cap="flat" cmpd="sng" algn="ctr">
+                      <a:solidFill>
+                        <a:srgbClr val="D1D5DB"/>
+                      </a:solidFill>
+                      <a:prstDash val="solid"/>
+                      <a:round/>
+                      <a:headEnd type="none" w="med" len="med"/>
+                      <a:tailEnd type="none" w="med" len="med"/>
+                    </a:lnT>
+                    <a:lnB w="6350" cap="flat" cmpd="sng" algn="ctr">
+                      <a:solidFill>
+                        <a:srgbClr val="D1D5DB"/>
+                      </a:solidFill>
+                      <a:prstDash val="solid"/>
+                      <a:round/>
+                      <a:headEnd type="none" w="med" len="med"/>
+                      <a:tailEnd type="none" w="med" len="med"/>
+                    </a:lnB>
+                    <a:solidFill>
+                      <a:srgbClr val="FFFFFF"/>
+                    </a:solidFill>
+                  </a:tcPr>
+                </a:tc>
+                <a:tc>
+                  <a:txBody>
+                    <a:bodyPr/>
+                    <a:lstStyle/>
+                    <a:p>
+                      <a:pPr indent="0" marL="0">
+                        <a:buNone/>
+                      </a:pPr>
+                      <a:r>
+                        <a:rPr lang="en-US" sz="700" dirty="0">
+                          <a:solidFill>
+                            <a:srgbClr val="1F2937"/>
+                          </a:solidFill>
+                          <a:latin typeface="Arial" pitchFamily="34" charset="0"/>
+                          <a:ea typeface="Arial" pitchFamily="34" charset="-122"/>
+                          <a:cs typeface="Arial" pitchFamily="34" charset="-120"/>
+                        </a:rPr>
+                        <a:t>Faster claims, compliance evidence, third-party monitoring</a:t>
+                      </a:r>
+                      <a:endParaRPr lang="en-US" sz="700" dirty="0">
+                        <a:latin typeface="Arial" charset="0"/>
+                        <a:ea typeface="Arial" charset="0"/>
+                        <a:cs typeface="Arial" charset="0"/>
+                      </a:endParaRPr>
+                    </a:p>
+                  </a:txBody>
+                  <a:tcPr marL="27432" marR="27432" marT="27432" marB="27432">
+                    <a:lnL w="6350" cap="flat" cmpd="sng" algn="ctr">
+                      <a:solidFill>
+                        <a:srgbClr val="D1D5DB"/>
+                      </a:solidFill>
+                      <a:prstDash val="solid"/>
+                      <a:round/>
+                      <a:headEnd type="none" w="med" len="med"/>
+                      <a:tailEnd type="none" w="med" len="med"/>
+                    </a:lnL>
+                    <a:lnR w="6350" cap="flat" cmpd="sng" algn="ctr">
+                      <a:solidFill>
+                        <a:srgbClr val="D1D5DB"/>
+                      </a:solidFill>
+                      <a:prstDash val="solid"/>
+                      <a:round/>
+                      <a:headEnd type="none" w="med" len="med"/>
+                      <a:tailEnd type="none" w="med" len="med"/>
+                    </a:lnR>
+                    <a:lnT w="6350" cap="flat" cmpd="sng" algn="ctr">
+                      <a:solidFill>
+                        <a:srgbClr val="D1D5DB"/>
+                      </a:solidFill>
+                      <a:prstDash val="solid"/>
+                      <a:round/>
+                      <a:headEnd type="none" w="med" len="med"/>
+                      <a:tailEnd type="none" w="med" len="med"/>
+                    </a:lnT>
+                    <a:lnB w="6350" cap="flat" cmpd="sng" algn="ctr">
+                      <a:solidFill>
+                        <a:srgbClr val="D1D5DB"/>
+                      </a:solidFill>
+                      <a:prstDash val="solid"/>
+                      <a:round/>
+                      <a:headEnd type="none" w="med" len="med"/>
+                      <a:tailEnd type="none" w="med" len="med"/>
+                    </a:lnB>
+                    <a:solidFill>
+                      <a:srgbClr val="FFFFFF"/>
+                    </a:solidFill>
+                  </a:tcPr>
+                </a:tc>
+              </a:tr>
+            </a:tbl>
+          </a:graphicData>
+        </a:graphic>
+      </p:graphicFrame>
+      <p:sp>
+        <p:nvSpPr>
+          <p:cNvPr id="11" name="Text 7"/>
           <p:cNvSpPr txBox="1"/>
           <p:nvPr/>
         </p:nvSpPr>
         <p:spPr>
           <a:xfrm>
-            <a:off x="365760" y="1243584"/>
-            <a:ext cx="4023360" cy="1627632"/>
-          </a:xfrm>
-          <a:prstGeom prst="rect">
-            <a:avLst/>
-          </a:prstGeom>
-          <a:noFill/>
-          <a:ln/>
-        </p:spPr>
-        <p:txBody>
-          <a:bodyPr wrap="square" lIns="12700" tIns="12700" rIns="12700" bIns="12700" rtlCol="0" anchor="t"/>
-          <a:lstStyle/>
-          <a:p>
-            <a:pPr marL="127000" indent="-127000">
-              <a:spcAft>
-                <a:spcPts val="200"/>
-              </a:spcAft>
-              <a:buSzPct val="100000"/>
-              <a:buChar char="•"/>
-            </a:pPr>
-            <a:r>
-              <a:rPr lang="en-US" sz="850" dirty="0">
-                <a:solidFill>
-                  <a:srgbClr val="1F2937"/>
-                </a:solidFill>
-                <a:latin typeface="Arial" pitchFamily="34" charset="0"/>
-                <a:ea typeface="Arial" pitchFamily="34" charset="-122"/>
-                <a:cs typeface="Arial" pitchFamily="34" charset="-120"/>
-              </a:rPr>
-              <a:t>Disaster management (NDMA / SDMAs / fire services): alerts only on abnormal industrial heat → faster, correctly-targeted response to plant fires &amp; explosions.</a:t>
-            </a:r>
-            <a:endParaRPr lang="en-US" sz="850" dirty="0"/>
-          </a:p>
-          <a:p>
-            <a:pPr marL="127000" indent="-127000">
-              <a:spcAft>
-                <a:spcPts val="200"/>
-              </a:spcAft>
-              <a:buSzPct val="100000"/>
-              <a:buChar char="•"/>
-            </a:pPr>
-            <a:r>
-              <a:rPr lang="en-US" sz="850" dirty="0">
-                <a:solidFill>
-                  <a:srgbClr val="1F2937"/>
-                </a:solidFill>
-                <a:latin typeface="Arial" pitchFamily="34" charset="0"/>
-                <a:ea typeface="Arial" pitchFamily="34" charset="-122"/>
-                <a:cs typeface="Arial" pitchFamily="34" charset="-120"/>
-              </a:rPr>
-              <a:t>NTRO &amp; security agencies: national registry of persistent thermal sources with activity history; detects undeclared industrial activity; change detection (shutdowns, restarts, surges).</a:t>
-            </a:r>
-            <a:endParaRPr lang="en-US" sz="850" dirty="0"/>
-          </a:p>
-          <a:p>
-            <a:pPr marL="127000" indent="-127000">
-              <a:spcAft>
-                <a:spcPts val="200"/>
-              </a:spcAft>
-              <a:buSzPct val="100000"/>
-              <a:buChar char="•"/>
-            </a:pPr>
-            <a:r>
-              <a:rPr lang="en-US" sz="850" dirty="0">
-                <a:solidFill>
-                  <a:srgbClr val="1F2937"/>
-                </a:solidFill>
-                <a:latin typeface="Arial" pitchFamily="34" charset="0"/>
-                <a:ea typeface="Arial" pitchFamily="34" charset="-122"/>
-                <a:cs typeface="Arial" pitchFamily="34" charset="-120"/>
-              </a:rPr>
-              <a:t>CPCB / MoEFCC: attribute district fires to stubble burning vs industry; flaring inventories.</a:t>
-            </a:r>
-            <a:endParaRPr lang="en-US" sz="850" dirty="0"/>
-          </a:p>
-          <a:p>
-            <a:pPr marL="127000" indent="-127000">
-              <a:spcAft>
-                <a:spcPts val="200"/>
-              </a:spcAft>
-              <a:buSzPct val="100000"/>
-              <a:buChar char="•"/>
-            </a:pPr>
-            <a:r>
-              <a:rPr lang="en-US" sz="850" dirty="0">
-                <a:solidFill>
-                  <a:srgbClr val="1F2937"/>
-                </a:solidFill>
-                <a:latin typeface="Arial" pitchFamily="34" charset="0"/>
-                <a:ea typeface="Arial" pitchFamily="34" charset="-122"/>
-                <a:cs typeface="Arial" pitchFamily="34" charset="-120"/>
-              </a:rPr>
-              <a:t>Insurers &amp; industry: verified incident records; compliance evidence.</a:t>
-            </a:r>
-            <a:endParaRPr lang="en-US" sz="850" dirty="0"/>
-          </a:p>
-        </p:txBody>
-      </p:sp>
-      <p:sp>
-        <p:nvSpPr>
-          <p:cNvPr id="12" name="Text 9"/>
-          <p:cNvSpPr txBox="1"/>
-          <p:nvPr/>
-        </p:nvSpPr>
-        <p:spPr>
-          <a:xfrm>
-            <a:off x="4663440" y="896112"/>
-            <a:ext cx="4206240" cy="256032"/>
+            <a:off x="5394960" y="896112"/>
+            <a:ext cx="3566160" cy="256032"/>
           </a:xfrm>
           <a:prstGeom prst="rect">
             <a:avLst/>
@@ -15708,7 +18224,7 @@
               <a:buNone/>
             </a:pPr>
             <a:r>
-              <a:rPr lang="en-US" sz="1050" b="1" dirty="0">
+              <a:rPr lang="en-US" sz="880" b="1" dirty="0">
                 <a:solidFill>
                   <a:srgbClr val="000000"/>
                 </a:solidFill>
@@ -15722,7 +18238,7 @@
               <a:buNone/>
             </a:pPr>
             <a:r>
-              <a:rPr lang="en-US" sz="1050" b="1" dirty="0">
+              <a:rPr lang="en-US" sz="880" b="1" dirty="0">
                 <a:solidFill>
                   <a:srgbClr val="15803D"/>
                 </a:solidFill>
@@ -15732,32 +18248,344 @@
               </a:rPr>
               <a:t>Benefits of the solution (social, economic, environmental, etc.)</a:t>
             </a:r>
-            <a:endParaRPr lang="en-US" sz="1050" dirty="0"/>
+            <a:endParaRPr lang="en-US" sz="880" dirty="0"/>
           </a:p>
         </p:txBody>
       </p:sp>
       <p:sp>
         <p:nvSpPr>
-          <p:cNvPr id="13" name="Shape 10"/>
+          <p:cNvPr id="12" name="Shape 8"/>
           <p:cNvSpPr/>
           <p:nvPr/>
         </p:nvSpPr>
         <p:spPr>
           <a:xfrm>
-            <a:off x="4663440" y="1170432"/>
-            <a:ext cx="4206240" cy="1737360"/>
+            <a:off x="5394960" y="1170432"/>
+            <a:ext cx="54864" cy="402336"/>
+          </a:xfrm>
+          <a:prstGeom prst="rect">
+            <a:avLst/>
+          </a:prstGeom>
+          <a:solidFill>
+            <a:srgbClr val="15803D"/>
+          </a:solidFill>
+          <a:ln w="12700">
+            <a:solidFill>
+              <a:srgbClr val="15803D"/>
+            </a:solidFill>
+            <a:prstDash val="solid"/>
+          </a:ln>
+        </p:spPr>
+      </p:sp>
+      <p:sp>
+        <p:nvSpPr>
+          <p:cNvPr id="13" name="Text 9"/>
+          <p:cNvSpPr txBox="1"/>
+          <p:nvPr/>
+        </p:nvSpPr>
+        <p:spPr>
+          <a:xfrm>
+            <a:off x="5513832" y="1170432"/>
+            <a:ext cx="3383280" cy="402336"/>
+          </a:xfrm>
+          <a:prstGeom prst="rect">
+            <a:avLst/>
+          </a:prstGeom>
+          <a:noFill/>
+          <a:ln/>
+        </p:spPr>
+        <p:txBody>
+          <a:bodyPr wrap="square" lIns="0" tIns="0" rIns="0" bIns="0" rtlCol="0" anchor="t"/>
+          <a:lstStyle/>
+          <a:p>
+            <a:pPr indent="0" marL="0">
+              <a:buNone/>
+            </a:pPr>
+            <a:r>
+              <a:rPr lang="en-US" sz="720" b="1" dirty="0">
+                <a:solidFill>
+                  <a:srgbClr val="15803D"/>
+                </a:solidFill>
+                <a:latin typeface="Arial" pitchFamily="34" charset="0"/>
+                <a:ea typeface="Arial" pitchFamily="34" charset="-122"/>
+                <a:cs typeface="Arial" pitchFamily="34" charset="-120"/>
+              </a:rPr>
+              <a:t>Social: </a:t>
+            </a:r>
+            <a:pPr indent="0" marL="0">
+              <a:buNone/>
+            </a:pPr>
+            <a:r>
+              <a:rPr lang="en-US" sz="720" dirty="0">
+                <a:solidFill>
+                  <a:srgbClr val="1F2937"/>
+                </a:solidFill>
+                <a:latin typeface="Arial" pitchFamily="34" charset="0"/>
+                <a:ea typeface="Arial" pitchFamily="34" charset="-122"/>
+                <a:cs typeface="Arial" pitchFamily="34" charset="-120"/>
+              </a:rPr>
+              <a:t>Earlier warning for communities around refineries, steel and chemical complexes; fire-service capacity used where it matters.</a:t>
+            </a:r>
+            <a:endParaRPr lang="en-US" sz="720" dirty="0"/>
+          </a:p>
+        </p:txBody>
+      </p:sp>
+      <p:sp>
+        <p:nvSpPr>
+          <p:cNvPr id="14" name="Shape 10"/>
+          <p:cNvSpPr/>
+          <p:nvPr/>
+        </p:nvSpPr>
+        <p:spPr>
+          <a:xfrm>
+            <a:off x="5394960" y="1627632"/>
+            <a:ext cx="54864" cy="402336"/>
+          </a:xfrm>
+          <a:prstGeom prst="rect">
+            <a:avLst/>
+          </a:prstGeom>
+          <a:solidFill>
+            <a:srgbClr val="E8590C"/>
+          </a:solidFill>
+          <a:ln w="12700">
+            <a:solidFill>
+              <a:srgbClr val="E8590C"/>
+            </a:solidFill>
+            <a:prstDash val="solid"/>
+          </a:ln>
+        </p:spPr>
+      </p:sp>
+      <p:sp>
+        <p:nvSpPr>
+          <p:cNvPr id="15" name="Text 11"/>
+          <p:cNvSpPr txBox="1"/>
+          <p:nvPr/>
+        </p:nvSpPr>
+        <p:spPr>
+          <a:xfrm>
+            <a:off x="5513832" y="1627632"/>
+            <a:ext cx="3383280" cy="402336"/>
+          </a:xfrm>
+          <a:prstGeom prst="rect">
+            <a:avLst/>
+          </a:prstGeom>
+          <a:noFill/>
+          <a:ln/>
+        </p:spPr>
+        <p:txBody>
+          <a:bodyPr wrap="square" lIns="0" tIns="0" rIns="0" bIns="0" rtlCol="0" anchor="t"/>
+          <a:lstStyle/>
+          <a:p>
+            <a:pPr indent="0" marL="0">
+              <a:buNone/>
+            </a:pPr>
+            <a:r>
+              <a:rPr lang="en-US" sz="720" b="1" dirty="0">
+                <a:solidFill>
+                  <a:srgbClr val="E8590C"/>
+                </a:solidFill>
+                <a:latin typeface="Arial" pitchFamily="34" charset="0"/>
+                <a:ea typeface="Arial" pitchFamily="34" charset="-122"/>
+                <a:cs typeface="Arial" pitchFamily="34" charset="-120"/>
+              </a:rPr>
+              <a:t>Economic: </a:t>
+            </a:r>
+            <a:pPr indent="0" marL="0">
+              <a:buNone/>
+            </a:pPr>
+            <a:r>
+              <a:rPr lang="en-US" sz="720" dirty="0">
+                <a:solidFill>
+                  <a:srgbClr val="1F2937"/>
+                </a:solidFill>
+                <a:latin typeface="Arial" pitchFamily="34" charset="0"/>
+                <a:ea typeface="Arial" pitchFamily="34" charset="-122"/>
+                <a:cs typeface="Arial" pitchFamily="34" charset="-120"/>
+              </a:rPr>
+              <a:t>₹0 data cost; one VM; losses cut by early detection; a sovereign, open alternative to paid geospatial platforms.</a:t>
+            </a:r>
+            <a:endParaRPr lang="en-US" sz="720" dirty="0"/>
+          </a:p>
+        </p:txBody>
+      </p:sp>
+      <p:sp>
+        <p:nvSpPr>
+          <p:cNvPr id="16" name="Shape 12"/>
+          <p:cNvSpPr/>
+          <p:nvPr/>
+        </p:nvSpPr>
+        <p:spPr>
+          <a:xfrm>
+            <a:off x="5394960" y="2084832"/>
+            <a:ext cx="54864" cy="402336"/>
+          </a:xfrm>
+          <a:prstGeom prst="rect">
+            <a:avLst/>
+          </a:prstGeom>
+          <a:solidFill>
+            <a:srgbClr val="1D4ED8"/>
+          </a:solidFill>
+          <a:ln w="12700">
+            <a:solidFill>
+              <a:srgbClr val="1D4ED8"/>
+            </a:solidFill>
+            <a:prstDash val="solid"/>
+          </a:ln>
+        </p:spPr>
+      </p:sp>
+      <p:sp>
+        <p:nvSpPr>
+          <p:cNvPr id="17" name="Text 13"/>
+          <p:cNvSpPr txBox="1"/>
+          <p:nvPr/>
+        </p:nvSpPr>
+        <p:spPr>
+          <a:xfrm>
+            <a:off x="5513832" y="2084832"/>
+            <a:ext cx="3383280" cy="402336"/>
+          </a:xfrm>
+          <a:prstGeom prst="rect">
+            <a:avLst/>
+          </a:prstGeom>
+          <a:noFill/>
+          <a:ln/>
+        </p:spPr>
+        <p:txBody>
+          <a:bodyPr wrap="square" lIns="0" tIns="0" rIns="0" bIns="0" rtlCol="0" anchor="t"/>
+          <a:lstStyle/>
+          <a:p>
+            <a:pPr indent="0" marL="0">
+              <a:buNone/>
+            </a:pPr>
+            <a:r>
+              <a:rPr lang="en-US" sz="720" b="1" dirty="0">
+                <a:solidFill>
+                  <a:srgbClr val="1D4ED8"/>
+                </a:solidFill>
+                <a:latin typeface="Arial" pitchFamily="34" charset="0"/>
+                <a:ea typeface="Arial" pitchFamily="34" charset="-122"/>
+                <a:cs typeface="Arial" pitchFamily="34" charset="-120"/>
+              </a:rPr>
+              <a:t>Environmental: </a:t>
+            </a:r>
+            <a:pPr indent="0" marL="0">
+              <a:buNone/>
+            </a:pPr>
+            <a:r>
+              <a:rPr lang="en-US" sz="720" dirty="0">
+                <a:solidFill>
+                  <a:srgbClr val="1F2937"/>
+                </a:solidFill>
+                <a:latin typeface="Arial" pitchFamily="34" charset="0"/>
+                <a:ea typeface="Arial" pitchFamily="34" charset="-122"/>
+                <a:cs typeface="Arial" pitchFamily="34" charset="-120"/>
+              </a:rPr>
+              <a:t>Separates agricultural burning from industrial emissions; flaring &amp; coal-fire monitoring feed climate and AQ reporting.</a:t>
+            </a:r>
+            <a:endParaRPr lang="en-US" sz="720" dirty="0"/>
+          </a:p>
+        </p:txBody>
+      </p:sp>
+      <p:sp>
+        <p:nvSpPr>
+          <p:cNvPr id="18" name="Shape 14"/>
+          <p:cNvSpPr/>
+          <p:nvPr/>
+        </p:nvSpPr>
+        <p:spPr>
+          <a:xfrm>
+            <a:off x="5394960" y="2542032"/>
+            <a:ext cx="54864" cy="402336"/>
+          </a:xfrm>
+          <a:prstGeom prst="rect">
+            <a:avLst/>
+          </a:prstGeom>
+          <a:solidFill>
+            <a:srgbClr val="6D28D9"/>
+          </a:solidFill>
+          <a:ln w="12700">
+            <a:solidFill>
+              <a:srgbClr val="6D28D9"/>
+            </a:solidFill>
+            <a:prstDash val="solid"/>
+          </a:ln>
+        </p:spPr>
+      </p:sp>
+      <p:sp>
+        <p:nvSpPr>
+          <p:cNvPr id="19" name="Text 15"/>
+          <p:cNvSpPr txBox="1"/>
+          <p:nvPr/>
+        </p:nvSpPr>
+        <p:spPr>
+          <a:xfrm>
+            <a:off x="5513832" y="2542032"/>
+            <a:ext cx="3383280" cy="402336"/>
+          </a:xfrm>
+          <a:prstGeom prst="rect">
+            <a:avLst/>
+          </a:prstGeom>
+          <a:noFill/>
+          <a:ln/>
+        </p:spPr>
+        <p:txBody>
+          <a:bodyPr wrap="square" lIns="0" tIns="0" rIns="0" bIns="0" rtlCol="0" anchor="t"/>
+          <a:lstStyle/>
+          <a:p>
+            <a:pPr indent="0" marL="0">
+              <a:buNone/>
+            </a:pPr>
+            <a:r>
+              <a:rPr lang="en-US" sz="720" b="1" dirty="0">
+                <a:solidFill>
+                  <a:srgbClr val="6D28D9"/>
+                </a:solidFill>
+                <a:latin typeface="Arial" pitchFamily="34" charset="0"/>
+                <a:ea typeface="Arial" pitchFamily="34" charset="-122"/>
+                <a:cs typeface="Arial" pitchFamily="34" charset="-120"/>
+              </a:rPr>
+              <a:t>Strategic: </a:t>
+            </a:r>
+            <a:pPr indent="0" marL="0">
+              <a:buNone/>
+            </a:pPr>
+            <a:r>
+              <a:rPr lang="en-US" sz="720" dirty="0">
+                <a:solidFill>
+                  <a:srgbClr val="1F2937"/>
+                </a:solidFill>
+                <a:latin typeface="Arial" pitchFamily="34" charset="0"/>
+                <a:ea typeface="Arial" pitchFamily="34" charset="-122"/>
+                <a:cs typeface="Arial" pitchFamily="34" charset="-120"/>
+              </a:rPr>
+              <a:t>Explainable, auditable, air-gap deployable — fits NTRO / NDEM / Bhuvan ecosystems.</a:t>
+            </a:r>
+            <a:endParaRPr lang="en-US" sz="720" dirty="0"/>
+          </a:p>
+        </p:txBody>
+      </p:sp>
+      <p:sp>
+        <p:nvSpPr>
+          <p:cNvPr id="20" name="Shape 16"/>
+          <p:cNvSpPr/>
+          <p:nvPr/>
+        </p:nvSpPr>
+        <p:spPr>
+          <a:xfrm>
+            <a:off x="5394960" y="3017520"/>
+            <a:ext cx="841248" cy="329184"/>
           </a:xfrm>
           <a:prstGeom prst="roundRect">
             <a:avLst>
-              <a:gd name="adj" fmla="val 2632"/>
+              <a:gd name="adj" fmla="val 13889"/>
             </a:avLst>
           </a:prstGeom>
           <a:solidFill>
-            <a:srgbClr val="FFFFFF"/>
+            <a:srgbClr val="F36D25"/>
           </a:solidFill>
           <a:ln w="9525">
             <a:solidFill>
-              <a:srgbClr val="D1D5DB"/>
+              <a:srgbClr val="F36D25"/>
             </a:solidFill>
             <a:prstDash val="solid"/>
           </a:ln>
@@ -15765,14 +18593,14 @@
       </p:sp>
       <p:sp>
         <p:nvSpPr>
-          <p:cNvPr id="14" name="Text 11"/>
+          <p:cNvPr id="21" name="Text 17"/>
           <p:cNvSpPr txBox="1"/>
           <p:nvPr/>
         </p:nvSpPr>
         <p:spPr>
           <a:xfrm>
-            <a:off x="4754880" y="1243584"/>
-            <a:ext cx="4023360" cy="1627632"/>
+            <a:off x="5394960" y="3026664"/>
+            <a:ext cx="841248" cy="155448"/>
           </a:xfrm>
           <a:prstGeom prst="rect">
             <a:avLst/>
@@ -15781,108 +18609,395 @@
           <a:ln/>
         </p:spPr>
         <p:txBody>
-          <a:bodyPr wrap="square" lIns="12700" tIns="12700" rIns="12700" bIns="12700" rtlCol="0" anchor="t"/>
+          <a:bodyPr wrap="square" lIns="0" tIns="0" rIns="0" bIns="0" rtlCol="0" anchor="t"/>
           <a:lstStyle/>
           <a:p>
-            <a:pPr marL="127000" indent="-127000">
-              <a:spcAft>
-                <a:spcPts val="200"/>
-              </a:spcAft>
-              <a:buSzPct val="100000"/>
-              <a:buChar char="•"/>
-            </a:pPr>
-            <a:r>
-              <a:rPr lang="en-US" sz="850" dirty="0">
-                <a:solidFill>
-                  <a:srgbClr val="1F2937"/>
+            <a:pPr algn="ctr" indent="0" marL="0">
+              <a:buNone/>
+            </a:pPr>
+            <a:r>
+              <a:rPr lang="en-US" sz="700" b="1" dirty="0">
+                <a:solidFill>
+                  <a:srgbClr val="FFFFFF"/>
                 </a:solidFill>
                 <a:latin typeface="Arial" pitchFamily="34" charset="0"/>
                 <a:ea typeface="Arial" pitchFamily="34" charset="-122"/>
                 <a:cs typeface="Arial" pitchFamily="34" charset="-120"/>
               </a:rPr>
-              <a:t>Social: earlier warning for communities near refineries, steel plants, chemical complexes; better use of fire-service capacity.</a:t>
-            </a:r>
-            <a:endParaRPr lang="en-US" sz="850" dirty="0"/>
+              <a:t>SDG 9</a:t>
+            </a:r>
+            <a:endParaRPr lang="en-US" sz="700" dirty="0"/>
           </a:p>
+        </p:txBody>
+      </p:sp>
+      <p:sp>
+        <p:nvSpPr>
+          <p:cNvPr id="22" name="Text 18"/>
+          <p:cNvSpPr txBox="1"/>
+          <p:nvPr/>
+        </p:nvSpPr>
+        <p:spPr>
+          <a:xfrm>
+            <a:off x="5394960" y="3172968"/>
+            <a:ext cx="841248" cy="155448"/>
+          </a:xfrm>
+          <a:prstGeom prst="rect">
+            <a:avLst/>
+          </a:prstGeom>
+          <a:noFill/>
+          <a:ln/>
+        </p:spPr>
+        <p:txBody>
+          <a:bodyPr wrap="square" lIns="0" tIns="0" rIns="0" bIns="0" rtlCol="0" anchor="t"/>
+          <a:lstStyle/>
           <a:p>
-            <a:pPr marL="127000" indent="-127000">
-              <a:spcAft>
-                <a:spcPts val="200"/>
-              </a:spcAft>
-              <a:buSzPct val="100000"/>
-              <a:buChar char="•"/>
-            </a:pPr>
-            <a:r>
-              <a:rPr lang="en-US" sz="850" dirty="0">
-                <a:solidFill>
-                  <a:srgbClr val="1F2937"/>
+            <a:pPr algn="ctr" indent="0" marL="0">
+              <a:buNone/>
+            </a:pPr>
+            <a:r>
+              <a:rPr lang="en-US" sz="520" dirty="0">
+                <a:solidFill>
+                  <a:srgbClr val="FFFFFF"/>
                 </a:solidFill>
                 <a:latin typeface="Arial" pitchFamily="34" charset="0"/>
                 <a:ea typeface="Arial" pitchFamily="34" charset="-122"/>
                 <a:cs typeface="Arial" pitchFamily="34" charset="-120"/>
               </a:rPr>
-              <a:t>Economic: 99 % fewer hotspots to triage; ₹0 data licensing; lower losses through early detection; runs on one VM.</a:t>
-            </a:r>
-            <a:endParaRPr lang="en-US" sz="850" dirty="0"/>
+              <a:t>Industry &amp; infrastructure</a:t>
+            </a:r>
+            <a:endParaRPr lang="en-US" sz="520" dirty="0"/>
           </a:p>
+        </p:txBody>
+      </p:sp>
+      <p:sp>
+        <p:nvSpPr>
+          <p:cNvPr id="23" name="Shape 19"/>
+          <p:cNvSpPr/>
+          <p:nvPr/>
+        </p:nvSpPr>
+        <p:spPr>
+          <a:xfrm>
+            <a:off x="6281928" y="3017520"/>
+            <a:ext cx="841248" cy="329184"/>
+          </a:xfrm>
+          <a:prstGeom prst="roundRect">
+            <a:avLst>
+              <a:gd name="adj" fmla="val 13889"/>
+            </a:avLst>
+          </a:prstGeom>
+          <a:solidFill>
+            <a:srgbClr val="F99D26"/>
+          </a:solidFill>
+          <a:ln w="9525">
+            <a:solidFill>
+              <a:srgbClr val="F99D26"/>
+            </a:solidFill>
+            <a:prstDash val="solid"/>
+          </a:ln>
+        </p:spPr>
+      </p:sp>
+      <p:sp>
+        <p:nvSpPr>
+          <p:cNvPr id="24" name="Text 20"/>
+          <p:cNvSpPr txBox="1"/>
+          <p:nvPr/>
+        </p:nvSpPr>
+        <p:spPr>
+          <a:xfrm>
+            <a:off x="6281928" y="3026664"/>
+            <a:ext cx="841248" cy="155448"/>
+          </a:xfrm>
+          <a:prstGeom prst="rect">
+            <a:avLst/>
+          </a:prstGeom>
+          <a:noFill/>
+          <a:ln/>
+        </p:spPr>
+        <p:txBody>
+          <a:bodyPr wrap="square" lIns="0" tIns="0" rIns="0" bIns="0" rtlCol="0" anchor="t"/>
+          <a:lstStyle/>
           <a:p>
-            <a:pPr marL="127000" indent="-127000">
-              <a:spcAft>
-                <a:spcPts val="200"/>
-              </a:spcAft>
-              <a:buSzPct val="100000"/>
-              <a:buChar char="•"/>
-            </a:pPr>
-            <a:r>
-              <a:rPr lang="en-US" sz="850" dirty="0">
-                <a:solidFill>
-                  <a:srgbClr val="1F2937"/>
+            <a:pPr algn="ctr" indent="0" marL="0">
+              <a:buNone/>
+            </a:pPr>
+            <a:r>
+              <a:rPr lang="en-US" sz="700" b="1" dirty="0">
+                <a:solidFill>
+                  <a:srgbClr val="FFFFFF"/>
                 </a:solidFill>
                 <a:latin typeface="Arial" pitchFamily="34" charset="0"/>
                 <a:ea typeface="Arial" pitchFamily="34" charset="-122"/>
                 <a:cs typeface="Arial" pitchFamily="34" charset="-120"/>
               </a:rPr>
-              <a:t>Environmental: separates agricultural burning from industrial emissions; flaring and coal-fire monitoring for climate reporting.</a:t>
-            </a:r>
-            <a:endParaRPr lang="en-US" sz="850" dirty="0"/>
+              <a:t>SDG 11</a:t>
+            </a:r>
+            <a:endParaRPr lang="en-US" sz="700" dirty="0"/>
           </a:p>
+        </p:txBody>
+      </p:sp>
+      <p:sp>
+        <p:nvSpPr>
+          <p:cNvPr id="25" name="Text 21"/>
+          <p:cNvSpPr txBox="1"/>
+          <p:nvPr/>
+        </p:nvSpPr>
+        <p:spPr>
+          <a:xfrm>
+            <a:off x="6281928" y="3172968"/>
+            <a:ext cx="841248" cy="155448"/>
+          </a:xfrm>
+          <a:prstGeom prst="rect">
+            <a:avLst/>
+          </a:prstGeom>
+          <a:noFill/>
+          <a:ln/>
+        </p:spPr>
+        <p:txBody>
+          <a:bodyPr wrap="square" lIns="0" tIns="0" rIns="0" bIns="0" rtlCol="0" anchor="t"/>
+          <a:lstStyle/>
           <a:p>
-            <a:pPr marL="127000" indent="-127000">
-              <a:spcAft>
-                <a:spcPts val="200"/>
-              </a:spcAft>
-              <a:buSzPct val="100000"/>
-              <a:buChar char="•"/>
-            </a:pPr>
-            <a:r>
-              <a:rPr lang="en-US" sz="850" dirty="0">
-                <a:solidFill>
-                  <a:srgbClr val="1F2937"/>
+            <a:pPr algn="ctr" indent="0" marL="0">
+              <a:buNone/>
+            </a:pPr>
+            <a:r>
+              <a:rPr lang="en-US" sz="520" dirty="0">
+                <a:solidFill>
+                  <a:srgbClr val="FFFFFF"/>
                 </a:solidFill>
                 <a:latin typeface="Arial" pitchFamily="34" charset="0"/>
                 <a:ea typeface="Arial" pitchFamily="34" charset="-122"/>
                 <a:cs typeface="Arial" pitchFamily="34" charset="-120"/>
               </a:rPr>
-              <a:t>Strategic: open, explainable, auditable — deployable on sovereign / air-gapped infrastructure.</a:t>
-            </a:r>
-            <a:endParaRPr lang="en-US" sz="850" dirty="0"/>
+              <a:t>Safe, resilient cities</a:t>
+            </a:r>
+            <a:endParaRPr lang="en-US" sz="520" dirty="0"/>
           </a:p>
         </p:txBody>
       </p:sp>
       <p:sp>
         <p:nvSpPr>
-          <p:cNvPr id="15" name="Shape 12"/>
+          <p:cNvPr id="26" name="Shape 22"/>
           <p:cNvSpPr/>
           <p:nvPr/>
         </p:nvSpPr>
         <p:spPr>
           <a:xfrm>
-            <a:off x="274320" y="3017520"/>
-            <a:ext cx="8595360" cy="1755648"/>
+            <a:off x="7168896" y="3017520"/>
+            <a:ext cx="841248" cy="329184"/>
           </a:xfrm>
           <a:prstGeom prst="roundRect">
             <a:avLst>
-              <a:gd name="adj" fmla="val 2604"/>
+              <a:gd name="adj" fmla="val 13889"/>
+            </a:avLst>
+          </a:prstGeom>
+          <a:solidFill>
+            <a:srgbClr val="3F7E44"/>
+          </a:solidFill>
+          <a:ln w="9525">
+            <a:solidFill>
+              <a:srgbClr val="3F7E44"/>
+            </a:solidFill>
+            <a:prstDash val="solid"/>
+          </a:ln>
+        </p:spPr>
+      </p:sp>
+      <p:sp>
+        <p:nvSpPr>
+          <p:cNvPr id="27" name="Text 23"/>
+          <p:cNvSpPr txBox="1"/>
+          <p:nvPr/>
+        </p:nvSpPr>
+        <p:spPr>
+          <a:xfrm>
+            <a:off x="7168896" y="3026664"/>
+            <a:ext cx="841248" cy="155448"/>
+          </a:xfrm>
+          <a:prstGeom prst="rect">
+            <a:avLst/>
+          </a:prstGeom>
+          <a:noFill/>
+          <a:ln/>
+        </p:spPr>
+        <p:txBody>
+          <a:bodyPr wrap="square" lIns="0" tIns="0" rIns="0" bIns="0" rtlCol="0" anchor="t"/>
+          <a:lstStyle/>
+          <a:p>
+            <a:pPr algn="ctr" indent="0" marL="0">
+              <a:buNone/>
+            </a:pPr>
+            <a:r>
+              <a:rPr lang="en-US" sz="700" b="1" dirty="0">
+                <a:solidFill>
+                  <a:srgbClr val="FFFFFF"/>
+                </a:solidFill>
+                <a:latin typeface="Arial" pitchFamily="34" charset="0"/>
+                <a:ea typeface="Arial" pitchFamily="34" charset="-122"/>
+                <a:cs typeface="Arial" pitchFamily="34" charset="-120"/>
+              </a:rPr>
+              <a:t>SDG 13</a:t>
+            </a:r>
+            <a:endParaRPr lang="en-US" sz="700" dirty="0"/>
+          </a:p>
+        </p:txBody>
+      </p:sp>
+      <p:sp>
+        <p:nvSpPr>
+          <p:cNvPr id="28" name="Text 24"/>
+          <p:cNvSpPr txBox="1"/>
+          <p:nvPr/>
+        </p:nvSpPr>
+        <p:spPr>
+          <a:xfrm>
+            <a:off x="7168896" y="3172968"/>
+            <a:ext cx="841248" cy="155448"/>
+          </a:xfrm>
+          <a:prstGeom prst="rect">
+            <a:avLst/>
+          </a:prstGeom>
+          <a:noFill/>
+          <a:ln/>
+        </p:spPr>
+        <p:txBody>
+          <a:bodyPr wrap="square" lIns="0" tIns="0" rIns="0" bIns="0" rtlCol="0" anchor="t"/>
+          <a:lstStyle/>
+          <a:p>
+            <a:pPr algn="ctr" indent="0" marL="0">
+              <a:buNone/>
+            </a:pPr>
+            <a:r>
+              <a:rPr lang="en-US" sz="520" dirty="0">
+                <a:solidFill>
+                  <a:srgbClr val="FFFFFF"/>
+                </a:solidFill>
+                <a:latin typeface="Arial" pitchFamily="34" charset="0"/>
+                <a:ea typeface="Arial" pitchFamily="34" charset="-122"/>
+                <a:cs typeface="Arial" pitchFamily="34" charset="-120"/>
+              </a:rPr>
+              <a:t>Climate action</a:t>
+            </a:r>
+            <a:endParaRPr lang="en-US" sz="520" dirty="0"/>
+          </a:p>
+        </p:txBody>
+      </p:sp>
+      <p:sp>
+        <p:nvSpPr>
+          <p:cNvPr id="29" name="Shape 25"/>
+          <p:cNvSpPr/>
+          <p:nvPr/>
+        </p:nvSpPr>
+        <p:spPr>
+          <a:xfrm>
+            <a:off x="8055864" y="3017520"/>
+            <a:ext cx="841248" cy="329184"/>
+          </a:xfrm>
+          <a:prstGeom prst="roundRect">
+            <a:avLst>
+              <a:gd name="adj" fmla="val 13889"/>
+            </a:avLst>
+          </a:prstGeom>
+          <a:solidFill>
+            <a:srgbClr val="4C9F38"/>
+          </a:solidFill>
+          <a:ln w="9525">
+            <a:solidFill>
+              <a:srgbClr val="4C9F38"/>
+            </a:solidFill>
+            <a:prstDash val="solid"/>
+          </a:ln>
+        </p:spPr>
+      </p:sp>
+      <p:sp>
+        <p:nvSpPr>
+          <p:cNvPr id="30" name="Text 26"/>
+          <p:cNvSpPr txBox="1"/>
+          <p:nvPr/>
+        </p:nvSpPr>
+        <p:spPr>
+          <a:xfrm>
+            <a:off x="8055864" y="3026664"/>
+            <a:ext cx="841248" cy="155448"/>
+          </a:xfrm>
+          <a:prstGeom prst="rect">
+            <a:avLst/>
+          </a:prstGeom>
+          <a:noFill/>
+          <a:ln/>
+        </p:spPr>
+        <p:txBody>
+          <a:bodyPr wrap="square" lIns="0" tIns="0" rIns="0" bIns="0" rtlCol="0" anchor="t"/>
+          <a:lstStyle/>
+          <a:p>
+            <a:pPr algn="ctr" indent="0" marL="0">
+              <a:buNone/>
+            </a:pPr>
+            <a:r>
+              <a:rPr lang="en-US" sz="700" b="1" dirty="0">
+                <a:solidFill>
+                  <a:srgbClr val="FFFFFF"/>
+                </a:solidFill>
+                <a:latin typeface="Arial" pitchFamily="34" charset="0"/>
+                <a:ea typeface="Arial" pitchFamily="34" charset="-122"/>
+                <a:cs typeface="Arial" pitchFamily="34" charset="-120"/>
+              </a:rPr>
+              <a:t>SDG 3</a:t>
+            </a:r>
+            <a:endParaRPr lang="en-US" sz="700" dirty="0"/>
+          </a:p>
+        </p:txBody>
+      </p:sp>
+      <p:sp>
+        <p:nvSpPr>
+          <p:cNvPr id="31" name="Text 27"/>
+          <p:cNvSpPr txBox="1"/>
+          <p:nvPr/>
+        </p:nvSpPr>
+        <p:spPr>
+          <a:xfrm>
+            <a:off x="8055864" y="3172968"/>
+            <a:ext cx="841248" cy="155448"/>
+          </a:xfrm>
+          <a:prstGeom prst="rect">
+            <a:avLst/>
+          </a:prstGeom>
+          <a:noFill/>
+          <a:ln/>
+        </p:spPr>
+        <p:txBody>
+          <a:bodyPr wrap="square" lIns="0" tIns="0" rIns="0" bIns="0" rtlCol="0" anchor="t"/>
+          <a:lstStyle/>
+          <a:p>
+            <a:pPr algn="ctr" indent="0" marL="0">
+              <a:buNone/>
+            </a:pPr>
+            <a:r>
+              <a:rPr lang="en-US" sz="520" dirty="0">
+                <a:solidFill>
+                  <a:srgbClr val="FFFFFF"/>
+                </a:solidFill>
+                <a:latin typeface="Arial" pitchFamily="34" charset="0"/>
+                <a:ea typeface="Arial" pitchFamily="34" charset="-122"/>
+                <a:cs typeface="Arial" pitchFamily="34" charset="-120"/>
+              </a:rPr>
+              <a:t>Health &amp; well-being</a:t>
+            </a:r>
+            <a:endParaRPr lang="en-US" sz="520" dirty="0"/>
+          </a:p>
+        </p:txBody>
+      </p:sp>
+      <p:sp>
+        <p:nvSpPr>
+          <p:cNvPr id="32" name="Shape 28"/>
+          <p:cNvSpPr/>
+          <p:nvPr/>
+        </p:nvSpPr>
+        <p:spPr>
+          <a:xfrm>
+            <a:off x="274320" y="3456432"/>
+            <a:ext cx="8595360" cy="1316736"/>
+          </a:xfrm>
+          <a:prstGeom prst="roundRect">
+            <a:avLst>
+              <a:gd name="adj" fmla="val 3472"/>
             </a:avLst>
           </a:prstGeom>
           <a:solidFill>
@@ -15898,14 +19013,14 @@
       </p:sp>
       <p:sp>
         <p:nvSpPr>
-          <p:cNvPr id="16" name="Text 13"/>
+          <p:cNvPr id="33" name="Text 29"/>
           <p:cNvSpPr txBox="1"/>
           <p:nvPr/>
         </p:nvSpPr>
         <p:spPr>
           <a:xfrm>
-            <a:off x="411480" y="3063240"/>
-            <a:ext cx="8321040" cy="228600"/>
+            <a:off x="411480" y="3493008"/>
+            <a:ext cx="8321040" cy="201168"/>
           </a:xfrm>
           <a:prstGeom prst="rect">
             <a:avLst/>
@@ -15921,7 +19036,7 @@
               <a:buNone/>
             </a:pPr>
             <a:r>
-              <a:rPr lang="en-US" sz="1000" b="1" dirty="0">
+              <a:rPr lang="en-US" sz="900" b="1" dirty="0">
                 <a:solidFill>
                   <a:srgbClr val="FBBF24"/>
                 </a:solidFill>
@@ -15929,22 +19044,22 @@
                 <a:ea typeface="Arial" pitchFamily="34" charset="-122"/>
                 <a:cs typeface="Arial" pitchFamily="34" charset="-120"/>
               </a:rPr>
-              <a:t>REPORT — results of the working prototype (90-day labelled archive over real Indian sites)</a:t>
-            </a:r>
-            <a:endParaRPr lang="en-US" sz="1000" dirty="0"/>
+              <a:t>REPORT — what the working prototype already delivers (90-day labelled archive over real Indian industrial sites)</a:t>
+            </a:r>
+            <a:endParaRPr lang="en-US" sz="900" dirty="0"/>
           </a:p>
         </p:txBody>
       </p:sp>
       <p:sp>
         <p:nvSpPr>
-          <p:cNvPr id="17" name="Text 14"/>
+          <p:cNvPr id="34" name="Text 30"/>
           <p:cNvSpPr txBox="1"/>
           <p:nvPr/>
         </p:nvSpPr>
         <p:spPr>
           <a:xfrm>
-            <a:off x="411480" y="3337560"/>
-            <a:ext cx="1005840" cy="384048"/>
+            <a:off x="411480" y="3730752"/>
+            <a:ext cx="960120" cy="365760"/>
           </a:xfrm>
           <a:prstGeom prst="rect">
             <a:avLst/>
@@ -15960,7 +19075,7 @@
               <a:buNone/>
             </a:pPr>
             <a:r>
-              <a:rPr lang="en-US" sz="1800" b="1" dirty="0">
+              <a:rPr lang="en-US" sz="1500" b="1" dirty="0">
                 <a:solidFill>
                   <a:srgbClr val="FB923C"/>
                 </a:solidFill>
@@ -15970,20 +19085,20 @@
               </a:rPr>
               <a:t>22,179</a:t>
             </a:r>
-            <a:endParaRPr lang="en-US" sz="1800" dirty="0"/>
+            <a:endParaRPr lang="en-US" sz="1500" dirty="0"/>
           </a:p>
         </p:txBody>
       </p:sp>
       <p:sp>
         <p:nvSpPr>
-          <p:cNvPr id="18" name="Text 15"/>
+          <p:cNvPr id="35" name="Text 31"/>
           <p:cNvSpPr txBox="1"/>
           <p:nvPr/>
         </p:nvSpPr>
         <p:spPr>
           <a:xfrm>
-            <a:off x="1463040" y="3337560"/>
-            <a:ext cx="1691640" cy="384048"/>
+            <a:off x="1417320" y="3730752"/>
+            <a:ext cx="1737360" cy="365760"/>
           </a:xfrm>
           <a:prstGeom prst="rect">
             <a:avLst/>
@@ -15999,7 +19114,7 @@
               <a:buNone/>
             </a:pPr>
             <a:r>
-              <a:rPr lang="en-US" sz="800" dirty="0">
+              <a:rPr lang="en-US" sz="750" dirty="0">
                 <a:solidFill>
                   <a:srgbClr val="E5E7EB"/>
                 </a:solidFill>
@@ -16007,22 +19122,22 @@
                 <a:ea typeface="Arial" pitchFamily="34" charset="-122"/>
                 <a:cs typeface="Arial" pitchFamily="34" charset="-120"/>
               </a:rPr>
-              <a:t>FIRMS detections classified in ~7 s</a:t>
-            </a:r>
-            <a:endParaRPr lang="en-US" sz="800" dirty="0"/>
+              <a:t>detections classified in ~7 s</a:t>
+            </a:r>
+            <a:endParaRPr lang="en-US" sz="750" dirty="0"/>
           </a:p>
         </p:txBody>
       </p:sp>
       <p:sp>
         <p:nvSpPr>
-          <p:cNvPr id="19" name="Text 16"/>
+          <p:cNvPr id="36" name="Text 32"/>
           <p:cNvSpPr txBox="1"/>
           <p:nvPr/>
         </p:nvSpPr>
         <p:spPr>
           <a:xfrm>
-            <a:off x="3200400" y="3337560"/>
-            <a:ext cx="1005840" cy="384048"/>
+            <a:off x="3200400" y="3730752"/>
+            <a:ext cx="960120" cy="365760"/>
           </a:xfrm>
           <a:prstGeom prst="rect">
             <a:avLst/>
@@ -16038,7 +19153,7 @@
               <a:buNone/>
             </a:pPr>
             <a:r>
-              <a:rPr lang="en-US" sz="1800" b="1" dirty="0">
+              <a:rPr lang="en-US" sz="1500" b="1" dirty="0">
                 <a:solidFill>
                   <a:srgbClr val="FB923C"/>
                 </a:solidFill>
@@ -16048,20 +19163,20 @@
               </a:rPr>
               <a:t>114</a:t>
             </a:r>
-            <a:endParaRPr lang="en-US" sz="1800" dirty="0"/>
+            <a:endParaRPr lang="en-US" sz="1500" dirty="0"/>
           </a:p>
         </p:txBody>
       </p:sp>
       <p:sp>
         <p:nvSpPr>
-          <p:cNvPr id="20" name="Text 17"/>
+          <p:cNvPr id="37" name="Text 33"/>
           <p:cNvSpPr txBox="1"/>
           <p:nvPr/>
         </p:nvSpPr>
         <p:spPr>
           <a:xfrm>
-            <a:off x="4251960" y="3337560"/>
-            <a:ext cx="1691640" cy="384048"/>
+            <a:off x="4206240" y="3730752"/>
+            <a:ext cx="1737360" cy="365760"/>
           </a:xfrm>
           <a:prstGeom prst="rect">
             <a:avLst/>
@@ -16077,7 +19192,7 @@
               <a:buNone/>
             </a:pPr>
             <a:r>
-              <a:rPr lang="en-US" sz="800" dirty="0">
+              <a:rPr lang="en-US" sz="750" dirty="0">
                 <a:solidFill>
                   <a:srgbClr val="E5E7EB"/>
                 </a:solidFill>
@@ -16087,20 +19202,20 @@
               </a:rPr>
               <a:t>persistent sources registered</a:t>
             </a:r>
-            <a:endParaRPr lang="en-US" sz="800" dirty="0"/>
+            <a:endParaRPr lang="en-US" sz="750" dirty="0"/>
           </a:p>
         </p:txBody>
       </p:sp>
       <p:sp>
         <p:nvSpPr>
-          <p:cNvPr id="21" name="Text 18"/>
+          <p:cNvPr id="38" name="Text 34"/>
           <p:cNvSpPr txBox="1"/>
           <p:nvPr/>
         </p:nvSpPr>
         <p:spPr>
           <a:xfrm>
-            <a:off x="5989320" y="3337560"/>
-            <a:ext cx="1005840" cy="384048"/>
+            <a:off x="5989320" y="3730752"/>
+            <a:ext cx="960120" cy="365760"/>
           </a:xfrm>
           <a:prstGeom prst="rect">
             <a:avLst/>
@@ -16116,7 +19231,7 @@
               <a:buNone/>
             </a:pPr>
             <a:r>
-              <a:rPr lang="en-US" sz="1800" b="1" dirty="0">
+              <a:rPr lang="en-US" sz="1500" b="1" dirty="0">
                 <a:solidFill>
                   <a:srgbClr val="FB923C"/>
                 </a:solidFill>
@@ -16126,20 +19241,20 @@
               </a:rPr>
               <a:t>138</a:t>
             </a:r>
-            <a:endParaRPr lang="en-US" sz="1800" dirty="0"/>
+            <a:endParaRPr lang="en-US" sz="1500" dirty="0"/>
           </a:p>
         </p:txBody>
       </p:sp>
       <p:sp>
         <p:nvSpPr>
-          <p:cNvPr id="22" name="Text 19"/>
+          <p:cNvPr id="39" name="Text 35"/>
           <p:cNvSpPr txBox="1"/>
           <p:nvPr/>
         </p:nvSpPr>
         <p:spPr>
           <a:xfrm>
-            <a:off x="7040880" y="3337560"/>
-            <a:ext cx="1691640" cy="384048"/>
+            <a:off x="6995160" y="3730752"/>
+            <a:ext cx="1737360" cy="365760"/>
           </a:xfrm>
           <a:prstGeom prst="rect">
             <a:avLst/>
@@ -16155,7 +19270,7 @@
               <a:buNone/>
             </a:pPr>
             <a:r>
-              <a:rPr lang="en-US" sz="800" dirty="0">
+              <a:rPr lang="en-US" sz="750" dirty="0">
                 <a:solidFill>
                   <a:srgbClr val="E5E7EB"/>
                 </a:solidFill>
@@ -16163,22 +19278,22 @@
                 <a:ea typeface="Arial" pitchFamily="34" charset="-122"/>
                 <a:cs typeface="Arial" pitchFamily="34" charset="-120"/>
               </a:rPr>
-              <a:t>incident candidates (0.6 % of detections)</a:t>
-            </a:r>
-            <a:endParaRPr lang="en-US" sz="800" dirty="0"/>
+              <a:t>incident candidates (0.6 %)</a:t>
+            </a:r>
+            <a:endParaRPr lang="en-US" sz="750" dirty="0"/>
           </a:p>
         </p:txBody>
       </p:sp>
       <p:sp>
         <p:nvSpPr>
-          <p:cNvPr id="23" name="Text 20"/>
+          <p:cNvPr id="40" name="Text 36"/>
           <p:cNvSpPr txBox="1"/>
           <p:nvPr/>
         </p:nvSpPr>
         <p:spPr>
           <a:xfrm>
-            <a:off x="411480" y="3941064"/>
-            <a:ext cx="1005840" cy="384048"/>
+            <a:off x="411480" y="4133088"/>
+            <a:ext cx="960120" cy="365760"/>
           </a:xfrm>
           <a:prstGeom prst="rect">
             <a:avLst/>
@@ -16194,7 +19309,7 @@
               <a:buNone/>
             </a:pPr>
             <a:r>
-              <a:rPr lang="en-US" sz="1800" b="1" dirty="0">
+              <a:rPr lang="en-US" sz="1500" b="1" dirty="0">
                 <a:solidFill>
                   <a:srgbClr val="FB923C"/>
                 </a:solidFill>
@@ -16204,20 +19319,20 @@
               </a:rPr>
               <a:t>99.9 %</a:t>
             </a:r>
-            <a:endParaRPr lang="en-US" sz="1800" dirty="0"/>
+            <a:endParaRPr lang="en-US" sz="1500" dirty="0"/>
           </a:p>
         </p:txBody>
       </p:sp>
       <p:sp>
         <p:nvSpPr>
-          <p:cNvPr id="24" name="Text 21"/>
+          <p:cNvPr id="41" name="Text 37"/>
           <p:cNvSpPr txBox="1"/>
           <p:nvPr/>
         </p:nvSpPr>
         <p:spPr>
           <a:xfrm>
-            <a:off x="1463040" y="3941064"/>
-            <a:ext cx="1691640" cy="384048"/>
+            <a:off x="1417320" y="4133088"/>
+            <a:ext cx="1737360" cy="365760"/>
           </a:xfrm>
           <a:prstGeom prst="rect">
             <a:avLst/>
@@ -16233,7 +19348,7 @@
               <a:buNone/>
             </a:pPr>
             <a:r>
-              <a:rPr lang="en-US" sz="800" dirty="0">
+              <a:rPr lang="en-US" sz="750" dirty="0">
                 <a:solidFill>
                   <a:srgbClr val="E5E7EB"/>
                 </a:solidFill>
@@ -16241,22 +19356,22 @@
                 <a:ea typeface="Arial" pitchFamily="34" charset="-122"/>
                 <a:cs typeface="Arial" pitchFamily="34" charset="-120"/>
               </a:rPr>
-              <a:t>hybrid accuracy (group-aware test split)</a:t>
-            </a:r>
-            <a:endParaRPr lang="en-US" sz="800" dirty="0"/>
+              <a:t>hybrid accuracy, group-aware split</a:t>
+            </a:r>
+            <a:endParaRPr lang="en-US" sz="750" dirty="0"/>
           </a:p>
         </p:txBody>
       </p:sp>
       <p:sp>
         <p:nvSpPr>
-          <p:cNvPr id="25" name="Text 22"/>
+          <p:cNvPr id="42" name="Text 38"/>
           <p:cNvSpPr txBox="1"/>
           <p:nvPr/>
         </p:nvSpPr>
         <p:spPr>
           <a:xfrm>
-            <a:off x="3200400" y="3941064"/>
-            <a:ext cx="1005840" cy="384048"/>
+            <a:off x="3200400" y="4133088"/>
+            <a:ext cx="960120" cy="365760"/>
           </a:xfrm>
           <a:prstGeom prst="rect">
             <a:avLst/>
@@ -16272,7 +19387,7 @@
               <a:buNone/>
             </a:pPr>
             <a:r>
-              <a:rPr lang="en-US" sz="1800" b="1" dirty="0">
+              <a:rPr lang="en-US" sz="1500" b="1" dirty="0">
                 <a:solidFill>
                   <a:srgbClr val="FB923C"/>
                 </a:solidFill>
@@ -16282,20 +19397,20 @@
               </a:rPr>
               <a:t>98.4 %</a:t>
             </a:r>
-            <a:endParaRPr lang="en-US" sz="1800" dirty="0"/>
+            <a:endParaRPr lang="en-US" sz="1500" dirty="0"/>
           </a:p>
         </p:txBody>
       </p:sp>
       <p:sp>
         <p:nvSpPr>
-          <p:cNvPr id="26" name="Text 23"/>
+          <p:cNvPr id="43" name="Text 39"/>
           <p:cNvSpPr txBox="1"/>
           <p:nvPr/>
         </p:nvSpPr>
         <p:spPr>
           <a:xfrm>
-            <a:off x="4251960" y="3941064"/>
-            <a:ext cx="1691640" cy="384048"/>
+            <a:off x="4206240" y="4133088"/>
+            <a:ext cx="1737360" cy="365760"/>
           </a:xfrm>
           <a:prstGeom prst="rect">
             <a:avLst/>
@@ -16311,7 +19426,7 @@
               <a:buNone/>
             </a:pPr>
             <a:r>
-              <a:rPr lang="en-US" sz="800" dirty="0">
+              <a:rPr lang="en-US" sz="750" dirty="0">
                 <a:solidFill>
                   <a:srgbClr val="E5E7EB"/>
                 </a:solidFill>
@@ -16319,22 +19434,22 @@
                 <a:ea typeface="Arial" pitchFamily="34" charset="-122"/>
                 <a:cs typeface="Arial" pitchFamily="34" charset="-120"/>
               </a:rPr>
-              <a:t>rules-only accuracy (explainable baseline)</a:t>
-            </a:r>
-            <a:endParaRPr lang="en-US" sz="800" dirty="0"/>
+              <a:t>rules-only (explainable baseline)</a:t>
+            </a:r>
+            <a:endParaRPr lang="en-US" sz="750" dirty="0"/>
           </a:p>
         </p:txBody>
       </p:sp>
       <p:sp>
         <p:nvSpPr>
-          <p:cNvPr id="27" name="Text 24"/>
+          <p:cNvPr id="44" name="Text 40"/>
           <p:cNvSpPr txBox="1"/>
           <p:nvPr/>
         </p:nvSpPr>
         <p:spPr>
           <a:xfrm>
-            <a:off x="5989320" y="3941064"/>
-            <a:ext cx="1005840" cy="384048"/>
+            <a:off x="5989320" y="4133088"/>
+            <a:ext cx="960120" cy="365760"/>
           </a:xfrm>
           <a:prstGeom prst="rect">
             <a:avLst/>
@@ -16350,7 +19465,7 @@
               <a:buNone/>
             </a:pPr>
             <a:r>
-              <a:rPr lang="en-US" sz="1800" b="1" dirty="0">
+              <a:rPr lang="en-US" sz="1500" b="1" dirty="0">
                 <a:solidFill>
                   <a:srgbClr val="FB923C"/>
                 </a:solidFill>
@@ -16360,20 +19475,20 @@
               </a:rPr>
               <a:t>6</a:t>
             </a:r>
-            <a:endParaRPr lang="en-US" sz="1800" dirty="0"/>
+            <a:endParaRPr lang="en-US" sz="1500" dirty="0"/>
           </a:p>
         </p:txBody>
       </p:sp>
       <p:sp>
         <p:nvSpPr>
-          <p:cNvPr id="28" name="Text 25"/>
+          <p:cNvPr id="45" name="Text 41"/>
           <p:cNvSpPr txBox="1"/>
           <p:nvPr/>
         </p:nvSpPr>
         <p:spPr>
           <a:xfrm>
-            <a:off x="7040880" y="3941064"/>
-            <a:ext cx="1691640" cy="384048"/>
+            <a:off x="6995160" y="4133088"/>
+            <a:ext cx="1737360" cy="365760"/>
           </a:xfrm>
           <a:prstGeom prst="rect">
             <a:avLst/>
@@ -16389,7 +19504,7 @@
               <a:buNone/>
             </a:pPr>
             <a:r>
-              <a:rPr lang="en-US" sz="800" dirty="0">
+              <a:rPr lang="en-US" sz="750" dirty="0">
                 <a:solidFill>
                   <a:srgbClr val="E5E7EB"/>
                 </a:solidFill>
@@ -16397,22 +19512,22 @@
                 <a:ea typeface="Arial" pitchFamily="34" charset="-122"/>
                 <a:cs typeface="Arial" pitchFamily="34" charset="-120"/>
               </a:rPr>
-              <a:t>classes: industrial, flare, mining, agri, wildfire, other</a:t>
-            </a:r>
-            <a:endParaRPr lang="en-US" sz="800" dirty="0"/>
+              <a:t>classes · 34 features · 3 data sources</a:t>
+            </a:r>
+            <a:endParaRPr lang="en-US" sz="750" dirty="0"/>
           </a:p>
         </p:txBody>
       </p:sp>
       <p:sp>
         <p:nvSpPr>
-          <p:cNvPr id="29" name="Text 26"/>
+          <p:cNvPr id="46" name="Text 42"/>
           <p:cNvSpPr txBox="1"/>
           <p:nvPr/>
         </p:nvSpPr>
         <p:spPr>
           <a:xfrm>
-            <a:off x="411480" y="4480560"/>
-            <a:ext cx="8321040" cy="274320"/>
+            <a:off x="411480" y="4526280"/>
+            <a:ext cx="8321040" cy="237744"/>
           </a:xfrm>
           <a:prstGeom prst="rect">
             <a:avLst/>
@@ -16428,7 +19543,7 @@
               <a:buNone/>
             </a:pPr>
             <a:r>
-              <a:rPr lang="en-US" sz="700" i="1" dirty="0">
+              <a:rPr lang="en-US" sz="650" i="1" dirty="0">
                 <a:solidFill>
                   <a:srgbClr val="CBD5E1"/>
                 </a:solidFill>
@@ -16436,9 +19551,9 @@
                 <a:ea typeface="Arial" pitchFamily="34" charset="-122"/>
                 <a:cs typeface="Arial" pitchFamily="34" charset="-120"/>
               </a:rPr>
-              <a:t>Example alerts: Bhilai Steel 414 MW vs 32 MW baseline · Jamnagar 207 MW vs 19 MW · Tata Steel 101 MW vs 26 MW.  Note: archive is physically simulated &amp; labelled; real-world accuracy will be lower — validating on real incidents is the next-round goal.</a:t>
-            </a:r>
-            <a:endParaRPr lang="en-US" sz="700" dirty="0"/>
+              <a:t>Alerts found: Bhilai Steel 414 MW vs 32 MW baseline · Jamnagar Refinery 207 MW vs 19 MW · Tata Steel 101 MW vs 26 MW.  Honest note: the archive is physically simulated &amp; labelled, so real-world accuracy will be lower — validating on confirmed incidents is the next-round goal.</a:t>
+            </a:r>
+            <a:endParaRPr lang="en-US" sz="650" dirty="0"/>
           </a:p>
         </p:txBody>
       </p:sp>
